--- a/book/_design/2-4-redux-build/2-4-redux-WIP.pptx
+++ b/book/_design/2-4-redux-build/2-4-redux-WIP.pptx
@@ -1427,6 +1427,16 @@
               <a:t>SOURCES: CrowdStrike RCA, 6 Aug 2024, for every number on this slide.</a:t>
             </a:r>
           </a:p>
+          <a:p>
+            <a:r>
+              <a:t>PACING (author): do not over-dwell on the technical mechanism — students need the INTERFACE MISMATCH, not the full Falcon content-processing architecture. Keep the walk-through under two minutes of the five.</a:t>
+            </a:r>
+          </a:p>
+          <a:p>
+            <a:r>
+              <a:t>TERMINOLOGY (stays in notes, off the slide): the Template Type defines the 21 fields; Template Instances are the content built against it; the Content Validator checked instances against the Template Type's 21 fields; the Content Interpreter consumed the integration code's 20-entry input array and, directed by the first non-wildcard 21st matching criterion, attempted the [20] access.</a:t>
+            </a:r>
+          </a:p>
         </p:txBody>
       </p:sp>
       <p:sp>
@@ -1537,6 +1547,11 @@
               <a:t>SOURCES: CrowdStrike RCA, 6 Aug 2024 (the bounds-check mitigation, backported to Windows sensor 7.11 and later).</a:t>
             </a:r>
           </a:p>
+          <a:p>
+            <a:r>
+              <a:t>CORRECTION FOLDED IN: the first node reads 'incompatible content + interpreter', not 'defective content'. This was not a malformed file breaking an otherwise-correct interpreter — it was incompatible assumptions across the template definition, the integration code, the validator, and the interpreter. 'Repair the defect' therefore means repairing the incompatibility, not one content artifact; a content-only fix would leave the same mismatch armed for the next instance.</a:t>
+            </a:r>
+          </a:p>
         </p:txBody>
       </p:sp>
       <p:sp>
@@ -1604,7 +1619,7 @@
           <a:lstStyle/>
           <a:p>
             <a:r>
-              <a:t>TIMING: 4 minutes. MAKE THEM COMMIT BEFORE THEY KNOW MORE.</a:t>
+              <a:t>TIMING: 4 minutes — PROTECT 3 of them for the discussion (author pacing note). MAKE THEM COMMIT BEFORE THEY KNOW MORE.</a:t>
             </a:r>
           </a:p>
           <a:p>
@@ -2499,12 +2514,22 @@
           </a:p>
           <a:p>
             <a:r>
-              <a:t>ENGINEERING POINT: a controller can make an unsafe decision because its process model is inaccurate, its feedback is inadequate, or its available control actions are insufficient — all three without anyone being negligent. For this release, the process model said 'the Content Validator passed it, so it is safe'; that model was wrong about what the validator actually checked (21 fields against the 20 supplied — RCA finding 4).</a:t>
-            </a:r>
-          </a:p>
-          <a:p>
-            <a:r>
-              <a:t>CARE: this is a SIMPLIFIED INSTRUCTIONAL control structure. Do not claim every depicted feedback path existed or operated during the incident, and do not invent telemetry, approvals, or rollout stages the RCA does not document. What the RCA does document: no staged rollout for Template Instances, and a remediation commitment to canary deployment rings with rollback and customer control over Rapid Response Content deployment (CrowdStrike RCA, 6 Aug 2024).</a:t>
+              <a:t>ENGINEERING POINT: a controller can make an unsafe decision because its process model is inaccurate, its feedback is inadequate, or its available control actions are insufficient — all three without anyone being negligent.</a:t>
+            </a:r>
+          </a:p>
+          <a:p>
+            <a:r>
+              <a:t>DOCUMENTED (CrowdStrike RCA, 6 Aug 2024): the Content Validator validated Template Instances against the Template Type's 21 fields while the integration code supplied 20 (finding 4); Template Instances deployed to all endpoints with no staged rollout (finding 6); committed mitigations include canary deployment rings with rollback and customer control over Rapid Response Content deployment.</a:t>
+            </a:r>
+          </a:p>
+          <a:p>
+            <a:r>
+              <a:t>INTERPRETATION (ours, not the RCA's): the release organization's effective process model amounted to 'the Content Validator passed it, so it is safe to distribute' — and that model was wrong about what the validator actually checked. The RCA documents the validator defect; reading it as a controller's inaccurate process model is our STAMP-framed interpretation.</a:t>
+            </a:r>
+          </a:p>
+          <a:p>
+            <a:r>
+              <a:t>PROPOSED (instructional): the control structure drawn here is simplified. Do not claim every depicted feedback path existed or operated during the incident, and do not invent telemetry, approvals, or rollout stages the RCA does not document.</a:t>
             </a:r>
           </a:p>
           <a:p>
@@ -2599,12 +2624,17 @@
           </a:p>
           <a:p>
             <a:r>
-              <a:t>QUALIFICATION: this constraint is a CANDIDATE requirement for critical-service operators, not a documented universal obligation that existed before the outage.</a:t>
-            </a:r>
-          </a:p>
-          <a:p>
-            <a:r>
-              <a:t>FACTUAL BACKGROUND: CrowdStrike controls its software and content distribution. Customer organizations control aspects of deployment, continuity arrangements, and recovery. OS vendors control platform architecture. The responsibilities overlap but are not interchangeable: an enterprise cannot repair CrowdStrike's content-processing implementation; CrowdStrike cannot determine a hospital's continuity architecture.</a:t>
+              <a:t>DOCUMENTED: CrowdStrike controls its software and content distribution, and committed to giving customers control over Rapid Response Content deployment (RCA, 6 Aug 2024); affected organizations performed recovery across sectors (Microsoft, 20 Jul 2024). What any specific enterprise could or could not control is NOT documented in these sources.</a:t>
+            </a:r>
+          </a:p>
+          <a:p>
+            <a:r>
+              <a:t>INTERPRETATION (ours): the division of control drawn here — vendor release controls versus enterprise deployment and continuity controls — is a responsibility-allocation argument, not a finding of the postmortem. An enterprise cannot repair CrowdStrike's content-processing implementation; CrowdStrike cannot determine a hospital's continuity architecture.</a:t>
+            </a:r>
+          </a:p>
+          <a:p>
+            <a:r>
+              <a:t>PROPOSED (candidate requirement): the safety constraint itself. It is a candidate obligation for critical-service operators, not a documented universal obligation that existed before the outage.</a:t>
             </a:r>
           </a:p>
           <a:p>
@@ -2694,12 +2724,17 @@
           </a:p>
           <a:p>
             <a:r>
-              <a:t>ENGINEERING POINT: common-cause failure — multiple components or organizations fail together because they share a dependency, condition, or mechanism. Redundancy provides limited protection when the redundant elements share the same vulnerability: a thousand machines running the same privileged component are not a thousand independent defenses against that component's failure.</a:t>
-            </a:r>
-          </a:p>
-          <a:p>
-            <a:r>
-              <a:t>FACTUAL SAFEGUARDS: the outage establishes widespread correlated EXPOSURE to CrowdStrike's software. It does NOT establish that every affected organization relied exclusively on CrowdStrike for endpoint security. Keep vendor concentration, shared software dependencies, and absence of redundancy distinct — related but different properties. Scale stays qualified: ~8.5M devices, under 1% of Windows machines (Microsoft, 20 Jul 2024).</a:t>
+              <a:t>ENGINEERING POINT: common-cause failure — multiple components or organizations fail together because they share a dependency, condition, or mechanism. The caption states the principle exactly: replication does not provide independence when replicas share the same failure mode. A thousand machines running the same privileged component are not a thousand independent defenses against that component's failure. That is an engineering principle, NOT a claim about any particular organization's redundancy architecture.</a:t>
+            </a:r>
+          </a:p>
+          <a:p>
+            <a:r>
+              <a:t>DOCUMENTED: ~8.5 million Windows devices affected — under 1% of all Windows machines (Microsoft, 20 Jul 2024); one defective content update was the shared trigger (CrowdStrike RCA, 6 Aug 2024).</a:t>
+            </a:r>
+          </a:p>
+          <a:p>
+            <a:r>
+              <a:t>INTERPRETATION (ours): the simultaneous multi-sector disruption is explained by correlated exposure to a shared privileged dependency. The incident does NOT establish that affected organizations had redundancy, that redundancy failed, or that any organization relied exclusively on CrowdStrike for endpoint security. Keep vendor concentration, shared software dependencies, and absence of redundancy distinct — related but different properties.</a:t>
             </a:r>
           </a:p>
           <a:p>
@@ -2709,7 +2744,7 @@
           </a:p>
           <a:p>
             <a:r>
-              <a:t>EXPECTED ANSWERS: students name redundant SERVERS. Push to the sharper question: the issue is not how many machines an organization runs, but how independently its essential functions can continue when a shared dependency fails.</a:t>
+              <a:t>EXPECTED ANSWERS: students name redundant SERVERS. Push to the sharper question: not how many machines an organization runs, but how independently its essential functions can continue when a shared dependency fails.</a:t>
             </a:r>
           </a:p>
           <a:p>
@@ -2784,7 +2819,7 @@
           <a:lstStyle/>
           <a:p>
             <a:r>
-              <a:t>TIMING: 4 minutes. THE MAIN RISK SLIDE — do not let it become an argument for mandatory vendor diversity.</a:t>
+              <a:t>TIMING: 4 minutes — PROTECT the discussion: 'what independence should critical services actually require?' deserves the time (author pacing note). THE MAIN RISK SLIDE — do not let it become an argument for mandatory vendor diversity.</a:t>
             </a:r>
           </a:p>
           <a:p>
@@ -2794,12 +2829,17 @@
           </a:p>
           <a:p>
             <a:r>
-              <a:t>WHY VENDOR DIVERSITY IS NOT THE ANSWER KEY: two products may share an operating system, a cloud service, a configuration mechanism, or an administrative control plane — diversity of vendor names does not establish independence of failure modes. Conversely, an organization can obtain real resilience without a second endpoint product.</a:t>
-            </a:r>
-          </a:p>
-          <a:p>
-            <a:r>
-              <a:t>EPISTEMIC LADDER (keep it visible): OBSERVED — one vendor update produced widespread correlated failures. INFERRED — shared privileged dependencies created a common-cause vulnerability. PROPOSED — critical infrastructure might require more independence. UNRESOLVED — whether mandatory diversity would have helped, and whether its benefits justify its costs.</a:t>
+              <a:t>DOCUMENTED: one vendor update produced widespread correlated failures (CrowdStrike RCA, 6 Aug 2024; Microsoft, 20 Jul 2024).</a:t>
+            </a:r>
+          </a:p>
+          <a:p>
+            <a:r>
+              <a:t>INTERPRETATION (ours): shared privileged dependencies created a common-cause vulnerability across organizations.</a:t>
+            </a:r>
+          </a:p>
+          <a:p>
+            <a:r>
+              <a:t>PROPOSED — and explicitly UNRESOLVED: critical infrastructure might require more independence; whether mandatory vendor diversity would have prevented this incident, and whether its benefits justify its costs, is unresolved. Two products may share an operating system, a cloud service, a configuration mechanism, or an administrative control plane — diversity of vendor names does not establish independence of failure modes. Conversely, an organization can obtain real resilience without a second endpoint product.</a:t>
             </a:r>
           </a:p>
           <a:p>
@@ -2884,12 +2924,22 @@
           </a:p>
           <a:p>
             <a:r>
-              <a:t>ENGINEERING POINT: controllers exist above the vendor, and the causal account may extend beyond the authority of the engineer conducting the investigation. A vendor can repair its software and release controls. A critical-service operator can change procurement, deployment, and continuity requirements. A sector authority may be able to impose resilience obligations across organizations — where its legal mandate permits. A cause outside your authority still belongs in the account; the response is to identify the responsible controller and ESCALATE the proposed intervention, not to omit the cause.</a:t>
-            </a:r>
-          </a:p>
-          <a:p>
-            <a:r>
-              <a:t>CARE: the diagram is conceptual. Do not imply every sector has a regulator empowered to mandate the proposed controls, and do not slide from 'a failure analysis reveals a systemic risk' to 'regulation is necessary' — necessity, effectiveness, and proportionality are further engineering and policy judgments requiring evidence.</a:t>
+              <a:t>ENGINEERING POINT: controllers exist above the vendor, and each level pairs a control action with the feedback it needs — read the diagram as control AND feedback, not as a hierarchy of rank. STAMP without feedback is just an org chart. A cause outside your authority still belongs in the account; the response is to identify the responsible controller and ESCALATE the proposed intervention, not to omit the cause.</a:t>
+            </a:r>
+          </a:p>
+          <a:p>
+            <a:r>
+              <a:t>DOCUMENTED vs HYPOTHETICAL (the dashed edge): enterprise deployment and recovery controls, and operators' continuity policies, are ordinary existing arrangements of the kind the incident exercised. A sector authority imposing resilience requirements for endpoint-security failure is a HYPOTHETICAL addition to the control structure — drawn dashed. Not every sector has a regulator empowered to mandate such controls, and no source in this lecture documents one that did so for this incident.</a:t>
+            </a:r>
+          </a:p>
+          <a:p>
+            <a:r>
+              <a:t>INTERPRETATION (ours): reading the outage as evidence of a systemic risk that some controller should manage is our interpretation of the documented exposure, not a finding of the RCA.</a:t>
+            </a:r>
+          </a:p>
+          <a:p>
+            <a:r>
+              <a:t>PROPOSED: any specific obligation at any level of this diagram. A failure analysis may reveal a systemic risk without establishing that regulation is necessary, effective, or proportionate — those are further engineering and policy judgments requiring evidence.</a:t>
             </a:r>
           </a:p>
           <a:p>
@@ -2899,7 +2949,7 @@
           </a:p>
           <a:p>
             <a:r>
-              <a:t>EXPECTED ANSWERS: 'the government should require it.' Push back with the epistemic ladder from the last slide: proposed is not validated. Also surface the reverse misconception — 'if it's outside our authority it's out of scope.' Escalation is an engineering act.</a:t>
+              <a:t>EXPECTED ANSWERS: 'the government should require it.' Push back with the epistemic ladder: proposed is not validated. Also surface the reverse misconception — 'if it's outside our authority it's out of scope.' Escalation is an engineering act.</a:t>
             </a:r>
           </a:p>
           <a:p>
@@ -12557,7 +12607,7 @@
                   <a:srgbClr val="5C4826"/>
                 </a:solidFill>
               </a:rPr>
-              <a:t>Redundancy did not help — every replica shared the same dependency.</a:t>
+              <a:t>Replication does not provide independence when replicas share the same failure mode.</a:t>
             </a:r>
           </a:p>
         </p:txBody>
@@ -13575,6 +13625,7 @@
             <a:solidFill>
               <a:srgbClr val="8E6F3E"/>
             </a:solidFill>
+            <a:prstDash val="dash"/>
             <a:tailEnd type="triangle"/>
           </a:ln>
         </p:spPr>
@@ -13937,8 +13988,8 @@
         </p:nvSpPr>
         <p:spPr>
           <a:xfrm>
-            <a:off x="640080" y="2377440"/>
-            <a:ext cx="2103120" cy="731520"/>
+            <a:off x="502920" y="1737360"/>
+            <a:ext cx="2331720" cy="594360"/>
           </a:xfrm>
           <a:prstGeom prst="rect">
             <a:avLst/>
@@ -13953,23 +14004,23 @@
           <a:p>
             <a:pPr algn="r"/>
             <a:r>
-              <a:rPr sz="2000" b="0" i="0">
+              <a:rPr sz="1200" b="0" i="0">
                 <a:solidFill>
                   <a:srgbClr val="555960"/>
                 </a:solidFill>
               </a:rPr>
-              <a:t>requirements,</a:t>
+              <a:t>resilience requirements ↓</a:t>
             </a:r>
           </a:p>
           <a:p>
             <a:pPr algn="r"/>
             <a:r>
-              <a:rPr sz="2000" b="0" i="0">
+              <a:rPr sz="1200" b="0" i="0">
                 <a:solidFill>
                   <a:srgbClr val="555960"/>
                 </a:solidFill>
               </a:rPr>
-              <a:t>policies ↓</a:t>
+              <a:t>(hypothetical)</a:t>
             </a:r>
           </a:p>
         </p:txBody>
@@ -13982,8 +14033,8 @@
         </p:nvSpPr>
         <p:spPr>
           <a:xfrm>
-            <a:off x="6400800" y="2377440"/>
-            <a:ext cx="2194560" cy="731520"/>
+            <a:off x="6309360" y="1783080"/>
+            <a:ext cx="2651760" cy="365760"/>
           </a:xfrm>
           <a:prstGeom prst="rect">
             <a:avLst/>
@@ -13998,23 +14049,12 @@
           <a:p>
             <a:pPr algn="l"/>
             <a:r>
-              <a:rPr sz="2000" b="0" i="0">
+              <a:rPr sz="1200" b="0" i="0">
                 <a:solidFill>
                   <a:srgbClr val="555960"/>
                 </a:solidFill>
               </a:rPr>
-              <a:t>↑ reports, evidence,</a:t>
-            </a:r>
-          </a:p>
-          <a:p>
-            <a:pPr algn="l"/>
-            <a:r>
-              <a:rPr sz="2000" b="0" i="0">
-                <a:solidFill>
-                  <a:srgbClr val="555960"/>
-                </a:solidFill>
-              </a:rPr>
-              <a:t>operational feedback</a:t>
+              <a:t>↑ incident reports, evidence</a:t>
             </a:r>
           </a:p>
         </p:txBody>
@@ -14027,8 +14067,8 @@
         </p:nvSpPr>
         <p:spPr>
           <a:xfrm>
-            <a:off x="548640" y="5440680"/>
-            <a:ext cx="8046720" cy="347472"/>
+            <a:off x="548640" y="5212080"/>
+            <a:ext cx="8046720" cy="594360"/>
           </a:xfrm>
           <a:prstGeom prst="rect">
             <a:avLst/>
@@ -14043,12 +14083,23 @@
           <a:p>
             <a:pPr algn="ctr"/>
             <a:r>
-              <a:rPr sz="1400" b="0" i="0">
+              <a:rPr sz="1300" b="0" i="0">
                 <a:solidFill>
                   <a:srgbClr val="5C4826"/>
                 </a:solidFill>
               </a:rPr>
               <a:t>Not every sector has a regulator empowered to mandate these controls.</a:t>
+            </a:r>
+          </a:p>
+          <a:p>
+            <a:pPr algn="ctr"/>
+            <a:r>
+              <a:rPr sz="1300" b="0" i="0">
+                <a:solidFill>
+                  <a:srgbClr val="5C4826"/>
+                </a:solidFill>
+              </a:rPr>
+              <a:t>Dashed control = hypothetical addition to the structure, not a documented arrangement.</a:t>
             </a:r>
           </a:p>
         </p:txBody>
@@ -14101,6 +14152,142 @@
                 </a:solidFill>
               </a:rPr>
               <a:t>Which controller has the authority to enforce independence?</a:t>
+            </a:r>
+          </a:p>
+        </p:txBody>
+      </p:sp>
+      <p:sp>
+        <p:nvSpPr>
+          <p:cNvPr id="1001" name="Label"/>
+          <p:cNvSpPr txBox="1"/>
+          <p:nvPr/>
+        </p:nvSpPr>
+        <p:spPr>
+          <a:xfrm>
+            <a:off x="502920" y="2743200"/>
+            <a:ext cx="2331720" cy="548640"/>
+          </a:xfrm>
+          <a:prstGeom prst="rect">
+            <a:avLst/>
+          </a:prstGeom>
+          <a:noFill/>
+        </p:spPr>
+        <p:txBody>
+          <a:bodyPr wrap="square" lIns="27432" tIns="22860" rIns="27432" bIns="22860" anchor="t">
+            <a:spAutoFit/>
+          </a:bodyPr>
+          <a:lstStyle/>
+          <a:p>
+            <a:pPr algn="l"/>
+            <a:r>
+              <a:rPr sz="1200" b="0" i="0">
+                <a:solidFill>
+                  <a:srgbClr val="555960"/>
+                </a:solidFill>
+              </a:rPr>
+              <a:t>continuity policies ↓</a:t>
+            </a:r>
+          </a:p>
+        </p:txBody>
+      </p:sp>
+      <p:sp>
+        <p:nvSpPr>
+          <p:cNvPr id="1002" name="Label"/>
+          <p:cNvSpPr txBox="1"/>
+          <p:nvPr/>
+        </p:nvSpPr>
+        <p:spPr>
+          <a:xfrm>
+            <a:off x="502920" y="3675887"/>
+            <a:ext cx="2331720" cy="548640"/>
+          </a:xfrm>
+          <a:prstGeom prst="rect">
+            <a:avLst/>
+          </a:prstGeom>
+          <a:noFill/>
+        </p:spPr>
+        <p:txBody>
+          <a:bodyPr wrap="square" lIns="27432" tIns="22860" rIns="27432" bIns="22860" anchor="t">
+            <a:spAutoFit/>
+          </a:bodyPr>
+          <a:lstStyle/>
+          <a:p>
+            <a:pPr algn="l"/>
+            <a:r>
+              <a:rPr sz="1200" b="0" i="0">
+                <a:solidFill>
+                  <a:srgbClr val="555960"/>
+                </a:solidFill>
+              </a:rPr>
+              <a:t>deployment + recovery controls ↓</a:t>
+            </a:r>
+          </a:p>
+        </p:txBody>
+      </p:sp>
+      <p:sp>
+        <p:nvSpPr>
+          <p:cNvPr id="1003" name="Label"/>
+          <p:cNvSpPr txBox="1"/>
+          <p:nvPr/>
+        </p:nvSpPr>
+        <p:spPr>
+          <a:xfrm>
+            <a:off x="6309360" y="2788920"/>
+            <a:ext cx="2651760" cy="548640"/>
+          </a:xfrm>
+          <a:prstGeom prst="rect">
+            <a:avLst/>
+          </a:prstGeom>
+          <a:noFill/>
+        </p:spPr>
+        <p:txBody>
+          <a:bodyPr wrap="square" lIns="27432" tIns="22860" rIns="27432" bIns="22860" anchor="t">
+            <a:spAutoFit/>
+          </a:bodyPr>
+          <a:lstStyle/>
+          <a:p>
+            <a:pPr algn="l"/>
+            <a:r>
+              <a:rPr sz="1200" b="0" i="0">
+                <a:solidFill>
+                  <a:srgbClr val="555960"/>
+                </a:solidFill>
+              </a:rPr>
+              <a:t>↑ service availability</a:t>
+            </a:r>
+          </a:p>
+        </p:txBody>
+      </p:sp>
+      <p:sp>
+        <p:nvSpPr>
+          <p:cNvPr id="1004" name="Label"/>
+          <p:cNvSpPr txBox="1"/>
+          <p:nvPr/>
+        </p:nvSpPr>
+        <p:spPr>
+          <a:xfrm>
+            <a:off x="6309360" y="3721608"/>
+            <a:ext cx="2651760" cy="548640"/>
+          </a:xfrm>
+          <a:prstGeom prst="rect">
+            <a:avLst/>
+          </a:prstGeom>
+          <a:noFill/>
+        </p:spPr>
+        <p:txBody>
+          <a:bodyPr wrap="square" lIns="27432" tIns="22860" rIns="27432" bIns="22860" anchor="t">
+            <a:spAutoFit/>
+          </a:bodyPr>
+          <a:lstStyle/>
+          <a:p>
+            <a:pPr algn="l"/>
+            <a:r>
+              <a:rPr sz="1200" b="0" i="0">
+                <a:solidFill>
+                  <a:srgbClr val="555960"/>
+                </a:solidFill>
+              </a:rPr>
+              <a:t>↑ operational evidence, telemetry</a:t>
             </a:r>
           </a:p>
         </p:txBody>
@@ -15239,7 +15426,7 @@
                   <a:srgbClr val="5C4826"/>
                 </a:solidFill>
               </a:rPr>
-              <a:t>Broader explanations require more evidence and more authority to act on.</a:t>
+              <a:t>Broader explanations require more evidence and may require greater authority to act.</a:t>
             </a:r>
           </a:p>
           <a:p>
@@ -16072,7 +16259,7 @@
                   <a:srgbClr val="5C4826"/>
                 </a:solidFill>
               </a:rPr>
-              <a:t>consequence</a:t>
+              <a:t>CONSEQUENCE</a:t>
             </a:r>
             <a:endParaRPr sz="2000" b="0" i="1" dirty="0">
               <a:solidFill>
@@ -16255,7 +16442,7 @@
                   <a:srgbClr val="5C4826"/>
                 </a:solidFill>
               </a:rPr>
-              <a:t>repertoire</a:t>
+              <a:t>REPERTOIRE</a:t>
             </a:r>
           </a:p>
         </p:txBody>
@@ -19312,6 +19499,212 @@
           </a:p>
         </p:txBody>
       </p:sp>
+      <p:sp>
+        <p:nvSpPr>
+          <p:cNvPr id="915" name="Label"/>
+          <p:cNvSpPr txBox="1"/>
+          <p:nvPr/>
+        </p:nvSpPr>
+        <p:spPr>
+          <a:xfrm>
+            <a:off x="548640" y="4599432"/>
+            <a:ext cx="2560320" cy="274320"/>
+          </a:xfrm>
+          <a:prstGeom prst="rect">
+            <a:avLst/>
+          </a:prstGeom>
+          <a:noFill/>
+        </p:spPr>
+        <p:txBody>
+          <a:bodyPr wrap="square" lIns="27432" tIns="22860" rIns="27432" bIns="22860" anchor="t">
+            <a:spAutoFit/>
+          </a:bodyPr>
+          <a:lstStyle/>
+          <a:p>
+            <a:pPr algn="ctr"/>
+            <a:r>
+              <a:rPr sz="1200" b="1" i="0">
+                <a:solidFill>
+                  <a:srgbClr val="5C4826"/>
+                </a:solidFill>
+              </a:rPr>
+              <a:t>‘x=x’  →  23 steps</a:t>
+            </a:r>
+          </a:p>
+        </p:txBody>
+      </p:sp>
+      <p:sp>
+        <p:nvSpPr>
+          <p:cNvPr id="910" name="Block"/>
+          <p:cNvSpPr/>
+          <p:nvPr/>
+        </p:nvSpPr>
+        <p:spPr>
+          <a:xfrm>
+            <a:off x="3291840" y="4626864"/>
+            <a:ext cx="237744" cy="182880"/>
+          </a:xfrm>
+          <a:prstGeom prst="rect">
+            <a:avLst/>
+          </a:prstGeom>
+          <a:solidFill>
+            <a:srgbClr val="8E6F3E"/>
+          </a:solidFill>
+          <a:ln>
+            <a:noFill/>
+          </a:ln>
+          <a:effectLst/>
+        </p:spPr>
+        <p:style>
+          <a:lnRef idx="1">
+            <a:schemeClr val="accent1"/>
+          </a:lnRef>
+          <a:fillRef idx="3">
+            <a:schemeClr val="accent1"/>
+          </a:fillRef>
+          <a:effectRef idx="2">
+            <a:schemeClr val="accent1"/>
+          </a:effectRef>
+          <a:fontRef idx="minor">
+            <a:schemeClr val="lt1"/>
+          </a:fontRef>
+        </p:style>
+        <p:txBody>
+          <a:bodyPr wrap="square" lIns="27432" tIns="22860" rIns="27432" bIns="22860" rtlCol="0" anchor="ctr"/>
+          <a:lstStyle/>
+          <a:p>
+            <a:pPr algn="ctr"/>
+            <a:r>
+              <a:rPr sz="1200" b="1" i="0">
+                <a:solidFill>
+                  <a:srgbClr val="FFFFFF"/>
+                </a:solidFill>
+              </a:rPr>
+              <a:t/>
+            </a:r>
+          </a:p>
+        </p:txBody>
+      </p:sp>
+      <p:sp>
+        <p:nvSpPr>
+          <p:cNvPr id="1000" name="Label"/>
+          <p:cNvSpPr txBox="1"/>
+          <p:nvPr/>
+        </p:nvSpPr>
+        <p:spPr>
+          <a:xfrm>
+            <a:off x="548640" y="4919472"/>
+            <a:ext cx="2560320" cy="274320"/>
+          </a:xfrm>
+          <a:prstGeom prst="rect">
+            <a:avLst/>
+          </a:prstGeom>
+          <a:noFill/>
+        </p:spPr>
+        <p:txBody>
+          <a:bodyPr wrap="square" lIns="27432" tIns="22860" rIns="27432" bIns="22860" anchor="t">
+            <a:spAutoFit/>
+          </a:bodyPr>
+          <a:lstStyle/>
+          <a:p>
+            <a:pPr algn="ctr"/>
+            <a:r>
+              <a:rPr sz="1200" b="1" i="0">
+                <a:solidFill>
+                  <a:srgbClr val="5C4826"/>
+                </a:solidFill>
+              </a:rPr>
+              <a:t>‘x=’ + twenty ‘x’s  →  555 steps</a:t>
+            </a:r>
+          </a:p>
+        </p:txBody>
+      </p:sp>
+      <p:sp>
+        <p:nvSpPr>
+          <p:cNvPr id="1001" name="Block"/>
+          <p:cNvSpPr/>
+          <p:nvPr/>
+        </p:nvSpPr>
+        <p:spPr>
+          <a:xfrm>
+            <a:off x="3291840" y="4946904"/>
+            <a:ext cx="5486400" cy="182880"/>
+          </a:xfrm>
+          <a:prstGeom prst="rect">
+            <a:avLst/>
+          </a:prstGeom>
+          <a:solidFill>
+            <a:srgbClr val="B3261E"/>
+          </a:solidFill>
+          <a:ln>
+            <a:noFill/>
+          </a:ln>
+          <a:effectLst/>
+        </p:spPr>
+        <p:style>
+          <a:lnRef idx="1">
+            <a:schemeClr val="accent1"/>
+          </a:lnRef>
+          <a:fillRef idx="3">
+            <a:schemeClr val="accent1"/>
+          </a:fillRef>
+          <a:effectRef idx="2">
+            <a:schemeClr val="accent1"/>
+          </a:effectRef>
+          <a:fontRef idx="minor">
+            <a:schemeClr val="lt1"/>
+          </a:fontRef>
+        </p:style>
+        <p:txBody>
+          <a:bodyPr wrap="square" lIns="27432" tIns="22860" rIns="27432" bIns="22860" rtlCol="0" anchor="ctr"/>
+          <a:lstStyle/>
+          <a:p>
+            <a:pPr algn="ctr"/>
+            <a:r>
+              <a:rPr sz="1200" b="1" i="0">
+                <a:solidFill>
+                  <a:srgbClr val="FFFFFF"/>
+                </a:solidFill>
+              </a:rPr>
+              <a:t/>
+            </a:r>
+          </a:p>
+        </p:txBody>
+      </p:sp>
+      <p:sp>
+        <p:nvSpPr>
+          <p:cNvPr id="1002" name="Label"/>
+          <p:cNvSpPr txBox="1"/>
+          <p:nvPr/>
+        </p:nvSpPr>
+        <p:spPr>
+          <a:xfrm>
+            <a:off x="3291840" y="5193792"/>
+            <a:ext cx="5120640" cy="256032"/>
+          </a:xfrm>
+          <a:prstGeom prst="rect">
+            <a:avLst/>
+          </a:prstGeom>
+          <a:noFill/>
+        </p:spPr>
+        <p:txBody>
+          <a:bodyPr wrap="square" lIns="27432" tIns="22860" rIns="27432" bIns="22860" anchor="t">
+            <a:spAutoFit/>
+          </a:bodyPr>
+          <a:lstStyle/>
+          <a:p>
+            <a:pPr algn="ctr"/>
+            <a:r>
+              <a:rPr sz="1000" b="1" i="0">
+                <a:solidFill>
+                  <a:srgbClr val="5C4826"/>
+                </a:solidFill>
+              </a:rPr>
+              <a:t>the same rule — the input grew from 3 to 22 characters</a:t>
+            </a:r>
+          </a:p>
+        </p:txBody>
+      </p:sp>
     </p:spTree>
   </p:cSld>
   <p:clrMapOvr>
@@ -20218,8 +20611,8 @@
         </p:nvSpPr>
         <p:spPr>
           <a:xfrm>
-            <a:off x="1188720" y="4160520"/>
-            <a:ext cx="2560320" cy="777240"/>
+            <a:off x="1005840" y="4160520"/>
+            <a:ext cx="2926080" cy="777240"/>
           </a:xfrm>
           <a:prstGeom prst="rect">
             <a:avLst/>
@@ -20252,7 +20645,7 @@
           <a:p>
             <a:pPr algn="ctr"/>
             <a:r>
-              <a:rPr sz="2000" b="1" i="0">
+              <a:rPr sz="1300" b="1" i="0">
                 <a:solidFill>
                   <a:srgbClr val="FFFFFF"/>
                 </a:solidFill>
@@ -20281,8 +20674,8 @@
         </p:nvSpPr>
         <p:spPr>
           <a:xfrm>
-            <a:off x="5394960" y="4160520"/>
-            <a:ext cx="2560320" cy="777240"/>
+            <a:off x="5212080" y="4160520"/>
+            <a:ext cx="2926080" cy="777240"/>
           </a:xfrm>
           <a:prstGeom prst="rect">
             <a:avLst/>
@@ -20315,7 +20708,7 @@
           <a:p>
             <a:pPr algn="ctr"/>
             <a:r>
-              <a:rPr sz="2000" b="1" i="0">
+              <a:rPr sz="1300" b="1" i="0">
                 <a:solidFill>
                   <a:srgbClr val="FFFFFF"/>
                 </a:solidFill>
@@ -20344,8 +20737,8 @@
         </p:nvSpPr>
         <p:spPr>
           <a:xfrm>
-            <a:off x="1188720" y="5303520"/>
-            <a:ext cx="2560320" cy="502920"/>
+            <a:off x="1005840" y="5303520"/>
+            <a:ext cx="2926080" cy="502920"/>
           </a:xfrm>
           <a:prstGeom prst="rect">
             <a:avLst/>
@@ -20403,8 +20796,8 @@
         </p:nvSpPr>
         <p:spPr>
           <a:xfrm>
-            <a:off x="5394960" y="5303520"/>
-            <a:ext cx="2560320" cy="502920"/>
+            <a:off x="5212080" y="5303520"/>
+            <a:ext cx="2926080" cy="502920"/>
           </a:xfrm>
           <a:prstGeom prst="rect">
             <a:avLst/>
@@ -21175,14 +21568,14 @@
       </p:sp>
       <p:sp>
         <p:nvSpPr>
-          <p:cNvPr id="920" name="Block"/>
+          <p:cNvPr id="910" name="Block"/>
           <p:cNvSpPr/>
           <p:nvPr/>
         </p:nvSpPr>
         <p:spPr>
           <a:xfrm>
-            <a:off x="548640" y="1143000"/>
-            <a:ext cx="2560320" cy="566928"/>
+            <a:off x="2743200" y="1005840"/>
+            <a:ext cx="3657600" cy="502920"/>
           </a:xfrm>
           <a:prstGeom prst="rect">
             <a:avLst/>
@@ -21220,28 +21613,32 @@
                   <a:srgbClr val="FFFFFF"/>
                 </a:solidFill>
               </a:rPr>
-              <a:t>TEMPLATE TYPE</a:t>
-            </a:r>
-          </a:p>
-        </p:txBody>
-      </p:sp>
-      <p:sp>
-        <p:nvSpPr>
-          <p:cNvPr id="921" name="RowCaption"/>
+              <a:t>TEMPLATE DEFINITION: 21 FIELDS</a:t>
+            </a:r>
+          </a:p>
+        </p:txBody>
+      </p:sp>
+      <p:sp>
+        <p:nvSpPr>
+          <p:cNvPr id="912" name="Card"/>
           <p:cNvSpPr/>
           <p:nvPr/>
         </p:nvSpPr>
         <p:spPr>
           <a:xfrm>
-            <a:off x="3383280" y="1143000"/>
-            <a:ext cx="5212080" cy="566928"/>
-          </a:xfrm>
-          <a:prstGeom prst="rect">
-            <a:avLst/>
-          </a:prstGeom>
-          <a:noFill/>
-          <a:ln>
-            <a:noFill/>
+            <a:off x="822960" y="1965960"/>
+            <a:ext cx="3291840" cy="502920"/>
+          </a:xfrm>
+          <a:prstGeom prst="rect">
+            <a:avLst/>
+          </a:prstGeom>
+          <a:solidFill>
+            <a:srgbClr val="F5F1E8"/>
+          </a:solidFill>
+          <a:ln w="12700">
+            <a:solidFill>
+              <a:srgbClr val="C9B991"/>
+            </a:solidFill>
           </a:ln>
           <a:effectLst/>
         </p:spPr>
@@ -21263,33 +21660,87 @@
           <a:bodyPr wrap="square" lIns="27432" tIns="22860" rIns="27432" bIns="22860" rtlCol="0" anchor="ctr"/>
           <a:lstStyle/>
           <a:p>
-            <a:pPr algn="l"/>
-            <a:r>
-              <a:rPr sz="2000" b="0" i="0">
-                <a:solidFill>
-                  <a:srgbClr val="555960"/>
-                </a:solidFill>
-              </a:rPr>
-              <a:t>defined 21 input parameter fields</a:t>
+            <a:pPr algn="ctr"/>
+            <a:r>
+              <a:rPr sz="2000" b="1" i="0">
+                <a:solidFill>
+                  <a:srgbClr val="5C4826"/>
+                </a:solidFill>
+              </a:rPr>
+              <a:t>content expects 21 inputs</a:t>
+            </a:r>
+          </a:p>
+        </p:txBody>
+      </p:sp>
+      <p:sp>
+        <p:nvSpPr>
+          <p:cNvPr id="1000" name="Card"/>
+          <p:cNvSpPr/>
+          <p:nvPr/>
+        </p:nvSpPr>
+        <p:spPr>
+          <a:xfrm>
+            <a:off x="5029200" y="1965960"/>
+            <a:ext cx="3291840" cy="502920"/>
+          </a:xfrm>
+          <a:prstGeom prst="rect">
+            <a:avLst/>
+          </a:prstGeom>
+          <a:solidFill>
+            <a:srgbClr val="F5F1E8"/>
+          </a:solidFill>
+          <a:ln w="12700">
+            <a:solidFill>
+              <a:srgbClr val="C9B991"/>
+            </a:solidFill>
+          </a:ln>
+          <a:effectLst/>
+        </p:spPr>
+        <p:style>
+          <a:lnRef idx="1">
+            <a:schemeClr val="accent1"/>
+          </a:lnRef>
+          <a:fillRef idx="3">
+            <a:schemeClr val="accent1"/>
+          </a:fillRef>
+          <a:effectRef idx="2">
+            <a:schemeClr val="accent1"/>
+          </a:effectRef>
+          <a:fontRef idx="minor">
+            <a:schemeClr val="lt1"/>
+          </a:fontRef>
+        </p:style>
+        <p:txBody>
+          <a:bodyPr wrap="square" lIns="27432" tIns="22860" rIns="27432" bIns="22860" rtlCol="0" anchor="ctr"/>
+          <a:lstStyle/>
+          <a:p>
+            <a:pPr algn="ctr"/>
+            <a:r>
+              <a:rPr sz="2000" b="1" i="0">
+                <a:solidFill>
+                  <a:srgbClr val="5C4826"/>
+                </a:solidFill>
+              </a:rPr>
+              <a:t>integration code supplies 20</a:t>
             </a:r>
           </a:p>
         </p:txBody>
       </p:sp>
       <p:cxnSp>
         <p:nvCxnSpPr>
-          <p:cNvPr id="922" name="Connector 922"/>
+          <p:cNvPr id="911" name="Connector 911"/>
           <p:cNvCxnSpPr/>
           <p:nvPr/>
         </p:nvCxnSpPr>
         <p:spPr>
-          <a:xfrm>
-            <a:off x="1828800" y="1709928"/>
-            <a:ext cx="0" cy="393192"/>
+          <a:xfrm flipH="1">
+            <a:off x="2468880" y="1508760"/>
+            <a:ext cx="1554480" cy="457200"/>
           </a:xfrm>
           <a:prstGeom prst="line">
             <a:avLst/>
           </a:prstGeom>
-          <a:ln w="19050">
+          <a:ln w="28575">
             <a:solidFill>
               <a:srgbClr val="8E6F3E"/>
             </a:solidFill>
@@ -21311,16 +21762,52 @@
           </a:fontRef>
         </p:style>
       </p:cxnSp>
-      <p:sp>
-        <p:nvSpPr>
-          <p:cNvPr id="923" name="Block"/>
+      <p:cxnSp>
+        <p:nvCxnSpPr>
+          <p:cNvPr id="1001" name="Connector 911"/>
+          <p:cNvCxnSpPr/>
+          <p:nvPr/>
+        </p:nvCxnSpPr>
+        <p:spPr>
+          <a:xfrm>
+            <a:off x="5120640" y="1508760"/>
+            <a:ext cx="1554480" cy="457200"/>
+          </a:xfrm>
+          <a:prstGeom prst="line">
+            <a:avLst/>
+          </a:prstGeom>
+          <a:ln w="28575">
+            <a:solidFill>
+              <a:srgbClr val="8E6F3E"/>
+            </a:solidFill>
+            <a:tailEnd type="triangle"/>
+          </a:ln>
+        </p:spPr>
+        <p:style>
+          <a:lnRef idx="2">
+            <a:schemeClr val="accent1"/>
+          </a:lnRef>
+          <a:fillRef idx="0">
+            <a:schemeClr val="accent1"/>
+          </a:fillRef>
+          <a:effectRef idx="1">
+            <a:schemeClr val="accent1"/>
+          </a:effectRef>
+          <a:fontRef idx="minor">
+            <a:schemeClr val="tx1"/>
+          </a:fontRef>
+        </p:style>
+      </p:cxnSp>
+      <p:sp>
+        <p:nvSpPr>
+          <p:cNvPr id="1002" name="Block"/>
           <p:cNvSpPr/>
           <p:nvPr/>
         </p:nvSpPr>
         <p:spPr>
           <a:xfrm>
-            <a:off x="548640" y="2103120"/>
-            <a:ext cx="2560320" cy="566928"/>
+            <a:off x="3108960" y="2971800"/>
+            <a:ext cx="2926080" cy="502920"/>
           </a:xfrm>
           <a:prstGeom prst="rect">
             <a:avLst/>
@@ -21358,76 +21845,26 @@
                   <a:srgbClr val="FFFFFF"/>
                 </a:solidFill>
               </a:rPr>
-              <a:t>INTEGRATION CODE</a:t>
-            </a:r>
-          </a:p>
-        </p:txBody>
-      </p:sp>
-      <p:sp>
-        <p:nvSpPr>
-          <p:cNvPr id="924" name="RowCaption"/>
-          <p:cNvSpPr/>
-          <p:nvPr/>
-        </p:nvSpPr>
-        <p:spPr>
-          <a:xfrm>
-            <a:off x="3383280" y="2103120"/>
-            <a:ext cx="5212080" cy="566928"/>
-          </a:xfrm>
-          <a:prstGeom prst="rect">
-            <a:avLst/>
-          </a:prstGeom>
-          <a:noFill/>
-          <a:ln>
-            <a:noFill/>
-          </a:ln>
-          <a:effectLst/>
-        </p:spPr>
-        <p:style>
-          <a:lnRef idx="1">
-            <a:schemeClr val="accent1"/>
-          </a:lnRef>
-          <a:fillRef idx="3">
-            <a:schemeClr val="accent1"/>
-          </a:fillRef>
-          <a:effectRef idx="2">
-            <a:schemeClr val="accent1"/>
-          </a:effectRef>
-          <a:fontRef idx="minor">
-            <a:schemeClr val="lt1"/>
-          </a:fontRef>
-        </p:style>
-        <p:txBody>
-          <a:bodyPr wrap="square" lIns="27432" tIns="22860" rIns="27432" bIns="22860" rtlCol="0" anchor="ctr"/>
-          <a:lstStyle/>
-          <a:p>
-            <a:pPr algn="l"/>
-            <a:r>
-              <a:rPr sz="2000" b="0" i="0">
-                <a:solidFill>
-                  <a:srgbClr val="555960"/>
-                </a:solidFill>
-              </a:rPr>
-              <a:t>supplied only 20 input values to match against</a:t>
+              <a:t>INPUT ARRAY [0 … 19]</a:t>
             </a:r>
           </a:p>
         </p:txBody>
       </p:sp>
       <p:cxnSp>
         <p:nvCxnSpPr>
-          <p:cNvPr id="925" name="Connector 925"/>
+          <p:cNvPr id="1003" name="Connector 911"/>
           <p:cNvCxnSpPr/>
           <p:nvPr/>
         </p:nvCxnSpPr>
         <p:spPr>
           <a:xfrm>
-            <a:off x="1828800" y="2670048"/>
-            <a:ext cx="0" cy="393192"/>
+            <a:off x="2468880" y="2468880"/>
+            <a:ext cx="1371600" cy="502919"/>
           </a:xfrm>
           <a:prstGeom prst="line">
             <a:avLst/>
           </a:prstGeom>
-          <a:ln w="19050">
+          <a:ln w="28575">
             <a:solidFill>
               <a:srgbClr val="8E6F3E"/>
             </a:solidFill>
@@ -21449,123 +21886,21 @@
           </a:fontRef>
         </p:style>
       </p:cxnSp>
-      <p:sp>
-        <p:nvSpPr>
-          <p:cNvPr id="926" name="Block"/>
-          <p:cNvSpPr/>
-          <p:nvPr/>
-        </p:nvSpPr>
-        <p:spPr>
-          <a:xfrm>
-            <a:off x="548640" y="3063240"/>
-            <a:ext cx="2560320" cy="566928"/>
-          </a:xfrm>
-          <a:prstGeom prst="rect">
-            <a:avLst/>
-          </a:prstGeom>
-          <a:solidFill>
-            <a:srgbClr val="8E6F3E"/>
-          </a:solidFill>
-          <a:ln>
-            <a:noFill/>
-          </a:ln>
-          <a:effectLst/>
-        </p:spPr>
-        <p:style>
-          <a:lnRef idx="1">
-            <a:schemeClr val="accent1"/>
-          </a:lnRef>
-          <a:fillRef idx="3">
-            <a:schemeClr val="accent1"/>
-          </a:fillRef>
-          <a:effectRef idx="2">
-            <a:schemeClr val="accent1"/>
-          </a:effectRef>
-          <a:fontRef idx="minor">
-            <a:schemeClr val="lt1"/>
-          </a:fontRef>
-        </p:style>
-        <p:txBody>
-          <a:bodyPr wrap="square" lIns="27432" tIns="22860" rIns="27432" bIns="22860" rtlCol="0" anchor="ctr"/>
-          <a:lstStyle/>
-          <a:p>
-            <a:pPr algn="ctr"/>
-            <a:r>
-              <a:rPr sz="2000" b="1" i="0" dirty="0">
-                <a:solidFill>
-                  <a:srgbClr val="FFFFFF"/>
-                </a:solidFill>
-              </a:rPr>
-              <a:t>CONTENT VALIDATOR</a:t>
-            </a:r>
-          </a:p>
-        </p:txBody>
-      </p:sp>
-      <p:sp>
-        <p:nvSpPr>
-          <p:cNvPr id="927" name="RowCaption"/>
-          <p:cNvSpPr/>
-          <p:nvPr/>
-        </p:nvSpPr>
-        <p:spPr>
-          <a:xfrm>
-            <a:off x="3383280" y="3063240"/>
-            <a:ext cx="5212080" cy="566928"/>
-          </a:xfrm>
-          <a:prstGeom prst="rect">
-            <a:avLst/>
-          </a:prstGeom>
-          <a:noFill/>
-          <a:ln>
-            <a:noFill/>
-          </a:ln>
-          <a:effectLst/>
-        </p:spPr>
-        <p:style>
-          <a:lnRef idx="1">
-            <a:schemeClr val="accent1"/>
-          </a:lnRef>
-          <a:fillRef idx="3">
-            <a:schemeClr val="accent1"/>
-          </a:fillRef>
-          <a:effectRef idx="2">
-            <a:schemeClr val="accent1"/>
-          </a:effectRef>
-          <a:fontRef idx="minor">
-            <a:schemeClr val="lt1"/>
-          </a:fontRef>
-        </p:style>
-        <p:txBody>
-          <a:bodyPr wrap="square" lIns="27432" tIns="22860" rIns="27432" bIns="22860" rtlCol="0" anchor="ctr"/>
-          <a:lstStyle/>
-          <a:p>
-            <a:pPr algn="l"/>
-            <a:r>
-              <a:rPr sz="2000" b="0" i="0">
-                <a:solidFill>
-                  <a:srgbClr val="555960"/>
-                </a:solidFill>
-              </a:rPr>
-              <a:t>accepted instances that expected 21 inputs</a:t>
-            </a:r>
-          </a:p>
-        </p:txBody>
-      </p:sp>
       <p:cxnSp>
         <p:nvCxnSpPr>
-          <p:cNvPr id="928" name="Connector 928"/>
+          <p:cNvPr id="1004" name="Connector 911"/>
           <p:cNvCxnSpPr/>
           <p:nvPr/>
         </p:nvCxnSpPr>
         <p:spPr>
-          <a:xfrm>
-            <a:off x="1828800" y="3630168"/>
-            <a:ext cx="0" cy="393192"/>
+          <a:xfrm flipH="1">
+            <a:off x="5303520" y="2468880"/>
+            <a:ext cx="1371600" cy="502919"/>
           </a:xfrm>
           <a:prstGeom prst="line">
             <a:avLst/>
           </a:prstGeom>
-          <a:ln w="19050">
+          <a:ln w="28575">
             <a:solidFill>
               <a:srgbClr val="8E6F3E"/>
             </a:solidFill>
@@ -21589,23 +21924,25 @@
       </p:cxnSp>
       <p:sp>
         <p:nvSpPr>
-          <p:cNvPr id="929" name="Block"/>
+          <p:cNvPr id="1005" name="Card"/>
           <p:cNvSpPr/>
           <p:nvPr/>
         </p:nvSpPr>
         <p:spPr>
           <a:xfrm>
-            <a:off x="548640" y="4023360"/>
-            <a:ext cx="2560320" cy="566928"/>
+            <a:off x="2926080" y="3931920"/>
+            <a:ext cx="3291840" cy="502920"/>
           </a:xfrm>
           <a:prstGeom prst="rect">
             <a:avLst/>
           </a:prstGeom>
           <a:solidFill>
-            <a:srgbClr val="9A3F12"/>
+            <a:srgbClr val="F5F1E8"/>
           </a:solidFill>
-          <a:ln>
-            <a:noFill/>
+          <a:ln w="12700">
+            <a:solidFill>
+              <a:srgbClr val="C9B991"/>
+            </a:solidFill>
           </a:ln>
           <a:effectLst/>
         </p:spPr>
@@ -21631,69 +21968,140 @@
             <a:r>
               <a:rPr sz="2000" b="1" i="0">
                 <a:solidFill>
+                  <a:srgbClr val="5C4826"/>
+                </a:solidFill>
+              </a:rPr>
+              <a:t>interpreter attempts access [20]</a:t>
+            </a:r>
+          </a:p>
+        </p:txBody>
+      </p:sp>
+      <p:cxnSp>
+        <p:nvCxnSpPr>
+          <p:cNvPr id="1006" name="Connector 911"/>
+          <p:cNvCxnSpPr/>
+          <p:nvPr/>
+        </p:nvCxnSpPr>
+        <p:spPr>
+          <a:xfrm>
+            <a:off x="4572000" y="3474720"/>
+            <a:ext cx="0" cy="457200"/>
+          </a:xfrm>
+          <a:prstGeom prst="line">
+            <a:avLst/>
+          </a:prstGeom>
+          <a:ln w="28575">
+            <a:solidFill>
+              <a:srgbClr val="8E6F3E"/>
+            </a:solidFill>
+            <a:tailEnd type="triangle"/>
+          </a:ln>
+        </p:spPr>
+        <p:style>
+          <a:lnRef idx="2">
+            <a:schemeClr val="accent1"/>
+          </a:lnRef>
+          <a:fillRef idx="0">
+            <a:schemeClr val="accent1"/>
+          </a:fillRef>
+          <a:effectRef idx="1">
+            <a:schemeClr val="accent1"/>
+          </a:effectRef>
+          <a:fontRef idx="minor">
+            <a:schemeClr val="tx1"/>
+          </a:fontRef>
+        </p:style>
+      </p:cxnSp>
+      <p:sp>
+        <p:nvSpPr>
+          <p:cNvPr id="1007" name="Block"/>
+          <p:cNvSpPr/>
+          <p:nvPr/>
+        </p:nvSpPr>
+        <p:spPr>
+          <a:xfrm>
+            <a:off x="3200400" y="4846320"/>
+            <a:ext cx="2743200" cy="502920"/>
+          </a:xfrm>
+          <a:prstGeom prst="rect">
+            <a:avLst/>
+          </a:prstGeom>
+          <a:solidFill>
+            <a:srgbClr val="8E6F3E"/>
+          </a:solidFill>
+          <a:ln w="25400">
+            <a:solidFill>
+              <a:srgbClr val="B3261E"/>
+            </a:solidFill>
+          </a:ln>
+          <a:effectLst/>
+        </p:spPr>
+        <p:style>
+          <a:lnRef idx="1">
+            <a:schemeClr val="accent1"/>
+          </a:lnRef>
+          <a:fillRef idx="3">
+            <a:schemeClr val="accent1"/>
+          </a:fillRef>
+          <a:effectRef idx="2">
+            <a:schemeClr val="accent1"/>
+          </a:effectRef>
+          <a:fontRef idx="minor">
+            <a:schemeClr val="lt1"/>
+          </a:fontRef>
+        </p:style>
+        <p:txBody>
+          <a:bodyPr wrap="square" lIns="27432" tIns="22860" rIns="27432" bIns="22860" rtlCol="0" anchor="ctr"/>
+          <a:lstStyle/>
+          <a:p>
+            <a:pPr algn="ctr"/>
+            <a:r>
+              <a:rPr sz="2000" b="1" i="0">
+                <a:solidFill>
                   <a:srgbClr val="FFFFFF"/>
                 </a:solidFill>
               </a:rPr>
-              <a:t>CONTENT INTERPRETER</a:t>
-            </a:r>
-          </a:p>
-        </p:txBody>
-      </p:sp>
-      <p:sp>
-        <p:nvSpPr>
-          <p:cNvPr id="930" name="RowCaption"/>
-          <p:cNvSpPr/>
-          <p:nvPr/>
-        </p:nvSpPr>
-        <p:spPr>
-          <a:xfrm>
-            <a:off x="3383280" y="4023360"/>
-            <a:ext cx="5212080" cy="566928"/>
-          </a:xfrm>
-          <a:prstGeom prst="rect">
-            <a:avLst/>
-          </a:prstGeom>
-          <a:noFill/>
-          <a:ln>
-            <a:noFill/>
-          </a:ln>
-          <a:effectLst/>
-        </p:spPr>
-        <p:style>
-          <a:lnRef idx="1">
-            <a:schemeClr val="accent1"/>
-          </a:lnRef>
-          <a:fillRef idx="3">
-            <a:schemeClr val="accent1"/>
-          </a:fillRef>
-          <a:effectRef idx="2">
-            <a:schemeClr val="accent1"/>
-          </a:effectRef>
-          <a:fontRef idx="minor">
-            <a:schemeClr val="lt1"/>
-          </a:fontRef>
-        </p:style>
-        <p:txBody>
-          <a:bodyPr wrap="square" lIns="27432" tIns="22860" rIns="27432" bIns="22860" rtlCol="0" anchor="ctr"/>
-          <a:lstStyle/>
-          <a:p>
-            <a:pPr algn="l"/>
-            <a:r>
-              <a:rPr sz="2000" b="1" i="0" dirty="0">
-                <a:solidFill>
-                  <a:srgbClr val="555960"/>
-                </a:solidFill>
-              </a:rPr>
-              <a:t>expected 20 — and read the 21st entry</a:t>
-            </a:r>
-            <a:endParaRPr sz="2000" b="1" i="0" dirty="0">
-              <a:solidFill>
-                <a:srgbClr val="555960"/>
-              </a:solidFill>
-            </a:endParaRPr>
-          </a:p>
-        </p:txBody>
-      </p:sp>
+              <a:t>OUT-OF-BOUNDS READ</a:t>
+            </a:r>
+          </a:p>
+        </p:txBody>
+      </p:sp>
+      <p:cxnSp>
+        <p:nvCxnSpPr>
+          <p:cNvPr id="1008" name="Connector 911"/>
+          <p:cNvCxnSpPr/>
+          <p:nvPr/>
+        </p:nvCxnSpPr>
+        <p:spPr>
+          <a:xfrm>
+            <a:off x="4572000" y="4434840"/>
+            <a:ext cx="0" cy="411480"/>
+          </a:xfrm>
+          <a:prstGeom prst="line">
+            <a:avLst/>
+          </a:prstGeom>
+          <a:ln w="28575">
+            <a:solidFill>
+              <a:srgbClr val="8E6F3E"/>
+            </a:solidFill>
+            <a:tailEnd type="triangle"/>
+          </a:ln>
+        </p:spPr>
+        <p:style>
+          <a:lnRef idx="2">
+            <a:schemeClr val="accent1"/>
+          </a:lnRef>
+          <a:fillRef idx="0">
+            <a:schemeClr val="accent1"/>
+          </a:fillRef>
+          <a:effectRef idx="1">
+            <a:schemeClr val="accent1"/>
+          </a:effectRef>
+          <a:fontRef idx="minor">
+            <a:schemeClr val="tx1"/>
+          </a:fontRef>
+        </p:style>
+      </p:cxnSp>
     </p:spTree>
   </p:cSld>
   <p:clrMapOvr>
@@ -21857,12 +22265,23 @@
           <a:p>
             <a:pPr algn="ctr"/>
             <a:r>
-              <a:rPr sz="2000" b="1" i="0">
+              <a:rPr sz="1200" b="1" i="0">
                 <a:solidFill>
                   <a:srgbClr val="FFFFFF"/>
                 </a:solidFill>
               </a:rPr>
-              <a:t>DEFECTIVE CONTENT</a:t>
+              <a:t>INCOMPATIBLE</a:t>
+            </a:r>
+          </a:p>
+          <a:p>
+            <a:pPr algn="ctr"/>
+            <a:r>
+              <a:rPr sz="1000" b="1" i="0">
+                <a:solidFill>
+                  <a:srgbClr val="FFFFFF"/>
+                </a:solidFill>
+              </a:rPr>
+              <a:t>CONTENT + INTERPRETER</a:t>
             </a:r>
           </a:p>
         </p:txBody>
@@ -21952,7 +22371,7 @@
                   <a:srgbClr val="5C4826"/>
                 </a:solidFill>
               </a:rPr>
-              <a:t>unsafe processing</a:t>
+              <a:t>unsafe access</a:t>
             </a:r>
           </a:p>
         </p:txBody>
@@ -22076,7 +22495,7 @@
                   <a:srgbClr val="5C4826"/>
                 </a:solidFill>
               </a:rPr>
-              <a:t>Model: a component behaved outside its contract.   Intervention: repair the component.</a:t>
+              <a:t>Model: a chain of events traced to a defect.   Intervention: repair the incompatibility.</a:t>
             </a:r>
           </a:p>
         </p:txBody>
@@ -22152,66 +22571,14 @@
       </p:sp>
       <p:sp>
         <p:nvSpPr>
-          <p:cNvPr id="901" name="Block"/>
-          <p:cNvSpPr/>
-          <p:nvPr/>
-        </p:nvSpPr>
-        <p:spPr>
-          <a:xfrm>
-            <a:off x="640080" y="2743200"/>
-            <a:ext cx="2377440" cy="822960"/>
-          </a:xfrm>
-          <a:prstGeom prst="rect">
-            <a:avLst/>
-          </a:prstGeom>
-          <a:solidFill>
-            <a:srgbClr val="9A3F12"/>
-          </a:solidFill>
-          <a:ln>
-            <a:noFill/>
-          </a:ln>
-          <a:effectLst/>
-        </p:spPr>
-        <p:style>
-          <a:lnRef idx="1">
-            <a:schemeClr val="accent1"/>
-          </a:lnRef>
-          <a:fillRef idx="3">
-            <a:schemeClr val="accent1"/>
-          </a:fillRef>
-          <a:effectRef idx="2">
-            <a:schemeClr val="accent1"/>
-          </a:effectRef>
-          <a:fontRef idx="minor">
-            <a:schemeClr val="lt1"/>
-          </a:fontRef>
-        </p:style>
-        <p:txBody>
-          <a:bodyPr wrap="square" lIns="27432" tIns="22860" rIns="27432" bIns="22860" rtlCol="0" anchor="ctr"/>
-          <a:lstStyle/>
-          <a:p>
-            <a:pPr algn="ctr"/>
-            <a:r>
-              <a:rPr sz="2200" b="1" i="0">
-                <a:solidFill>
-                  <a:srgbClr val="FFFFFF"/>
-                </a:solidFill>
-              </a:rPr>
-              <a:t>WHAT WOULD YOU CHANGE?</a:t>
-            </a:r>
-          </a:p>
-        </p:txBody>
-      </p:sp>
-      <p:sp>
-        <p:nvSpPr>
           <p:cNvPr id="902" name="Card"/>
           <p:cNvSpPr/>
           <p:nvPr/>
         </p:nvSpPr>
         <p:spPr>
           <a:xfrm>
-            <a:off x="4876800" y="960120"/>
-            <a:ext cx="3764280" cy="914400"/>
+            <a:off x="1371600" y="1188720"/>
+            <a:ext cx="6400800" cy="1051560"/>
           </a:xfrm>
           <a:prstGeom prst="rect">
             <a:avLst/>
@@ -22280,8 +22647,8 @@
         </p:nvSpPr>
         <p:spPr>
           <a:xfrm>
-            <a:off x="4876800" y="2078037"/>
-            <a:ext cx="3764280" cy="914400"/>
+            <a:off x="1371600" y="2606040"/>
+            <a:ext cx="6400800" cy="1051560"/>
           </a:xfrm>
           <a:prstGeom prst="rect">
             <a:avLst/>
@@ -22350,8 +22717,8 @@
         </p:nvSpPr>
         <p:spPr>
           <a:xfrm>
-            <a:off x="4876800" y="3201670"/>
-            <a:ext cx="3764280" cy="914400"/>
+            <a:off x="1371600" y="4023360"/>
+            <a:ext cx="6400800" cy="1051560"/>
           </a:xfrm>
           <a:prstGeom prst="rect">
             <a:avLst/>
@@ -22407,123 +22774,6 @@
           </a:p>
         </p:txBody>
       </p:sp>
-      <p:cxnSp>
-        <p:nvCxnSpPr>
-          <p:cNvPr id="930" name="Connector 930"/>
-          <p:cNvCxnSpPr>
-            <a:cxnSpLocks/>
-            <a:endCxn id="902" idx="1"/>
-          </p:cNvCxnSpPr>
-          <p:nvPr/>
-        </p:nvCxnSpPr>
-        <p:spPr>
-          <a:xfrm flipV="1">
-            <a:off x="3017520" y="1417320"/>
-            <a:ext cx="1859280" cy="1737360"/>
-          </a:xfrm>
-          <a:prstGeom prst="line">
-            <a:avLst/>
-          </a:prstGeom>
-          <a:ln w="19050">
-            <a:solidFill>
-              <a:srgbClr val="8E6F3E"/>
-            </a:solidFill>
-            <a:tailEnd type="triangle"/>
-          </a:ln>
-        </p:spPr>
-        <p:style>
-          <a:lnRef idx="2">
-            <a:schemeClr val="accent1"/>
-          </a:lnRef>
-          <a:fillRef idx="0">
-            <a:schemeClr val="accent1"/>
-          </a:fillRef>
-          <a:effectRef idx="1">
-            <a:schemeClr val="accent1"/>
-          </a:effectRef>
-          <a:fontRef idx="minor">
-            <a:schemeClr val="tx1"/>
-          </a:fontRef>
-        </p:style>
-      </p:cxnSp>
-      <p:cxnSp>
-        <p:nvCxnSpPr>
-          <p:cNvPr id="931" name="Connector 931"/>
-          <p:cNvCxnSpPr>
-            <a:cxnSpLocks/>
-            <a:endCxn id="904" idx="1"/>
-          </p:cNvCxnSpPr>
-          <p:nvPr/>
-        </p:nvCxnSpPr>
-        <p:spPr>
-          <a:xfrm flipV="1">
-            <a:off x="3017520" y="2535237"/>
-            <a:ext cx="1859280" cy="619443"/>
-          </a:xfrm>
-          <a:prstGeom prst="line">
-            <a:avLst/>
-          </a:prstGeom>
-          <a:ln w="19050">
-            <a:solidFill>
-              <a:srgbClr val="8E6F3E"/>
-            </a:solidFill>
-            <a:tailEnd type="triangle"/>
-          </a:ln>
-        </p:spPr>
-        <p:style>
-          <a:lnRef idx="2">
-            <a:schemeClr val="accent1"/>
-          </a:lnRef>
-          <a:fillRef idx="0">
-            <a:schemeClr val="accent1"/>
-          </a:fillRef>
-          <a:effectRef idx="1">
-            <a:schemeClr val="accent1"/>
-          </a:effectRef>
-          <a:fontRef idx="minor">
-            <a:schemeClr val="tx1"/>
-          </a:fontRef>
-        </p:style>
-      </p:cxnSp>
-      <p:cxnSp>
-        <p:nvCxnSpPr>
-          <p:cNvPr id="932" name="Connector 932"/>
-          <p:cNvCxnSpPr>
-            <a:cxnSpLocks/>
-            <a:endCxn id="906" idx="1"/>
-          </p:cNvCxnSpPr>
-          <p:nvPr/>
-        </p:nvCxnSpPr>
-        <p:spPr>
-          <a:xfrm>
-            <a:off x="3017520" y="3154680"/>
-            <a:ext cx="1859280" cy="504190"/>
-          </a:xfrm>
-          <a:prstGeom prst="line">
-            <a:avLst/>
-          </a:prstGeom>
-          <a:ln w="19050">
-            <a:solidFill>
-              <a:srgbClr val="8E6F3E"/>
-            </a:solidFill>
-            <a:tailEnd type="triangle"/>
-          </a:ln>
-        </p:spPr>
-        <p:style>
-          <a:lnRef idx="2">
-            <a:schemeClr val="accent1"/>
-          </a:lnRef>
-          <a:fillRef idx="0">
-            <a:schemeClr val="accent1"/>
-          </a:fillRef>
-          <a:effectRef idx="1">
-            <a:schemeClr val="accent1"/>
-          </a:effectRef>
-          <a:fontRef idx="minor">
-            <a:schemeClr val="tx1"/>
-          </a:fontRef>
-        </p:style>
-      </p:cxnSp>
       <p:sp>
         <p:nvSpPr>
           <p:cNvPr id="2" name="FooterBand"/>
@@ -23080,8 +23330,8 @@
         </p:nvSpPr>
         <p:spPr>
           <a:xfrm>
-            <a:off x="3840480" y="1188720"/>
-            <a:ext cx="4754880" cy="566928"/>
+            <a:off x="4343400" y="1188720"/>
+            <a:ext cx="4526280" cy="566928"/>
           </a:xfrm>
           <a:prstGeom prst="rect">
             <a:avLst/>
@@ -23130,8 +23380,8 @@
         </p:nvSpPr>
         <p:spPr>
           <a:xfrm>
-            <a:off x="3840480" y="2029968"/>
-            <a:ext cx="4754880" cy="566928"/>
+            <a:off x="4343400" y="2029968"/>
+            <a:ext cx="4526280" cy="566928"/>
           </a:xfrm>
           <a:prstGeom prst="rect">
             <a:avLst/>
@@ -23180,8 +23430,8 @@
         </p:nvSpPr>
         <p:spPr>
           <a:xfrm>
-            <a:off x="3840480" y="2871216"/>
-            <a:ext cx="4754880" cy="566928"/>
+            <a:off x="4343400" y="2871216"/>
+            <a:ext cx="4526280" cy="566928"/>
           </a:xfrm>
           <a:prstGeom prst="rect">
             <a:avLst/>
@@ -23230,8 +23480,8 @@
         </p:nvSpPr>
         <p:spPr>
           <a:xfrm>
-            <a:off x="3840480" y="4169664"/>
-            <a:ext cx="4754880" cy="566928"/>
+            <a:off x="4343400" y="4169664"/>
+            <a:ext cx="4526280" cy="566928"/>
           </a:xfrm>
           <a:prstGeom prst="rect">
             <a:avLst/>
@@ -23280,8 +23530,8 @@
         </p:nvSpPr>
         <p:spPr>
           <a:xfrm>
-            <a:off x="3840480" y="5010912"/>
-            <a:ext cx="4754880" cy="566928"/>
+            <a:off x="4343400" y="5010912"/>
+            <a:ext cx="4526280" cy="566928"/>
           </a:xfrm>
           <a:prstGeom prst="rect">
             <a:avLst/>
@@ -23494,6 +23744,186 @@
           </a:p>
         </p:txBody>
       </p:sp>
+      <p:cxnSp>
+        <p:nvCxnSpPr>
+          <p:cNvPr id="911" name="Connector 911"/>
+          <p:cNvCxnSpPr/>
+          <p:nvPr/>
+        </p:nvCxnSpPr>
+        <p:spPr>
+          <a:xfrm>
+            <a:off x="3657600" y="1472184"/>
+            <a:ext cx="685800" cy="0"/>
+          </a:xfrm>
+          <a:prstGeom prst="line">
+            <a:avLst/>
+          </a:prstGeom>
+          <a:ln w="28575">
+            <a:solidFill>
+              <a:srgbClr val="8E6F3E"/>
+            </a:solidFill>
+            <a:tailEnd type="triangle"/>
+          </a:ln>
+        </p:spPr>
+        <p:style>
+          <a:lnRef idx="2">
+            <a:schemeClr val="accent1"/>
+          </a:lnRef>
+          <a:fillRef idx="0">
+            <a:schemeClr val="accent1"/>
+          </a:fillRef>
+          <a:effectRef idx="1">
+            <a:schemeClr val="accent1"/>
+          </a:effectRef>
+          <a:fontRef idx="minor">
+            <a:schemeClr val="tx1"/>
+          </a:fontRef>
+        </p:style>
+      </p:cxnSp>
+      <p:cxnSp>
+        <p:nvCxnSpPr>
+          <p:cNvPr id="911" name="Connector 911"/>
+          <p:cNvCxnSpPr/>
+          <p:nvPr/>
+        </p:nvCxnSpPr>
+        <p:spPr>
+          <a:xfrm>
+            <a:off x="3657600" y="2313432"/>
+            <a:ext cx="685800" cy="0"/>
+          </a:xfrm>
+          <a:prstGeom prst="line">
+            <a:avLst/>
+          </a:prstGeom>
+          <a:ln w="28575">
+            <a:solidFill>
+              <a:srgbClr val="8E6F3E"/>
+            </a:solidFill>
+            <a:tailEnd type="triangle"/>
+          </a:ln>
+        </p:spPr>
+        <p:style>
+          <a:lnRef idx="2">
+            <a:schemeClr val="accent1"/>
+          </a:lnRef>
+          <a:fillRef idx="0">
+            <a:schemeClr val="accent1"/>
+          </a:fillRef>
+          <a:effectRef idx="1">
+            <a:schemeClr val="accent1"/>
+          </a:effectRef>
+          <a:fontRef idx="minor">
+            <a:schemeClr val="tx1"/>
+          </a:fontRef>
+        </p:style>
+      </p:cxnSp>
+      <p:cxnSp>
+        <p:nvCxnSpPr>
+          <p:cNvPr id="911" name="Connector 911"/>
+          <p:cNvCxnSpPr/>
+          <p:nvPr/>
+        </p:nvCxnSpPr>
+        <p:spPr>
+          <a:xfrm>
+            <a:off x="3657600" y="3154680"/>
+            <a:ext cx="685800" cy="0"/>
+          </a:xfrm>
+          <a:prstGeom prst="line">
+            <a:avLst/>
+          </a:prstGeom>
+          <a:ln w="28575">
+            <a:solidFill>
+              <a:srgbClr val="8E6F3E"/>
+            </a:solidFill>
+            <a:tailEnd type="triangle"/>
+          </a:ln>
+        </p:spPr>
+        <p:style>
+          <a:lnRef idx="2">
+            <a:schemeClr val="accent1"/>
+          </a:lnRef>
+          <a:fillRef idx="0">
+            <a:schemeClr val="accent1"/>
+          </a:fillRef>
+          <a:effectRef idx="1">
+            <a:schemeClr val="accent1"/>
+          </a:effectRef>
+          <a:fontRef idx="minor">
+            <a:schemeClr val="tx1"/>
+          </a:fontRef>
+        </p:style>
+      </p:cxnSp>
+      <p:cxnSp>
+        <p:nvCxnSpPr>
+          <p:cNvPr id="911" name="Connector 911"/>
+          <p:cNvCxnSpPr/>
+          <p:nvPr/>
+        </p:nvCxnSpPr>
+        <p:spPr>
+          <a:xfrm>
+            <a:off x="3657600" y="4453127"/>
+            <a:ext cx="685800" cy="0"/>
+          </a:xfrm>
+          <a:prstGeom prst="line">
+            <a:avLst/>
+          </a:prstGeom>
+          <a:ln w="28575">
+            <a:solidFill>
+              <a:srgbClr val="8E6F3E"/>
+            </a:solidFill>
+            <a:tailEnd type="triangle"/>
+          </a:ln>
+        </p:spPr>
+        <p:style>
+          <a:lnRef idx="2">
+            <a:schemeClr val="accent1"/>
+          </a:lnRef>
+          <a:fillRef idx="0">
+            <a:schemeClr val="accent1"/>
+          </a:fillRef>
+          <a:effectRef idx="1">
+            <a:schemeClr val="accent1"/>
+          </a:effectRef>
+          <a:fontRef idx="minor">
+            <a:schemeClr val="tx1"/>
+          </a:fontRef>
+        </p:style>
+      </p:cxnSp>
+      <p:cxnSp>
+        <p:nvCxnSpPr>
+          <p:cNvPr id="911" name="Connector 911"/>
+          <p:cNvCxnSpPr/>
+          <p:nvPr/>
+        </p:nvCxnSpPr>
+        <p:spPr>
+          <a:xfrm>
+            <a:off x="3657600" y="5294376"/>
+            <a:ext cx="685800" cy="0"/>
+          </a:xfrm>
+          <a:prstGeom prst="line">
+            <a:avLst/>
+          </a:prstGeom>
+          <a:ln w="28575">
+            <a:solidFill>
+              <a:srgbClr val="8E6F3E"/>
+            </a:solidFill>
+            <a:tailEnd type="triangle"/>
+          </a:ln>
+        </p:spPr>
+        <p:style>
+          <a:lnRef idx="2">
+            <a:schemeClr val="accent1"/>
+          </a:lnRef>
+          <a:fillRef idx="0">
+            <a:schemeClr val="accent1"/>
+          </a:fillRef>
+          <a:effectRef idx="1">
+            <a:schemeClr val="accent1"/>
+          </a:effectRef>
+          <a:fontRef idx="minor">
+            <a:schemeClr val="tx1"/>
+          </a:fontRef>
+        </p:style>
+      </p:cxnSp>
     </p:spTree>
   </p:cSld>
   <p:clrMapOvr>
@@ -24689,7 +25119,7 @@
                   <a:srgbClr val="FFFFFF"/>
                 </a:solidFill>
               </a:rPr>
-              <a:t>Two defenses were missing. One ran — and checked the wrong property.</a:t>
+              <a:t>Two defenses missing · one coverage gap · one ran against the wrong contract</a:t>
             </a:r>
           </a:p>
           <a:p>

--- a/book/_design/2-4-redux-build/2-4-redux-WIP.pptx
+++ b/book/_design/2-4-redux-build/2-4-redux-WIP.pptx
@@ -1089,7 +1089,7 @@
           <a:lstStyle/>
           <a:p>
             <a:r>
-              <a:t>TIMING: 2 minutes.</a:t>
+              <a:t>TIMING: 1 minutes.</a:t>
             </a:r>
           </a:p>
           <a:p>
@@ -1115,6 +1115,16 @@
           <a:p>
             <a:r>
               <a:t>TRANSITION: start with consequences, not mechanism. July 19, 2024.</a:t>
+            </a:r>
+          </a:p>
+          <a:p>
+            <a:r>
+              <a:t>FRAME IT AS ENGINEERING, NOT ACCIDENT ANALYSIS (author): this unit is Failure-Aware ENGINEERING. The destination is not that students can explain failures with three frameworks; it is that an organization becomes better at preventing, detecting, containing, and recovering from failure because of what it learned — and that the learning can change exactly two things: the engineer's judgment, through reflection, and the engineering environment, through models, constraints, validation mechanisms, and controls. Say this up front; the three models are instruments toward it, not the point.</a:t>
+            </a:r>
+          </a:p>
+          <a:p>
+            <a:r>
+              <a:t>BUDGET: the TIMING lines across the deck now sum to 75 minutes, with the slide-6 commitment discussion and the slide-27 transfer exercise protected.</a:t>
             </a:r>
           </a:p>
         </p:txBody>
@@ -1184,7 +1194,7 @@
           <a:lstStyle/>
           <a:p>
             <a:r>
-              <a:t>TIMING: 3 minutes. START WITH CONSEQUENCES, NOT CAUSE.</a:t>
+              <a:t>TIMING: 2 minutes. START WITH CONSEQUENCES, NOT CAUSE.</a:t>
             </a:r>
           </a:p>
           <a:p>
@@ -1289,37 +1299,37 @@
           <a:lstStyle/>
           <a:p>
             <a:r>
-              <a:t>TIMING: 3 minutes.</a:t>
-            </a:r>
-          </a:p>
-          <a:p>
-            <a:r>
-              <a:t>ENGINEERING POINT: the update was CONTENT, not code — and content travelled a faster, less-gated path than a sensor release. Hold that fact; it is the hinge of the whole lecture and it returns in the Cloudflare exercise.</a:t>
-            </a:r>
-          </a:p>
-          <a:p>
-            <a:r>
-              <a:t>BACKGROUND: the defect arrived in Channel File 291, a Rapid Response Content update interpreted by the sensor's Content Interpreter. Rapid Response Content could be updated independently of ordinary sensor-code releases (RCA, 6 Aug 2024).</a:t>
-            </a:r>
-          </a:p>
-          <a:p>
-            <a:r>
-              <a:t>ASK: why should security content be able to crash the operating system at all?</a:t>
-            </a:r>
-          </a:p>
-          <a:p>
-            <a:r>
-              <a:t>EXPECTED ANSWERS: students reach for 'it runs in the kernel'. True and incomplete — privilege explains the BLAST RADIUS, not the defect. Do not resolve the architecture question yet; it is slide 14's job.</a:t>
-            </a:r>
-          </a:p>
-          <a:p>
-            <a:r>
-              <a:t>TRANSITION: next, exactly what went wrong when the content was read.</a:t>
-            </a:r>
-          </a:p>
-          <a:p>
-            <a:r>
-              <a:t>SOURCES: CrowdStrike RCA, 6 Aug 2024. Do not yet disclose the validation weaknesses — Movement 2 earns them.</a:t>
+              <a:t>TIMING: 3 minutes. ESTABLISH THE SYSTEM BEFORE ANALYZING IT.</a:t>
+            </a:r>
+          </a:p>
+          <a:p>
+            <a:r>
+              <a:t>ENGINEERING POINT: a student should never have to infer what a component does while being asked to analyze why it failed. So first the parts, in order: CrowdStrike is a security vendor; its Falcon sensor runs on each Windows endpoint with privileged system access (it must see what the operating system sees); the sensor interprets Rapid Response Content — detection content describing what to look for — which is distributed separately from sensor-software releases. THEN the event: on July 19, one content update was defective, the sensor crashed processing it, and because the sensor runs with privileged access, the sensor's crash became the operating system's crash.</a:t>
+            </a:r>
+          </a:p>
+          <a:p>
+            <a:r>
+              <a:t>DOCUMENTED (CrowdStrike RCA, 6 Aug 2024): the defective artifact was a Rapid Response Content update, not an ordinary Windows OS update; Rapid Response Content could be updated independently of sensor-code releases — a faster release path. HOLD that faster-path observation for Movement 2 (slide 7) unless a student raises it; here it is premature.</a:t>
+            </a:r>
+          </a:p>
+          <a:p>
+            <a:r>
+              <a:t>ASK (the footer): why can security content crash an operating system?</a:t>
+            </a:r>
+          </a:p>
+          <a:p>
+            <a:r>
+              <a:t>EXPECTED ANSWERS: 'it's code' — sharpen: it is DATA interpreted by privileged code, and data consumed by privileged code can change its behavior. Misconception: students assume the update was a program; the content/interpreter split is the load-bearing distinction for the whole lecture.</a:t>
+            </a:r>
+          </a:p>
+          <a:p>
+            <a:r>
+              <a:t>TRANSITION: what exactly did the content and its interpreter disagree about? Numbers next.</a:t>
+            </a:r>
+          </a:p>
+          <a:p>
+            <a:r>
+              <a:t>SOURCES: CrowdStrike RCA, 6 Aug 2024.</a:t>
             </a:r>
           </a:p>
         </p:txBody>
@@ -1389,7 +1399,7 @@
           <a:lstStyle/>
           <a:p>
             <a:r>
-              <a:t>TIMING: 5 minutes. THE TECHNICAL CORE.</a:t>
+              <a:t>TIMING: 4 minutes. THE TECHNICAL CORE.</a:t>
             </a:r>
           </a:p>
           <a:p>
@@ -1435,6 +1445,11 @@
           <a:p>
             <a:r>
               <a:t>TERMINOLOGY (stays in notes, off the slide): the Template Type defines the 21 fields; Template Instances are the content built against it; the Content Validator checked instances against the Template Type's 21 fields; the Content Interpreter consumed the integration code's 20-entry input array and, directed by the first non-wildcard 21st matching criterion, attempted the [20] access.</a:t>
+            </a:r>
+          </a:p>
+          <a:p>
+            <a:r>
+              <a:t>EXPOSITION ORDER (author): read the bridge sentence FIRST, verbatim — templates are the interface between detection content and the interpreter; each template specifies the input fields the interpreter expects. Only then walk the diagram; it is now intelligible without inference. Keep the concrete indices [0 … 19] and [20] — they are what makes the failure technically understandable.</a:t>
             </a:r>
           </a:p>
         </p:txBody>
@@ -1504,7 +1519,7 @@
           <a:lstStyle/>
           <a:p>
             <a:r>
-              <a:t>TIMING: 3 minutes. FIRST OF THREE CAUSAL BOUNDARIES.</a:t>
+              <a:t>TIMING: 2 minutes. FIRST OF THREE CAUSAL BOUNDARIES.</a:t>
             </a:r>
           </a:p>
           <a:p>
@@ -1752,6 +1767,11 @@
               <a:t>TRANSITION: several defenses in sequence, and the defect passed every one. There is a classic model for exactly this shape.</a:t>
             </a:r>
           </a:p>
+          <a:p>
+            <a:r>
+              <a:t>WILDCARD, SPELLED OUT (author): a wildcard matching criterion means 'accept any value here'. When the matching criterion for field 21 is a wildcard, the Content Interpreter never needs to READ field 21 to decide the match — so the missing 21st array entry was never touched, and every wildcard test passed honestly. The mismatch was real the whole time; the tests simply never exercised the read that exposes it. That is what makes it a latent condition rather than a flaky test.</a:t>
+            </a:r>
+          </a:p>
         </p:txBody>
       </p:sp>
       <p:sp>
@@ -1819,7 +1839,7 @@
           <a:lstStyle/>
           <a:p>
             <a:r>
-              <a:t>TIMING: 3 minutes. SECOND CAUSAL BOUNDARY.</a:t>
+              <a:t>TIMING: 2 minutes. SECOND CAUSAL BOUNDARY.</a:t>
             </a:r>
           </a:p>
           <a:p>
@@ -1850,6 +1870,11 @@
           <a:p>
             <a:r>
               <a:t>TRANSITION: the model predicts aligned weaknesses. The postmortem tells us what the weaknesses actually were.</a:t>
+            </a:r>
+          </a:p>
+          <a:p>
+            <a:r>
+              <a:t>NAMING + THE DISTINCTIVE CLAIM (author): say the model's NAME — this is Reason's Swiss cheese model — and state its distinctive claim precisely: every defensive layer can contain weaknesses, and a failure escapes only when weaknesses in successive layers ALIGN. The red path through the red-rimmed holes is the alignment; the other holes are weaknesses that this particular trajectory did not exercise. Without the alignment idea a student leaves with defense-in-depth but not Reason's contribution: defenses fail TOGETHER, as a configuration, not merely one at a time.</a:t>
             </a:r>
           </a:p>
         </p:txBody>
@@ -2014,7 +2039,7 @@
           <a:lstStyle/>
           <a:p>
             <a:r>
-              <a:t>TIMING: 3 minutes.</a:t>
+              <a:t>TIMING: 2 minutes.</a:t>
             </a:r>
           </a:p>
           <a:p>
@@ -2045,6 +2070,11 @@
           <a:p>
             <a:r>
               <a:t>TRANSITION: each intervention leaves a different uncertainty behind. What exactly does each piece of evidence establish?</a:t>
+            </a:r>
+          </a:p>
+          <a:p>
+            <a:r>
+              <a:t>TIMELINE (author): give the four a shared timeline — defect → release → propagation → disruption — and read each intervention against the stage it addresses (now tagged on each block): PREVENT acts at the defect, DETECT before release, CONTAIN during propagation, RECOVER after disruption. That turns the taxonomy into an analytical tool: for any proposed intervention, ask which stage it acts on and what has already happened by then.</a:t>
             </a:r>
           </a:p>
         </p:txBody>
@@ -2114,7 +2144,7 @@
           <a:lstStyle/>
           <a:p>
             <a:r>
-              <a:t>TIMING: 3 minutes. RECONNECTS TO THE VALIDATION UNIT.</a:t>
+              <a:t>TIMING: 2 minutes. RECONNECTS TO THE VALIDATION UNIT.</a:t>
             </a:r>
           </a:p>
           <a:p>
@@ -2214,7 +2244,7 @@
           <a:lstStyle/>
           <a:p>
             <a:r>
-              <a:t>TIMING: 2 minutes. TRANSITION SLIDE — closes Movement 2, opens the system question.</a:t>
+              <a:t>TIMING: 1 minutes. TRANSITION SLIDE — closes Movement 2, opens the system question.</a:t>
             </a:r>
           </a:p>
           <a:p>
@@ -2342,6 +2372,11 @@
               <a:t>TRANSITION: to reason about the larger boundaries we need a model built for systems — one whose vocabulary is control, not components.</a:t>
             </a:r>
           </a:p>
+          <a:p>
+            <a:r>
+              <a:t>STAGING (no animation is authored in this deck — run the reveal verbally): present the boundaries SEQUENTIALLY, never all four at once. Step 1 — cover or ignore the outer boundaries; point at ① content + interpreter and ask 'what caused the crash?'. Step 2 — widen to ② CrowdStrike's engineering system: 'why did the update escape?'. Step 3 — widen to ③ deployment, endpoints, services: 'why did organizations become unavailable?'. Step 4 — widen to ④ the shared-dependency ecosystem: 'why could one failure disrupt many sectors?'. Read each legend line only when its boundary is introduced. The slide is the end-state the staging arrives at.</a:t>
+            </a:r>
+          </a:p>
         </p:txBody>
       </p:sp>
       <p:sp>
@@ -2409,7 +2444,7 @@
           <a:lstStyle/>
           <a:p>
             <a:r>
-              <a:t>TIMING: 4 minutes. THIRD CAUSAL BOUNDARY — introduce the model accurately.</a:t>
+              <a:t>TIMING: 3 minutes. THIRD CAUSAL BOUNDARY — introduce the model accurately.</a:t>
             </a:r>
           </a:p>
           <a:p>
@@ -2440,6 +2475,11 @@
           <a:p>
             <a:r>
               <a:t>TRANSITION: apply it. What did CrowdStrike's update control structure look like on July 19?</a:t>
+            </a:r>
+          </a:p>
+          <a:p>
+            <a:r>
+              <a:t>EXPOSITION ORDER (author): lead with the CONCRETE example at the top of the slide — release manager, test results, wrong picture — and only then introduce the four terms by mapping them onto it: the manager is the CONTROLLER, the authorization is a CONTROL ACTION, the test results are FEEDBACK, the manager's picture of the system is the PROCESS MODEL. The abstraction arrives after the student has an instance of it. Slide 15 then applies the full structure to CrowdStrike — do not merge or reorder the two.</a:t>
             </a:r>
           </a:p>
         </p:txBody>
@@ -2509,7 +2549,7 @@
           <a:lstStyle/>
           <a:p>
             <a:r>
-              <a:t>TIMING: 3 minutes.</a:t>
+              <a:t>TIMING: 2 minutes.</a:t>
             </a:r>
           </a:p>
           <a:p>
@@ -2919,7 +2959,7 @@
           <a:lstStyle/>
           <a:p>
             <a:r>
-              <a:t>TIMING: 3 minutes.</a:t>
+              <a:t>TIMING: 2 minutes.</a:t>
             </a:r>
           </a:p>
           <a:p>
@@ -2955,6 +2995,11 @@
           <a:p>
             <a:r>
               <a:t>TRANSITION: three models, three boundaries, three intervention scopes. Put them side by side.</a:t>
+            </a:r>
+          </a:p>
+          <a:p>
+            <a:r>
+              <a:t>NOT A HIERARCHY (author): the stack can misread as an org chart. The corrective sentence is now on the slide — each controller requires BOTH authority to act AND evidence about the consequences. A regulator with authority but no operational evidence cannot control well; an operator rich in evidence may lack the authority to impose a sector-wide requirement. Control needs the pair, at every level.</a:t>
             </a:r>
           </a:p>
         </p:txBody>
@@ -3024,27 +3069,32 @@
           <a:lstStyle/>
           <a:p>
             <a:r>
-              <a:t>TIMING: 3 minutes. THE SYNTHESIS SLIDE — closes Movement 3.</a:t>
-            </a:r>
-          </a:p>
-          <a:p>
-            <a:r>
-              <a:t>ENGINEERING POINT: three models, three causal boundaries, three intervention scopes, encountered in the order the INVESTIGATION needed them. Component-level analysis asked 'what failed?' and let us repair the defect. Swiss cheese asked 'why did it escape?' and let us improve the defenses. STAMP asked 'why was the impact so broad?' and let us reason about controls, dependencies, and responsibilities — including controllers outside the vendor.</a:t>
-            </a:r>
-          </a:p>
-          <a:p>
-            <a:r>
-              <a:t>CARE: this is a progression of investigative SCOPE, not a ranking of theoretical sophistication, and not a ladder every analysis must climb. A local defect may justify a local correction; a defective release process may require stronger defenses; a systemic common-cause vulnerability may require architectural or institutional change. Do not suggest STAMP is the correct model for every failure. Swiss cheese and STAMP can each be applied at several scales — the boundary is the analyst's choice, not the theory's.</a:t>
-            </a:r>
-          </a:p>
-          <a:p>
-            <a:r>
-              <a:t>ASK: broader models expose more — what do they COST? (More evidence to support the account; more authority to act on it.)</a:t>
-            </a:r>
-          </a:p>
-          <a:p>
-            <a:r>
-              <a:t>EXPECTED ANSWERS AND MISCONCEPTION: students reflexively crown the broadest model. The analyst's obligation is a boundary SUFFICIENT for the decision at hand.</a:t>
+              <a:t>TIMING: 3 minutes. THE SYNTHESIS SLIDE — closes Movement 3. (Backbone slide: models enable different interventions.)</a:t>
+            </a:r>
+          </a:p>
+          <a:p>
+            <a:r>
+              <a:t>ENGINEERING POINT — TWO DIMENSIONS, NOT ONE: the three models differ in their EXPLANATORY MECHANISM (what kind of account they construct: a causal chain; a configuration of defenses; a control structure enforcing constraints) and, SEPARATELY, in the SYSTEM BOUNDARY they are applied to. This lecture applied them at progressively broader boundaries because the investigation's questions widened — but that was our choice of boundary, not a property of the models.</a:t>
+            </a:r>
+          </a:p>
+          <a:p>
+            <a:r>
+              <a:t>THE CONFLATION TO PREVENT: STAMP is NOT simply a more comprehensive Swiss cheese. STAMP can be applied to a narrow technical system (a single controller and its process); Swiss cheese can be applied across organizational boundaries (defenses spanning vendor and customer). The model answers its question; the boundary is chosen to fit the decision.</a:t>
+            </a:r>
+          </a:p>
+          <a:p>
+            <a:r>
+              <a:t>WALK THE TABLE: component-level — what mechanism produced the failure? — repair the defective mechanism. Swiss cheese — why did defenses fail to prevent it? — strengthen or diversify defenses. STAMP — which safety constraints were inadequately controlled? — change control actions, feedback, or authority.</a:t>
+            </a:r>
+          </a:p>
+          <a:p>
+            <a:r>
+              <a:t>ASK: broader explanations expose more — what do they COST? (More evidence to support the account; often more authority to act on it.)</a:t>
+            </a:r>
+          </a:p>
+          <a:p>
+            <a:r>
+              <a:t>EXPECTED ANSWERS AND MISCONCEPTION: students reflexively crown the broadest model. Keep the standing caution: broader is not automatically better; choose the boundary sufficient for the decision.</a:t>
             </a:r>
           </a:p>
           <a:p>
@@ -3119,7 +3169,7 @@
           <a:lstStyle/>
           <a:p>
             <a:r>
-              <a:t>TIMING: 3 minutes. OPENS MOVEMENT 4 — what should change?</a:t>
+              <a:t>TIMING: 2 minutes. OPENS MOVEMENT 4 — what should change?</a:t>
             </a:r>
           </a:p>
           <a:p>
@@ -3145,6 +3195,11 @@
           <a:p>
             <a:r>
               <a:t>TRANSITION: suppose the lesson is sound. Where does it go? Two destinations — the engineer, and the engineering environment. First the engineer.</a:t>
+            </a:r>
+          </a:p>
+          <a:p>
+            <a:r>
+              <a:t>BRIDGE (author): the jump from comparing causal models to reading postmortems needs its connective sentence, now on the slide — once engineers have an explanation, they must determine what the evidence justifies changing. A postmortem is the document where that determination is argued.</a:t>
             </a:r>
           </a:p>
         </p:txBody>
@@ -3214,7 +3269,7 @@
           <a:lstStyle/>
           <a:p>
             <a:r>
-              <a:t>TIMING: 3 minutes. PRESERVED FROM THE ORIGINAL LECTURE — Schön's contribution.</a:t>
+              <a:t>TIMING: 2 minutes. PRESERVED FROM THE ORIGINAL LECTURE — Schön's contribution.</a:t>
             </a:r>
           </a:p>
           <a:p>
@@ -3250,6 +3305,11 @@
           <a:p>
             <a:r>
               <a:t>TRANSITION: reflection lives in a person. People leave, and agents arrive without the organization's history. Where does the lesson live then?</a:t>
+            </a:r>
+          </a:p>
+          <a:p>
+            <a:r>
+              <a:t>EXPOSITION ORDER (author): read the intro sentence first, then walk the chain. The distinction to land before the diagram: experience accumulates by itself; expertise does not. Reflection is the deliberate comparison of expectation with outcome — that comparison, not the hours, is what feeds the repertoire.</a:t>
             </a:r>
           </a:p>
         </p:txBody>
@@ -3319,7 +3379,7 @@
           <a:lstStyle/>
           <a:p>
             <a:r>
-              <a:t>TIMING: 4 minutes. GOVERNANCE CONVERSION — the lesson changes the ENVIRONMENT.</a:t>
+              <a:t>TIMING: 3 minutes. GOVERNANCE CONVERSION — the lesson changes the ENVIRONMENT.</a:t>
             </a:r>
           </a:p>
           <a:p>
@@ -3350,6 +3410,11 @@
           <a:p>
             <a:r>
               <a:t>TRANSITION: encoding is not the end of the decision. Different lessons land at different ALTITUDES — and need different authorities.</a:t>
+            </a:r>
+          </a:p>
+          <a:p>
+            <a:r>
+              <a:t>SEQUENCE, NOT TAXONOMY (author): walk the five rows as CONNECTED DECISIONS, each depending on the previous — what obligation was violated? → how should it be REPRESENTED so it can be reasoned about? → what EVIDENCE establishes compliance with it? → how is that evidence EVALUATED? → what ENFORCES that an unacceptable change cannot proceed? The arrows down the left column carry the dependency. Map each to the unit where students met it (the bottom line): obligations in Requirements, representation in Modeling, evidence and evaluation in Validation, enforcement in Alignment. The diagnosis question is where the CHAIN first broke, and the encoding belongs at that link.</a:t>
             </a:r>
           </a:p>
         </p:txBody>
@@ -3419,7 +3484,7 @@
           <a:lstStyle/>
           <a:p>
             <a:r>
-              <a:t>TIMING: 3 minutes. THE LOCAL AND SYSTEMIC ANALYSES MEET.</a:t>
+              <a:t>TIMING: 2 minutes. THE LOCAL AND SYSTEMIC ANALYSES MEET.</a:t>
             </a:r>
           </a:p>
           <a:p>
@@ -3514,7 +3579,7 @@
           <a:lstStyle/>
           <a:p>
             <a:r>
-              <a:t>TIMING: 3 minutes. CLOSES THE CROWDSTRIKE INVESTIGATION.</a:t>
+              <a:t>TIMING: 2 minutes. CLOSES THE CROWDSTRIKE INVESTIGATION.</a:t>
             </a:r>
           </a:p>
           <a:p>
@@ -3609,32 +3674,37 @@
           <a:lstStyle/>
           <a:p>
             <a:r>
-              <a:t>TIMING: 2 minutes — a transfer exercise, not a second full case study.</a:t>
-            </a:r>
-          </a:p>
-          <a:p>
-            <a:r>
-              <a:t>ENGINEERING POINT: lead with the deep structure, because it is what makes this an APPLICATION of the method rather than a second war story. In both incidents, content or configuration shipped through a faster, less-gated path than code; and in both, a validator ran and passed while checking the wrong property — arity against the wrong contract at CrowdStrike, runtime instead of CPU at Cloudflare.</a:t>
-            </a:r>
-          </a:p>
-          <a:p>
-            <a:r>
-              <a:t>FACTS (Cloudflare post-mortem, 'Details of the Cloudflare outage on July 2, 2019'): a WAF Managed Rule targeting XSS deployed globally at 13:42 UTC; the sub-pattern .*(?:.*=.*) caused catastrophic backtracking (their worked numbers: 'x=x' 23 steps; 'x=' + twenty x's 555 steps); PCRE 'has no mechanism to protect against a runaway expression'; impact 27 minutes — identified 14:00, killed globally 14:07, traffic normal 14:09, WAF re-enabled 14:52. Software releases went DOG → PIG → Canary; the WAF SOP allowed a non-emergency rule to go global without staged rollout, and a CPU-usage protection had been accidentally removed weeks earlier.</a:t>
-            </a:r>
-          </a:p>
-          <a:p>
-            <a:r>
-              <a:t>CARE: regex matching cost depends on expression, algorithm, AND input — do not imply all engines behave this way (re2 and Rust's engine carry runtime guarantees). Do not conflate with Cloudflare's November 2025 outage — different mechanism.</a:t>
-            </a:r>
-          </a:p>
-          <a:p>
-            <a:r>
-              <a:t>ASK: before advancing — what in this story have you already seen this lecture?</a:t>
-            </a:r>
-          </a:p>
-          <a:p>
-            <a:r>
-              <a:t>TRANSITION: your turn. Diagnose it with the three models.</a:t>
+              <a:t>TIMING: 3 minutes — a transfer exercise, not a second full case study.</a:t>
+            </a:r>
+          </a:p>
+          <a:p>
+            <a:r>
+              <a:t>EXPOSITION ORDER (author): establish the system first. Cloudflare operates an edge network a large share of web traffic passes through; a Web Application Firewall (WAF) inspects that traffic for attacks; WAF rules describe attack patterns, often as regular expressions. THEN the failure — and explain the MECHANISM before the measurements: some regular expressions require disproportionately more matching work as the input grows, because a backtracking engine re-tries overlapping ways to match. The 23-vs-555 bars at the bottom ILLUSTRATE that mechanism; they do not replace the explanation.</a:t>
+            </a:r>
+          </a:p>
+          <a:p>
+            <a:r>
+              <a:t>FACTS (Cloudflare post-mortem, 'Details of the Cloudflare outage on July 2, 2019'): a WAF Managed Rule targeting XSS deployed globally at 13:42 UTC — in seconds, with no staged rollout, while software releases went DOG → PIG → Canary; the sub-pattern .*(?:.*=.*) caused catastrophic backtracking (their worked numbers: 'x=x' took 23 steps; 'x=' plus twenty 'x's took 555); PCRE 'has no mechanism to protect against a runaway expression'; WAF identified 14:00, killed globally 14:07, traffic normal 14:09, re-enabled 14:52 — 27 minutes of impact. A CPU protection had been accidentally removed weeks earlier.</a:t>
+            </a:r>
+          </a:p>
+          <a:p>
+            <a:r>
+              <a:t>DEEP STRUCTURE (lead with it at the footer): in both incidents, content or configuration shipped through a faster, less-gated path than code; and in both, a validator ran and passed while checking the wrong property — arity against the wrong contract at CrowdStrike, runtime instead of CPU at Cloudflare.</a:t>
+            </a:r>
+          </a:p>
+          <a:p>
+            <a:r>
+              <a:t>CARE: regex matching cost depends on expression, engine, AND input — do not imply all engines behave this way (re2 and Rust's engine carry runtime guarantees). Do not conflate with Cloudflare's November 2025 outage — different mechanism.</a:t>
+            </a:r>
+          </a:p>
+          <a:p>
+            <a:r>
+              <a:t>ASK: what in this story have you already seen this lecture?</a:t>
+            </a:r>
+          </a:p>
+          <a:p>
+            <a:r>
+              <a:t>TRANSITION: your turn — diagnose it with the three models.</a:t>
             </a:r>
           </a:p>
         </p:txBody>
@@ -3794,7 +3864,7 @@
           <a:lstStyle/>
           <a:p>
             <a:r>
-              <a:t>TIMING: 3 minutes. CLOSES THE UNIT AND ACT II. No new framework on this slide.</a:t>
+              <a:t>TIMING: 2 minutes. CLOSES THE UNIT AND ACT II. No new framework on this slide.</a:t>
             </a:r>
           </a:p>
           <a:p>
@@ -7692,6 +7762,17 @@
               <a:t>PREVENT</a:t>
             </a:r>
           </a:p>
+          <a:p>
+            <a:pPr algn="ctr"/>
+            <a:r>
+              <a:rPr sz="900" b="1" i="0">
+                <a:solidFill>
+                  <a:srgbClr val="FFFFFF"/>
+                </a:solidFill>
+              </a:rPr>
+              <a:t>acts at the defect</a:t>
+            </a:r>
+          </a:p>
         </p:txBody>
       </p:sp>
       <p:sp>
@@ -7830,6 +7911,17 @@
               <a:t>DETECT</a:t>
             </a:r>
           </a:p>
+          <a:p>
+            <a:pPr algn="ctr"/>
+            <a:r>
+              <a:rPr sz="900" b="1" i="0">
+                <a:solidFill>
+                  <a:srgbClr val="FFFFFF"/>
+                </a:solidFill>
+              </a:rPr>
+              <a:t>acts before release</a:t>
+            </a:r>
+          </a:p>
         </p:txBody>
       </p:sp>
       <p:sp>
@@ -7968,6 +8060,17 @@
               <a:t>CONTAIN</a:t>
             </a:r>
           </a:p>
+          <a:p>
+            <a:pPr algn="ctr"/>
+            <a:r>
+              <a:rPr sz="900" b="1" i="0" dirty="0">
+                <a:solidFill>
+                  <a:srgbClr val="FFFFFF"/>
+                </a:solidFill>
+              </a:rPr>
+              <a:t>acts during propagation</a:t>
+            </a:r>
+          </a:p>
         </p:txBody>
       </p:sp>
       <p:sp>
@@ -8104,6 +8207,17 @@
                 </a:solidFill>
               </a:rPr>
               <a:t>RECOVER</a:t>
+            </a:r>
+          </a:p>
+          <a:p>
+            <a:pPr algn="ctr"/>
+            <a:r>
+              <a:rPr sz="900" b="1" i="0">
+                <a:solidFill>
+                  <a:srgbClr val="FFFFFF"/>
+                </a:solidFill>
+              </a:rPr>
+              <a:t>acts after disruption</a:t>
             </a:r>
           </a:p>
         </p:txBody>
@@ -10421,7 +10535,7 @@
         </p:nvSpPr>
         <p:spPr>
           <a:xfrm>
-            <a:off x="2743200" y="1554480"/>
+            <a:off x="2743200" y="1920240"/>
             <a:ext cx="3657600" cy="914400"/>
           </a:xfrm>
           <a:prstGeom prst="rect">
@@ -10484,8 +10598,8 @@
         </p:nvCxnSpPr>
         <p:spPr>
           <a:xfrm>
-            <a:off x="3931920" y="2468880"/>
-            <a:ext cx="0" cy="1097279"/>
+            <a:off x="3931920" y="2834640"/>
+            <a:ext cx="0" cy="1005840"/>
           </a:xfrm>
           <a:prstGeom prst="line">
             <a:avLst/>
@@ -10520,8 +10634,8 @@
         </p:nvCxnSpPr>
         <p:spPr>
           <a:xfrm flipV="1">
-            <a:off x="5212080" y="2468880"/>
-            <a:ext cx="0" cy="1097279"/>
+            <a:off x="5212080" y="2834640"/>
+            <a:ext cx="0" cy="1005840"/>
           </a:xfrm>
           <a:prstGeom prst="line">
             <a:avLst/>
@@ -10556,7 +10670,7 @@
         </p:nvSpPr>
         <p:spPr>
           <a:xfrm>
-            <a:off x="2743200" y="3566160"/>
+            <a:off x="2743200" y="3840480"/>
             <a:ext cx="3657600" cy="731520"/>
           </a:xfrm>
           <a:prstGeom prst="rect">
@@ -10608,7 +10722,7 @@
         </p:nvSpPr>
         <p:spPr>
           <a:xfrm>
-            <a:off x="1097280" y="2788920"/>
+            <a:off x="1097280" y="3063240"/>
             <a:ext cx="2377440" cy="411480"/>
           </a:xfrm>
           <a:prstGeom prst="rect">
@@ -10642,7 +10756,7 @@
         </p:nvSpPr>
         <p:spPr>
           <a:xfrm>
-            <a:off x="6492240" y="2788920"/>
+            <a:off x="6492240" y="3063240"/>
             <a:ext cx="2103120" cy="411480"/>
           </a:xfrm>
           <a:prstGeom prst="rect">
@@ -10761,6 +10875,62 @@
                 </a:solidFill>
               </a:rPr>
               <a:t>What must the controller know and control?</a:t>
+            </a:r>
+          </a:p>
+        </p:txBody>
+      </p:sp>
+      <p:sp>
+        <p:nvSpPr>
+          <p:cNvPr id="915" name="Label"/>
+          <p:cNvSpPr txBox="1"/>
+          <p:nvPr/>
+        </p:nvSpPr>
+        <p:spPr>
+          <a:xfrm>
+            <a:off x="548640" y="868680"/>
+            <a:ext cx="8046720" cy="868680"/>
+          </a:xfrm>
+          <a:prstGeom prst="rect">
+            <a:avLst/>
+          </a:prstGeom>
+          <a:noFill/>
+        </p:spPr>
+        <p:txBody>
+          <a:bodyPr wrap="square" lIns="27432" tIns="22860" rIns="27432" bIns="22860" anchor="t">
+            <a:spAutoFit/>
+          </a:bodyPr>
+          <a:lstStyle/>
+          <a:p>
+            <a:pPr algn="ctr"/>
+            <a:r>
+              <a:rPr sz="1300" b="1" i="1">
+                <a:solidFill>
+                  <a:srgbClr val="5C4826"/>
+                </a:solidFill>
+              </a:rPr>
+              <a:t>A release manager authorizes an update (a control action) based on test results (feedback).</a:t>
+            </a:r>
+          </a:p>
+          <a:p>
+            <a:pPr algn="ctr"/>
+            <a:r>
+              <a:rPr sz="1300" b="1" i="1">
+                <a:solidFill>
+                  <a:srgbClr val="5C4826"/>
+                </a:solidFill>
+              </a:rPr>
+              <a:t>If the tests do not represent actual endpoint behavior, the manager’s picture of the</a:t>
+            </a:r>
+          </a:p>
+          <a:p>
+            <a:pPr algn="ctr"/>
+            <a:r>
+              <a:rPr sz="1300" b="1" i="1">
+                <a:solidFill>
+                  <a:srgbClr val="5C4826"/>
+                </a:solidFill>
+              </a:rPr>
+              <a:t>system (the process model) is wrong — and a well-intended decision is unsafe.</a:t>
             </a:r>
           </a:p>
         </p:txBody>
@@ -14067,8 +14237,8 @@
         </p:nvSpPr>
         <p:spPr>
           <a:xfrm>
-            <a:off x="548640" y="5212080"/>
-            <a:ext cx="8046720" cy="594360"/>
+            <a:off x="548640" y="5074920"/>
+            <a:ext cx="8046720" cy="777240"/>
           </a:xfrm>
           <a:prstGeom prst="rect">
             <a:avLst/>
@@ -14083,18 +14253,29 @@
           <a:p>
             <a:pPr algn="ctr"/>
             <a:r>
-              <a:rPr sz="1300" b="0" i="0">
+              <a:rPr sz="1200" b="1" i="0">
                 <a:solidFill>
                   <a:srgbClr val="5C4826"/>
                 </a:solidFill>
               </a:rPr>
+              <a:t>Each controller requires both authority to act and evidence about the consequences.</a:t>
+            </a:r>
+          </a:p>
+          <a:p>
+            <a:pPr algn="ctr"/>
+            <a:r>
+              <a:rPr sz="1200" b="0" i="0">
+                <a:solidFill>
+                  <a:srgbClr val="5C4826"/>
+                </a:solidFill>
+              </a:rPr>
               <a:t>Not every sector has a regulator empowered to mandate these controls.</a:t>
             </a:r>
           </a:p>
           <a:p>
             <a:pPr algn="ctr"/>
             <a:r>
-              <a:rPr sz="1300" b="0" i="0">
+              <a:rPr sz="1200" b="0" i="0">
                 <a:solidFill>
                   <a:srgbClr val="5C4826"/>
                 </a:solidFill>
@@ -15180,43 +15361,6 @@
           </a:p>
         </p:txBody>
       </p:sp>
-      <p:cxnSp>
-        <p:nvCxnSpPr>
-          <p:cNvPr id="905" name="Connector 904"/>
-          <p:cNvCxnSpPr/>
-          <p:nvPr/>
-        </p:nvCxnSpPr>
-        <p:spPr>
-          <a:xfrm>
-            <a:off x="448056" y="4069080"/>
-            <a:ext cx="8001000" cy="0"/>
-          </a:xfrm>
-          <a:prstGeom prst="line">
-            <a:avLst/>
-          </a:prstGeom>
-          <a:ln w="28575">
-            <a:solidFill>
-              <a:srgbClr val="8E6F3E"/>
-            </a:solidFill>
-            <a:headEnd type="triangle"/>
-            <a:tailEnd type="triangle"/>
-          </a:ln>
-        </p:spPr>
-        <p:style>
-          <a:lnRef idx="2">
-            <a:schemeClr val="accent1"/>
-          </a:lnRef>
-          <a:fillRef idx="0">
-            <a:schemeClr val="accent1"/>
-          </a:fillRef>
-          <a:effectRef idx="1">
-            <a:schemeClr val="accent1"/>
-          </a:effectRef>
-          <a:fontRef idx="minor">
-            <a:schemeClr val="tx1"/>
-          </a:fontRef>
-        </p:style>
-      </p:cxnSp>
       <p:sp>
         <p:nvSpPr>
           <p:cNvPr id="920" name="Label"/>
@@ -15226,7 +15370,7 @@
         <p:spPr>
           <a:xfrm>
             <a:off x="640080" y="2057400"/>
-            <a:ext cx="2011680" cy="457200"/>
+            <a:ext cx="2011680" cy="868680"/>
           </a:xfrm>
           <a:prstGeom prst="rect">
             <a:avLst/>
@@ -15241,12 +15385,12 @@
           <a:p>
             <a:pPr algn="ctr"/>
             <a:r>
-              <a:rPr sz="2000" b="0" i="0">
+              <a:rPr sz="1200" b="0" i="0">
                 <a:solidFill>
                   <a:srgbClr val="555960"/>
                 </a:solidFill>
               </a:rPr>
-              <a:t>What failed?</a:t>
+              <a:t>What mechanism produced the failure?</a:t>
             </a:r>
           </a:p>
         </p:txBody>
@@ -15260,7 +15404,7 @@
         <p:spPr>
           <a:xfrm>
             <a:off x="3566160" y="2057400"/>
-            <a:ext cx="2011680" cy="457200"/>
+            <a:ext cx="2011680" cy="868680"/>
           </a:xfrm>
           <a:prstGeom prst="rect">
             <a:avLst/>
@@ -15275,12 +15419,12 @@
           <a:p>
             <a:pPr algn="ctr"/>
             <a:r>
-              <a:rPr sz="2000" b="0" i="0">
+              <a:rPr sz="1200" b="0" i="0">
                 <a:solidFill>
                   <a:srgbClr val="555960"/>
                 </a:solidFill>
               </a:rPr>
-              <a:t>Why did it escape?</a:t>
+              <a:t>Why did defenses fail to prevent it?</a:t>
             </a:r>
           </a:p>
         </p:txBody>
@@ -15294,7 +15438,7 @@
         <p:spPr>
           <a:xfrm>
             <a:off x="6492240" y="2057400"/>
-            <a:ext cx="2011680" cy="457200"/>
+            <a:ext cx="2011680" cy="868680"/>
           </a:xfrm>
           <a:prstGeom prst="rect">
             <a:avLst/>
@@ -15309,26 +15453,26 @@
           <a:p>
             <a:pPr algn="ctr"/>
             <a:r>
-              <a:rPr sz="2000" b="0" i="0">
+              <a:rPr sz="1200" b="0" i="0">
                 <a:solidFill>
                   <a:srgbClr val="555960"/>
                 </a:solidFill>
               </a:rPr>
-              <a:t>Why so broad an impact?</a:t>
-            </a:r>
-          </a:p>
-        </p:txBody>
-      </p:sp>
-      <p:sp>
-        <p:nvSpPr>
-          <p:cNvPr id="924" name="Label"/>
+              <a:t>Which safety constraints were inadequately controlled?</a:t>
+            </a:r>
+          </a:p>
+        </p:txBody>
+      </p:sp>
+      <p:sp>
+        <p:nvSpPr>
+          <p:cNvPr id="927" name="Label"/>
           <p:cNvSpPr txBox="1"/>
           <p:nvPr/>
         </p:nvSpPr>
         <p:spPr>
           <a:xfrm>
-            <a:off x="448056" y="3657600"/>
-            <a:ext cx="1719072" cy="353943"/>
+            <a:off x="640080" y="4160520"/>
+            <a:ext cx="7863840" cy="1188720"/>
           </a:xfrm>
           <a:prstGeom prst="rect">
             <a:avLst/>
@@ -15341,33 +15485,50 @@
           </a:bodyPr>
           <a:lstStyle/>
           <a:p>
-            <a:pPr algn="l"/>
-            <a:r>
-              <a:rPr lang="en-US" sz="2000" b="0" i="0" dirty="0">
-                <a:solidFill>
-                  <a:srgbClr val="555960"/>
-                </a:solidFill>
-              </a:rPr>
-              <a:t>Narrower</a:t>
-            </a:r>
-            <a:endParaRPr sz="2000" b="0" i="0" dirty="0">
-              <a:solidFill>
-                <a:srgbClr val="555960"/>
-              </a:solidFill>
-            </a:endParaRPr>
-          </a:p>
-        </p:txBody>
-      </p:sp>
-      <p:sp>
-        <p:nvSpPr>
-          <p:cNvPr id="925" name="Label"/>
+            <a:pPr algn="ctr"/>
+            <a:r>
+              <a:rPr sz="1400" b="0" i="0" dirty="0">
+                <a:solidFill>
+                  <a:srgbClr val="5C4826"/>
+                </a:solidFill>
+              </a:rPr>
+              <a:t>Any of the three can be applied at different system boundaries — this lecture chose progressively broader ones.</a:t>
+            </a:r>
+          </a:p>
+          <a:p>
+            <a:pPr algn="ctr"/>
+            <a:r>
+              <a:rPr sz="1400" b="0" i="0" dirty="0">
+                <a:solidFill>
+                  <a:srgbClr val="5C4826"/>
+                </a:solidFill>
+              </a:rPr>
+              <a:t>Broader explanations require more evidence and may require greater authority to act.</a:t>
+            </a:r>
+          </a:p>
+          <a:p>
+            <a:pPr algn="ctr"/>
+            <a:r>
+              <a:rPr sz="1400" b="0" i="0" dirty="0">
+                <a:solidFill>
+                  <a:srgbClr val="5C4826"/>
+                </a:solidFill>
+              </a:rPr>
+              <a:t>Choose the model for its question, and the boundary sufficient for the decision.</a:t>
+            </a:r>
+          </a:p>
+        </p:txBody>
+      </p:sp>
+      <p:sp>
+        <p:nvSpPr>
+          <p:cNvPr id="1000" name="Label"/>
           <p:cNvSpPr txBox="1"/>
           <p:nvPr/>
         </p:nvSpPr>
         <p:spPr>
           <a:xfrm>
-            <a:off x="6848856" y="3657600"/>
-            <a:ext cx="1600200" cy="353943"/>
+            <a:off x="640080" y="3063240"/>
+            <a:ext cx="2011680" cy="731520"/>
           </a:xfrm>
           <a:prstGeom prst="rect">
             <a:avLst/>
@@ -15380,33 +15541,28 @@
           </a:bodyPr>
           <a:lstStyle/>
           <a:p>
-            <a:pPr algn="r"/>
-            <a:r>
-              <a:rPr lang="en-US" sz="2000" b="0" i="0" dirty="0">
+            <a:pPr algn="ctr"/>
+            <a:r>
+              <a:rPr sz="1200" b="0" i="0">
                 <a:solidFill>
                   <a:srgbClr val="555960"/>
                 </a:solidFill>
               </a:rPr>
-              <a:t>Broader</a:t>
-            </a:r>
-            <a:endParaRPr sz="2000" b="0" i="0" dirty="0">
-              <a:solidFill>
-                <a:srgbClr val="555960"/>
-              </a:solidFill>
-            </a:endParaRPr>
-          </a:p>
-        </p:txBody>
-      </p:sp>
-      <p:sp>
-        <p:nvSpPr>
-          <p:cNvPr id="927" name="Label"/>
+              <a:t>repair the defective mechanism</a:t>
+            </a:r>
+          </a:p>
+        </p:txBody>
+      </p:sp>
+      <p:sp>
+        <p:nvSpPr>
+          <p:cNvPr id="1001" name="Label"/>
           <p:cNvSpPr txBox="1"/>
           <p:nvPr/>
         </p:nvSpPr>
         <p:spPr>
           <a:xfrm>
-            <a:off x="850392" y="4526280"/>
-            <a:ext cx="7498079" cy="822960"/>
+            <a:off x="3566160" y="3063240"/>
+            <a:ext cx="2011680" cy="731520"/>
           </a:xfrm>
           <a:prstGeom prst="rect">
             <a:avLst/>
@@ -15421,43 +15577,26 @@
           <a:p>
             <a:pPr algn="ctr"/>
             <a:r>
-              <a:rPr sz="1500" b="0" i="0" dirty="0">
-                <a:solidFill>
-                  <a:srgbClr val="5C4826"/>
-                </a:solidFill>
-              </a:rPr>
-              <a:t>Broader explanations require more evidence and may require greater authority to act.</a:t>
-            </a:r>
-          </a:p>
-          <a:p>
-            <a:pPr algn="ctr"/>
-            <a:r>
-              <a:rPr sz="1500" b="0" i="0" dirty="0">
-                <a:solidFill>
-                  <a:srgbClr val="5C4826"/>
-                </a:solidFill>
-              </a:rPr>
-              <a:t>Choose the boundary sufficient for the decision — broader is not automatically better.</a:t>
-            </a:r>
-          </a:p>
-        </p:txBody>
-      </p:sp>
-      <p:sp>
-        <p:nvSpPr>
-          <p:cNvPr id="2" name="Label">
-            <a:extLst>
-              <a:ext uri="{FF2B5EF4-FFF2-40B4-BE49-F238E27FC236}">
-                <a16:creationId xmlns:a16="http://schemas.microsoft.com/office/drawing/2014/main" id="{7DD433C0-05A4-A8DB-8A40-F75777F417F1}"/>
-              </a:ext>
-            </a:extLst>
-          </p:cNvPr>
+              <a:rPr sz="1200" b="0" i="0">
+                <a:solidFill>
+                  <a:srgbClr val="555960"/>
+                </a:solidFill>
+              </a:rPr>
+              <a:t>strengthen or diversify defenses</a:t>
+            </a:r>
+          </a:p>
+        </p:txBody>
+      </p:sp>
+      <p:sp>
+        <p:nvSpPr>
+          <p:cNvPr id="1002" name="Label"/>
           <p:cNvSpPr txBox="1"/>
           <p:nvPr/>
         </p:nvSpPr>
         <p:spPr>
           <a:xfrm>
-            <a:off x="3502152" y="3657600"/>
-            <a:ext cx="2011680" cy="353943"/>
+            <a:off x="6492240" y="3063240"/>
+            <a:ext cx="2011680" cy="731520"/>
           </a:xfrm>
           <a:prstGeom prst="rect">
             <a:avLst/>
@@ -15472,127 +15611,12 @@
           <a:p>
             <a:pPr algn="ctr"/>
             <a:r>
-              <a:rPr lang="en-US" sz="2000" dirty="0">
+              <a:rPr sz="1200" b="0" i="0">
                 <a:solidFill>
                   <a:srgbClr val="555960"/>
                 </a:solidFill>
               </a:rPr>
-              <a:t>c</a:t>
-            </a:r>
-            <a:r>
-              <a:rPr lang="en-US" sz="2000" b="0" i="0" dirty="0">
-                <a:solidFill>
-                  <a:srgbClr val="555960"/>
-                </a:solidFill>
-              </a:rPr>
-              <a:t>ausal boundary</a:t>
-            </a:r>
-            <a:endParaRPr sz="2000" b="0" i="0" dirty="0">
-              <a:solidFill>
-                <a:srgbClr val="555960"/>
-              </a:solidFill>
-            </a:endParaRPr>
-          </a:p>
-        </p:txBody>
-      </p:sp>
-      <p:sp>
-        <p:nvSpPr>
-          <p:cNvPr id="1000" name="Label"/>
-          <p:cNvSpPr txBox="1"/>
-          <p:nvPr/>
-        </p:nvSpPr>
-        <p:spPr>
-          <a:xfrm>
-            <a:off x="640080" y="2697480"/>
-            <a:ext cx="2011680" cy="548640"/>
-          </a:xfrm>
-          <a:prstGeom prst="rect">
-            <a:avLst/>
-          </a:prstGeom>
-          <a:noFill/>
-        </p:spPr>
-        <p:txBody>
-          <a:bodyPr wrap="square" lIns="27432" tIns="22860" rIns="27432" bIns="22860" anchor="t">
-            <a:spAutoFit/>
-          </a:bodyPr>
-          <a:lstStyle/>
-          <a:p>
-            <a:pPr algn="ctr"/>
-            <a:r>
-              <a:rPr sz="1300" b="0" i="0">
-                <a:solidFill>
-                  <a:srgbClr val="555960"/>
-                </a:solidFill>
-              </a:rPr>
-              <a:t>repair the defect</a:t>
-            </a:r>
-          </a:p>
-        </p:txBody>
-      </p:sp>
-      <p:sp>
-        <p:nvSpPr>
-          <p:cNvPr id="1001" name="Label"/>
-          <p:cNvSpPr txBox="1"/>
-          <p:nvPr/>
-        </p:nvSpPr>
-        <p:spPr>
-          <a:xfrm>
-            <a:off x="3566160" y="2697480"/>
-            <a:ext cx="2011680" cy="548640"/>
-          </a:xfrm>
-          <a:prstGeom prst="rect">
-            <a:avLst/>
-          </a:prstGeom>
-          <a:noFill/>
-        </p:spPr>
-        <p:txBody>
-          <a:bodyPr wrap="square" lIns="27432" tIns="22860" rIns="27432" bIns="22860" anchor="t">
-            <a:spAutoFit/>
-          </a:bodyPr>
-          <a:lstStyle/>
-          <a:p>
-            <a:pPr algn="ctr"/>
-            <a:r>
-              <a:rPr sz="1300" b="0" i="0">
-                <a:solidFill>
-                  <a:srgbClr val="555960"/>
-                </a:solidFill>
-              </a:rPr>
-              <a:t>improve the defenses</a:t>
-            </a:r>
-          </a:p>
-        </p:txBody>
-      </p:sp>
-      <p:sp>
-        <p:nvSpPr>
-          <p:cNvPr id="1002" name="Label"/>
-          <p:cNvSpPr txBox="1"/>
-          <p:nvPr/>
-        </p:nvSpPr>
-        <p:spPr>
-          <a:xfrm>
-            <a:off x="6492240" y="2697480"/>
-            <a:ext cx="2011680" cy="548640"/>
-          </a:xfrm>
-          <a:prstGeom prst="rect">
-            <a:avLst/>
-          </a:prstGeom>
-          <a:noFill/>
-        </p:spPr>
-        <p:txBody>
-          <a:bodyPr wrap="square" lIns="27432" tIns="22860" rIns="27432" bIns="22860" anchor="t">
-            <a:spAutoFit/>
-          </a:bodyPr>
-          <a:lstStyle/>
-          <a:p>
-            <a:pPr algn="ctr"/>
-            <a:r>
-              <a:rPr sz="1300" b="0" i="0">
-                <a:solidFill>
-                  <a:srgbClr val="555960"/>
-                </a:solidFill>
-              </a:rPr>
-              <a:t>change controls and responsibilities</a:t>
+              <a:t>change control actions, feedback, or authority</a:t>
             </a:r>
           </a:p>
         </p:txBody>
@@ -16048,6 +16072,40 @@
           </a:p>
         </p:txBody>
       </p:sp>
+      <p:sp>
+        <p:nvSpPr>
+          <p:cNvPr id="915" name="Label"/>
+          <p:cNvSpPr txBox="1"/>
+          <p:nvPr/>
+        </p:nvSpPr>
+        <p:spPr>
+          <a:xfrm>
+            <a:off x="548640" y="914400"/>
+            <a:ext cx="8046720" cy="365760"/>
+          </a:xfrm>
+          <a:prstGeom prst="rect">
+            <a:avLst/>
+          </a:prstGeom>
+          <a:noFill/>
+        </p:spPr>
+        <p:txBody>
+          <a:bodyPr wrap="square" lIns="27432" tIns="22860" rIns="27432" bIns="22860" anchor="t">
+            <a:spAutoFit/>
+          </a:bodyPr>
+          <a:lstStyle/>
+          <a:p>
+            <a:pPr algn="ctr"/>
+            <a:r>
+              <a:rPr sz="1300" b="1" i="1">
+                <a:solidFill>
+                  <a:srgbClr val="5C4826"/>
+                </a:solidFill>
+              </a:rPr>
+              <a:t>We can now explain the failure three ways. The next decision: what does the evidence justify CHANGING?</a:t>
+            </a:r>
+          </a:p>
+        </p:txBody>
+      </p:sp>
     </p:spTree>
   </p:cSld>
   <p:clrMapOvr>
@@ -16130,7 +16188,7 @@
         </p:nvSpPr>
         <p:spPr>
           <a:xfrm>
-            <a:off x="2606040" y="1097280"/>
+            <a:off x="2606040" y="1481328"/>
             <a:ext cx="3931920" cy="548640"/>
           </a:xfrm>
           <a:prstGeom prst="rect">
@@ -16182,8 +16240,8 @@
         </p:nvCxnSpPr>
         <p:spPr>
           <a:xfrm>
-            <a:off x="4572000" y="1645919"/>
-            <a:ext cx="0" cy="274321"/>
+            <a:off x="4572000" y="2029968"/>
+            <a:ext cx="0" cy="201168"/>
           </a:xfrm>
           <a:prstGeom prst="line">
             <a:avLst/>
@@ -16218,7 +16276,7 @@
         </p:nvSpPr>
         <p:spPr>
           <a:xfrm>
-            <a:off x="2606040" y="1920240"/>
+            <a:off x="2606040" y="2231136"/>
             <a:ext cx="3931920" cy="548640"/>
           </a:xfrm>
           <a:prstGeom prst="rect">
@@ -16277,8 +16335,8 @@
         </p:nvCxnSpPr>
         <p:spPr>
           <a:xfrm>
-            <a:off x="4572000" y="2468880"/>
-            <a:ext cx="0" cy="274320"/>
+            <a:off x="4572000" y="2779776"/>
+            <a:ext cx="0" cy="201168"/>
           </a:xfrm>
           <a:prstGeom prst="line">
             <a:avLst/>
@@ -16313,7 +16371,7 @@
         </p:nvSpPr>
         <p:spPr>
           <a:xfrm>
-            <a:off x="2606040" y="2743200"/>
+            <a:off x="2606040" y="2980944"/>
             <a:ext cx="3931920" cy="548640"/>
           </a:xfrm>
           <a:prstGeom prst="rect">
@@ -16365,8 +16423,8 @@
         </p:nvCxnSpPr>
         <p:spPr>
           <a:xfrm>
-            <a:off x="4572000" y="3291840"/>
-            <a:ext cx="0" cy="274320"/>
+            <a:off x="4572000" y="3529584"/>
+            <a:ext cx="0" cy="201168"/>
           </a:xfrm>
           <a:prstGeom prst="line">
             <a:avLst/>
@@ -16401,7 +16459,7 @@
         </p:nvSpPr>
         <p:spPr>
           <a:xfrm>
-            <a:off x="2606040" y="3566160"/>
+            <a:off x="2606040" y="3730752"/>
             <a:ext cx="3931920" cy="548640"/>
           </a:xfrm>
           <a:prstGeom prst="rect">
@@ -16455,7 +16513,7 @@
         </p:nvSpPr>
         <p:spPr>
           <a:xfrm>
-            <a:off x="2606040" y="4389120"/>
+            <a:off x="2606040" y="4480560"/>
             <a:ext cx="3931920" cy="548640"/>
           </a:xfrm>
           <a:prstGeom prst="rect">
@@ -16507,8 +16565,8 @@
         </p:nvCxnSpPr>
         <p:spPr>
           <a:xfrm>
-            <a:off x="4572000" y="4114800"/>
-            <a:ext cx="0" cy="274319"/>
+            <a:off x="4572000" y="4279392"/>
+            <a:ext cx="0" cy="201167"/>
           </a:xfrm>
           <a:prstGeom prst="line">
             <a:avLst/>
@@ -16543,7 +16601,7 @@
         </p:nvSpPr>
         <p:spPr>
           <a:xfrm>
-            <a:off x="548640" y="5193792"/>
+            <a:off x="548640" y="5120640"/>
             <a:ext cx="8046720" cy="594360"/>
           </a:xfrm>
           <a:prstGeom prst="rect">
@@ -16559,7 +16617,7 @@
           <a:p>
             <a:pPr algn="ctr"/>
             <a:r>
-              <a:rPr sz="1400" b="1" i="0">
+              <a:rPr sz="1300" b="1" i="0">
                 <a:solidFill>
                   <a:srgbClr val="5C4826"/>
                 </a:solidFill>
@@ -16570,7 +16628,7 @@
           <a:p>
             <a:pPr algn="ctr"/>
             <a:r>
-              <a:rPr sz="1400" b="1" i="0">
+              <a:rPr sz="1300" b="1" i="0">
                 <a:solidFill>
                   <a:srgbClr val="5C4826"/>
                 </a:solidFill>
@@ -16628,6 +16686,51 @@
                 </a:solidFill>
               </a:rPr>
               <a:t>What will an experienced engineer notice next time?</a:t>
+            </a:r>
+          </a:p>
+        </p:txBody>
+      </p:sp>
+      <p:sp>
+        <p:nvSpPr>
+          <p:cNvPr id="1002" name="Label"/>
+          <p:cNvSpPr txBox="1"/>
+          <p:nvPr/>
+        </p:nvSpPr>
+        <p:spPr>
+          <a:xfrm>
+            <a:off x="548640" y="868680"/>
+            <a:ext cx="8046720" cy="566928"/>
+          </a:xfrm>
+          <a:prstGeom prst="rect">
+            <a:avLst/>
+          </a:prstGeom>
+          <a:noFill/>
+        </p:spPr>
+        <p:txBody>
+          <a:bodyPr wrap="square" lIns="27432" tIns="22860" rIns="27432" bIns="22860" anchor="t">
+            <a:spAutoFit/>
+          </a:bodyPr>
+          <a:lstStyle/>
+          <a:p>
+            <a:pPr algn="ctr"/>
+            <a:r>
+              <a:rPr sz="1300" b="1" i="1">
+                <a:solidFill>
+                  <a:srgbClr val="5C4826"/>
+                </a:solidFill>
+              </a:rPr>
+              <a:t>Engineers develop expertise by examining the consequences of their decisions and</a:t>
+            </a:r>
+          </a:p>
+          <a:p>
+            <a:pPr algn="ctr"/>
+            <a:r>
+              <a:rPr sz="1300" b="1" i="1">
+                <a:solidFill>
+                  <a:srgbClr val="5C4826"/>
+                </a:solidFill>
+              </a:rPr>
+              <a:t>incorporating what they learn into future judgment — reflection, not mere accumulation of experience.</a:t>
             </a:r>
           </a:p>
         </p:txBody>
@@ -17415,6 +17518,184 @@
           </a:p>
         </p:txBody>
       </p:sp>
+      <p:cxnSp>
+        <p:nvCxnSpPr>
+          <p:cNvPr id="1000" name="Connector 911"/>
+          <p:cNvCxnSpPr/>
+          <p:nvPr/>
+        </p:nvCxnSpPr>
+        <p:spPr>
+          <a:xfrm>
+            <a:off x="2194560" y="1892807"/>
+            <a:ext cx="0" cy="274320"/>
+          </a:xfrm>
+          <a:prstGeom prst="line">
+            <a:avLst/>
+          </a:prstGeom>
+          <a:ln w="28575">
+            <a:solidFill>
+              <a:srgbClr val="8E6F3E"/>
+            </a:solidFill>
+            <a:tailEnd type="triangle"/>
+          </a:ln>
+        </p:spPr>
+        <p:style>
+          <a:lnRef idx="2">
+            <a:schemeClr val="accent1"/>
+          </a:lnRef>
+          <a:fillRef idx="0">
+            <a:schemeClr val="accent1"/>
+          </a:fillRef>
+          <a:effectRef idx="1">
+            <a:schemeClr val="accent1"/>
+          </a:effectRef>
+          <a:fontRef idx="minor">
+            <a:schemeClr val="tx1"/>
+          </a:fontRef>
+        </p:style>
+      </p:cxnSp>
+      <p:cxnSp>
+        <p:nvCxnSpPr>
+          <p:cNvPr id="1001" name="Connector 911"/>
+          <p:cNvCxnSpPr/>
+          <p:nvPr/>
+        </p:nvCxnSpPr>
+        <p:spPr>
+          <a:xfrm>
+            <a:off x="2194560" y="2734056"/>
+            <a:ext cx="0" cy="274319"/>
+          </a:xfrm>
+          <a:prstGeom prst="line">
+            <a:avLst/>
+          </a:prstGeom>
+          <a:ln w="28575">
+            <a:solidFill>
+              <a:srgbClr val="8E6F3E"/>
+            </a:solidFill>
+            <a:tailEnd type="triangle"/>
+          </a:ln>
+        </p:spPr>
+        <p:style>
+          <a:lnRef idx="2">
+            <a:schemeClr val="accent1"/>
+          </a:lnRef>
+          <a:fillRef idx="0">
+            <a:schemeClr val="accent1"/>
+          </a:fillRef>
+          <a:effectRef idx="1">
+            <a:schemeClr val="accent1"/>
+          </a:effectRef>
+          <a:fontRef idx="minor">
+            <a:schemeClr val="tx1"/>
+          </a:fontRef>
+        </p:style>
+      </p:cxnSp>
+      <p:cxnSp>
+        <p:nvCxnSpPr>
+          <p:cNvPr id="1002" name="Connector 911"/>
+          <p:cNvCxnSpPr/>
+          <p:nvPr/>
+        </p:nvCxnSpPr>
+        <p:spPr>
+          <a:xfrm>
+            <a:off x="2194560" y="3575304"/>
+            <a:ext cx="0" cy="274319"/>
+          </a:xfrm>
+          <a:prstGeom prst="line">
+            <a:avLst/>
+          </a:prstGeom>
+          <a:ln w="28575">
+            <a:solidFill>
+              <a:srgbClr val="8E6F3E"/>
+            </a:solidFill>
+            <a:tailEnd type="triangle"/>
+          </a:ln>
+        </p:spPr>
+        <p:style>
+          <a:lnRef idx="2">
+            <a:schemeClr val="accent1"/>
+          </a:lnRef>
+          <a:fillRef idx="0">
+            <a:schemeClr val="accent1"/>
+          </a:fillRef>
+          <a:effectRef idx="1">
+            <a:schemeClr val="accent1"/>
+          </a:effectRef>
+          <a:fontRef idx="minor">
+            <a:schemeClr val="tx1"/>
+          </a:fontRef>
+        </p:style>
+      </p:cxnSp>
+      <p:cxnSp>
+        <p:nvCxnSpPr>
+          <p:cNvPr id="1003" name="Connector 911"/>
+          <p:cNvCxnSpPr/>
+          <p:nvPr/>
+        </p:nvCxnSpPr>
+        <p:spPr>
+          <a:xfrm>
+            <a:off x="2194560" y="4416552"/>
+            <a:ext cx="0" cy="274319"/>
+          </a:xfrm>
+          <a:prstGeom prst="line">
+            <a:avLst/>
+          </a:prstGeom>
+          <a:ln w="28575">
+            <a:solidFill>
+              <a:srgbClr val="8E6F3E"/>
+            </a:solidFill>
+            <a:tailEnd type="triangle"/>
+          </a:ln>
+        </p:spPr>
+        <p:style>
+          <a:lnRef idx="2">
+            <a:schemeClr val="accent1"/>
+          </a:lnRef>
+          <a:fillRef idx="0">
+            <a:schemeClr val="accent1"/>
+          </a:fillRef>
+          <a:effectRef idx="1">
+            <a:schemeClr val="accent1"/>
+          </a:effectRef>
+          <a:fontRef idx="minor">
+            <a:schemeClr val="tx1"/>
+          </a:fontRef>
+        </p:style>
+      </p:cxnSp>
+      <p:sp>
+        <p:nvSpPr>
+          <p:cNvPr id="915" name="Label"/>
+          <p:cNvSpPr txBox="1"/>
+          <p:nvPr/>
+        </p:nvSpPr>
+        <p:spPr>
+          <a:xfrm>
+            <a:off x="548640" y="5422392"/>
+            <a:ext cx="8046720" cy="292608"/>
+          </a:xfrm>
+          <a:prstGeom prst="rect">
+            <a:avLst/>
+          </a:prstGeom>
+          <a:noFill/>
+        </p:spPr>
+        <p:txBody>
+          <a:bodyPr wrap="square" lIns="27432" tIns="22860" rIns="27432" bIns="22860" anchor="t">
+            <a:spAutoFit/>
+          </a:bodyPr>
+          <a:lstStyle/>
+          <a:p>
+            <a:pPr algn="ctr"/>
+            <a:r>
+              <a:rPr sz="1100" b="1" i="0">
+                <a:solidFill>
+                  <a:srgbClr val="5C4826"/>
+                </a:solidFill>
+              </a:rPr>
+              <a:t>obligation → Requirements · representation → Modeling · evidence + evaluation → Validation · enforcement → Alignment</a:t>
+            </a:r>
+          </a:p>
+        </p:txBody>
+      </p:sp>
     </p:spTree>
   </p:cSld>
   <p:clrMapOvr>
@@ -19020,12 +19301,12 @@
           <a:p>
             <a:pPr algn="ctr"/>
             <a:r>
-              <a:rPr sz="2000" b="1" i="0">
+              <a:rPr sz="1200" b="1" i="0">
                 <a:solidFill>
                   <a:srgbClr val="FFFFFF"/>
                 </a:solidFill>
               </a:rPr>
-              <a:t>A NEW WAF RULE</a:t>
+              <a:t>CLOUDFLARE</a:t>
             </a:r>
           </a:p>
         </p:txBody>
@@ -19075,7 +19356,7 @@
                   <a:srgbClr val="555960"/>
                 </a:solidFill>
               </a:rPr>
-              <a:t>deployed globally at 13:42 UTC — in seconds, with no staged rollout</a:t>
+              <a:t>operates a global edge network; its WAF inspects customers’ web traffic for attacks</a:t>
             </a:r>
           </a:p>
         </p:txBody>
@@ -19158,12 +19439,12 @@
           <a:p>
             <a:pPr algn="ctr"/>
             <a:r>
-              <a:rPr sz="2000" b="1" i="0">
+              <a:rPr sz="1200" b="1" i="0">
                 <a:solidFill>
                   <a:srgbClr val="FFFFFF"/>
                 </a:solidFill>
               </a:rPr>
-              <a:t>THE REGEX</a:t>
+              <a:t>WAF MANAGED RULES</a:t>
             </a:r>
           </a:p>
         </p:txBody>
@@ -19213,7 +19494,7 @@
                   <a:srgbClr val="555960"/>
                 </a:solidFill>
               </a:rPr>
-              <a:t>.*(?:.*=.*)  —  ‘x=x’ took 23 steps; ‘x=’ plus twenty ‘x’s took 555</a:t>
+              <a:t>attack-detection patterns — often regular expressions — running on every edge server</a:t>
             </a:r>
           </a:p>
         </p:txBody>
@@ -19296,12 +19577,12 @@
           <a:p>
             <a:pPr algn="ctr"/>
             <a:r>
-              <a:rPr sz="2000" b="1" i="0" dirty="0">
+              <a:rPr sz="1200" b="1" i="0" dirty="0">
                 <a:solidFill>
                   <a:srgbClr val="FFFFFF"/>
                 </a:solidFill>
               </a:rPr>
-              <a:t>CPU EXHAUSTION</a:t>
+              <a:t>THE DEFECTIVE RULE</a:t>
             </a:r>
           </a:p>
         </p:txBody>
@@ -19351,7 +19632,7 @@
                   <a:srgbClr val="555960"/>
                 </a:solidFill>
               </a:rPr>
-              <a:t>PCRE has no mechanism to protect against a runaway expression</a:t>
+              <a:t>.*(?:.*=.*) — matching work grows explosively with input length (backtracking)</a:t>
             </a:r>
           </a:p>
         </p:txBody>
@@ -19434,7 +19715,7 @@
           <a:p>
             <a:pPr algn="ctr"/>
             <a:r>
-              <a:rPr sz="2000" b="1" i="0">
+              <a:rPr sz="1200" b="1" i="0">
                 <a:solidFill>
                   <a:srgbClr val="FFFFFF"/>
                 </a:solidFill>
@@ -19489,7 +19770,7 @@
                   <a:srgbClr val="555960"/>
                 </a:solidFill>
               </a:rPr>
-              <a:t>WAF killed globally at 14:07; traffic normal by 14:09</a:t>
+              <a:t>CPU exhaustion from 13:42 UTC; rule killed globally 14:07; traffic normal 14:09</a:t>
             </a:r>
             <a:endParaRPr sz="2000" b="1" i="0" dirty="0">
               <a:solidFill>
@@ -21172,8 +21453,8 @@
         </p:nvSpPr>
         <p:spPr>
           <a:xfrm>
-            <a:off x="822960" y="2103120"/>
-            <a:ext cx="2194560" cy="731520"/>
+            <a:off x="822960" y="4297680"/>
+            <a:ext cx="2194560" cy="640080"/>
           </a:xfrm>
           <a:prstGeom prst="rect">
             <a:avLst/>
@@ -21211,7 +21492,7 @@
                   <a:srgbClr val="FFFFFF"/>
                 </a:solidFill>
               </a:rPr>
-              <a:t>RAPID RESPONSE CONTENT</a:t>
+              <a:t>DEFECTIVE CONTENT</a:t>
             </a:r>
           </a:p>
         </p:txBody>
@@ -21224,7 +21505,7 @@
         </p:nvCxnSpPr>
         <p:spPr>
           <a:xfrm>
-            <a:off x="3017520" y="2468880"/>
+            <a:off x="3017520" y="4617720"/>
             <a:ext cx="548640" cy="0"/>
           </a:xfrm>
           <a:prstGeom prst="line">
@@ -21260,8 +21541,8 @@
         </p:nvSpPr>
         <p:spPr>
           <a:xfrm>
-            <a:off x="3566160" y="2103120"/>
-            <a:ext cx="2011680" cy="731520"/>
+            <a:off x="3566160" y="4297680"/>
+            <a:ext cx="2011680" cy="640080"/>
           </a:xfrm>
           <a:prstGeom prst="rect">
             <a:avLst/>
@@ -21301,7 +21582,7 @@
                   <a:srgbClr val="5C4826"/>
                 </a:solidFill>
               </a:rPr>
-              <a:t>Falcon sensor</a:t>
+              <a:t>sensor crash</a:t>
             </a:r>
           </a:p>
         </p:txBody>
@@ -21314,7 +21595,7 @@
         </p:nvCxnSpPr>
         <p:spPr>
           <a:xfrm>
-            <a:off x="5577840" y="2468880"/>
+            <a:off x="5577840" y="4617720"/>
             <a:ext cx="548640" cy="0"/>
           </a:xfrm>
           <a:prstGeom prst="line">
@@ -21350,8 +21631,8 @@
         </p:nvSpPr>
         <p:spPr>
           <a:xfrm>
-            <a:off x="6126480" y="2103120"/>
-            <a:ext cx="2011680" cy="731520"/>
+            <a:off x="6126480" y="4297680"/>
+            <a:ext cx="2011680" cy="640080"/>
           </a:xfrm>
           <a:prstGeom prst="rect">
             <a:avLst/>
@@ -21404,8 +21685,8 @@
         </p:nvSpPr>
         <p:spPr>
           <a:xfrm>
-            <a:off x="548640" y="3474720"/>
-            <a:ext cx="8046720" cy="457200"/>
+            <a:off x="548640" y="3886200"/>
+            <a:ext cx="8046720" cy="320040"/>
           </a:xfrm>
           <a:prstGeom prst="rect">
             <a:avLst/>
@@ -21420,16 +21701,394 @@
           <a:p>
             <a:pPr algn="ctr"/>
             <a:r>
-              <a:rPr sz="2000" b="1" i="0">
+              <a:rPr sz="1200" b="1" i="0">
                 <a:solidFill>
                   <a:srgbClr val="5C4826"/>
                 </a:solidFill>
               </a:rPr>
-              <a:t>Rapid Response Content shipped on a faster path than sensor-code releases.</a:t>
-            </a:r>
-          </a:p>
-        </p:txBody>
-      </p:sp>
+              <a:t>JULY 19, 2024: ONE RAPID RESPONSE CONTENT UPDATE WAS DEFECTIVE</a:t>
+            </a:r>
+          </a:p>
+        </p:txBody>
+      </p:sp>
+      <p:sp>
+        <p:nvSpPr>
+          <p:cNvPr id="920" name="Block"/>
+          <p:cNvSpPr/>
+          <p:nvPr/>
+        </p:nvSpPr>
+        <p:spPr>
+          <a:xfrm>
+            <a:off x="548640" y="1097280"/>
+            <a:ext cx="2560320" cy="566928"/>
+          </a:xfrm>
+          <a:prstGeom prst="rect">
+            <a:avLst/>
+          </a:prstGeom>
+          <a:solidFill>
+            <a:srgbClr val="8E6F3E"/>
+          </a:solidFill>
+          <a:ln>
+            <a:noFill/>
+          </a:ln>
+          <a:effectLst/>
+        </p:spPr>
+        <p:style>
+          <a:lnRef idx="1">
+            <a:schemeClr val="accent1"/>
+          </a:lnRef>
+          <a:fillRef idx="3">
+            <a:schemeClr val="accent1"/>
+          </a:fillRef>
+          <a:effectRef idx="2">
+            <a:schemeClr val="accent1"/>
+          </a:effectRef>
+          <a:fontRef idx="minor">
+            <a:schemeClr val="lt1"/>
+          </a:fontRef>
+        </p:style>
+        <p:txBody>
+          <a:bodyPr wrap="square" lIns="27432" tIns="22860" rIns="27432" bIns="22860" rtlCol="0" anchor="ctr"/>
+          <a:lstStyle/>
+          <a:p>
+            <a:pPr algn="ctr"/>
+            <a:r>
+              <a:rPr sz="1200" b="1" i="0">
+                <a:solidFill>
+                  <a:srgbClr val="FFFFFF"/>
+                </a:solidFill>
+              </a:rPr>
+              <a:t>CROWDSTRIKE</a:t>
+            </a:r>
+          </a:p>
+        </p:txBody>
+      </p:sp>
+      <p:sp>
+        <p:nvSpPr>
+          <p:cNvPr id="921" name="RowCaption"/>
+          <p:cNvSpPr/>
+          <p:nvPr/>
+        </p:nvSpPr>
+        <p:spPr>
+          <a:xfrm>
+            <a:off x="3383280" y="1097280"/>
+            <a:ext cx="5212080" cy="566928"/>
+          </a:xfrm>
+          <a:prstGeom prst="rect">
+            <a:avLst/>
+          </a:prstGeom>
+          <a:noFill/>
+          <a:ln>
+            <a:noFill/>
+          </a:ln>
+          <a:effectLst/>
+        </p:spPr>
+        <p:style>
+          <a:lnRef idx="1">
+            <a:schemeClr val="accent1"/>
+          </a:lnRef>
+          <a:fillRef idx="3">
+            <a:schemeClr val="accent1"/>
+          </a:fillRef>
+          <a:effectRef idx="2">
+            <a:schemeClr val="accent1"/>
+          </a:effectRef>
+          <a:fontRef idx="minor">
+            <a:schemeClr val="lt1"/>
+          </a:fontRef>
+        </p:style>
+        <p:txBody>
+          <a:bodyPr wrap="square" lIns="27432" tIns="22860" rIns="27432" bIns="22860" rtlCol="0" anchor="ctr"/>
+          <a:lstStyle/>
+          <a:p>
+            <a:pPr algn="l"/>
+            <a:r>
+              <a:rPr sz="2000" b="0" i="0">
+                <a:solidFill>
+                  <a:srgbClr val="555960"/>
+                </a:solidFill>
+              </a:rPr>
+              <a:t>a security vendor; organizations install its Falcon product to protect their computers</a:t>
+            </a:r>
+          </a:p>
+        </p:txBody>
+      </p:sp>
+      <p:sp>
+        <p:nvSpPr>
+          <p:cNvPr id="1000" name="Block"/>
+          <p:cNvSpPr/>
+          <p:nvPr/>
+        </p:nvSpPr>
+        <p:spPr>
+          <a:xfrm>
+            <a:off x="548640" y="2011680"/>
+            <a:ext cx="2560320" cy="566928"/>
+          </a:xfrm>
+          <a:prstGeom prst="rect">
+            <a:avLst/>
+          </a:prstGeom>
+          <a:solidFill>
+            <a:srgbClr val="8E6F3E"/>
+          </a:solidFill>
+          <a:ln>
+            <a:noFill/>
+          </a:ln>
+          <a:effectLst/>
+        </p:spPr>
+        <p:style>
+          <a:lnRef idx="1">
+            <a:schemeClr val="accent1"/>
+          </a:lnRef>
+          <a:fillRef idx="3">
+            <a:schemeClr val="accent1"/>
+          </a:fillRef>
+          <a:effectRef idx="2">
+            <a:schemeClr val="accent1"/>
+          </a:effectRef>
+          <a:fontRef idx="minor">
+            <a:schemeClr val="lt1"/>
+          </a:fontRef>
+        </p:style>
+        <p:txBody>
+          <a:bodyPr wrap="square" lIns="27432" tIns="22860" rIns="27432" bIns="22860" rtlCol="0" anchor="ctr"/>
+          <a:lstStyle/>
+          <a:p>
+            <a:pPr algn="ctr"/>
+            <a:r>
+              <a:rPr sz="1200" b="1" i="0">
+                <a:solidFill>
+                  <a:srgbClr val="FFFFFF"/>
+                </a:solidFill>
+              </a:rPr>
+              <a:t>FALCON SENSOR</a:t>
+            </a:r>
+          </a:p>
+        </p:txBody>
+      </p:sp>
+      <p:sp>
+        <p:nvSpPr>
+          <p:cNvPr id="1001" name="RowCaption"/>
+          <p:cNvSpPr/>
+          <p:nvPr/>
+        </p:nvSpPr>
+        <p:spPr>
+          <a:xfrm>
+            <a:off x="3383280" y="2011680"/>
+            <a:ext cx="5212080" cy="566928"/>
+          </a:xfrm>
+          <a:prstGeom prst="rect">
+            <a:avLst/>
+          </a:prstGeom>
+          <a:noFill/>
+          <a:ln>
+            <a:noFill/>
+          </a:ln>
+          <a:effectLst/>
+        </p:spPr>
+        <p:style>
+          <a:lnRef idx="1">
+            <a:schemeClr val="accent1"/>
+          </a:lnRef>
+          <a:fillRef idx="3">
+            <a:schemeClr val="accent1"/>
+          </a:fillRef>
+          <a:effectRef idx="2">
+            <a:schemeClr val="accent1"/>
+          </a:effectRef>
+          <a:fontRef idx="minor">
+            <a:schemeClr val="lt1"/>
+          </a:fontRef>
+        </p:style>
+        <p:txBody>
+          <a:bodyPr wrap="square" lIns="27432" tIns="22860" rIns="27432" bIns="22860" rtlCol="0" anchor="ctr"/>
+          <a:lstStyle/>
+          <a:p>
+            <a:pPr algn="l"/>
+            <a:r>
+              <a:rPr sz="2000" b="0" i="0">
+                <a:solidFill>
+                  <a:srgbClr val="555960"/>
+                </a:solidFill>
+              </a:rPr>
+              <a:t>software running on each Windows endpoint, with privileged (deep) system access</a:t>
+            </a:r>
+          </a:p>
+        </p:txBody>
+      </p:sp>
+      <p:sp>
+        <p:nvSpPr>
+          <p:cNvPr id="1002" name="Block"/>
+          <p:cNvSpPr/>
+          <p:nvPr/>
+        </p:nvSpPr>
+        <p:spPr>
+          <a:xfrm>
+            <a:off x="548640" y="2926080"/>
+            <a:ext cx="2560320" cy="566928"/>
+          </a:xfrm>
+          <a:prstGeom prst="rect">
+            <a:avLst/>
+          </a:prstGeom>
+          <a:solidFill>
+            <a:srgbClr val="8E6F3E"/>
+          </a:solidFill>
+          <a:ln>
+            <a:noFill/>
+          </a:ln>
+          <a:effectLst/>
+        </p:spPr>
+        <p:style>
+          <a:lnRef idx="1">
+            <a:schemeClr val="accent1"/>
+          </a:lnRef>
+          <a:fillRef idx="3">
+            <a:schemeClr val="accent1"/>
+          </a:fillRef>
+          <a:effectRef idx="2">
+            <a:schemeClr val="accent1"/>
+          </a:effectRef>
+          <a:fontRef idx="minor">
+            <a:schemeClr val="lt1"/>
+          </a:fontRef>
+        </p:style>
+        <p:txBody>
+          <a:bodyPr wrap="square" lIns="27432" tIns="22860" rIns="27432" bIns="22860" rtlCol="0" anchor="ctr"/>
+          <a:lstStyle/>
+          <a:p>
+            <a:pPr algn="ctr"/>
+            <a:r>
+              <a:rPr sz="1200" b="1" i="0">
+                <a:solidFill>
+                  <a:srgbClr val="FFFFFF"/>
+                </a:solidFill>
+              </a:rPr>
+              <a:t>RAPID RESPONSE CONTENT</a:t>
+            </a:r>
+          </a:p>
+        </p:txBody>
+      </p:sp>
+      <p:sp>
+        <p:nvSpPr>
+          <p:cNvPr id="1003" name="RowCaption"/>
+          <p:cNvSpPr/>
+          <p:nvPr/>
+        </p:nvSpPr>
+        <p:spPr>
+          <a:xfrm>
+            <a:off x="3383280" y="2926080"/>
+            <a:ext cx="5212080" cy="566928"/>
+          </a:xfrm>
+          <a:prstGeom prst="rect">
+            <a:avLst/>
+          </a:prstGeom>
+          <a:noFill/>
+          <a:ln>
+            <a:noFill/>
+          </a:ln>
+          <a:effectLst/>
+        </p:spPr>
+        <p:style>
+          <a:lnRef idx="1">
+            <a:schemeClr val="accent1"/>
+          </a:lnRef>
+          <a:fillRef idx="3">
+            <a:schemeClr val="accent1"/>
+          </a:fillRef>
+          <a:effectRef idx="2">
+            <a:schemeClr val="accent1"/>
+          </a:effectRef>
+          <a:fontRef idx="minor">
+            <a:schemeClr val="lt1"/>
+          </a:fontRef>
+        </p:style>
+        <p:txBody>
+          <a:bodyPr wrap="square" lIns="27432" tIns="22860" rIns="27432" bIns="22860" rtlCol="0" anchor="ctr"/>
+          <a:lstStyle/>
+          <a:p>
+            <a:pPr algn="l"/>
+            <a:r>
+              <a:rPr sz="2000" b="0" i="0">
+                <a:solidFill>
+                  <a:srgbClr val="555960"/>
+                </a:solidFill>
+              </a:rPr>
+              <a:t>detection content the sensor interprets — distributed separately from sensor software</a:t>
+            </a:r>
+          </a:p>
+        </p:txBody>
+      </p:sp>
+      <p:cxnSp>
+        <p:nvCxnSpPr>
+          <p:cNvPr id="922" name="Connector 922"/>
+          <p:cNvCxnSpPr/>
+          <p:nvPr/>
+        </p:nvCxnSpPr>
+        <p:spPr>
+          <a:xfrm>
+            <a:off x="1828800" y="1664208"/>
+            <a:ext cx="0" cy="347472"/>
+          </a:xfrm>
+          <a:prstGeom prst="line">
+            <a:avLst/>
+          </a:prstGeom>
+          <a:ln w="19050">
+            <a:solidFill>
+              <a:srgbClr val="8E6F3E"/>
+            </a:solidFill>
+            <a:tailEnd type="triangle"/>
+          </a:ln>
+        </p:spPr>
+        <p:style>
+          <a:lnRef idx="2">
+            <a:schemeClr val="accent1"/>
+          </a:lnRef>
+          <a:fillRef idx="0">
+            <a:schemeClr val="accent1"/>
+          </a:fillRef>
+          <a:effectRef idx="1">
+            <a:schemeClr val="accent1"/>
+          </a:effectRef>
+          <a:fontRef idx="minor">
+            <a:schemeClr val="tx1"/>
+          </a:fontRef>
+        </p:style>
+      </p:cxnSp>
+      <p:cxnSp>
+        <p:nvCxnSpPr>
+          <p:cNvPr id="1004" name="Connector 922"/>
+          <p:cNvCxnSpPr/>
+          <p:nvPr/>
+        </p:nvCxnSpPr>
+        <p:spPr>
+          <a:xfrm>
+            <a:off x="1828800" y="2578608"/>
+            <a:ext cx="0" cy="347472"/>
+          </a:xfrm>
+          <a:prstGeom prst="line">
+            <a:avLst/>
+          </a:prstGeom>
+          <a:ln w="19050">
+            <a:solidFill>
+              <a:srgbClr val="8E6F3E"/>
+            </a:solidFill>
+            <a:tailEnd type="triangle"/>
+          </a:ln>
+        </p:spPr>
+        <p:style>
+          <a:lnRef idx="2">
+            <a:schemeClr val="accent1"/>
+          </a:lnRef>
+          <a:fillRef idx="0">
+            <a:schemeClr val="accent1"/>
+          </a:fillRef>
+          <a:effectRef idx="1">
+            <a:schemeClr val="accent1"/>
+          </a:effectRef>
+          <a:fontRef idx="minor">
+            <a:schemeClr val="tx1"/>
+          </a:fontRef>
+        </p:style>
+      </p:cxnSp>
     </p:spTree>
   </p:cSld>
   <p:clrMapOvr>
@@ -21568,13 +22227,58 @@
       </p:sp>
       <p:sp>
         <p:nvSpPr>
+          <p:cNvPr id="915" name="Label"/>
+          <p:cNvSpPr txBox="1"/>
+          <p:nvPr/>
+        </p:nvSpPr>
+        <p:spPr>
+          <a:xfrm>
+            <a:off x="548640" y="868680"/>
+            <a:ext cx="8046720" cy="566928"/>
+          </a:xfrm>
+          <a:prstGeom prst="rect">
+            <a:avLst/>
+          </a:prstGeom>
+          <a:noFill/>
+        </p:spPr>
+        <p:txBody>
+          <a:bodyPr wrap="square" lIns="27432" tIns="22860" rIns="27432" bIns="22860" anchor="t">
+            <a:spAutoFit/>
+          </a:bodyPr>
+          <a:lstStyle/>
+          <a:p>
+            <a:pPr algn="ctr"/>
+            <a:r>
+              <a:rPr sz="1300" b="1" i="1">
+                <a:solidFill>
+                  <a:srgbClr val="5C4826"/>
+                </a:solidFill>
+              </a:rPr>
+              <a:t>The sensor interprets detection content using predefined templates.</a:t>
+            </a:r>
+          </a:p>
+          <a:p>
+            <a:pPr algn="ctr"/>
+            <a:r>
+              <a:rPr sz="1300" b="1" i="1">
+                <a:solidFill>
+                  <a:srgbClr val="5C4826"/>
+                </a:solidFill>
+              </a:rPr>
+              <a:t>Each template specifies the input fields the interpreter expects.</a:t>
+            </a:r>
+          </a:p>
+        </p:txBody>
+      </p:sp>
+      <p:sp>
+        <p:nvSpPr>
           <p:cNvPr id="910" name="Block"/>
           <p:cNvSpPr/>
           <p:nvPr/>
         </p:nvSpPr>
         <p:spPr>
           <a:xfrm>
-            <a:off x="2743200" y="1005840"/>
+            <a:off x="2743200" y="1600200"/>
             <a:ext cx="3657600" cy="502920"/>
           </a:xfrm>
           <a:prstGeom prst="rect">
@@ -21608,7 +22312,7 @@
           <a:p>
             <a:pPr algn="ctr"/>
             <a:r>
-              <a:rPr sz="2000" b="1" i="0">
+              <a:rPr sz="1200" b="1" i="0">
                 <a:solidFill>
                   <a:srgbClr val="FFFFFF"/>
                 </a:solidFill>
@@ -21626,7 +22330,7 @@
         </p:nvSpPr>
         <p:spPr>
           <a:xfrm>
-            <a:off x="822960" y="1965960"/>
+            <a:off x="822960" y="2423160"/>
             <a:ext cx="3291840" cy="502920"/>
           </a:xfrm>
           <a:prstGeom prst="rect">
@@ -21680,7 +22384,7 @@
         </p:nvSpPr>
         <p:spPr>
           <a:xfrm>
-            <a:off x="5029200" y="1965960"/>
+            <a:off x="5029200" y="2423160"/>
             <a:ext cx="3291840" cy="502920"/>
           </a:xfrm>
           <a:prstGeom prst="rect">
@@ -21734,8 +22438,8 @@
         </p:nvCxnSpPr>
         <p:spPr>
           <a:xfrm flipH="1">
-            <a:off x="2468880" y="1508760"/>
-            <a:ext cx="1554480" cy="457200"/>
+            <a:off x="2468880" y="2103120"/>
+            <a:ext cx="1554480" cy="320040"/>
           </a:xfrm>
           <a:prstGeom prst="line">
             <a:avLst/>
@@ -21770,8 +22474,8 @@
         </p:nvCxnSpPr>
         <p:spPr>
           <a:xfrm>
-            <a:off x="5120640" y="1508760"/>
-            <a:ext cx="1554480" cy="457200"/>
+            <a:off x="5120640" y="2103120"/>
+            <a:ext cx="1554480" cy="320040"/>
           </a:xfrm>
           <a:prstGeom prst="line">
             <a:avLst/>
@@ -21806,7 +22510,7 @@
         </p:nvSpPr>
         <p:spPr>
           <a:xfrm>
-            <a:off x="3108960" y="2971800"/>
+            <a:off x="3108960" y="3291840"/>
             <a:ext cx="2926080" cy="502920"/>
           </a:xfrm>
           <a:prstGeom prst="rect">
@@ -21840,7 +22544,7 @@
           <a:p>
             <a:pPr algn="ctr"/>
             <a:r>
-              <a:rPr sz="2000" b="1" i="0">
+              <a:rPr sz="1200" b="1" i="0">
                 <a:solidFill>
                   <a:srgbClr val="FFFFFF"/>
                 </a:solidFill>
@@ -21858,8 +22562,8 @@
         </p:nvCxnSpPr>
         <p:spPr>
           <a:xfrm>
-            <a:off x="2468880" y="2468880"/>
-            <a:ext cx="1371600" cy="502919"/>
+            <a:off x="2468880" y="2926080"/>
+            <a:ext cx="1371600" cy="365759"/>
           </a:xfrm>
           <a:prstGeom prst="line">
             <a:avLst/>
@@ -21894,8 +22598,8 @@
         </p:nvCxnSpPr>
         <p:spPr>
           <a:xfrm flipH="1">
-            <a:off x="5303520" y="2468880"/>
-            <a:ext cx="1371600" cy="502919"/>
+            <a:off x="5303520" y="2926080"/>
+            <a:ext cx="1371600" cy="365759"/>
           </a:xfrm>
           <a:prstGeom prst="line">
             <a:avLst/>
@@ -21930,7 +22634,7 @@
         </p:nvSpPr>
         <p:spPr>
           <a:xfrm>
-            <a:off x="2926080" y="3931920"/>
+            <a:off x="2926080" y="4114800"/>
             <a:ext cx="3291840" cy="502920"/>
           </a:xfrm>
           <a:prstGeom prst="rect">
@@ -21984,8 +22688,8 @@
         </p:nvCxnSpPr>
         <p:spPr>
           <a:xfrm>
-            <a:off x="4572000" y="3474720"/>
-            <a:ext cx="0" cy="457200"/>
+            <a:off x="4572000" y="3794760"/>
+            <a:ext cx="0" cy="320039"/>
           </a:xfrm>
           <a:prstGeom prst="line">
             <a:avLst/>
@@ -22020,7 +22724,7 @@
         </p:nvSpPr>
         <p:spPr>
           <a:xfrm>
-            <a:off x="3200400" y="4846320"/>
+            <a:off x="3200400" y="4892040"/>
             <a:ext cx="2743200" cy="502920"/>
           </a:xfrm>
           <a:prstGeom prst="rect">
@@ -22056,7 +22760,7 @@
           <a:p>
             <a:pPr algn="ctr"/>
             <a:r>
-              <a:rPr sz="2000" b="1" i="0">
+              <a:rPr sz="1200" b="1" i="0">
                 <a:solidFill>
                   <a:srgbClr val="FFFFFF"/>
                 </a:solidFill>
@@ -22074,8 +22778,8 @@
         </p:nvCxnSpPr>
         <p:spPr>
           <a:xfrm>
-            <a:off x="4572000" y="4434840"/>
-            <a:ext cx="0" cy="411480"/>
+            <a:off x="4572000" y="4617720"/>
+            <a:ext cx="0" cy="274319"/>
           </a:xfrm>
           <a:prstGeom prst="line">
             <a:avLst/>
@@ -23417,7 +24121,7 @@
                   <a:srgbClr val="555960"/>
                 </a:solidFill>
               </a:rPr>
-              <a:t>passed — every test matched the 21st field with a wildcard</a:t>
+              <a:t>passed — every test used a wildcard (‘match anything’) for field 21, so field 21 was never read</a:t>
             </a:r>
           </a:p>
         </p:txBody>
@@ -23965,7 +24669,7 @@
                   <a:srgbClr val="000000"/>
                 </a:solidFill>
               </a:rPr>
-              <a:t>Explanation 2: Defenses can fail together</a:t>
+              <a:t>Explanation 2: The Swiss cheese model</a:t>
             </a:r>
           </a:p>
         </p:txBody>
@@ -24104,9 +24808,9 @@
           <a:solidFill>
             <a:srgbClr val="FFFFFF"/>
           </a:solidFill>
-          <a:ln w="12700">
+          <a:ln w="22225">
             <a:solidFill>
-              <a:srgbClr val="C9B991"/>
+              <a:srgbClr val="B3261E"/>
             </a:solidFill>
           </a:ln>
           <a:effectLst/>
@@ -24292,9 +24996,9 @@
           <a:solidFill>
             <a:srgbClr val="FFFFFF"/>
           </a:solidFill>
-          <a:ln w="12700">
+          <a:ln w="22225">
             <a:solidFill>
-              <a:srgbClr val="C9B991"/>
+              <a:srgbClr val="B3261E"/>
             </a:solidFill>
           </a:ln>
           <a:effectLst/>
@@ -24480,9 +25184,9 @@
           <a:solidFill>
             <a:srgbClr val="FFFFFF"/>
           </a:solidFill>
-          <a:ln w="12700">
+          <a:ln w="22225">
             <a:solidFill>
-              <a:srgbClr val="C9B991"/>
+              <a:srgbClr val="B3261E"/>
             </a:solidFill>
           </a:ln>
           <a:effectLst/>
@@ -24668,9 +25372,9 @@
           <a:solidFill>
             <a:srgbClr val="FFFFFF"/>
           </a:solidFill>
-          <a:ln w="12700">
+          <a:ln w="22225">
             <a:solidFill>
-              <a:srgbClr val="C9B991"/>
+              <a:srgbClr val="B3261E"/>
             </a:solidFill>
           </a:ln>
           <a:effectLst/>
@@ -24761,7 +25465,7 @@
           </a:prstGeom>
           <a:ln w="31750">
             <a:solidFill>
-              <a:srgbClr val="9A3F12"/>
+              <a:srgbClr val="B3261E"/>
             </a:solidFill>
             <a:tailEnd type="triangle"/>
           </a:ln>
@@ -24789,8 +25493,8 @@
         </p:nvSpPr>
         <p:spPr>
           <a:xfrm>
-            <a:off x="548640" y="5212080"/>
-            <a:ext cx="8046720" cy="457200"/>
+            <a:off x="548640" y="5074920"/>
+            <a:ext cx="8046720" cy="640080"/>
           </a:xfrm>
           <a:prstGeom prst="rect">
             <a:avLst/>
@@ -24805,12 +25509,23 @@
           <a:p>
             <a:pPr algn="ctr"/>
             <a:r>
-              <a:rPr sz="2200" b="0" i="0">
+              <a:rPr sz="1400" b="0" i="0">
                 <a:solidFill>
                   <a:srgbClr val="5C4826"/>
                 </a:solidFill>
               </a:rPr>
-              <a:t>In this view, the condition of the defenses matters.</a:t>
+              <a:t>Reason’s claim: every defensive layer can contain weaknesses —</a:t>
+            </a:r>
+          </a:p>
+          <a:p>
+            <a:pPr algn="ctr"/>
+            <a:r>
+              <a:rPr sz="1400" b="0" i="0">
+                <a:solidFill>
+                  <a:srgbClr val="5C4826"/>
+                </a:solidFill>
+              </a:rPr>
+              <a:t>a failure escapes only when the weaknesses ALIGN.</a:t>
             </a:r>
           </a:p>
         </p:txBody>

--- a/book/_design/2-4-redux-build/2-4-redux-WIP.pptx
+++ b/book/_design/2-4-redux-build/2-4-redux-WIP.pptx
@@ -33,6 +33,8 @@
     <p:sldId id="325" r:id="rId63"/>
     <p:sldId id="326" r:id="rId64"/>
     <p:sldId id="327" r:id="rId65"/>
+    <p:sldId id="331" r:id="rId35"/>
+    <p:sldId id="332" r:id="rId34"/>
     <p:sldId id="328" r:id="rId66"/>
     <p:sldId id="329" r:id="rId67"/>
     <p:sldId id="330" r:id="rId68"/>
@@ -1124,7 +1126,7 @@
           </a:p>
           <a:p>
             <a:r>
-              <a:t>BUDGET: the TIMING lines across the deck now sum to 75 minutes, with the slide-6 commitment discussion and the slide-27 transfer exercise protected.</a:t>
+              <a:t>BUDGET: the TIMING lines across the deck now sum to 75 minutes, with the slide-6 commitment discussion, the slide-27 FMEA transfer exercise, and the slide-29 diagnosis exercise protected.</a:t>
             </a:r>
           </a:p>
         </p:txBody>
@@ -1137,6 +1139,211 @@
           </p:cNvSpPr>
           <p:nvPr>
             <p:ph type="sldNum" sz="quarter" idx="5"/>
+          </p:nvPr>
+        </p:nvSpPr>
+        <p:spPr/>
+      </p:sp>
+    </p:spTree>
+  </p:cSld>
+  <p:clrMapOvr>
+    <a:masterClrMapping/>
+  </p:clrMapOvr>
+</p:notes>
+</file>
+
+<file path=ppt/notesSlides/notesSlide29.xml><?xml version="1.0" encoding="utf-8"?>
+<p:notes xmlns:a="http://schemas.openxmlformats.org/drawingml/2006/main" xmlns:p="http://schemas.openxmlformats.org/presentationml/2006/main" xmlns:r="http://schemas.openxmlformats.org/officeDocument/2006/relationships">
+  <p:cSld>
+    <p:spTree>
+      <p:nvGrpSpPr>
+        <p:cNvPr id="1" name=""/>
+        <p:cNvGrpSpPr/>
+        <p:nvPr/>
+      </p:nvGrpSpPr>
+      <p:grpSpPr>
+        <a:xfrm>
+          <a:off x="0" y="0"/>
+          <a:ext cx="0" cy="0"/>
+          <a:chOff x="0" y="0"/>
+          <a:chExt cx="0" cy="0"/>
+        </a:xfrm>
+      </p:grpSpPr>
+      <p:sp>
+        <p:nvSpPr>
+          <p:cNvPr id="2" name="Slide Image Placeholder 1"/>
+          <p:cNvSpPr>
+            <a:spLocks noGrp="1"/>
+          </p:cNvSpPr>
+          <p:nvPr>
+            <p:ph type="sldImg" idx="2"/>
+          </p:nvPr>
+        </p:nvSpPr>
+        <p:spPr/>
+      </p:sp>
+      <p:sp>
+        <p:nvSpPr>
+          <p:cNvPr id="3" name="Notes Placeholder 2"/>
+          <p:cNvSpPr>
+            <a:spLocks noGrp="1"/>
+          </p:cNvSpPr>
+          <p:nvPr>
+            <p:ph type="body" idx="3" sz="quarter"/>
+          </p:nvPr>
+        </p:nvSpPr>
+        <p:spPr/>
+        <p:txBody>
+          <a:bodyPr/>
+          <a:lstStyle/>
+          <a:p>
+            <a:r>
+              <a:t>TIMING: 3 minutes. NEW METHOD — prospective, not explanatory.</a:t>
+            </a:r>
+          </a:p>
+          <a:p>
+            <a:r>
+              <a:t>ENGINEERING POINT: the three models EXPLAIN a failure that has happened. FMEA — Failure Mode and Effects Analysis (IEC 60812:2018) — is not a fourth explanation: it is a structured method for SEARCHING for potential failures and deciding what deserves attention, before anything fails. Nor is it component-only — by scope it can examine functions, interfaces, operational processes, or organizational activities. Do not teach 'FMEA = components, STAMP = systems.'</a:t>
+            </a:r>
+          </a:p>
+          <a:p>
+            <a:r>
+              <a:t>THE WORKED TABLE: each row: a FUNCTION of the system we know thoroughly, a failure mode, its effect, a candidate control — all met on slides 21–25.</a:t>
+            </a:r>
+          </a:p>
+          <a:p>
+            <a:r>
+              <a:t>CARE — the staged-rollout row (cross-reference slide 25): HAVING a staged-rollout mechanism is not the same as having one that reliably detects and contains the failure mode; a rollout that advances without meaningful health checks offers little protection.</a:t>
+            </a:r>
+          </a:p>
+          <a:p>
+            <a:r>
+              <a:t>RATINGS (notes only): classical FMEA multiplies severity, occurrence, and detection into a Risk Priority Number — but multiplying ordinal ratings does not make an RPN of 120 twice the risk of 60; the AIAG &amp; VDA FMEA Handbook (1st ed., 2019) replaces RPN with Action Priority. Occurrence stays '?' deliberately: the method's value is exposing uncertainty, not manufacturing numerical certainty.</a:t>
+            </a:r>
+          </a:p>
+          <a:p>
+            <a:r>
+              <a:t>ASK (the footer): which of these failure modes could occur in another security product? Expected: the validate / distribute / maintain rows do not depend on the content-interpreter defect at all.</a:t>
+            </a:r>
+          </a:p>
+          <a:p>
+            <a:r>
+              <a:t>INSTRUCTOR REFERENCES (no student reading assigned): IEC 60812:2018; AIAG &amp; VDA FMEA Handbook, 1st ed., 2019.</a:t>
+            </a:r>
+          </a:p>
+          <a:p>
+            <a:r>
+              <a:t>TRANSITION: if those rows transfer, the method should work on a system we know nothing about. Next: exactly that.</a:t>
+            </a:r>
+          </a:p>
+        </p:txBody>
+      </p:sp>
+      <p:sp>
+        <p:nvSpPr>
+          <p:cNvPr id="4" name="Slide Number Placeholder 3"/>
+          <p:cNvSpPr>
+            <a:spLocks noGrp="1"/>
+          </p:cNvSpPr>
+          <p:nvPr>
+            <p:ph type="sldNum" idx="5" sz="quarter"/>
+          </p:nvPr>
+        </p:nvSpPr>
+        <p:spPr/>
+      </p:sp>
+    </p:spTree>
+  </p:cSld>
+  <p:clrMapOvr>
+    <a:masterClrMapping/>
+  </p:clrMapOvr>
+</p:notes>
+</file>
+
+<file path=ppt/notesSlides/notesSlide30.xml><?xml version="1.0" encoding="utf-8"?>
+<p:notes xmlns:a="http://schemas.openxmlformats.org/drawingml/2006/main" xmlns:p="http://schemas.openxmlformats.org/presentationml/2006/main" xmlns:r="http://schemas.openxmlformats.org/officeDocument/2006/relationships">
+  <p:cSld>
+    <p:spTree>
+      <p:nvGrpSpPr>
+        <p:cNvPr id="1" name=""/>
+        <p:cNvGrpSpPr/>
+        <p:nvPr/>
+      </p:nvGrpSpPr>
+      <p:grpSpPr>
+        <a:xfrm>
+          <a:off x="0" y="0"/>
+          <a:ext cx="0" cy="0"/>
+          <a:chOff x="0" y="0"/>
+          <a:chExt cx="0" cy="0"/>
+        </a:xfrm>
+      </p:grpSpPr>
+      <p:sp>
+        <p:nvSpPr>
+          <p:cNvPr id="2" name="Slide Image Placeholder 1"/>
+          <p:cNvSpPr>
+            <a:spLocks noGrp="1"/>
+          </p:cNvSpPr>
+          <p:nvPr>
+            <p:ph type="sldImg" idx="2"/>
+          </p:nvPr>
+        </p:nvSpPr>
+        <p:spPr/>
+      </p:sp>
+      <p:sp>
+        <p:nvSpPr>
+          <p:cNvPr id="3" name="Notes Placeholder 2"/>
+          <p:cNvSpPr>
+            <a:spLocks noGrp="1"/>
+          </p:cNvSpPr>
+          <p:nvPr>
+            <p:ph type="body" idx="3" sz="quarter"/>
+          </p:nvPr>
+        </p:nvSpPr>
+        <p:spPr/>
+        <p:txBody>
+          <a:bodyPr/>
+          <a:lstStyle/>
+          <a:p>
+            <a:r>
+              <a:t>TIMING: 3 minutes — present the architecture in under one minute; PROTECT 2–3 minutes for the worksheet discussion (author pacing note).</a:t>
+            </a:r>
+          </a:p>
+          <a:p>
+            <a:r>
+              <a:t>ENGINEERING POINT: transfer of the METHOD, not recall of an incident. Students get only the architecture — four facts — and must search it for failure modes under genuinely incomplete information, the condition engineers actually work in. DO NOT reveal what happened in 2019; if a student already knows the incident, ask them to hold it.</a:t>
+            </a:r>
+          </a:p>
+          <a:p>
+            <a:r>
+              <a:t>FACTUAL BACKGROUND (architecture only; source: Cloudflare post-mortem, 'Details of the Cloudflare outage on July 2, 2019'): Cloudflare operates a Web Application Firewall that inspects incoming web requests; engineers can deploy new detection rules without releasing new software; some rules use regular expressions; rule changes can propagate globally within seconds.</a:t>
+            </a:r>
+          </a:p>
+          <a:p>
+            <a:r>
+              <a:t>RUN IT: pairs, at least one failure mode per function row; leave occurrence '?' and ask which modes warrant a control anyway.</a:t>
+            </a:r>
+          </a:p>
+          <a:p>
+            <a:r>
+              <a:t>EXPECTED ANSWERS — all legitimate WITHOUT knowing the incident: a rule that consumes excessive CPU or memory; a rule that false-positives and blocks legitimate traffic; a malformed rule that breaks evaluation; a defective rule reaching every server before anyone can detect or halt it. Students do NOT need to anticipate catastrophic regex backtracking: the general failure mode is the method's product; the precise defect is hindsight's.</a:t>
+            </a:r>
+          </a:p>
+          <a:p>
+            <a:r>
+              <a:t>MISCONCEPTION: a guessing game about 'the real outage.' Grade on search discipline, not prophecy.</a:t>
+            </a:r>
+          </a:p>
+          <a:p>
+            <a:r>
+              <a:t>TRANSITION: let's see what actually happened — and compare it against your table.</a:t>
+            </a:r>
+          </a:p>
+        </p:txBody>
+      </p:sp>
+      <p:sp>
+        <p:nvSpPr>
+          <p:cNvPr id="4" name="Slide Number Placeholder 3"/>
+          <p:cNvSpPr>
+            <a:spLocks noGrp="1"/>
+          </p:cNvSpPr>
+          <p:nvPr>
+            <p:ph type="sldNum" idx="5" sz="quarter"/>
           </p:nvPr>
         </p:nvSpPr>
         <p:spPr/>
@@ -3169,7 +3376,7 @@
           <a:lstStyle/>
           <a:p>
             <a:r>
-              <a:t>TIMING: 2 minutes. OPENS MOVEMENT 4 — what should change?</a:t>
+              <a:t>TIMING: 1 minutes. OPENS MOVEMENT 4 — what should change? DELIVER EFFICIENTLY (author pacing note): present the ladder and pose the footer question rhetorically — this movement's active-learning weight now lives in the FMEA exercise (slide 27) and the diagnosis exercise (slide 29).</a:t>
             </a:r>
           </a:p>
           <a:p>
@@ -3269,7 +3476,7 @@
           <a:lstStyle/>
           <a:p>
             <a:r>
-              <a:t>TIMING: 2 minutes. PRESERVED FROM THE ORIGINAL LECTURE — Schön's contribution.</a:t>
+              <a:t>TIMING: 1 minutes. PRESERVED FROM THE ORIGINAL LECTURE — Schön's contribution. Deliver as exposition; fold the footer question into the transition rather than opening a discussion.</a:t>
             </a:r>
           </a:p>
           <a:p>
@@ -3379,7 +3586,7 @@
           <a:lstStyle/>
           <a:p>
             <a:r>
-              <a:t>TIMING: 3 minutes. GOVERNANCE CONVERSION — the lesson changes the ENVIRONMENT.</a:t>
+              <a:t>TIMING: 1 minutes. GOVERNANCE CONVERSION — the lesson changes the ENVIRONMENT.</a:t>
             </a:r>
           </a:p>
           <a:p>
@@ -3394,7 +3601,7 @@
           </a:p>
           <a:p>
             <a:r>
-              <a:t>ANIMATION-IN-SPEECH: cover the right column; ask students to propose the artifact for each left-hand diagnosis before revealing.</a:t>
+              <a:t>PACING (author): the cover-the-right-column reveal is CUT for time — walk the rows directly and state the slide-9 contrast yourself; the FMEA exercise two slides ahead carries this movement's active learning.</a:t>
             </a:r>
           </a:p>
           <a:p>
@@ -3484,7 +3691,7 @@
           <a:lstStyle/>
           <a:p>
             <a:r>
-              <a:t>TIMING: 2 minutes. THE LOCAL AND SYSTEMIC ANALYSES MEET.</a:t>
+              <a:t>TIMING: 1 minutes. THE LOCAL AND SYSTEMIC ANALYSES MEET. Pose the footer question, take ONE answer, state the recognition yourself.</a:t>
             </a:r>
           </a:p>
           <a:p>
@@ -3579,7 +3786,7 @@
           <a:lstStyle/>
           <a:p>
             <a:r>
-              <a:t>TIMING: 2 minutes. CLOSES THE CROWDSTRIKE INVESTIGATION.</a:t>
+              <a:t>TIMING: 1 minutes. CLOSES THE CROWDSTRIKE INVESTIGATION. Walk the rows briskly — the next slide re-invokes this slide's lesson (a control's existence is not evidence of its effectiveness) inside the FMEA's staged-rollout row.</a:t>
             </a:r>
           </a:p>
           <a:p>
@@ -3604,7 +3811,7 @@
           </a:p>
           <a:p>
             <a:r>
-              <a:t>TRANSITION: we built a method on one incident. If the method is real, it should transfer. New incident, five years earlier, different company.</a:t>
+              <a:t>TRANSITION: everything so far reasons BACKWARD from a failure that already happened. Can the discipline run FORWARD — before any failure occurs? Next: a structured method for searching for failures in advance, tried first on the incident we now know thoroughly.</a:t>
             </a:r>
           </a:p>
         </p:txBody>
@@ -3674,32 +3881,37 @@
           <a:lstStyle/>
           <a:p>
             <a:r>
-              <a:t>TIMING: 3 minutes — a transfer exercise, not a second full case study.</a:t>
-            </a:r>
-          </a:p>
-          <a:p>
-            <a:r>
-              <a:t>EXPOSITION ORDER (author): establish the system first. Cloudflare operates an edge network a large share of web traffic passes through; a Web Application Firewall (WAF) inspects that traffic for attacks; WAF rules describe attack patterns, often as regular expressions. THEN the failure — and explain the MECHANISM before the measurements: some regular expressions require disproportionately more matching work as the input grows, because a backtracking engine re-tries overlapping ways to match. The 23-vs-555 bars at the bottom ILLUSTRATE that mechanism; they do not replace the explanation.</a:t>
-            </a:r>
-          </a:p>
-          <a:p>
-            <a:r>
-              <a:t>FACTS (Cloudflare post-mortem, 'Details of the Cloudflare outage on July 2, 2019'): a WAF Managed Rule targeting XSS deployed globally at 13:42 UTC — in seconds, with no staged rollout, while software releases went DOG → PIG → Canary; the sub-pattern .*(?:.*=.*) caused catastrophic backtracking (their worked numbers: 'x=x' took 23 steps; 'x=' plus twenty 'x's took 555); PCRE 'has no mechanism to protect against a runaway expression'; WAF identified 14:00, killed globally 14:07, traffic normal 14:09, re-enabled 14:52 — 27 minutes of impact. A CPU protection had been accidentally removed weeks earlier.</a:t>
-            </a:r>
-          </a:p>
-          <a:p>
-            <a:r>
-              <a:t>DEEP STRUCTURE (lead with it at the footer): in both incidents, content or configuration shipped through a faster, less-gated path than code; and in both, a validator ran and passed while checking the wrong property — arity against the wrong contract at CrowdStrike, runtime instead of CPU at Cloudflare.</a:t>
+              <a:t>TIMING: 3 minutes — the reveal. Grade the class's FMEA predictions against the incident.</a:t>
+            </a:r>
+          </a:p>
+          <a:p>
+            <a:r>
+              <a:t>ENGINEERING POINT: compare prediction with reality, and name the gap honestly. Most groups will have proposed a resource-exhaustion or bad-rule failure mode, a service-disruption effect, and controls such as pre-deployment resource limits or a staged rollout — without knowing anything about 2019. Nobody should be expected to have named catastrophic regex backtracking: FMEA surfaces the GENERAL failure mode; it does not predict the specific defect. In hindsight every failure looks foreseeable; in practice engineers work under incomplete information.</a:t>
+            </a:r>
+          </a:p>
+          <a:p>
+            <a:r>
+              <a:t>EXPOSITION ORDER (author): the class met only the architecture on the previous slide, so establish the rest of the system briefly, then the failure — MECHANISM before measurements: some regular expressions require disproportionately more matching work as the input grows, because a backtracking engine re-tries overlapping ways to match. The 23-vs-555 bars at the bottom ILLUSTRATE that mechanism; they do not replace the explanation.</a:t>
+            </a:r>
+          </a:p>
+          <a:p>
+            <a:r>
+              <a:t>FACTS (Cloudflare post-mortem, 'Details of the Cloudflare outage on July 2, 2019'): a WAF Managed Rule targeting XSS deployed globally at 13:42 UTC — in seconds, with no staged rollout, while software releases went DOG → PIG → Canary; the sub-pattern .*(?:.*=.*) caused catastrophic backtracking (their worked numbers: 'x=x' took 23 steps; 'x=' plus twenty 'x's took 555); PCRE 'has no mechanism to protect against a runaway expression'; WAF identified 14:00, killed globally 14:07, traffic normal 14:09, re-enabled 14:52 — 27 minutes of impact. A CPU-usage protection had been accidentally removed weeks earlier.</a:t>
+            </a:r>
+          </a:p>
+          <a:p>
+            <a:r>
+              <a:t>ASK (the footer's first line): which failure modes did we anticipate — and which did we miss? Typically anticipated: a defective rule, global distribution, nothing to halt it. Typically missed: the removed CPU protection, and a test suite that measured runtime rather than CPU — defenses that existed and failed, which the diagnosis exercise next can surface.</a:t>
+            </a:r>
+          </a:p>
+          <a:p>
+            <a:r>
+              <a:t>DEEP STRUCTURE (the footer's second line — let students state it before you do): in both incidents, a security configuration update is distributed globally without adequate opportunities to detect and contain defective updates; and in both, a validator ran and passed while checking the wrong property — arity against the wrong contract at CrowdStrike, runtime instead of CPU at Cloudflare. An engineer could identify that characteristic prospectively in either system — which is what the previous two slides had students do.</a:t>
             </a:r>
           </a:p>
           <a:p>
             <a:r>
               <a:t>CARE: regex matching cost depends on expression, engine, AND input — do not imply all engines behave this way (re2 and Rust's engine carry runtime guarantees). Do not conflate with Cloudflare's November 2025 outage — different mechanism.</a:t>
-            </a:r>
-          </a:p>
-          <a:p>
-            <a:r>
-              <a:t>ASK: what in this story have you already seen this lecture?</a:t>
             </a:r>
           </a:p>
           <a:p>
@@ -3790,6 +4002,11 @@
           <a:p>
             <a:r>
               <a:t>GRADING STANCE: do not reward choosing the broadest model. Reward an intervention justified by the model and the evidence, addressing a consequential failure class at acceptable cost.</a:t>
+            </a:r>
+          </a:p>
+          <a:p>
+            <a:r>
+              <a:t>CLOSING QUESTION (the footer's last line): how should this incident change the FMEA for future WAF releases? Expected: new failure-mode rows (a rule whose matching cost explodes on ordinary input); a detection column that measures CPU, not wall-clock runtime; controls promoted from candidate to required — staged rollout for rules, a regex engine with runtime guarantees, a restored and protected CPU limit. The durable point: an FMEA is a living document — each incident updates the search. That is how failure changes FUTURE engineering, which is the closing slide's claim.</a:t>
             </a:r>
           </a:p>
           <a:p>
@@ -19164,7 +19381,7 @@
                   <a:srgbClr val="000000"/>
                 </a:solidFill>
               </a:rPr>
-              <a:t>July 2, 2019: Cloudflare’s WAF outage</a:t>
+              <a:t>What actually happened? July 2, 2019</a:t>
             </a:r>
           </a:p>
         </p:txBody>
@@ -19239,7 +19456,7 @@
                   <a:srgbClr val="FFFFFF"/>
                 </a:solidFill>
               </a:rPr>
-              <a:t>How could one regular expression disrupt a global service?</a:t>
+              <a:t>Which failure modes did we anticipate — and which did we miss?</a:t>
             </a:r>
           </a:p>
           <a:p>
@@ -20395,7 +20612,7 @@
                   <a:schemeClr val="bg1"/>
                 </a:solidFill>
               </a:rPr>
-              <a:t>decide where the lesson should live.</a:t>
+              <a:t>decide where the lesson should live. What evidence would establish that it works?</a:t>
             </a:r>
           </a:p>
           <a:p>
@@ -20406,7 +20623,7 @@
                   <a:schemeClr val="bg1"/>
                 </a:solidFill>
               </a:rPr>
-              <a:t>What evidence would establish that your intervention works?</a:t>
+              <a:t>How should this incident change the FMEA for future WAF releases?</a:t>
             </a:r>
           </a:p>
         </p:txBody>
@@ -21332,6 +21549,1305 @@
 </p:sld>
 </file>
 
+<file path=ppt/slides/slide29.xml><?xml version="1.0" encoding="utf-8"?>
+<p:sld xmlns:a="http://schemas.openxmlformats.org/drawingml/2006/main" xmlns:p="http://schemas.openxmlformats.org/presentationml/2006/main" xmlns:r="http://schemas.openxmlformats.org/officeDocument/2006/relationships">
+  <p:cSld>
+    <p:spTree>
+      <p:nvGrpSpPr>
+        <p:cNvPr id="1" name=""/>
+        <p:cNvGrpSpPr/>
+        <p:nvPr/>
+      </p:nvGrpSpPr>
+      <p:grpSpPr/>
+      <p:sp>
+        <p:nvSpPr>
+          <p:cNvPr id="3" name="Title 2"/>
+          <p:cNvSpPr>
+            <a:spLocks noGrp="1"/>
+          </p:cNvSpPr>
+          <p:nvPr>
+            <p:ph type="title"/>
+          </p:nvPr>
+        </p:nvSpPr>
+        <p:spPr>
+          <a:xfrm>
+            <a:off x="277148" y="118428"/>
+            <a:ext cx="9145148" cy="638175"/>
+          </a:xfrm>
+        </p:spPr>
+        <p:txBody>
+          <a:bodyPr>
+            <a:normAutofit fontScale="90000"/>
+          </a:bodyPr>
+          <a:lstStyle/>
+          <a:p>
+            <a:r>
+              <a:rPr lang="en-US" sz="2400" i="1" dirty="0">
+                <a:solidFill>
+                  <a:srgbClr val="000000"/>
+                </a:solidFill>
+              </a:rPr>
+              <a:t>Could we have anticipated this failure?</a:t>
+            </a:r>
+          </a:p>
+        </p:txBody>
+      </p:sp>
+      <p:sp>
+        <p:nvSpPr>
+          <p:cNvPr id="900" name="Slide Number Placeholder 900"/>
+          <p:cNvSpPr>
+            <a:spLocks noGrp="1"/>
+          </p:cNvSpPr>
+          <p:nvPr>
+            <p:ph type="sldNum" sz="quarter" idx="4"/>
+          </p:nvPr>
+        </p:nvSpPr>
+        <p:spPr/>
+        <p:txBody>
+          <a:bodyPr/>
+          <a:lstStyle/>
+          <a:p>
+            <a:fld id="{54DE72B0-FFEB-4C83-B4BD-F25961BEDFCA}" type="slidenum">
+              <a:rPr lang="en-US" smtClean="0"/>
+              <a:t>29</a:t>
+            </a:fld>
+            <a:endParaRPr lang="en-US"/>
+          </a:p>
+        </p:txBody>
+      </p:sp>
+      <p:sp>
+        <p:nvSpPr>
+          <p:cNvPr id="903" name="Card"/>
+          <p:cNvSpPr/>
+          <p:nvPr/>
+        </p:nvSpPr>
+        <p:spPr>
+          <a:xfrm>
+            <a:off x="2103120" y="1920240"/>
+            <a:ext cx="2194560" cy="713232"/>
+          </a:xfrm>
+          <a:prstGeom prst="rect">
+            <a:avLst/>
+          </a:prstGeom>
+          <a:solidFill>
+            <a:srgbClr val="F5F1E8"/>
+          </a:solidFill>
+          <a:ln w="12700">
+            <a:solidFill>
+              <a:srgbClr val="C9B991"/>
+            </a:solidFill>
+          </a:ln>
+          <a:effectLst/>
+        </p:spPr>
+        <p:style>
+          <a:lnRef idx="1">
+            <a:schemeClr val="accent1"/>
+          </a:lnRef>
+          <a:fillRef idx="3">
+            <a:schemeClr val="accent1"/>
+          </a:fillRef>
+          <a:effectRef idx="2">
+            <a:schemeClr val="accent1"/>
+          </a:effectRef>
+          <a:fontRef idx="minor">
+            <a:schemeClr val="lt1"/>
+          </a:fontRef>
+        </p:style>
+        <p:txBody>
+          <a:bodyPr wrap="square" lIns="27432" tIns="22860" rIns="27432" bIns="22860" rtlCol="0" anchor="ctr"/>
+          <a:lstStyle/>
+          <a:p>
+            <a:pPr algn="ctr"/>
+            <a:r>
+              <a:rPr sz="1100" b="0" i="1" dirty="0">
+                <a:solidFill>
+                  <a:srgbClr val="5C4826"/>
+                </a:solidFill>
+              </a:rPr>
+              <a:t>invalid content causes unsafe execution</a:t>
+            </a:r>
+          </a:p>
+        </p:txBody>
+      </p:sp>
+      <p:sp>
+        <p:nvSpPr>
+          <p:cNvPr id="907" name="Card"/>
+          <p:cNvSpPr/>
+          <p:nvPr/>
+        </p:nvSpPr>
+        <p:spPr>
+          <a:xfrm>
+            <a:off x="2103120" y="2697480"/>
+            <a:ext cx="2194560" cy="713232"/>
+          </a:xfrm>
+          <a:prstGeom prst="rect">
+            <a:avLst/>
+          </a:prstGeom>
+          <a:solidFill>
+            <a:srgbClr val="F5F1E8"/>
+          </a:solidFill>
+          <a:ln w="12700">
+            <a:solidFill>
+              <a:srgbClr val="C9B991"/>
+            </a:solidFill>
+          </a:ln>
+          <a:effectLst/>
+        </p:spPr>
+        <p:style>
+          <a:lnRef idx="1">
+            <a:schemeClr val="accent1"/>
+          </a:lnRef>
+          <a:fillRef idx="3">
+            <a:schemeClr val="accent1"/>
+          </a:fillRef>
+          <a:effectRef idx="2">
+            <a:schemeClr val="accent1"/>
+          </a:effectRef>
+          <a:fontRef idx="minor">
+            <a:schemeClr val="lt1"/>
+          </a:fontRef>
+        </p:style>
+        <p:txBody>
+          <a:bodyPr wrap="square" lIns="27432" tIns="22860" rIns="27432" bIns="22860" rtlCol="0" anchor="ctr"/>
+          <a:lstStyle/>
+          <a:p>
+            <a:pPr algn="ctr"/>
+            <a:r>
+              <a:rPr sz="1100" b="0" i="1">
+                <a:solidFill>
+                  <a:srgbClr val="5C4826"/>
+                </a:solidFill>
+              </a:rPr>
+              <a:t>a defect escapes testing</a:t>
+            </a:r>
+          </a:p>
+        </p:txBody>
+      </p:sp>
+      <p:sp>
+        <p:nvSpPr>
+          <p:cNvPr id="909" name="Block"/>
+          <p:cNvSpPr/>
+          <p:nvPr/>
+        </p:nvSpPr>
+        <p:spPr>
+          <a:xfrm>
+            <a:off x="365760" y="1920240"/>
+            <a:ext cx="1645920" cy="713232"/>
+          </a:xfrm>
+          <a:prstGeom prst="rect">
+            <a:avLst/>
+          </a:prstGeom>
+          <a:solidFill>
+            <a:srgbClr val="8E6F3E"/>
+          </a:solidFill>
+          <a:ln>
+            <a:noFill/>
+          </a:ln>
+          <a:effectLst/>
+        </p:spPr>
+        <p:style>
+          <a:lnRef idx="1">
+            <a:schemeClr val="accent1"/>
+          </a:lnRef>
+          <a:fillRef idx="3">
+            <a:schemeClr val="accent1"/>
+          </a:fillRef>
+          <a:effectRef idx="2">
+            <a:schemeClr val="accent1"/>
+          </a:effectRef>
+          <a:fontRef idx="minor">
+            <a:schemeClr val="lt1"/>
+          </a:fontRef>
+        </p:style>
+        <p:txBody>
+          <a:bodyPr wrap="square" lIns="27432" tIns="22860" rIns="27432" bIns="22860" rtlCol="0" anchor="ctr"/>
+          <a:lstStyle/>
+          <a:p>
+            <a:pPr algn="ctr"/>
+            <a:r>
+              <a:rPr sz="1200" b="1" i="0" dirty="0">
+                <a:solidFill>
+                  <a:srgbClr val="FFFFFF"/>
+                </a:solidFill>
+              </a:rPr>
+              <a:t>Interpret security content</a:t>
+            </a:r>
+            <a:endParaRPr lang="en-US" sz="2000" b="1" i="0" dirty="0">
+              <a:solidFill>
+                <a:srgbClr val="FFFFFF"/>
+              </a:solidFill>
+            </a:endParaRPr>
+          </a:p>
+        </p:txBody>
+      </p:sp>
+      <p:sp>
+        <p:nvSpPr>
+          <p:cNvPr id="910" name="Block"/>
+          <p:cNvSpPr/>
+          <p:nvPr/>
+        </p:nvSpPr>
+        <p:spPr>
+          <a:xfrm>
+            <a:off x="365760" y="2697480"/>
+            <a:ext cx="1645920" cy="713232"/>
+          </a:xfrm>
+          <a:prstGeom prst="rect">
+            <a:avLst/>
+          </a:prstGeom>
+          <a:solidFill>
+            <a:srgbClr val="8E6F3E"/>
+          </a:solidFill>
+          <a:ln>
+            <a:noFill/>
+          </a:ln>
+          <a:effectLst/>
+        </p:spPr>
+        <p:style>
+          <a:lnRef idx="1">
+            <a:schemeClr val="accent1"/>
+          </a:lnRef>
+          <a:fillRef idx="3">
+            <a:schemeClr val="accent1"/>
+          </a:fillRef>
+          <a:effectRef idx="2">
+            <a:schemeClr val="accent1"/>
+          </a:effectRef>
+          <a:fontRef idx="minor">
+            <a:schemeClr val="lt1"/>
+          </a:fontRef>
+        </p:style>
+        <p:txBody>
+          <a:bodyPr wrap="square" lIns="27432" tIns="22860" rIns="27432" bIns="22860" rtlCol="0" anchor="ctr"/>
+          <a:lstStyle/>
+          <a:p>
+            <a:pPr algn="ctr"/>
+            <a:r>
+              <a:rPr sz="1200" b="1" i="0" dirty="0">
+                <a:solidFill>
+                  <a:srgbClr val="FFFFFF"/>
+                </a:solidFill>
+              </a:rPr>
+              <a:t>Validate content</a:t>
+            </a:r>
+            <a:endParaRPr lang="en-US" sz="2000" b="1" i="0" dirty="0">
+              <a:solidFill>
+                <a:srgbClr val="FFFFFF"/>
+              </a:solidFill>
+            </a:endParaRPr>
+          </a:p>
+        </p:txBody>
+      </p:sp>
+      <p:sp>
+        <p:nvSpPr>
+          <p:cNvPr id="911" name="Block"/>
+          <p:cNvSpPr/>
+          <p:nvPr/>
+        </p:nvSpPr>
+        <p:spPr>
+          <a:xfrm>
+            <a:off x="365760" y="3474720"/>
+            <a:ext cx="1645920" cy="713232"/>
+          </a:xfrm>
+          <a:prstGeom prst="rect">
+            <a:avLst/>
+          </a:prstGeom>
+          <a:solidFill>
+            <a:srgbClr val="8E6F3E"/>
+          </a:solidFill>
+          <a:ln>
+            <a:noFill/>
+          </a:ln>
+          <a:effectLst/>
+        </p:spPr>
+        <p:style>
+          <a:lnRef idx="1">
+            <a:schemeClr val="accent1"/>
+          </a:lnRef>
+          <a:fillRef idx="3">
+            <a:schemeClr val="accent1"/>
+          </a:fillRef>
+          <a:effectRef idx="2">
+            <a:schemeClr val="accent1"/>
+          </a:effectRef>
+          <a:fontRef idx="minor">
+            <a:schemeClr val="lt1"/>
+          </a:fontRef>
+        </p:style>
+        <p:txBody>
+          <a:bodyPr wrap="square" lIns="27432" tIns="22860" rIns="27432" bIns="22860" rtlCol="0" anchor="ctr"/>
+          <a:lstStyle/>
+          <a:p>
+            <a:pPr algn="ctr"/>
+            <a:r>
+              <a:rPr sz="1200" b="1" i="0" dirty="0">
+                <a:solidFill>
+                  <a:srgbClr val="FFFFFF"/>
+                </a:solidFill>
+              </a:rPr>
+              <a:t>Distribute content</a:t>
+            </a:r>
+            <a:endParaRPr sz="2000" b="1" i="0" dirty="0">
+              <a:solidFill>
+                <a:srgbClr val="FFFFFF"/>
+              </a:solidFill>
+            </a:endParaRPr>
+          </a:p>
+        </p:txBody>
+      </p:sp>
+      <p:sp>
+        <p:nvSpPr>
+          <p:cNvPr id="912" name="Block"/>
+          <p:cNvSpPr/>
+          <p:nvPr/>
+        </p:nvSpPr>
+        <p:spPr>
+          <a:xfrm>
+            <a:off x="365760" y="4251960"/>
+            <a:ext cx="1645920" cy="713232"/>
+          </a:xfrm>
+          <a:prstGeom prst="rect">
+            <a:avLst/>
+          </a:prstGeom>
+          <a:solidFill>
+            <a:srgbClr val="8E6F3E"/>
+          </a:solidFill>
+          <a:ln>
+            <a:noFill/>
+          </a:ln>
+          <a:effectLst/>
+        </p:spPr>
+        <p:style>
+          <a:lnRef idx="1">
+            <a:schemeClr val="accent1"/>
+          </a:lnRef>
+          <a:fillRef idx="3">
+            <a:schemeClr val="accent1"/>
+          </a:fillRef>
+          <a:effectRef idx="2">
+            <a:schemeClr val="accent1"/>
+          </a:effectRef>
+          <a:fontRef idx="minor">
+            <a:schemeClr val="lt1"/>
+          </a:fontRef>
+        </p:style>
+        <p:txBody>
+          <a:bodyPr wrap="square" lIns="27432" tIns="22860" rIns="27432" bIns="22860" rtlCol="0" anchor="ctr"/>
+          <a:lstStyle/>
+          <a:p>
+            <a:pPr algn="ctr"/>
+            <a:r>
+              <a:rPr sz="1200" b="1" i="0" dirty="0">
+                <a:solidFill>
+                  <a:srgbClr val="FFFFFF"/>
+                </a:solidFill>
+              </a:rPr>
+              <a:t>Maintain service</a:t>
+            </a:r>
+          </a:p>
+        </p:txBody>
+      </p:sp>
+      <p:sp>
+        <p:nvSpPr>
+          <p:cNvPr id="913" name="FooterBand"/>
+          <p:cNvSpPr/>
+          <p:nvPr/>
+        </p:nvSpPr>
+        <p:spPr>
+          <a:xfrm>
+            <a:off x="274320" y="5852160"/>
+            <a:ext cx="8595360" cy="566928"/>
+          </a:xfrm>
+          <a:prstGeom prst="rect">
+            <a:avLst/>
+          </a:prstGeom>
+          <a:noFill/>
+          <a:ln>
+            <a:noFill/>
+          </a:ln>
+          <a:effectLst/>
+        </p:spPr>
+        <p:style>
+          <a:lnRef idx="1">
+            <a:schemeClr val="accent1"/>
+          </a:lnRef>
+          <a:fillRef idx="3">
+            <a:schemeClr val="accent1"/>
+          </a:fillRef>
+          <a:effectRef idx="2">
+            <a:schemeClr val="accent1"/>
+          </a:effectRef>
+          <a:fontRef idx="minor">
+            <a:schemeClr val="lt1"/>
+          </a:fontRef>
+        </p:style>
+        <p:txBody>
+          <a:bodyPr wrap="square" lIns="27432" tIns="22860" rIns="27432" bIns="22860" rtlCol="0" anchor="ctr"/>
+          <a:lstStyle/>
+          <a:p>
+            <a:pPr algn="ctr"/>
+            <a:r>
+              <a:rPr lang="en-US" sz="2000" b="1" i="0" dirty="0">
+                <a:solidFill>
+                  <a:schemeClr val="bg1"/>
+                </a:solidFill>
+              </a:rPr>
+              <a:t>Which of these failure modes could occur in another security product?</a:t>
+            </a:r>
+          </a:p>
+        </p:txBody>
+      </p:sp>
+      <p:sp>
+        <p:nvSpPr>
+          <p:cNvPr id="2" name="Card"/>
+          <p:cNvSpPr/>
+          <p:nvPr/>
+        </p:nvSpPr>
+        <p:spPr>
+          <a:xfrm>
+            <a:off x="2103120" y="3474720"/>
+            <a:ext cx="2194560" cy="713232"/>
+          </a:xfrm>
+          <a:prstGeom prst="rect">
+            <a:avLst/>
+          </a:prstGeom>
+          <a:solidFill>
+            <a:srgbClr val="F5F1E8"/>
+          </a:solidFill>
+          <a:ln w="12700">
+            <a:solidFill>
+              <a:srgbClr val="C9B991"/>
+            </a:solidFill>
+          </a:ln>
+          <a:effectLst/>
+        </p:spPr>
+        <p:style>
+          <a:lnRef idx="1">
+            <a:schemeClr val="accent1"/>
+          </a:lnRef>
+          <a:fillRef idx="3">
+            <a:schemeClr val="accent1"/>
+          </a:fillRef>
+          <a:effectRef idx="2">
+            <a:schemeClr val="accent1"/>
+          </a:effectRef>
+          <a:fontRef idx="minor">
+            <a:schemeClr val="lt1"/>
+          </a:fontRef>
+        </p:style>
+        <p:txBody>
+          <a:bodyPr wrap="square" lIns="27432" tIns="22860" rIns="27432" bIns="22860" rtlCol="0" anchor="ctr"/>
+          <a:lstStyle/>
+          <a:p>
+            <a:pPr algn="ctr"/>
+            <a:r>
+              <a:rPr lang="en-US" sz="1100" b="0" i="1" dirty="0">
+                <a:solidFill>
+                  <a:srgbClr val="5C4826"/>
+                </a:solidFill>
+              </a:rPr>
+              <a:t>a defective update reaches all endpoints</a:t>
+            </a:r>
+          </a:p>
+        </p:txBody>
+      </p:sp>
+      <p:sp>
+        <p:nvSpPr>
+          <p:cNvPr id="4" name="Card"/>
+          <p:cNvSpPr/>
+          <p:nvPr/>
+        </p:nvSpPr>
+        <p:spPr>
+          <a:xfrm>
+            <a:off x="2103120" y="4251960"/>
+            <a:ext cx="2194560" cy="713232"/>
+          </a:xfrm>
+          <a:prstGeom prst="rect">
+            <a:avLst/>
+          </a:prstGeom>
+          <a:solidFill>
+            <a:srgbClr val="F5F1E8"/>
+          </a:solidFill>
+          <a:ln w="12700">
+            <a:solidFill>
+              <a:srgbClr val="C9B991"/>
+            </a:solidFill>
+          </a:ln>
+          <a:effectLst/>
+        </p:spPr>
+        <p:style>
+          <a:lnRef idx="1">
+            <a:schemeClr val="accent1"/>
+          </a:lnRef>
+          <a:fillRef idx="3">
+            <a:schemeClr val="accent1"/>
+          </a:fillRef>
+          <a:effectRef idx="2">
+            <a:schemeClr val="accent1"/>
+          </a:effectRef>
+          <a:fontRef idx="minor">
+            <a:schemeClr val="lt1"/>
+          </a:fontRef>
+        </p:style>
+        <p:txBody>
+          <a:bodyPr wrap="square" lIns="27432" tIns="22860" rIns="27432" bIns="22860" rtlCol="0" anchor="ctr"/>
+          <a:lstStyle/>
+          <a:p>
+            <a:pPr algn="ctr"/>
+            <a:r>
+              <a:rPr lang="en-US" sz="1100" b="0" i="1" dirty="0">
+                <a:solidFill>
+                  <a:srgbClr val="5C4826"/>
+                </a:solidFill>
+              </a:rPr>
+              <a:t>endpoint failure disables critical services</a:t>
+            </a:r>
+            <a:endParaRPr sz="2000" b="0" i="1" dirty="0">
+              <a:solidFill>
+                <a:srgbClr val="5C4826"/>
+              </a:solidFill>
+            </a:endParaRPr>
+          </a:p>
+        </p:txBody>
+      </p:sp>
+      <p:sp>
+        <p:nvSpPr>
+          <p:cNvPr id="5" name="ColumnHeading"/>
+          <p:cNvSpPr/>
+          <p:nvPr/>
+        </p:nvSpPr>
+        <p:spPr>
+          <a:xfrm>
+            <a:off x="365760" y="1572768"/>
+            <a:ext cx="1645920" cy="274320"/>
+          </a:xfrm>
+          <a:prstGeom prst="rect">
+            <a:avLst/>
+          </a:prstGeom>
+          <a:noFill/>
+          <a:ln>
+            <a:noFill/>
+          </a:ln>
+          <a:effectLst/>
+        </p:spPr>
+        <p:style>
+          <a:lnRef idx="1">
+            <a:schemeClr val="accent1"/>
+          </a:lnRef>
+          <a:fillRef idx="3">
+            <a:schemeClr val="accent1"/>
+          </a:fillRef>
+          <a:effectRef idx="2">
+            <a:schemeClr val="accent1"/>
+          </a:effectRef>
+          <a:fontRef idx="minor">
+            <a:schemeClr val="lt1"/>
+          </a:fontRef>
+        </p:style>
+        <p:txBody>
+          <a:bodyPr wrap="square" lIns="27432" tIns="22860" rIns="27432" bIns="22860" rtlCol="0" anchor="ctr"/>
+          <a:lstStyle/>
+          <a:p>
+            <a:pPr algn="ctr"/>
+            <a:r>
+              <a:rPr lang="en-US" sz="1200" b="1" i="0" dirty="0">
+                <a:solidFill>
+                  <a:schemeClr val="bg1"/>
+                </a:solidFill>
+              </a:rPr>
+              <a:t>FUNCTION</a:t>
+            </a:r>
+            <a:endParaRPr sz="2800" b="1" i="0" dirty="0">
+              <a:solidFill>
+                <a:schemeClr val="bg1"/>
+              </a:solidFill>
+            </a:endParaRPr>
+          </a:p>
+        </p:txBody>
+      </p:sp>
+      <p:sp>
+        <p:nvSpPr>
+          <p:cNvPr id="6" name="ColumnHeading"/>
+          <p:cNvSpPr/>
+          <p:nvPr/>
+        </p:nvSpPr>
+        <p:spPr>
+          <a:xfrm>
+            <a:off x="2103120" y="1572768"/>
+            <a:ext cx="2194560" cy="274320"/>
+          </a:xfrm>
+          <a:prstGeom prst="rect">
+            <a:avLst/>
+          </a:prstGeom>
+          <a:noFill/>
+          <a:ln>
+            <a:noFill/>
+          </a:ln>
+          <a:effectLst/>
+        </p:spPr>
+        <p:style>
+          <a:lnRef idx="1">
+            <a:schemeClr val="accent1"/>
+          </a:lnRef>
+          <a:fillRef idx="3">
+            <a:schemeClr val="accent1"/>
+          </a:fillRef>
+          <a:effectRef idx="2">
+            <a:schemeClr val="accent1"/>
+          </a:effectRef>
+          <a:fontRef idx="minor">
+            <a:schemeClr val="lt1"/>
+          </a:fontRef>
+        </p:style>
+        <p:txBody>
+          <a:bodyPr wrap="square" lIns="27432" tIns="22860" rIns="27432" bIns="22860" rtlCol="0" anchor="ctr"/>
+          <a:lstStyle/>
+          <a:p>
+            <a:pPr algn="ctr"/>
+            <a:r>
+              <a:rPr lang="en-US" sz="1200" b="1" i="0" dirty="0">
+                <a:solidFill>
+                  <a:schemeClr val="bg1"/>
+                </a:solidFill>
+              </a:rPr>
+              <a:t>FAILURE MODE</a:t>
+            </a:r>
+            <a:endParaRPr sz="2800" b="1" i="0" dirty="0">
+              <a:solidFill>
+                <a:schemeClr val="bg1"/>
+              </a:solidFill>
+            </a:endParaRPr>
+          </a:p>
+        </p:txBody>
+      </p:sp>
+      <p:sp>
+        <p:nvSpPr>
+          <p:cNvPr id="915" name="Label"/>
+          <p:cNvSpPr txBox="1"/>
+          <p:nvPr/>
+        </p:nvSpPr>
+        <p:spPr>
+          <a:xfrm>
+            <a:off x="548640" y="841248"/>
+            <a:ext cx="8046720" cy="566928"/>
+          </a:xfrm>
+          <a:prstGeom prst="rect">
+            <a:avLst/>
+          </a:prstGeom>
+          <a:noFill/>
+        </p:spPr>
+        <p:txBody>
+          <a:bodyPr wrap="square" lIns="27432" tIns="22860" rIns="27432" bIns="22860" anchor="t">
+            <a:spAutoFit/>
+          </a:bodyPr>
+          <a:lstStyle/>
+          <a:p>
+            <a:pPr algn="ctr"/>
+            <a:r>
+              <a:rPr sz="1200" b="1" i="1">
+                <a:solidFill>
+                  <a:srgbClr val="5C4826"/>
+                </a:solidFill>
+              </a:rPr>
+              <a:t>The three models explain a failure that has happened. FMEA — Failure Mode and Effects Analysis —</a:t>
+            </a:r>
+          </a:p>
+          <a:p>
+            <a:pPr algn="ctr"/>
+            <a:r>
+              <a:rPr sz="1200" b="1" i="1">
+                <a:solidFill>
+                  <a:srgbClr val="5C4826"/>
+                </a:solidFill>
+              </a:rPr>
+              <a:t>searches for failures that have not happened yet: function by function, what could fail, with what effect, held by which control?</a:t>
+            </a:r>
+          </a:p>
+        </p:txBody>
+      </p:sp>
+      <p:sp>
+        <p:nvSpPr>
+          <p:cNvPr id="1000" name="ColumnHeading"/>
+          <p:cNvSpPr/>
+          <p:nvPr/>
+        </p:nvSpPr>
+        <p:spPr>
+          <a:xfrm>
+            <a:off x="4389120" y="1572768"/>
+            <a:ext cx="1828800" cy="274320"/>
+          </a:xfrm>
+          <a:prstGeom prst="rect">
+            <a:avLst/>
+          </a:prstGeom>
+          <a:noFill/>
+          <a:ln>
+            <a:noFill/>
+          </a:ln>
+          <a:effectLst/>
+        </p:spPr>
+        <p:style>
+          <a:lnRef idx="1">
+            <a:schemeClr val="accent1"/>
+          </a:lnRef>
+          <a:fillRef idx="3">
+            <a:schemeClr val="accent1"/>
+          </a:fillRef>
+          <a:effectRef idx="2">
+            <a:schemeClr val="accent1"/>
+          </a:effectRef>
+          <a:fontRef idx="minor">
+            <a:schemeClr val="lt1"/>
+          </a:fontRef>
+        </p:style>
+        <p:txBody>
+          <a:bodyPr wrap="square" lIns="27432" tIns="22860" rIns="27432" bIns="22860" rtlCol="0" anchor="ctr"/>
+          <a:lstStyle/>
+          <a:p>
+            <a:pPr algn="ctr"/>
+            <a:r>
+              <a:rPr lang="en-US" sz="1200" b="1" i="0" dirty="0">
+                <a:solidFill>
+                  <a:schemeClr val="bg1"/>
+                </a:solidFill>
+              </a:rPr>
+              <a:t>EFFECT</a:t>
+            </a:r>
+            <a:endParaRPr sz="2800" b="1" i="0" dirty="0">
+              <a:solidFill>
+                <a:schemeClr val="bg1"/>
+              </a:solidFill>
+            </a:endParaRPr>
+          </a:p>
+        </p:txBody>
+      </p:sp>
+      <p:sp>
+        <p:nvSpPr>
+          <p:cNvPr id="1001" name="ColumnHeading"/>
+          <p:cNvSpPr/>
+          <p:nvPr/>
+        </p:nvSpPr>
+        <p:spPr>
+          <a:xfrm>
+            <a:off x="6309360" y="1572768"/>
+            <a:ext cx="2286000" cy="274320"/>
+          </a:xfrm>
+          <a:prstGeom prst="rect">
+            <a:avLst/>
+          </a:prstGeom>
+          <a:noFill/>
+          <a:ln>
+            <a:noFill/>
+          </a:ln>
+          <a:effectLst/>
+        </p:spPr>
+        <p:style>
+          <a:lnRef idx="1">
+            <a:schemeClr val="accent1"/>
+          </a:lnRef>
+          <a:fillRef idx="3">
+            <a:schemeClr val="accent1"/>
+          </a:fillRef>
+          <a:effectRef idx="2">
+            <a:schemeClr val="accent1"/>
+          </a:effectRef>
+          <a:fontRef idx="minor">
+            <a:schemeClr val="lt1"/>
+          </a:fontRef>
+        </p:style>
+        <p:txBody>
+          <a:bodyPr wrap="square" lIns="27432" tIns="22860" rIns="27432" bIns="22860" rtlCol="0" anchor="ctr"/>
+          <a:lstStyle/>
+          <a:p>
+            <a:pPr algn="ctr"/>
+            <a:r>
+              <a:rPr lang="en-US" sz="1200" b="1" i="0" dirty="0">
+                <a:solidFill>
+                  <a:schemeClr val="bg1"/>
+                </a:solidFill>
+              </a:rPr>
+              <a:t>CANDIDATE CONTROL</a:t>
+            </a:r>
+            <a:endParaRPr sz="2800" b="1" i="0" dirty="0">
+              <a:solidFill>
+                <a:schemeClr val="bg1"/>
+              </a:solidFill>
+            </a:endParaRPr>
+          </a:p>
+        </p:txBody>
+      </p:sp>
+      <p:sp>
+        <p:nvSpPr>
+          <p:cNvPr id="1002" name="Card"/>
+          <p:cNvSpPr/>
+          <p:nvPr/>
+        </p:nvSpPr>
+        <p:spPr>
+          <a:xfrm>
+            <a:off x="4389120" y="1920240"/>
+            <a:ext cx="1828800" cy="713232"/>
+          </a:xfrm>
+          <a:prstGeom prst="rect">
+            <a:avLst/>
+          </a:prstGeom>
+          <a:solidFill>
+            <a:srgbClr val="F5F1E8"/>
+          </a:solidFill>
+          <a:ln w="12700">
+            <a:solidFill>
+              <a:srgbClr val="C9B991"/>
+            </a:solidFill>
+          </a:ln>
+          <a:effectLst/>
+        </p:spPr>
+        <p:style>
+          <a:lnRef idx="1">
+            <a:schemeClr val="accent1"/>
+          </a:lnRef>
+          <a:fillRef idx="3">
+            <a:schemeClr val="accent1"/>
+          </a:fillRef>
+          <a:effectRef idx="2">
+            <a:schemeClr val="accent1"/>
+          </a:effectRef>
+          <a:fontRef idx="minor">
+            <a:schemeClr val="lt1"/>
+          </a:fontRef>
+        </p:style>
+        <p:txBody>
+          <a:bodyPr wrap="square" lIns="27432" tIns="22860" rIns="27432" bIns="22860" rtlCol="0" anchor="ctr"/>
+          <a:lstStyle/>
+          <a:p>
+            <a:pPr algn="ctr"/>
+            <a:r>
+              <a:rPr sz="1100" b="0" i="1" dirty="0">
+                <a:solidFill>
+                  <a:srgbClr val="5C4826"/>
+                </a:solidFill>
+              </a:rPr>
+              <a:t>endpoint failure</a:t>
+            </a:r>
+          </a:p>
+        </p:txBody>
+      </p:sp>
+      <p:sp>
+        <p:nvSpPr>
+          <p:cNvPr id="1003" name="Card"/>
+          <p:cNvSpPr/>
+          <p:nvPr/>
+        </p:nvSpPr>
+        <p:spPr>
+          <a:xfrm>
+            <a:off x="6309360" y="1920240"/>
+            <a:ext cx="2286000" cy="713232"/>
+          </a:xfrm>
+          <a:prstGeom prst="rect">
+            <a:avLst/>
+          </a:prstGeom>
+          <a:solidFill>
+            <a:srgbClr val="F5F1E8"/>
+          </a:solidFill>
+          <a:ln w="12700">
+            <a:solidFill>
+              <a:srgbClr val="C9B991"/>
+            </a:solidFill>
+          </a:ln>
+          <a:effectLst/>
+        </p:spPr>
+        <p:style>
+          <a:lnRef idx="1">
+            <a:schemeClr val="accent1"/>
+          </a:lnRef>
+          <a:fillRef idx="3">
+            <a:schemeClr val="accent1"/>
+          </a:fillRef>
+          <a:effectRef idx="2">
+            <a:schemeClr val="accent1"/>
+          </a:effectRef>
+          <a:fontRef idx="minor">
+            <a:schemeClr val="lt1"/>
+          </a:fontRef>
+        </p:style>
+        <p:txBody>
+          <a:bodyPr wrap="square" lIns="27432" tIns="22860" rIns="27432" bIns="22860" rtlCol="0" anchor="ctr"/>
+          <a:lstStyle/>
+          <a:p>
+            <a:pPr algn="ctr"/>
+            <a:r>
+              <a:rPr sz="1100" b="0" i="1" dirty="0">
+                <a:solidFill>
+                  <a:srgbClr val="5C4826"/>
+                </a:solidFill>
+              </a:rPr>
+              <a:t>contract validation</a:t>
+            </a:r>
+          </a:p>
+        </p:txBody>
+      </p:sp>
+      <p:sp>
+        <p:nvSpPr>
+          <p:cNvPr id="1004" name="Card"/>
+          <p:cNvSpPr/>
+          <p:nvPr/>
+        </p:nvSpPr>
+        <p:spPr>
+          <a:xfrm>
+            <a:off x="4389120" y="2697480"/>
+            <a:ext cx="1828800" cy="713232"/>
+          </a:xfrm>
+          <a:prstGeom prst="rect">
+            <a:avLst/>
+          </a:prstGeom>
+          <a:solidFill>
+            <a:srgbClr val="F5F1E8"/>
+          </a:solidFill>
+          <a:ln w="12700">
+            <a:solidFill>
+              <a:srgbClr val="C9B991"/>
+            </a:solidFill>
+          </a:ln>
+          <a:effectLst/>
+        </p:spPr>
+        <p:style>
+          <a:lnRef idx="1">
+            <a:schemeClr val="accent1"/>
+          </a:lnRef>
+          <a:fillRef idx="3">
+            <a:schemeClr val="accent1"/>
+          </a:fillRef>
+          <a:effectRef idx="2">
+            <a:schemeClr val="accent1"/>
+          </a:effectRef>
+          <a:fontRef idx="minor">
+            <a:schemeClr val="lt1"/>
+          </a:fontRef>
+        </p:style>
+        <p:txBody>
+          <a:bodyPr wrap="square" lIns="27432" tIns="22860" rIns="27432" bIns="22860" rtlCol="0" anchor="ctr"/>
+          <a:lstStyle/>
+          <a:p>
+            <a:pPr algn="ctr"/>
+            <a:r>
+              <a:rPr sz="1100" b="0" i="1" dirty="0">
+                <a:solidFill>
+                  <a:srgbClr val="5C4826"/>
+                </a:solidFill>
+              </a:rPr>
+              <a:t>defective update released</a:t>
+            </a:r>
+          </a:p>
+        </p:txBody>
+      </p:sp>
+      <p:sp>
+        <p:nvSpPr>
+          <p:cNvPr id="1005" name="Card"/>
+          <p:cNvSpPr/>
+          <p:nvPr/>
+        </p:nvSpPr>
+        <p:spPr>
+          <a:xfrm>
+            <a:off x="6309360" y="2697480"/>
+            <a:ext cx="2286000" cy="713232"/>
+          </a:xfrm>
+          <a:prstGeom prst="rect">
+            <a:avLst/>
+          </a:prstGeom>
+          <a:solidFill>
+            <a:srgbClr val="F5F1E8"/>
+          </a:solidFill>
+          <a:ln w="12700">
+            <a:solidFill>
+              <a:srgbClr val="C9B991"/>
+            </a:solidFill>
+          </a:ln>
+          <a:effectLst/>
+        </p:spPr>
+        <p:style>
+          <a:lnRef idx="1">
+            <a:schemeClr val="accent1"/>
+          </a:lnRef>
+          <a:fillRef idx="3">
+            <a:schemeClr val="accent1"/>
+          </a:fillRef>
+          <a:effectRef idx="2">
+            <a:schemeClr val="accent1"/>
+          </a:effectRef>
+          <a:fontRef idx="minor">
+            <a:schemeClr val="lt1"/>
+          </a:fontRef>
+        </p:style>
+        <p:txBody>
+          <a:bodyPr wrap="square" lIns="27432" tIns="22860" rIns="27432" bIns="22860" rtlCol="0" anchor="ctr"/>
+          <a:lstStyle/>
+          <a:p>
+            <a:pPr algn="ctr"/>
+            <a:r>
+              <a:rPr sz="1100" b="0" i="1" dirty="0">
+                <a:solidFill>
+                  <a:srgbClr val="5C4826"/>
+                </a:solidFill>
+              </a:rPr>
+              <a:t>independent compatibility tests</a:t>
+            </a:r>
+          </a:p>
+        </p:txBody>
+      </p:sp>
+      <p:sp>
+        <p:nvSpPr>
+          <p:cNvPr id="1006" name="Card"/>
+          <p:cNvSpPr/>
+          <p:nvPr/>
+        </p:nvSpPr>
+        <p:spPr>
+          <a:xfrm>
+            <a:off x="4389120" y="3474720"/>
+            <a:ext cx="1828800" cy="713232"/>
+          </a:xfrm>
+          <a:prstGeom prst="rect">
+            <a:avLst/>
+          </a:prstGeom>
+          <a:solidFill>
+            <a:srgbClr val="F5F1E8"/>
+          </a:solidFill>
+          <a:ln w="12700">
+            <a:solidFill>
+              <a:srgbClr val="C9B991"/>
+            </a:solidFill>
+          </a:ln>
+          <a:effectLst/>
+        </p:spPr>
+        <p:style>
+          <a:lnRef idx="1">
+            <a:schemeClr val="accent1"/>
+          </a:lnRef>
+          <a:fillRef idx="3">
+            <a:schemeClr val="accent1"/>
+          </a:fillRef>
+          <a:effectRef idx="2">
+            <a:schemeClr val="accent1"/>
+          </a:effectRef>
+          <a:fontRef idx="minor">
+            <a:schemeClr val="lt1"/>
+          </a:fontRef>
+        </p:style>
+        <p:txBody>
+          <a:bodyPr wrap="square" lIns="27432" tIns="22860" rIns="27432" bIns="22860" rtlCol="0" anchor="ctr"/>
+          <a:lstStyle/>
+          <a:p>
+            <a:pPr algn="ctr"/>
+            <a:r>
+              <a:rPr sz="1100" b="0" i="1" dirty="0">
+                <a:solidFill>
+                  <a:srgbClr val="5C4826"/>
+                </a:solidFill>
+              </a:rPr>
+              <a:t>widespread outage</a:t>
+            </a:r>
+          </a:p>
+        </p:txBody>
+      </p:sp>
+      <p:sp>
+        <p:nvSpPr>
+          <p:cNvPr id="1007" name="Card"/>
+          <p:cNvSpPr/>
+          <p:nvPr/>
+        </p:nvSpPr>
+        <p:spPr>
+          <a:xfrm>
+            <a:off x="6309360" y="3474720"/>
+            <a:ext cx="2286000" cy="713232"/>
+          </a:xfrm>
+          <a:prstGeom prst="rect">
+            <a:avLst/>
+          </a:prstGeom>
+          <a:solidFill>
+            <a:srgbClr val="F5F1E8"/>
+          </a:solidFill>
+          <a:ln w="12700">
+            <a:solidFill>
+              <a:srgbClr val="C9B991"/>
+            </a:solidFill>
+          </a:ln>
+          <a:effectLst/>
+        </p:spPr>
+        <p:style>
+          <a:lnRef idx="1">
+            <a:schemeClr val="accent1"/>
+          </a:lnRef>
+          <a:fillRef idx="3">
+            <a:schemeClr val="accent1"/>
+          </a:fillRef>
+          <a:effectRef idx="2">
+            <a:schemeClr val="accent1"/>
+          </a:effectRef>
+          <a:fontRef idx="minor">
+            <a:schemeClr val="lt1"/>
+          </a:fontRef>
+        </p:style>
+        <p:txBody>
+          <a:bodyPr wrap="square" lIns="27432" tIns="22860" rIns="27432" bIns="22860" rtlCol="0" anchor="ctr"/>
+          <a:lstStyle/>
+          <a:p>
+            <a:pPr algn="ctr"/>
+            <a:r>
+              <a:rPr sz="1100" b="0" i="1" dirty="0">
+                <a:solidFill>
+                  <a:srgbClr val="5C4826"/>
+                </a:solidFill>
+              </a:rPr>
+              <a:t>staged rollout + demonstrated halt</a:t>
+            </a:r>
+          </a:p>
+        </p:txBody>
+      </p:sp>
+      <p:sp>
+        <p:nvSpPr>
+          <p:cNvPr id="1008" name="Card"/>
+          <p:cNvSpPr/>
+          <p:nvPr/>
+        </p:nvSpPr>
+        <p:spPr>
+          <a:xfrm>
+            <a:off x="4389120" y="4251960"/>
+            <a:ext cx="1828800" cy="713232"/>
+          </a:xfrm>
+          <a:prstGeom prst="rect">
+            <a:avLst/>
+          </a:prstGeom>
+          <a:solidFill>
+            <a:srgbClr val="F5F1E8"/>
+          </a:solidFill>
+          <a:ln w="12700">
+            <a:solidFill>
+              <a:srgbClr val="C9B991"/>
+            </a:solidFill>
+          </a:ln>
+          <a:effectLst/>
+        </p:spPr>
+        <p:style>
+          <a:lnRef idx="1">
+            <a:schemeClr val="accent1"/>
+          </a:lnRef>
+          <a:fillRef idx="3">
+            <a:schemeClr val="accent1"/>
+          </a:fillRef>
+          <a:effectRef idx="2">
+            <a:schemeClr val="accent1"/>
+          </a:effectRef>
+          <a:fontRef idx="minor">
+            <a:schemeClr val="lt1"/>
+          </a:fontRef>
+        </p:style>
+        <p:txBody>
+          <a:bodyPr wrap="square" lIns="27432" tIns="22860" rIns="27432" bIns="22860" rtlCol="0" anchor="ctr"/>
+          <a:lstStyle/>
+          <a:p>
+            <a:pPr algn="ctr"/>
+            <a:r>
+              <a:rPr sz="1100" b="0" i="1" dirty="0">
+                <a:solidFill>
+                  <a:srgbClr val="5C4826"/>
+                </a:solidFill>
+              </a:rPr>
+              <a:t>service disruption</a:t>
+            </a:r>
+          </a:p>
+        </p:txBody>
+      </p:sp>
+      <p:sp>
+        <p:nvSpPr>
+          <p:cNvPr id="1009" name="Card"/>
+          <p:cNvSpPr/>
+          <p:nvPr/>
+        </p:nvSpPr>
+        <p:spPr>
+          <a:xfrm>
+            <a:off x="6309360" y="4251960"/>
+            <a:ext cx="2286000" cy="713232"/>
+          </a:xfrm>
+          <a:prstGeom prst="rect">
+            <a:avLst/>
+          </a:prstGeom>
+          <a:solidFill>
+            <a:srgbClr val="F5F1E8"/>
+          </a:solidFill>
+          <a:ln w="12700">
+            <a:solidFill>
+              <a:srgbClr val="C9B991"/>
+            </a:solidFill>
+          </a:ln>
+          <a:effectLst/>
+        </p:spPr>
+        <p:style>
+          <a:lnRef idx="1">
+            <a:schemeClr val="accent1"/>
+          </a:lnRef>
+          <a:fillRef idx="3">
+            <a:schemeClr val="accent1"/>
+          </a:fillRef>
+          <a:effectRef idx="2">
+            <a:schemeClr val="accent1"/>
+          </a:effectRef>
+          <a:fontRef idx="minor">
+            <a:schemeClr val="lt1"/>
+          </a:fontRef>
+        </p:style>
+        <p:txBody>
+          <a:bodyPr wrap="square" lIns="27432" tIns="22860" rIns="27432" bIns="22860" rtlCol="0" anchor="ctr"/>
+          <a:lstStyle/>
+          <a:p>
+            <a:pPr algn="ctr"/>
+            <a:r>
+              <a:rPr sz="1100" b="0" i="1" dirty="0">
+                <a:solidFill>
+                  <a:srgbClr val="5C4826"/>
+                </a:solidFill>
+              </a:rPr>
+              <a:t>independent service paths</a:t>
+            </a:r>
+          </a:p>
+        </p:txBody>
+      </p:sp>
+      <p:sp>
+        <p:nvSpPr>
+          <p:cNvPr id="1010" name="Label"/>
+          <p:cNvSpPr txBox="1"/>
+          <p:nvPr/>
+        </p:nvSpPr>
+        <p:spPr>
+          <a:xfrm>
+            <a:off x="548640" y="5102352"/>
+            <a:ext cx="8046720" cy="365760"/>
+          </a:xfrm>
+          <a:prstGeom prst="rect">
+            <a:avLst/>
+          </a:prstGeom>
+          <a:noFill/>
+        </p:spPr>
+        <p:txBody>
+          <a:bodyPr wrap="square" lIns="27432" tIns="22860" rIns="27432" bIns="22860" anchor="t">
+            <a:spAutoFit/>
+          </a:bodyPr>
+          <a:lstStyle/>
+          <a:p>
+            <a:pPr algn="ctr"/>
+            <a:r>
+              <a:rPr sz="1200" b="1" i="1">
+                <a:solidFill>
+                  <a:srgbClr val="5C4826"/>
+                </a:solidFill>
+              </a:rPr>
+              <a:t>How often will each mode occur? Occurrence stays ‘?’ — which modes warrant action even when their probabilities are unknown?</a:t>
+            </a:r>
+          </a:p>
+        </p:txBody>
+      </p:sp>
+    </p:spTree>
+  </p:cSld>
+  <p:clrMapOvr>
+    <a:masterClrMapping/>
+  </p:clrMapOvr>
+</p:sld>
+</file>
+
 <file path=ppt/slides/slide3.xml><?xml version="1.0" encoding="utf-8"?>
 <p:sld xmlns:a="http://schemas.openxmlformats.org/drawingml/2006/main" xmlns:p="http://schemas.openxmlformats.org/presentationml/2006/main" xmlns:r="http://schemas.openxmlformats.org/officeDocument/2006/relationships">
   <p:cSld>
@@ -22089,6 +23605,1310 @@
           </a:fontRef>
         </p:style>
       </p:cxnSp>
+    </p:spTree>
+  </p:cSld>
+  <p:clrMapOvr>
+    <a:masterClrMapping/>
+  </p:clrMapOvr>
+</p:sld>
+</file>
+
+<file path=ppt/slides/slide30.xml><?xml version="1.0" encoding="utf-8"?>
+<p:sld xmlns:a="http://schemas.openxmlformats.org/drawingml/2006/main" xmlns:p="http://schemas.openxmlformats.org/presentationml/2006/main" xmlns:r="http://schemas.openxmlformats.org/officeDocument/2006/relationships">
+  <p:cSld>
+    <p:spTree>
+      <p:nvGrpSpPr>
+        <p:cNvPr id="1" name=""/>
+        <p:cNvGrpSpPr/>
+        <p:nvPr/>
+      </p:nvGrpSpPr>
+      <p:grpSpPr/>
+      <p:sp>
+        <p:nvSpPr>
+          <p:cNvPr id="3" name="Title 2"/>
+          <p:cNvSpPr>
+            <a:spLocks noGrp="1"/>
+          </p:cNvSpPr>
+          <p:nvPr>
+            <p:ph type="title"/>
+          </p:nvPr>
+        </p:nvSpPr>
+        <p:spPr/>
+        <p:txBody>
+          <a:bodyPr>
+            <a:normAutofit fontScale="90000"/>
+          </a:bodyPr>
+          <a:lstStyle/>
+          <a:p>
+            <a:r>
+              <a:rPr sz="2400" b="0" i="0">
+                <a:solidFill>
+                  <a:srgbClr val="000000"/>
+                </a:solidFill>
+              </a:rPr>
+              <a:t>Apply FMEA to an unfamiliar system</a:t>
+            </a:r>
+          </a:p>
+        </p:txBody>
+      </p:sp>
+      <p:sp>
+        <p:nvSpPr>
+          <p:cNvPr id="900" name="Slide Number Placeholder 900"/>
+          <p:cNvSpPr>
+            <a:spLocks noGrp="1"/>
+          </p:cNvSpPr>
+          <p:nvPr>
+            <p:ph type="sldNum" sz="quarter" idx="4"/>
+          </p:nvPr>
+        </p:nvSpPr>
+        <p:spPr/>
+        <p:txBody>
+          <a:bodyPr/>
+          <a:lstStyle/>
+          <a:p>
+            <a:fld id="{8CF8A65D-8523-4C39-BD83-5C787F1FA9B3}" type="slidenum">
+              <a:rPr lang="en-US" smtClean="0"/>
+              <a:t>10</a:t>
+            </a:fld>
+            <a:endParaRPr lang="en-US"/>
+          </a:p>
+        </p:txBody>
+      </p:sp>
+      <p:sp>
+        <p:nvSpPr>
+          <p:cNvPr id="909" name="FooterBand"/>
+          <p:cNvSpPr/>
+          <p:nvPr/>
+        </p:nvSpPr>
+        <p:spPr>
+          <a:xfrm>
+            <a:off x="274320" y="5513831"/>
+            <a:ext cx="8595360" cy="905256"/>
+          </a:xfrm>
+          <a:prstGeom prst="rect">
+            <a:avLst/>
+          </a:prstGeom>
+          <a:solidFill>
+            <a:srgbClr val="8E6F3E"/>
+          </a:solidFill>
+          <a:ln>
+            <a:noFill/>
+          </a:ln>
+          <a:effectLst/>
+        </p:spPr>
+        <p:style>
+          <a:lnRef idx="1">
+            <a:schemeClr val="accent1"/>
+          </a:lnRef>
+          <a:fillRef idx="3">
+            <a:schemeClr val="accent1"/>
+          </a:fillRef>
+          <a:effectRef idx="2">
+            <a:schemeClr val="accent1"/>
+          </a:effectRef>
+          <a:fontRef idx="minor">
+            <a:schemeClr val="lt1"/>
+          </a:fontRef>
+        </p:style>
+        <p:txBody>
+          <a:bodyPr wrap="square" lIns="27432" tIns="22860" rIns="27432" bIns="22860" rtlCol="0" anchor="ctr"/>
+          <a:lstStyle/>
+          <a:p>
+            <a:pPr algn="ctr"/>
+            <a:r>
+              <a:rPr sz="2000" b="1" i="0" dirty="0">
+                <a:solidFill>
+                  <a:srgbClr val="FFFFFF"/>
+                </a:solidFill>
+              </a:rPr>
+              <a:t>YOUR TASK (2–3 minutes, with a partner): at least one failure mode per function.</a:t>
+            </a:r>
+          </a:p>
+          <a:p>
+            <a:pPr algn="ctr">
+              <a:spcBef>
+                <a:spcPts val="300"/>
+              </a:spcBef>
+            </a:pPr>
+            <a:r>
+              <a:rPr sz="2000" b="1" i="0" dirty="0">
+                <a:solidFill>
+                  <a:srgbClr val="FFFFFF"/>
+                </a:solidFill>
+              </a:rPr>
+              <a:t>Leave likelihood as ‘?’ — decide which modes warrant a control anyway.</a:t>
+            </a:r>
+          </a:p>
+        </p:txBody>
+      </p:sp>
+      <p:sp>
+        <p:nvSpPr>
+          <p:cNvPr id="920" name="Block"/>
+          <p:cNvSpPr/>
+          <p:nvPr/>
+        </p:nvSpPr>
+        <p:spPr>
+          <a:xfrm>
+            <a:off x="548640" y="1005840"/>
+            <a:ext cx="2560320" cy="566928"/>
+          </a:xfrm>
+          <a:prstGeom prst="rect">
+            <a:avLst/>
+          </a:prstGeom>
+          <a:solidFill>
+            <a:srgbClr val="8E6F3E"/>
+          </a:solidFill>
+          <a:ln>
+            <a:noFill/>
+          </a:ln>
+          <a:effectLst/>
+        </p:spPr>
+        <p:style>
+          <a:lnRef idx="1">
+            <a:schemeClr val="accent1"/>
+          </a:lnRef>
+          <a:fillRef idx="3">
+            <a:schemeClr val="accent1"/>
+          </a:fillRef>
+          <a:effectRef idx="2">
+            <a:schemeClr val="accent1"/>
+          </a:effectRef>
+          <a:fontRef idx="minor">
+            <a:schemeClr val="lt1"/>
+          </a:fontRef>
+        </p:style>
+        <p:txBody>
+          <a:bodyPr wrap="square" lIns="27432" tIns="22860" rIns="27432" bIns="22860" rtlCol="0" anchor="ctr"/>
+          <a:lstStyle/>
+          <a:p>
+            <a:pPr algn="ctr"/>
+            <a:r>
+              <a:rPr sz="1200" b="1" i="0">
+                <a:solidFill>
+                  <a:srgbClr val="FFFFFF"/>
+                </a:solidFill>
+              </a:rPr>
+              <a:t>CLOUDFLARE</a:t>
+            </a:r>
+          </a:p>
+        </p:txBody>
+      </p:sp>
+      <p:sp>
+        <p:nvSpPr>
+          <p:cNvPr id="921" name="RowCaption"/>
+          <p:cNvSpPr/>
+          <p:nvPr/>
+        </p:nvSpPr>
+        <p:spPr>
+          <a:xfrm>
+            <a:off x="3383280" y="1005840"/>
+            <a:ext cx="5212080" cy="566928"/>
+          </a:xfrm>
+          <a:prstGeom prst="rect">
+            <a:avLst/>
+          </a:prstGeom>
+          <a:noFill/>
+          <a:ln>
+            <a:noFill/>
+          </a:ln>
+          <a:effectLst/>
+        </p:spPr>
+        <p:style>
+          <a:lnRef idx="1">
+            <a:schemeClr val="accent1"/>
+          </a:lnRef>
+          <a:fillRef idx="3">
+            <a:schemeClr val="accent1"/>
+          </a:fillRef>
+          <a:effectRef idx="2">
+            <a:schemeClr val="accent1"/>
+          </a:effectRef>
+          <a:fontRef idx="minor">
+            <a:schemeClr val="lt1"/>
+          </a:fontRef>
+        </p:style>
+        <p:txBody>
+          <a:bodyPr wrap="square" lIns="27432" tIns="22860" rIns="27432" bIns="22860" rtlCol="0" anchor="ctr"/>
+          <a:lstStyle/>
+          <a:p>
+            <a:pPr algn="l"/>
+            <a:r>
+              <a:rPr sz="1600" b="0" i="0">
+                <a:solidFill>
+                  <a:srgbClr val="555960"/>
+                </a:solidFill>
+              </a:rPr>
+              <a:t>operates a Web Application Firewall (WAF): it inspects incoming web requests for attacks</a:t>
+            </a:r>
+          </a:p>
+        </p:txBody>
+      </p:sp>
+      <p:sp>
+        <p:nvSpPr>
+          <p:cNvPr id="923" name="Block"/>
+          <p:cNvSpPr/>
+          <p:nvPr/>
+        </p:nvSpPr>
+        <p:spPr>
+          <a:xfrm>
+            <a:off x="548640" y="1664208"/>
+            <a:ext cx="2560320" cy="566928"/>
+          </a:xfrm>
+          <a:prstGeom prst="rect">
+            <a:avLst/>
+          </a:prstGeom>
+          <a:solidFill>
+            <a:srgbClr val="8E6F3E"/>
+          </a:solidFill>
+          <a:ln>
+            <a:noFill/>
+          </a:ln>
+          <a:effectLst/>
+        </p:spPr>
+        <p:style>
+          <a:lnRef idx="1">
+            <a:schemeClr val="accent1"/>
+          </a:lnRef>
+          <a:fillRef idx="3">
+            <a:schemeClr val="accent1"/>
+          </a:fillRef>
+          <a:effectRef idx="2">
+            <a:schemeClr val="accent1"/>
+          </a:effectRef>
+          <a:fontRef idx="minor">
+            <a:schemeClr val="lt1"/>
+          </a:fontRef>
+        </p:style>
+        <p:txBody>
+          <a:bodyPr wrap="square" lIns="27432" tIns="22860" rIns="27432" bIns="22860" rtlCol="0" anchor="ctr"/>
+          <a:lstStyle/>
+          <a:p>
+            <a:pPr algn="ctr"/>
+            <a:r>
+              <a:rPr sz="1200" b="1" i="0">
+                <a:solidFill>
+                  <a:srgbClr val="FFFFFF"/>
+                </a:solidFill>
+              </a:rPr>
+              <a:t>RULE CHANGES</a:t>
+            </a:r>
+          </a:p>
+        </p:txBody>
+      </p:sp>
+      <p:sp>
+        <p:nvSpPr>
+          <p:cNvPr id="924" name="RowCaption"/>
+          <p:cNvSpPr/>
+          <p:nvPr/>
+        </p:nvSpPr>
+        <p:spPr>
+          <a:xfrm>
+            <a:off x="3383280" y="1664208"/>
+            <a:ext cx="5212080" cy="566928"/>
+          </a:xfrm>
+          <a:prstGeom prst="rect">
+            <a:avLst/>
+          </a:prstGeom>
+          <a:noFill/>
+          <a:ln>
+            <a:noFill/>
+          </a:ln>
+          <a:effectLst/>
+        </p:spPr>
+        <p:style>
+          <a:lnRef idx="1">
+            <a:schemeClr val="accent1"/>
+          </a:lnRef>
+          <a:fillRef idx="3">
+            <a:schemeClr val="accent1"/>
+          </a:fillRef>
+          <a:effectRef idx="2">
+            <a:schemeClr val="accent1"/>
+          </a:effectRef>
+          <a:fontRef idx="minor">
+            <a:schemeClr val="lt1"/>
+          </a:fontRef>
+        </p:style>
+        <p:txBody>
+          <a:bodyPr wrap="square" lIns="27432" tIns="22860" rIns="27432" bIns="22860" rtlCol="0" anchor="ctr"/>
+          <a:lstStyle/>
+          <a:p>
+            <a:pPr algn="l"/>
+            <a:r>
+              <a:rPr sz="1600" b="0" i="0">
+                <a:solidFill>
+                  <a:srgbClr val="555960"/>
+                </a:solidFill>
+              </a:rPr>
+              <a:t>new detection rules deploy without a software release — and propagate globally within seconds</a:t>
+            </a:r>
+          </a:p>
+        </p:txBody>
+      </p:sp>
+      <p:sp>
+        <p:nvSpPr>
+          <p:cNvPr id="926" name="Block"/>
+          <p:cNvSpPr/>
+          <p:nvPr/>
+        </p:nvSpPr>
+        <p:spPr>
+          <a:xfrm>
+            <a:off x="548640" y="2322576"/>
+            <a:ext cx="2560320" cy="566928"/>
+          </a:xfrm>
+          <a:prstGeom prst="rect">
+            <a:avLst/>
+          </a:prstGeom>
+          <a:solidFill>
+            <a:srgbClr val="8E6F3E"/>
+          </a:solidFill>
+          <a:ln>
+            <a:noFill/>
+          </a:ln>
+          <a:effectLst/>
+        </p:spPr>
+        <p:style>
+          <a:lnRef idx="1">
+            <a:schemeClr val="accent1"/>
+          </a:lnRef>
+          <a:fillRef idx="3">
+            <a:schemeClr val="accent1"/>
+          </a:fillRef>
+          <a:effectRef idx="2">
+            <a:schemeClr val="accent1"/>
+          </a:effectRef>
+          <a:fontRef idx="minor">
+            <a:schemeClr val="lt1"/>
+          </a:fontRef>
+        </p:style>
+        <p:txBody>
+          <a:bodyPr wrap="square" lIns="27432" tIns="22860" rIns="27432" bIns="22860" rtlCol="0" anchor="ctr"/>
+          <a:lstStyle/>
+          <a:p>
+            <a:pPr algn="ctr"/>
+            <a:r>
+              <a:rPr sz="1200" b="1" i="0" dirty="0">
+                <a:solidFill>
+                  <a:srgbClr val="FFFFFF"/>
+                </a:solidFill>
+              </a:rPr>
+              <a:t>RULE FORM</a:t>
+            </a:r>
+          </a:p>
+        </p:txBody>
+      </p:sp>
+      <p:sp>
+        <p:nvSpPr>
+          <p:cNvPr id="927" name="RowCaption"/>
+          <p:cNvSpPr/>
+          <p:nvPr/>
+        </p:nvSpPr>
+        <p:spPr>
+          <a:xfrm>
+            <a:off x="3383280" y="2322576"/>
+            <a:ext cx="5212080" cy="566928"/>
+          </a:xfrm>
+          <a:prstGeom prst="rect">
+            <a:avLst/>
+          </a:prstGeom>
+          <a:noFill/>
+          <a:ln>
+            <a:noFill/>
+          </a:ln>
+          <a:effectLst/>
+        </p:spPr>
+        <p:style>
+          <a:lnRef idx="1">
+            <a:schemeClr val="accent1"/>
+          </a:lnRef>
+          <a:fillRef idx="3">
+            <a:schemeClr val="accent1"/>
+          </a:fillRef>
+          <a:effectRef idx="2">
+            <a:schemeClr val="accent1"/>
+          </a:effectRef>
+          <a:fontRef idx="minor">
+            <a:schemeClr val="lt1"/>
+          </a:fontRef>
+        </p:style>
+        <p:txBody>
+          <a:bodyPr wrap="square" lIns="27432" tIns="22860" rIns="27432" bIns="22860" rtlCol="0" anchor="ctr"/>
+          <a:lstStyle/>
+          <a:p>
+            <a:pPr algn="l"/>
+            <a:r>
+              <a:rPr sz="1600" b="0" i="0">
+                <a:solidFill>
+                  <a:srgbClr val="555960"/>
+                </a:solidFill>
+              </a:rPr>
+              <a:t>some detection rules are written as regular expressions</a:t>
+            </a:r>
+          </a:p>
+        </p:txBody>
+      </p:sp>
+      <p:sp>
+        <p:nvSpPr>
+          <p:cNvPr id="5" name="ColumnHeading"/>
+          <p:cNvSpPr/>
+          <p:nvPr/>
+        </p:nvSpPr>
+        <p:spPr>
+          <a:xfrm>
+            <a:off x="365760" y="3072384"/>
+            <a:ext cx="1645920" cy="256032"/>
+          </a:xfrm>
+          <a:prstGeom prst="rect">
+            <a:avLst/>
+          </a:prstGeom>
+          <a:noFill/>
+          <a:ln>
+            <a:noFill/>
+          </a:ln>
+          <a:effectLst/>
+        </p:spPr>
+        <p:style>
+          <a:lnRef idx="1">
+            <a:schemeClr val="accent1"/>
+          </a:lnRef>
+          <a:fillRef idx="3">
+            <a:schemeClr val="accent1"/>
+          </a:fillRef>
+          <a:effectRef idx="2">
+            <a:schemeClr val="accent1"/>
+          </a:effectRef>
+          <a:fontRef idx="minor">
+            <a:schemeClr val="lt1"/>
+          </a:fontRef>
+        </p:style>
+        <p:txBody>
+          <a:bodyPr wrap="square" lIns="27432" tIns="22860" rIns="27432" bIns="22860" rtlCol="0" anchor="ctr"/>
+          <a:lstStyle/>
+          <a:p>
+            <a:pPr algn="ctr"/>
+            <a:r>
+              <a:rPr lang="en-US" sz="1200" b="1" i="0" dirty="0">
+                <a:solidFill>
+                  <a:schemeClr val="bg1"/>
+                </a:solidFill>
+              </a:rPr>
+              <a:t>FUNCTION</a:t>
+            </a:r>
+            <a:endParaRPr sz="2800" b="1" i="0" dirty="0">
+              <a:solidFill>
+                <a:schemeClr val="bg1"/>
+              </a:solidFill>
+            </a:endParaRPr>
+          </a:p>
+        </p:txBody>
+      </p:sp>
+      <p:sp>
+        <p:nvSpPr>
+          <p:cNvPr id="1000" name="ColumnHeading"/>
+          <p:cNvSpPr/>
+          <p:nvPr/>
+        </p:nvSpPr>
+        <p:spPr>
+          <a:xfrm>
+            <a:off x="2103120" y="3072384"/>
+            <a:ext cx="2194560" cy="256032"/>
+          </a:xfrm>
+          <a:prstGeom prst="rect">
+            <a:avLst/>
+          </a:prstGeom>
+          <a:noFill/>
+          <a:ln>
+            <a:noFill/>
+          </a:ln>
+          <a:effectLst/>
+        </p:spPr>
+        <p:style>
+          <a:lnRef idx="1">
+            <a:schemeClr val="accent1"/>
+          </a:lnRef>
+          <a:fillRef idx="3">
+            <a:schemeClr val="accent1"/>
+          </a:fillRef>
+          <a:effectRef idx="2">
+            <a:schemeClr val="accent1"/>
+          </a:effectRef>
+          <a:fontRef idx="minor">
+            <a:schemeClr val="lt1"/>
+          </a:fontRef>
+        </p:style>
+        <p:txBody>
+          <a:bodyPr wrap="square" lIns="27432" tIns="22860" rIns="27432" bIns="22860" rtlCol="0" anchor="ctr"/>
+          <a:lstStyle/>
+          <a:p>
+            <a:pPr algn="ctr"/>
+            <a:r>
+              <a:rPr lang="en-US" sz="1200" b="1" i="0" dirty="0">
+                <a:solidFill>
+                  <a:schemeClr val="bg1"/>
+                </a:solidFill>
+              </a:rPr>
+              <a:t>POSSIBLE FAILURE MODE</a:t>
+            </a:r>
+            <a:endParaRPr sz="2800" b="1" i="0" dirty="0">
+              <a:solidFill>
+                <a:schemeClr val="bg1"/>
+              </a:solidFill>
+            </a:endParaRPr>
+          </a:p>
+        </p:txBody>
+      </p:sp>
+      <p:sp>
+        <p:nvSpPr>
+          <p:cNvPr id="1001" name="ColumnHeading"/>
+          <p:cNvSpPr/>
+          <p:nvPr/>
+        </p:nvSpPr>
+        <p:spPr>
+          <a:xfrm>
+            <a:off x="4389120" y="3072384"/>
+            <a:ext cx="2011680" cy="256032"/>
+          </a:xfrm>
+          <a:prstGeom prst="rect">
+            <a:avLst/>
+          </a:prstGeom>
+          <a:noFill/>
+          <a:ln>
+            <a:noFill/>
+          </a:ln>
+          <a:effectLst/>
+        </p:spPr>
+        <p:style>
+          <a:lnRef idx="1">
+            <a:schemeClr val="accent1"/>
+          </a:lnRef>
+          <a:fillRef idx="3">
+            <a:schemeClr val="accent1"/>
+          </a:fillRef>
+          <a:effectRef idx="2">
+            <a:schemeClr val="accent1"/>
+          </a:effectRef>
+          <a:fontRef idx="minor">
+            <a:schemeClr val="lt1"/>
+          </a:fontRef>
+        </p:style>
+        <p:txBody>
+          <a:bodyPr wrap="square" lIns="27432" tIns="22860" rIns="27432" bIns="22860" rtlCol="0" anchor="ctr"/>
+          <a:lstStyle/>
+          <a:p>
+            <a:pPr algn="ctr"/>
+            <a:r>
+              <a:rPr lang="en-US" sz="1200" b="1" i="0" dirty="0">
+                <a:solidFill>
+                  <a:schemeClr val="bg1"/>
+                </a:solidFill>
+              </a:rPr>
+              <a:t>POTENTIAL EFFECT</a:t>
+            </a:r>
+            <a:endParaRPr sz="2800" b="1" i="0" dirty="0">
+              <a:solidFill>
+                <a:schemeClr val="bg1"/>
+              </a:solidFill>
+            </a:endParaRPr>
+          </a:p>
+        </p:txBody>
+      </p:sp>
+      <p:sp>
+        <p:nvSpPr>
+          <p:cNvPr id="1002" name="ColumnHeading"/>
+          <p:cNvSpPr/>
+          <p:nvPr/>
+        </p:nvSpPr>
+        <p:spPr>
+          <a:xfrm>
+            <a:off x="6492240" y="3072384"/>
+            <a:ext cx="2103120" cy="256032"/>
+          </a:xfrm>
+          <a:prstGeom prst="rect">
+            <a:avLst/>
+          </a:prstGeom>
+          <a:noFill/>
+          <a:ln>
+            <a:noFill/>
+          </a:ln>
+          <a:effectLst/>
+        </p:spPr>
+        <p:style>
+          <a:lnRef idx="1">
+            <a:schemeClr val="accent1"/>
+          </a:lnRef>
+          <a:fillRef idx="3">
+            <a:schemeClr val="accent1"/>
+          </a:fillRef>
+          <a:effectRef idx="2">
+            <a:schemeClr val="accent1"/>
+          </a:effectRef>
+          <a:fontRef idx="minor">
+            <a:schemeClr val="lt1"/>
+          </a:fontRef>
+        </p:style>
+        <p:txBody>
+          <a:bodyPr wrap="square" lIns="27432" tIns="22860" rIns="27432" bIns="22860" rtlCol="0" anchor="ctr"/>
+          <a:lstStyle/>
+          <a:p>
+            <a:pPr algn="ctr"/>
+            <a:r>
+              <a:rPr lang="en-US" sz="1200" b="1" i="0" dirty="0">
+                <a:solidFill>
+                  <a:schemeClr val="bg1"/>
+                </a:solidFill>
+              </a:rPr>
+              <a:t>PROPOSED CONTROL</a:t>
+            </a:r>
+            <a:endParaRPr sz="2800" b="1" i="0" dirty="0">
+              <a:solidFill>
+                <a:schemeClr val="bg1"/>
+              </a:solidFill>
+            </a:endParaRPr>
+          </a:p>
+        </p:txBody>
+      </p:sp>
+      <p:sp>
+        <p:nvSpPr>
+          <p:cNvPr id="1003" name="Block"/>
+          <p:cNvSpPr/>
+          <p:nvPr/>
+        </p:nvSpPr>
+        <p:spPr>
+          <a:xfrm>
+            <a:off x="365760" y="3401568"/>
+            <a:ext cx="1645920" cy="603504"/>
+          </a:xfrm>
+          <a:prstGeom prst="rect">
+            <a:avLst/>
+          </a:prstGeom>
+          <a:solidFill>
+            <a:srgbClr val="8E6F3E"/>
+          </a:solidFill>
+          <a:ln>
+            <a:noFill/>
+          </a:ln>
+          <a:effectLst/>
+        </p:spPr>
+        <p:style>
+          <a:lnRef idx="1">
+            <a:schemeClr val="accent1"/>
+          </a:lnRef>
+          <a:fillRef idx="3">
+            <a:schemeClr val="accent1"/>
+          </a:fillRef>
+          <a:effectRef idx="2">
+            <a:schemeClr val="accent1"/>
+          </a:effectRef>
+          <a:fontRef idx="minor">
+            <a:schemeClr val="lt1"/>
+          </a:fontRef>
+        </p:style>
+        <p:txBody>
+          <a:bodyPr wrap="square" lIns="27432" tIns="22860" rIns="27432" bIns="22860" rtlCol="0" anchor="ctr"/>
+          <a:lstStyle/>
+          <a:p>
+            <a:pPr algn="ctr"/>
+            <a:r>
+              <a:rPr sz="1200" b="1" i="0">
+                <a:solidFill>
+                  <a:srgbClr val="FFFFFF"/>
+                </a:solidFill>
+              </a:rPr>
+              <a:t>Evaluate WAF rule</a:t>
+            </a:r>
+          </a:p>
+        </p:txBody>
+      </p:sp>
+      <p:sp>
+        <p:nvSpPr>
+          <p:cNvPr id="1004" name="Block"/>
+          <p:cNvSpPr/>
+          <p:nvPr/>
+        </p:nvSpPr>
+        <p:spPr>
+          <a:xfrm>
+            <a:off x="365760" y="4059936"/>
+            <a:ext cx="1645920" cy="603504"/>
+          </a:xfrm>
+          <a:prstGeom prst="rect">
+            <a:avLst/>
+          </a:prstGeom>
+          <a:solidFill>
+            <a:srgbClr val="8E6F3E"/>
+          </a:solidFill>
+          <a:ln>
+            <a:noFill/>
+          </a:ln>
+          <a:effectLst/>
+        </p:spPr>
+        <p:style>
+          <a:lnRef idx="1">
+            <a:schemeClr val="accent1"/>
+          </a:lnRef>
+          <a:fillRef idx="3">
+            <a:schemeClr val="accent1"/>
+          </a:fillRef>
+          <a:effectRef idx="2">
+            <a:schemeClr val="accent1"/>
+          </a:effectRef>
+          <a:fontRef idx="minor">
+            <a:schemeClr val="lt1"/>
+          </a:fontRef>
+        </p:style>
+        <p:txBody>
+          <a:bodyPr wrap="square" lIns="27432" tIns="22860" rIns="27432" bIns="22860" rtlCol="0" anchor="ctr"/>
+          <a:lstStyle/>
+          <a:p>
+            <a:pPr algn="ctr"/>
+            <a:r>
+              <a:rPr sz="1200" b="1" i="0">
+                <a:solidFill>
+                  <a:srgbClr val="FFFFFF"/>
+                </a:solidFill>
+              </a:rPr>
+              <a:t>Validate new rule</a:t>
+            </a:r>
+          </a:p>
+        </p:txBody>
+      </p:sp>
+      <p:sp>
+        <p:nvSpPr>
+          <p:cNvPr id="1005" name="Block"/>
+          <p:cNvSpPr/>
+          <p:nvPr/>
+        </p:nvSpPr>
+        <p:spPr>
+          <a:xfrm>
+            <a:off x="365760" y="4718304"/>
+            <a:ext cx="1645920" cy="603504"/>
+          </a:xfrm>
+          <a:prstGeom prst="rect">
+            <a:avLst/>
+          </a:prstGeom>
+          <a:solidFill>
+            <a:srgbClr val="8E6F3E"/>
+          </a:solidFill>
+          <a:ln>
+            <a:noFill/>
+          </a:ln>
+          <a:effectLst/>
+        </p:spPr>
+        <p:style>
+          <a:lnRef idx="1">
+            <a:schemeClr val="accent1"/>
+          </a:lnRef>
+          <a:fillRef idx="3">
+            <a:schemeClr val="accent1"/>
+          </a:fillRef>
+          <a:effectRef idx="2">
+            <a:schemeClr val="accent1"/>
+          </a:effectRef>
+          <a:fontRef idx="minor">
+            <a:schemeClr val="lt1"/>
+          </a:fontRef>
+        </p:style>
+        <p:txBody>
+          <a:bodyPr wrap="square" lIns="27432" tIns="22860" rIns="27432" bIns="22860" rtlCol="0" anchor="ctr"/>
+          <a:lstStyle/>
+          <a:p>
+            <a:pPr algn="ctr"/>
+            <a:r>
+              <a:rPr sz="1200" b="1" i="0">
+                <a:solidFill>
+                  <a:srgbClr val="FFFFFF"/>
+                </a:solidFill>
+              </a:rPr>
+              <a:t>Distribute rule</a:t>
+            </a:r>
+          </a:p>
+        </p:txBody>
+      </p:sp>
+      <p:sp>
+        <p:nvSpPr>
+          <p:cNvPr id="903" name="Card"/>
+          <p:cNvSpPr/>
+          <p:nvPr/>
+        </p:nvSpPr>
+        <p:spPr>
+          <a:xfrm>
+            <a:off x="2103120" y="3401568"/>
+            <a:ext cx="2194560" cy="603504"/>
+          </a:xfrm>
+          <a:prstGeom prst="rect">
+            <a:avLst/>
+          </a:prstGeom>
+          <a:solidFill>
+            <a:srgbClr val="F5F1E8"/>
+          </a:solidFill>
+          <a:ln w="12700">
+            <a:solidFill>
+              <a:srgbClr val="C9B991"/>
+            </a:solidFill>
+          </a:ln>
+          <a:effectLst/>
+        </p:spPr>
+        <p:style>
+          <a:lnRef idx="1">
+            <a:schemeClr val="accent1"/>
+          </a:lnRef>
+          <a:fillRef idx="3">
+            <a:schemeClr val="accent1"/>
+          </a:fillRef>
+          <a:effectRef idx="2">
+            <a:schemeClr val="accent1"/>
+          </a:effectRef>
+          <a:fontRef idx="minor">
+            <a:schemeClr val="lt1"/>
+          </a:fontRef>
+        </p:style>
+        <p:txBody>
+          <a:bodyPr wrap="square" lIns="27432" tIns="22860" rIns="27432" bIns="22860" rtlCol="0" anchor="ctr"/>
+          <a:lstStyle/>
+          <a:p>
+            <a:pPr algn="ctr"/>
+            <a:r>
+              <a:rPr sz="2000" b="0" i="1" dirty="0">
+                <a:solidFill>
+                  <a:srgbClr val="5C4826"/>
+                </a:solidFill>
+              </a:rPr>
+              <a:t/>
+            </a:r>
+          </a:p>
+        </p:txBody>
+      </p:sp>
+      <p:sp>
+        <p:nvSpPr>
+          <p:cNvPr id="1006" name="Card"/>
+          <p:cNvSpPr/>
+          <p:nvPr/>
+        </p:nvSpPr>
+        <p:spPr>
+          <a:xfrm>
+            <a:off x="4389120" y="3401568"/>
+            <a:ext cx="2011680" cy="603504"/>
+          </a:xfrm>
+          <a:prstGeom prst="rect">
+            <a:avLst/>
+          </a:prstGeom>
+          <a:solidFill>
+            <a:srgbClr val="F5F1E8"/>
+          </a:solidFill>
+          <a:ln w="12700">
+            <a:solidFill>
+              <a:srgbClr val="C9B991"/>
+            </a:solidFill>
+          </a:ln>
+          <a:effectLst/>
+        </p:spPr>
+        <p:style>
+          <a:lnRef idx="1">
+            <a:schemeClr val="accent1"/>
+          </a:lnRef>
+          <a:fillRef idx="3">
+            <a:schemeClr val="accent1"/>
+          </a:fillRef>
+          <a:effectRef idx="2">
+            <a:schemeClr val="accent1"/>
+          </a:effectRef>
+          <a:fontRef idx="minor">
+            <a:schemeClr val="lt1"/>
+          </a:fontRef>
+        </p:style>
+        <p:txBody>
+          <a:bodyPr wrap="square" lIns="27432" tIns="22860" rIns="27432" bIns="22860" rtlCol="0" anchor="ctr"/>
+          <a:lstStyle/>
+          <a:p>
+            <a:pPr algn="ctr"/>
+            <a:r>
+              <a:rPr sz="2000" b="0" i="1" dirty="0">
+                <a:solidFill>
+                  <a:srgbClr val="5C4826"/>
+                </a:solidFill>
+              </a:rPr>
+              <a:t/>
+            </a:r>
+          </a:p>
+        </p:txBody>
+      </p:sp>
+      <p:sp>
+        <p:nvSpPr>
+          <p:cNvPr id="1007" name="Card"/>
+          <p:cNvSpPr/>
+          <p:nvPr/>
+        </p:nvSpPr>
+        <p:spPr>
+          <a:xfrm>
+            <a:off x="6492240" y="3401568"/>
+            <a:ext cx="2103120" cy="603504"/>
+          </a:xfrm>
+          <a:prstGeom prst="rect">
+            <a:avLst/>
+          </a:prstGeom>
+          <a:solidFill>
+            <a:srgbClr val="F5F1E8"/>
+          </a:solidFill>
+          <a:ln w="12700">
+            <a:solidFill>
+              <a:srgbClr val="C9B991"/>
+            </a:solidFill>
+          </a:ln>
+          <a:effectLst/>
+        </p:spPr>
+        <p:style>
+          <a:lnRef idx="1">
+            <a:schemeClr val="accent1"/>
+          </a:lnRef>
+          <a:fillRef idx="3">
+            <a:schemeClr val="accent1"/>
+          </a:fillRef>
+          <a:effectRef idx="2">
+            <a:schemeClr val="accent1"/>
+          </a:effectRef>
+          <a:fontRef idx="minor">
+            <a:schemeClr val="lt1"/>
+          </a:fontRef>
+        </p:style>
+        <p:txBody>
+          <a:bodyPr wrap="square" lIns="27432" tIns="22860" rIns="27432" bIns="22860" rtlCol="0" anchor="ctr"/>
+          <a:lstStyle/>
+          <a:p>
+            <a:pPr algn="ctr"/>
+            <a:r>
+              <a:rPr sz="2000" b="0" i="1" dirty="0">
+                <a:solidFill>
+                  <a:srgbClr val="5C4826"/>
+                </a:solidFill>
+              </a:rPr>
+              <a:t/>
+            </a:r>
+          </a:p>
+        </p:txBody>
+      </p:sp>
+      <p:sp>
+        <p:nvSpPr>
+          <p:cNvPr id="1008" name="Card"/>
+          <p:cNvSpPr/>
+          <p:nvPr/>
+        </p:nvSpPr>
+        <p:spPr>
+          <a:xfrm>
+            <a:off x="2103120" y="4059936"/>
+            <a:ext cx="2194560" cy="603504"/>
+          </a:xfrm>
+          <a:prstGeom prst="rect">
+            <a:avLst/>
+          </a:prstGeom>
+          <a:solidFill>
+            <a:srgbClr val="F5F1E8"/>
+          </a:solidFill>
+          <a:ln w="12700">
+            <a:solidFill>
+              <a:srgbClr val="C9B991"/>
+            </a:solidFill>
+          </a:ln>
+          <a:effectLst/>
+        </p:spPr>
+        <p:style>
+          <a:lnRef idx="1">
+            <a:schemeClr val="accent1"/>
+          </a:lnRef>
+          <a:fillRef idx="3">
+            <a:schemeClr val="accent1"/>
+          </a:fillRef>
+          <a:effectRef idx="2">
+            <a:schemeClr val="accent1"/>
+          </a:effectRef>
+          <a:fontRef idx="minor">
+            <a:schemeClr val="lt1"/>
+          </a:fontRef>
+        </p:style>
+        <p:txBody>
+          <a:bodyPr wrap="square" lIns="27432" tIns="22860" rIns="27432" bIns="22860" rtlCol="0" anchor="ctr"/>
+          <a:lstStyle/>
+          <a:p>
+            <a:pPr algn="ctr"/>
+            <a:r>
+              <a:rPr sz="2000" b="0" i="1" dirty="0">
+                <a:solidFill>
+                  <a:srgbClr val="5C4826"/>
+                </a:solidFill>
+              </a:rPr>
+              <a:t/>
+            </a:r>
+          </a:p>
+        </p:txBody>
+      </p:sp>
+      <p:sp>
+        <p:nvSpPr>
+          <p:cNvPr id="1009" name="Card"/>
+          <p:cNvSpPr/>
+          <p:nvPr/>
+        </p:nvSpPr>
+        <p:spPr>
+          <a:xfrm>
+            <a:off x="4389120" y="4059936"/>
+            <a:ext cx="2011680" cy="603504"/>
+          </a:xfrm>
+          <a:prstGeom prst="rect">
+            <a:avLst/>
+          </a:prstGeom>
+          <a:solidFill>
+            <a:srgbClr val="F5F1E8"/>
+          </a:solidFill>
+          <a:ln w="12700">
+            <a:solidFill>
+              <a:srgbClr val="C9B991"/>
+            </a:solidFill>
+          </a:ln>
+          <a:effectLst/>
+        </p:spPr>
+        <p:style>
+          <a:lnRef idx="1">
+            <a:schemeClr val="accent1"/>
+          </a:lnRef>
+          <a:fillRef idx="3">
+            <a:schemeClr val="accent1"/>
+          </a:fillRef>
+          <a:effectRef idx="2">
+            <a:schemeClr val="accent1"/>
+          </a:effectRef>
+          <a:fontRef idx="minor">
+            <a:schemeClr val="lt1"/>
+          </a:fontRef>
+        </p:style>
+        <p:txBody>
+          <a:bodyPr wrap="square" lIns="27432" tIns="22860" rIns="27432" bIns="22860" rtlCol="0" anchor="ctr"/>
+          <a:lstStyle/>
+          <a:p>
+            <a:pPr algn="ctr"/>
+            <a:r>
+              <a:rPr sz="2000" b="0" i="1" dirty="0">
+                <a:solidFill>
+                  <a:srgbClr val="5C4826"/>
+                </a:solidFill>
+              </a:rPr>
+              <a:t/>
+            </a:r>
+          </a:p>
+        </p:txBody>
+      </p:sp>
+      <p:sp>
+        <p:nvSpPr>
+          <p:cNvPr id="1010" name="Card"/>
+          <p:cNvSpPr/>
+          <p:nvPr/>
+        </p:nvSpPr>
+        <p:spPr>
+          <a:xfrm>
+            <a:off x="6492240" y="4059936"/>
+            <a:ext cx="2103120" cy="603504"/>
+          </a:xfrm>
+          <a:prstGeom prst="rect">
+            <a:avLst/>
+          </a:prstGeom>
+          <a:solidFill>
+            <a:srgbClr val="F5F1E8"/>
+          </a:solidFill>
+          <a:ln w="12700">
+            <a:solidFill>
+              <a:srgbClr val="C9B991"/>
+            </a:solidFill>
+          </a:ln>
+          <a:effectLst/>
+        </p:spPr>
+        <p:style>
+          <a:lnRef idx="1">
+            <a:schemeClr val="accent1"/>
+          </a:lnRef>
+          <a:fillRef idx="3">
+            <a:schemeClr val="accent1"/>
+          </a:fillRef>
+          <a:effectRef idx="2">
+            <a:schemeClr val="accent1"/>
+          </a:effectRef>
+          <a:fontRef idx="minor">
+            <a:schemeClr val="lt1"/>
+          </a:fontRef>
+        </p:style>
+        <p:txBody>
+          <a:bodyPr wrap="square" lIns="27432" tIns="22860" rIns="27432" bIns="22860" rtlCol="0" anchor="ctr"/>
+          <a:lstStyle/>
+          <a:p>
+            <a:pPr algn="ctr"/>
+            <a:r>
+              <a:rPr sz="2000" b="0" i="1" dirty="0">
+                <a:solidFill>
+                  <a:srgbClr val="5C4826"/>
+                </a:solidFill>
+              </a:rPr>
+              <a:t/>
+            </a:r>
+          </a:p>
+        </p:txBody>
+      </p:sp>
+      <p:sp>
+        <p:nvSpPr>
+          <p:cNvPr id="1011" name="Card"/>
+          <p:cNvSpPr/>
+          <p:nvPr/>
+        </p:nvSpPr>
+        <p:spPr>
+          <a:xfrm>
+            <a:off x="2103120" y="4718304"/>
+            <a:ext cx="2194560" cy="603504"/>
+          </a:xfrm>
+          <a:prstGeom prst="rect">
+            <a:avLst/>
+          </a:prstGeom>
+          <a:solidFill>
+            <a:srgbClr val="F5F1E8"/>
+          </a:solidFill>
+          <a:ln w="12700">
+            <a:solidFill>
+              <a:srgbClr val="C9B991"/>
+            </a:solidFill>
+          </a:ln>
+          <a:effectLst/>
+        </p:spPr>
+        <p:style>
+          <a:lnRef idx="1">
+            <a:schemeClr val="accent1"/>
+          </a:lnRef>
+          <a:fillRef idx="3">
+            <a:schemeClr val="accent1"/>
+          </a:fillRef>
+          <a:effectRef idx="2">
+            <a:schemeClr val="accent1"/>
+          </a:effectRef>
+          <a:fontRef idx="minor">
+            <a:schemeClr val="lt1"/>
+          </a:fontRef>
+        </p:style>
+        <p:txBody>
+          <a:bodyPr wrap="square" lIns="27432" tIns="22860" rIns="27432" bIns="22860" rtlCol="0" anchor="ctr"/>
+          <a:lstStyle/>
+          <a:p>
+            <a:pPr algn="ctr"/>
+            <a:r>
+              <a:rPr sz="2000" b="0" i="1" dirty="0">
+                <a:solidFill>
+                  <a:srgbClr val="5C4826"/>
+                </a:solidFill>
+              </a:rPr>
+              <a:t/>
+            </a:r>
+          </a:p>
+        </p:txBody>
+      </p:sp>
+      <p:sp>
+        <p:nvSpPr>
+          <p:cNvPr id="1012" name="Card"/>
+          <p:cNvSpPr/>
+          <p:nvPr/>
+        </p:nvSpPr>
+        <p:spPr>
+          <a:xfrm>
+            <a:off x="4389120" y="4718304"/>
+            <a:ext cx="2011680" cy="603504"/>
+          </a:xfrm>
+          <a:prstGeom prst="rect">
+            <a:avLst/>
+          </a:prstGeom>
+          <a:solidFill>
+            <a:srgbClr val="F5F1E8"/>
+          </a:solidFill>
+          <a:ln w="12700">
+            <a:solidFill>
+              <a:srgbClr val="C9B991"/>
+            </a:solidFill>
+          </a:ln>
+          <a:effectLst/>
+        </p:spPr>
+        <p:style>
+          <a:lnRef idx="1">
+            <a:schemeClr val="accent1"/>
+          </a:lnRef>
+          <a:fillRef idx="3">
+            <a:schemeClr val="accent1"/>
+          </a:fillRef>
+          <a:effectRef idx="2">
+            <a:schemeClr val="accent1"/>
+          </a:effectRef>
+          <a:fontRef idx="minor">
+            <a:schemeClr val="lt1"/>
+          </a:fontRef>
+        </p:style>
+        <p:txBody>
+          <a:bodyPr wrap="square" lIns="27432" tIns="22860" rIns="27432" bIns="22860" rtlCol="0" anchor="ctr"/>
+          <a:lstStyle/>
+          <a:p>
+            <a:pPr algn="ctr"/>
+            <a:r>
+              <a:rPr sz="2000" b="0" i="1" dirty="0">
+                <a:solidFill>
+                  <a:srgbClr val="5C4826"/>
+                </a:solidFill>
+              </a:rPr>
+              <a:t/>
+            </a:r>
+          </a:p>
+        </p:txBody>
+      </p:sp>
+      <p:sp>
+        <p:nvSpPr>
+          <p:cNvPr id="1013" name="Card"/>
+          <p:cNvSpPr/>
+          <p:nvPr/>
+        </p:nvSpPr>
+        <p:spPr>
+          <a:xfrm>
+            <a:off x="6492240" y="4718304"/>
+            <a:ext cx="2103120" cy="603504"/>
+          </a:xfrm>
+          <a:prstGeom prst="rect">
+            <a:avLst/>
+          </a:prstGeom>
+          <a:solidFill>
+            <a:srgbClr val="F5F1E8"/>
+          </a:solidFill>
+          <a:ln w="12700">
+            <a:solidFill>
+              <a:srgbClr val="C9B991"/>
+            </a:solidFill>
+          </a:ln>
+          <a:effectLst/>
+        </p:spPr>
+        <p:style>
+          <a:lnRef idx="1">
+            <a:schemeClr val="accent1"/>
+          </a:lnRef>
+          <a:fillRef idx="3">
+            <a:schemeClr val="accent1"/>
+          </a:fillRef>
+          <a:effectRef idx="2">
+            <a:schemeClr val="accent1"/>
+          </a:effectRef>
+          <a:fontRef idx="minor">
+            <a:schemeClr val="lt1"/>
+          </a:fontRef>
+        </p:style>
+        <p:txBody>
+          <a:bodyPr wrap="square" lIns="27432" tIns="22860" rIns="27432" bIns="22860" rtlCol="0" anchor="ctr"/>
+          <a:lstStyle/>
+          <a:p>
+            <a:pPr algn="ctr"/>
+            <a:r>
+              <a:rPr sz="2000" b="0" i="1" dirty="0">
+                <a:solidFill>
+                  <a:srgbClr val="5C4826"/>
+                </a:solidFill>
+              </a:rPr>
+              <a:t/>
+            </a:r>
+          </a:p>
+        </p:txBody>
+      </p:sp>
     </p:spTree>
   </p:cSld>
   <p:clrMapOvr>

--- a/book/_design/2-4-redux-build/2-4-redux-WIP.pptx
+++ b/book/_design/2-4-redux-build/2-4-redux-WIP.pptx
@@ -1206,6 +1206,11 @@
           </a:p>
           <a:p>
             <a:r>
+              <a:t>BUILD (ANIMATION-IN-SPEECH — no authored animation; run the reveal as staged speech): Step 1 — read the lead and the four-step PROCEDURE at the top, before any row: identify a plausible failure mode; determine its consequences; identify existing or proposed controls; decide whether the remaining risk warrants action. This is the method slide 27 asks students to run unaided. Step 2 — only then walk the worked table one row at a time, naming which procedure step each column instantiates (failure mode -&gt; step 1, effect -&gt; step 2, candidate control -&gt; step 3). Step 3 — close on the occurrence line at the bottom: deciding which modes warrant action under unknown probabilities IS step 4.</a:t>
+            </a:r>
+          </a:p>
+          <a:p>
+            <a:r>
               <a:t>THE WORKED TABLE: each row: a FUNCTION of the system we know thoroughly, a failure mode, its effect, a candidate control — all met on slides 21–25.</a:t>
             </a:r>
           </a:p>
@@ -1217,6 +1222,11 @@
           <a:p>
             <a:r>
               <a:t>RATINGS (notes only): classical FMEA multiplies severity, occurrence, and detection into a Risk Priority Number — but multiplying ordinal ratings does not make an RPN of 120 twice the risk of 60; the AIAG &amp; VDA FMEA Handbook (1st ed., 2019) replaces RPN with Action Priority. Occurrence stays '?' deliberately: the method's value is exposing uncertainty, not manufacturing numerical certainty.</a:t>
+            </a:r>
+          </a:p>
+          <a:p>
+            <a:r>
+              <a:t>SIMPLIFICATION (say it to the class): a full FMEA also assesses severity, occurrence, and detectability to prioritize action. We are using a simplified version because we lack reliable estimates.</a:t>
             </a:r>
           </a:p>
           <a:p>
@@ -1726,7 +1736,7 @@
           <a:lstStyle/>
           <a:p>
             <a:r>
-              <a:t>TIMING: 2 minutes. FIRST OF THREE CAUSAL BOUNDARIES.</a:t>
+              <a:t>TIMING: 1 minutes. FIRST OF THREE CAUSAL BOUNDARIES. DELIVER EFFICIENTLY (author reallocation 261015): reduce exposition — state the boundary, the model, and the intervention, then move; slide 6's 4-minute commitment discussion is protected and untouched.</a:t>
             </a:r>
           </a:p>
           <a:p>
@@ -2084,6 +2094,11 @@
               <a:t>NAMING + THE DISTINCTIVE CLAIM (author): say the model's NAME — this is Reason's Swiss cheese model — and state its distinctive claim precisely: every defensive layer can contain weaknesses, and a failure escapes only when weaknesses in successive layers ALIGN. The red path through the red-rimmed holes is the alignment; the other holes are weaknesses that this particular trajectory did not exercise. Without the alignment idea a student leaves with defense-in-depth but not Reason's contribution: defenses fail TOGETHER, as a configuration, not merely one at a time.</a:t>
             </a:r>
           </a:p>
+          <a:p>
+            <a:r>
+              <a:t>QUALIFICATION (author, notes only — the slide wording stays): 'a failure escapes only when the weaknesses ALIGN' is a simplification. The intended meaning is that weaknesses align across the defenses RELEVANT TO A PARTICULAR FAILURE TRAJECTORY — not that every conceivable defense in the organization must fail. Carry the qualification verbally if a student presses on it.</a:t>
+            </a:r>
+          </a:p>
         </p:txBody>
       </p:sp>
       <p:sp>
@@ -2151,7 +2166,7 @@
           <a:lstStyle/>
           <a:p>
             <a:r>
-              <a:t>TIMING: 3 minutes. THE EVIDENCE REPLACES THE SCHEMATIC.</a:t>
+              <a:t>TIMING: 2 minutes. THE EVIDENCE REPLACES THE SCHEMATIC. DELIVER EFFICIENTLY (author reallocation 261015): slide 7 already introduced the evidence — walk the four rows and the absent/failed distinction without re-deriving each finding.</a:t>
             </a:r>
           </a:p>
           <a:p>
@@ -2966,7 +2981,7 @@
           <a:lstStyle/>
           <a:p>
             <a:r>
-              <a:t>TIMING: 3 minutes. THE CENTRAL CONCEPTUAL PAYOFF OF MOVEMENT 3.</a:t>
+              <a:t>TIMING: 2 minutes. THE CENTRAL CONCEPTUAL PAYOFF OF MOVEMENT 3. PACING (author reallocation 261015): state the common-cause principle once and do not re-derive it — slide 18 carries the architectural discussion and keeps its protected 4 minutes.</a:t>
             </a:r>
           </a:p>
           <a:p>
@@ -3516,7 +3531,7 @@
           </a:p>
           <a:p>
             <a:r>
-              <a:t>EXPOSITION ORDER (author): read the intro sentence first, then walk the chain. The distinction to land before the diagram: experience accumulates by itself; expertise does not. Reflection is the deliberate comparison of expectation with outcome — that comparison, not the hours, is what feeds the repertoire.</a:t>
+              <a:t>EXPOSITION ORDER (author, revised 261015): walk the chain, then land the distinction with the Schön line beneath the diagram — experience accumulates by itself; expertise does not. Reflection is the deliberate comparison of expectation with outcome, and that comparison, not the hours, feeds the repertoire. (The duplicate opening sentence above the diagram was removed: one statement of the point, stated once.)</a:t>
             </a:r>
           </a:p>
         </p:txBody>
@@ -3586,7 +3601,7 @@
           <a:lstStyle/>
           <a:p>
             <a:r>
-              <a:t>TIMING: 1 minutes. GOVERNANCE CONVERSION — the lesson changes the ENVIRONMENT.</a:t>
+              <a:t>TIMING: 2 minutes. GOVERNANCE CONVERSION — the lesson changes the ENVIRONMENT. (Reallocated +1 minute, author revision 261015: this slide introduces five diagnostic categories and maps them to four earlier course units — do not rush the walk.)</a:t>
             </a:r>
           </a:p>
           <a:p>
@@ -3596,12 +3611,12 @@
           </a:p>
           <a:p>
             <a:r>
-              <a:t>FACTUAL CARE: do NOT claim CrowdStrike lacked all five. Some controls existed and proved inadequate — the Content Validator RAN (against the wrong contract, RCA finding 4). The right-hand column is a proposed engineering response, not a description of CrowdStrike's actual remediation.</a:t>
-            </a:r>
-          </a:p>
-          <a:p>
-            <a:r>
-              <a:t>PACING (author): the cover-the-right-column reveal is CUT for time — walk the rows directly and state the slide-9 contrast yourself; the FMEA exercise two slides ahead carries this movement's active learning.</a:t>
+              <a:t>FACTUAL CARE: do NOT claim CrowdStrike lacked all five. Some controls existed and proved inadequate — the Content Validator RAN (against the wrong contract, RCA finding 4). A control that was ABSENT and one that ran against the WRONG OBLIGATION call for different responses: build the missing control versus re-point the existing one. The right-hand column is a proposed engineering response, not a description of CrowdStrike's actual remediation.</a:t>
+            </a:r>
+          </a:p>
+          <a:p>
+            <a:r>
+              <a:t>PACING (author): the cover-the-right-column reveal stays CUT — the FMEA exercise two slides ahead carries this movement's active learning. Spend the restored second minute on the five-row walk and the unit mapping, and state the slide-9 contrast yourself.</a:t>
             </a:r>
           </a:p>
           <a:p>
@@ -3611,7 +3626,7 @@
           </a:p>
           <a:p>
             <a:r>
-              <a:t>EXPECTED ANSWERS AND MISCONCEPTION: 'add more gates.' The footer is the rule: a failure is not a request for another gate — diagnose what was missing, THEN encode it.</a:t>
+              <a:t>EXPECTED ANSWERS AND MISCONCEPTION: 'add more gates.' The footer is the rule: a failure is not a request for another gate — absent and inadequate controls call for different responses. Diagnose which category the chain broke at, then encode it; the on-slide line says it: not every failure requires all five.</a:t>
             </a:r>
           </a:p>
           <a:p>
@@ -3691,7 +3706,7 @@
           <a:lstStyle/>
           <a:p>
             <a:r>
-              <a:t>TIMING: 1 minutes. THE LOCAL AND SYSTEMIC ANALYSES MEET. Pose the footer question, take ONE answer, state the recognition yourself.</a:t>
+              <a:t>TIMING: 2 minutes. THE LOCAL AND SYSTEMIC ANALYSES MEET. Pose the footer question and take one or two answers before stating the recognition yourself — students must reason about organizational authority, which needs a beat (author reallocation 261015).</a:t>
             </a:r>
           </a:p>
           <a:p>
@@ -3786,7 +3801,7 @@
           <a:lstStyle/>
           <a:p>
             <a:r>
-              <a:t>TIMING: 1 minutes. CLOSES THE CROWDSTRIKE INVESTIGATION. Walk the rows briskly — the next slide re-invokes this slide's lesson (a control's existence is not evidence of its effectiveness) inside the FMEA's staged-rollout row.</a:t>
+              <a:t>TIMING: 2 minutes. CLOSES THE CROWDSTRIKE INVESTIGATION. Walk the rows with enough time for students to weigh what each evidence row establishes (author reallocation 261015) — the next slide re-invokes this slide's lesson (a control's existence is not evidence of its effectiveness) inside the FMEA's staged-rollout row.</a:t>
             </a:r>
           </a:p>
           <a:p>
@@ -3896,6 +3911,16 @@
           </a:p>
           <a:p>
             <a:r>
+              <a:t>TRIGGER AND AMPLIFIER (now labelled on the slide): the pathological regex is the TRIGGER — it exhausts CPU; global deployment without staged containment is the AMPLIFIER — it set the blast radius. Both are needed to explain the incident's scale, and the pairing is the CrowdStrike parallel: there the content defect was the trigger and unstaged Rapid Response Content distribution the amplifier.</a:t>
+            </a:r>
+          </a:p>
+          <a:p>
+            <a:r>
+              <a:t>WHAT THE STEP COUNTS MEASURE (author): the counts are the number of candidate matching paths the engine explores before it can conclude — the work of backtracking — not merely a reflection of a longer input. And present 23-vs-555 as an ILLUSTRATION of the phenomenon, not a proof of exponential complexity: two measurements cannot establish an asymptotic growth rate.</a:t>
+            </a:r>
+          </a:p>
+          <a:p>
+            <a:r>
               <a:t>FACTS (Cloudflare post-mortem, 'Details of the Cloudflare outage on July 2, 2019'): a WAF Managed Rule targeting XSS deployed globally at 13:42 UTC — in seconds, with no staged rollout, while software releases went DOG → PIG → Canary; the sub-pattern .*(?:.*=.*) caused catastrophic backtracking (their worked numbers: 'x=x' took 23 steps; 'x=' plus twenty 'x's took 555); PCRE 'has no mechanism to protect against a runaway expression'; WAF identified 14:00, killed globally 14:07, traffic normal 14:09, re-enabled 14:52 — 27 minutes of impact. A CPU-usage protection had been accidentally removed weeks earlier.</a:t>
             </a:r>
           </a:p>
@@ -3992,6 +4017,11 @@
           <a:p>
             <a:r>
               <a:t>ENGINEERING POINT: students apply the models WITHOUT being led. Each group picks ONE model, proposes an intervention the incident's evidence supports, and answers: what the model preserves, what mechanism it explains, what intervention follows, what evidence would support it, who has authority to implement it.</a:t>
+            </a:r>
+          </a:p>
+          <a:p>
+            <a:r>
+              <a:t>VISIBLE TASK (author revision 261015): 'Choose ONE model' is now in the on-slide instructions — groups attempt one full analysis in the five minutes, not three shallow ones.</a:t>
             </a:r>
           </a:p>
           <a:p>
@@ -16907,51 +16937,6 @@
           </a:p>
         </p:txBody>
       </p:sp>
-      <p:sp>
-        <p:nvSpPr>
-          <p:cNvPr id="1002" name="Label"/>
-          <p:cNvSpPr txBox="1"/>
-          <p:nvPr/>
-        </p:nvSpPr>
-        <p:spPr>
-          <a:xfrm>
-            <a:off x="548640" y="868680"/>
-            <a:ext cx="8046720" cy="566928"/>
-          </a:xfrm>
-          <a:prstGeom prst="rect">
-            <a:avLst/>
-          </a:prstGeom>
-          <a:noFill/>
-        </p:spPr>
-        <p:txBody>
-          <a:bodyPr wrap="square" lIns="27432" tIns="22860" rIns="27432" bIns="22860" anchor="t">
-            <a:spAutoFit/>
-          </a:bodyPr>
-          <a:lstStyle/>
-          <a:p>
-            <a:pPr algn="ctr"/>
-            <a:r>
-              <a:rPr sz="1300" b="1" i="1">
-                <a:solidFill>
-                  <a:srgbClr val="5C4826"/>
-                </a:solidFill>
-              </a:rPr>
-              <a:t>Engineers develop expertise by examining the consequences of their decisions and</a:t>
-            </a:r>
-          </a:p>
-          <a:p>
-            <a:pPr algn="ctr"/>
-            <a:r>
-              <a:rPr sz="1300" b="1" i="1">
-                <a:solidFill>
-                  <a:srgbClr val="5C4826"/>
-                </a:solidFill>
-              </a:rPr>
-              <a:t>incorporating what they learn into future judgment — reflection, not mere accumulation of experience.</a:t>
-            </a:r>
-          </a:p>
-        </p:txBody>
-      </p:sp>
     </p:spTree>
   </p:cSld>
   <p:clrMapOvr>
@@ -17088,7 +17073,7 @@
         </p:nvSpPr>
         <p:spPr>
           <a:xfrm>
-            <a:off x="3840480" y="2167128"/>
+            <a:off x="3840480" y="2075688"/>
             <a:ext cx="4754880" cy="566928"/>
           </a:xfrm>
           <a:prstGeom prst="rect">
@@ -17194,7 +17179,7 @@
         </p:nvSpPr>
         <p:spPr>
           <a:xfrm>
-            <a:off x="731520" y="2167128"/>
+            <a:off x="731520" y="2075688"/>
             <a:ext cx="2926080" cy="566928"/>
           </a:xfrm>
           <a:prstGeom prst="rect">
@@ -17246,7 +17231,7 @@
         </p:nvSpPr>
         <p:spPr>
           <a:xfrm>
-            <a:off x="731520" y="3008376"/>
+            <a:off x="731520" y="2825496"/>
             <a:ext cx="2926080" cy="566928"/>
           </a:xfrm>
           <a:prstGeom prst="rect">
@@ -17298,7 +17283,7 @@
         </p:nvSpPr>
         <p:spPr>
           <a:xfrm>
-            <a:off x="731520" y="3849624"/>
+            <a:off x="731520" y="3575304"/>
             <a:ext cx="2926080" cy="566928"/>
           </a:xfrm>
           <a:prstGeom prst="rect">
@@ -17350,7 +17335,7 @@
         </p:nvSpPr>
         <p:spPr>
           <a:xfrm>
-            <a:off x="731520" y="4690872"/>
+            <a:off x="731520" y="4325112"/>
             <a:ext cx="2926080" cy="566928"/>
           </a:xfrm>
           <a:prstGeom prst="rect">
@@ -17402,7 +17387,7 @@
         </p:nvSpPr>
         <p:spPr>
           <a:xfrm>
-            <a:off x="3840480" y="3008376"/>
+            <a:off x="3840480" y="2825496"/>
             <a:ext cx="4754880" cy="566928"/>
           </a:xfrm>
           <a:prstGeom prst="rect">
@@ -17456,7 +17441,7 @@
         </p:nvSpPr>
         <p:spPr>
           <a:xfrm>
-            <a:off x="3840480" y="3849624"/>
+            <a:off x="3840480" y="3575304"/>
             <a:ext cx="4754880" cy="566928"/>
           </a:xfrm>
           <a:prstGeom prst="rect">
@@ -17510,7 +17495,7 @@
         </p:nvSpPr>
         <p:spPr>
           <a:xfrm>
-            <a:off x="3840480" y="4690872"/>
+            <a:off x="3840480" y="4325112"/>
             <a:ext cx="4754880" cy="566928"/>
           </a:xfrm>
           <a:prstGeom prst="rect">
@@ -17601,7 +17586,7 @@
                   <a:schemeClr val="bg1"/>
                 </a:solidFill>
               </a:rPr>
-              <a:t>WHAT WAS MISSING?</a:t>
+              <a:t>WHAT MIGHT WE CHANGE?</a:t>
             </a:r>
             <a:endParaRPr sz="2800" b="1" i="0" dirty="0">
               <a:solidFill>
@@ -17719,7 +17704,7 @@
                   <a:srgbClr val="FFFFFF"/>
                 </a:solidFill>
               </a:rPr>
-              <a:t>A failure is not a request for another gate. </a:t>
+              <a:t>A failure is not a request for another gate.</a:t>
             </a:r>
           </a:p>
           <a:p>
@@ -17730,7 +17715,7 @@
                   <a:srgbClr val="FFFFFF"/>
                 </a:solidFill>
               </a:rPr>
-              <a:t>Diagnose what was missing, then encode it.</a:t>
+              <a:t>Absent and inadequate controls call for different responses.</a:t>
             </a:r>
           </a:p>
         </p:txBody>
@@ -17744,7 +17729,7 @@
         <p:spPr>
           <a:xfrm>
             <a:off x="2194560" y="1892807"/>
-            <a:ext cx="0" cy="274320"/>
+            <a:ext cx="0" cy="182880"/>
           </a:xfrm>
           <a:prstGeom prst="line">
             <a:avLst/>
@@ -17779,8 +17764,8 @@
         </p:nvCxnSpPr>
         <p:spPr>
           <a:xfrm>
-            <a:off x="2194560" y="2734056"/>
-            <a:ext cx="0" cy="274319"/>
+            <a:off x="2194560" y="2642616"/>
+            <a:ext cx="0" cy="182880"/>
           </a:xfrm>
           <a:prstGeom prst="line">
             <a:avLst/>
@@ -17815,8 +17800,8 @@
         </p:nvCxnSpPr>
         <p:spPr>
           <a:xfrm>
-            <a:off x="2194560" y="3575304"/>
-            <a:ext cx="0" cy="274319"/>
+            <a:off x="2194560" y="3392424"/>
+            <a:ext cx="0" cy="182880"/>
           </a:xfrm>
           <a:prstGeom prst="line">
             <a:avLst/>
@@ -17851,8 +17836,8 @@
         </p:nvCxnSpPr>
         <p:spPr>
           <a:xfrm>
-            <a:off x="2194560" y="4416552"/>
-            <a:ext cx="0" cy="274319"/>
+            <a:off x="2194560" y="4142232"/>
+            <a:ext cx="0" cy="182880"/>
           </a:xfrm>
           <a:prstGeom prst="line">
             <a:avLst/>
@@ -17909,6 +17894,51 @@
                 </a:solidFill>
               </a:rPr>
               <a:t>obligation → Requirements · representation → Modeling · evidence + evaluation → Validation · enforcement → Alignment</a:t>
+            </a:r>
+          </a:p>
+        </p:txBody>
+      </p:sp>
+      <p:sp>
+        <p:nvSpPr>
+          <p:cNvPr id="1004" name="Label"/>
+          <p:cNvSpPr txBox="1"/>
+          <p:nvPr/>
+        </p:nvSpPr>
+        <p:spPr>
+          <a:xfrm>
+            <a:off x="548640" y="4974336"/>
+            <a:ext cx="8046720" cy="384048"/>
+          </a:xfrm>
+          <a:prstGeom prst="rect">
+            <a:avLst/>
+          </a:prstGeom>
+          <a:noFill/>
+        </p:spPr>
+        <p:txBody>
+          <a:bodyPr wrap="square" lIns="27432" tIns="22860" rIns="27432" bIns="22860" anchor="t">
+            <a:spAutoFit/>
+          </a:bodyPr>
+          <a:lstStyle/>
+          <a:p>
+            <a:pPr algn="ctr"/>
+            <a:r>
+              <a:rPr sz="1200" b="1" i="0">
+                <a:solidFill>
+                  <a:srgbClr val="5C4826"/>
+                </a:solidFill>
+              </a:rPr>
+              <a:t>Diagnose the missing obligation, representation, evidence, evaluation, or enforcement.</a:t>
+            </a:r>
+          </a:p>
+          <a:p>
+            <a:pPr algn="ctr"/>
+            <a:r>
+              <a:rPr sz="1200" b="1" i="0">
+                <a:solidFill>
+                  <a:srgbClr val="5C4826"/>
+                </a:solidFill>
+              </a:rPr>
+              <a:t>Not every failure requires all five.</a:t>
             </a:r>
           </a:p>
         </p:txBody>
@@ -19368,7 +19398,12 @@
             <p:ph type="title"/>
           </p:nvPr>
         </p:nvSpPr>
-        <p:spPr/>
+        <p:spPr>
+          <a:xfrm>
+            <a:off x="277148" y="118428"/>
+            <a:ext cx="9145148" cy="638175"/>
+          </a:xfrm>
+        </p:spPr>
         <p:txBody>
           <a:bodyPr>
             <a:normAutofit fontScale="90000"/>
@@ -19376,12 +19411,12 @@
           <a:lstStyle/>
           <a:p>
             <a:r>
-              <a:rPr sz="2400" b="0" i="0">
+              <a:rPr lang="en-US" sz="2400" i="1" dirty="0">
                 <a:solidFill>
                   <a:srgbClr val="000000"/>
                 </a:solidFill>
               </a:rPr>
-              <a:t>What actually happened? July 2, 2019</a:t>
+              <a:t>Could we have anticipated this failure?</a:t>
             </a:r>
           </a:p>
         </p:txBody>
@@ -19401,9 +19436,9 @@
           <a:bodyPr/>
           <a:lstStyle/>
           <a:p>
-            <a:fld id="{8CF8A65D-8523-4C39-BD83-5C787F1FA9B3}" type="slidenum">
+            <a:fld id="{54DE72B0-FFEB-4C83-B4BD-F25961BEDFCA}" type="slidenum">
               <a:rPr lang="en-US" smtClean="0"/>
-              <a:t>10</a:t>
+              <a:t>29</a:t>
             </a:fld>
             <a:endParaRPr lang="en-US"/>
           </a:p>
@@ -19411,14 +19446,122 @@
       </p:sp>
       <p:sp>
         <p:nvSpPr>
-          <p:cNvPr id="909" name="FooterBand"/>
+          <p:cNvPr id="903" name="Card"/>
           <p:cNvSpPr/>
           <p:nvPr/>
         </p:nvSpPr>
         <p:spPr>
           <a:xfrm>
-            <a:off x="274320" y="5513831"/>
-            <a:ext cx="8595360" cy="905256"/>
+            <a:off x="2103120" y="2231136"/>
+            <a:ext cx="2194560" cy="713232"/>
+          </a:xfrm>
+          <a:prstGeom prst="rect">
+            <a:avLst/>
+          </a:prstGeom>
+          <a:solidFill>
+            <a:srgbClr val="F5F1E8"/>
+          </a:solidFill>
+          <a:ln w="12700">
+            <a:solidFill>
+              <a:srgbClr val="C9B991"/>
+            </a:solidFill>
+          </a:ln>
+          <a:effectLst/>
+        </p:spPr>
+        <p:style>
+          <a:lnRef idx="1">
+            <a:schemeClr val="accent1"/>
+          </a:lnRef>
+          <a:fillRef idx="3">
+            <a:schemeClr val="accent1"/>
+          </a:fillRef>
+          <a:effectRef idx="2">
+            <a:schemeClr val="accent1"/>
+          </a:effectRef>
+          <a:fontRef idx="minor">
+            <a:schemeClr val="lt1"/>
+          </a:fontRef>
+        </p:style>
+        <p:txBody>
+          <a:bodyPr wrap="square" lIns="27432" tIns="22860" rIns="27432" bIns="22860" rtlCol="0" anchor="ctr"/>
+          <a:lstStyle/>
+          <a:p>
+            <a:pPr algn="ctr"/>
+            <a:r>
+              <a:rPr sz="1100" b="0" i="1" dirty="0">
+                <a:solidFill>
+                  <a:srgbClr val="5C4826"/>
+                </a:solidFill>
+              </a:rPr>
+              <a:t>invalid content causes unsafe execution</a:t>
+            </a:r>
+          </a:p>
+        </p:txBody>
+      </p:sp>
+      <p:sp>
+        <p:nvSpPr>
+          <p:cNvPr id="907" name="Card"/>
+          <p:cNvSpPr/>
+          <p:nvPr/>
+        </p:nvSpPr>
+        <p:spPr>
+          <a:xfrm>
+            <a:off x="2103120" y="3008376"/>
+            <a:ext cx="2194560" cy="713232"/>
+          </a:xfrm>
+          <a:prstGeom prst="rect">
+            <a:avLst/>
+          </a:prstGeom>
+          <a:solidFill>
+            <a:srgbClr val="F5F1E8"/>
+          </a:solidFill>
+          <a:ln w="12700">
+            <a:solidFill>
+              <a:srgbClr val="C9B991"/>
+            </a:solidFill>
+          </a:ln>
+          <a:effectLst/>
+        </p:spPr>
+        <p:style>
+          <a:lnRef idx="1">
+            <a:schemeClr val="accent1"/>
+          </a:lnRef>
+          <a:fillRef idx="3">
+            <a:schemeClr val="accent1"/>
+          </a:fillRef>
+          <a:effectRef idx="2">
+            <a:schemeClr val="accent1"/>
+          </a:effectRef>
+          <a:fontRef idx="minor">
+            <a:schemeClr val="lt1"/>
+          </a:fontRef>
+        </p:style>
+        <p:txBody>
+          <a:bodyPr wrap="square" lIns="27432" tIns="22860" rIns="27432" bIns="22860" rtlCol="0" anchor="ctr"/>
+          <a:lstStyle/>
+          <a:p>
+            <a:pPr algn="ctr"/>
+            <a:r>
+              <a:rPr sz="1100" b="0" i="1">
+                <a:solidFill>
+                  <a:srgbClr val="5C4826"/>
+                </a:solidFill>
+              </a:rPr>
+              <a:t>a defect escapes testing</a:t>
+            </a:r>
+          </a:p>
+        </p:txBody>
+      </p:sp>
+      <p:sp>
+        <p:nvSpPr>
+          <p:cNvPr id="909" name="Block"/>
+          <p:cNvSpPr/>
+          <p:nvPr/>
+        </p:nvSpPr>
+        <p:spPr>
+          <a:xfrm>
+            <a:off x="365760" y="2231136"/>
+            <a:ext cx="1645920" cy="713232"/>
           </a:xfrm>
           <a:prstGeom prst="rect">
             <a:avLst/>
@@ -19451,41 +19594,31 @@
           <a:p>
             <a:pPr algn="ctr"/>
             <a:r>
-              <a:rPr sz="2000" b="1" i="0" dirty="0">
+              <a:rPr sz="1200" b="1" i="0" dirty="0">
                 <a:solidFill>
                   <a:srgbClr val="FFFFFF"/>
                 </a:solidFill>
               </a:rPr>
-              <a:t>Which failure modes did we anticipate — and which did we miss?</a:t>
-            </a:r>
-          </a:p>
-          <a:p>
-            <a:pPr algn="ctr">
-              <a:spcBef>
-                <a:spcPts val="300"/>
-              </a:spcBef>
-            </a:pPr>
-            <a:r>
-              <a:rPr sz="2000" b="1" i="0" dirty="0">
-                <a:solidFill>
-                  <a:srgbClr val="FFFFFF"/>
-                </a:solidFill>
-              </a:rPr>
-              <a:t>Configuration shipped through a faster, less-gated path than code — again.</a:t>
-            </a:r>
-          </a:p>
-        </p:txBody>
-      </p:sp>
-      <p:sp>
-        <p:nvSpPr>
-          <p:cNvPr id="920" name="Block"/>
+              <a:t>Interpret security content</a:t>
+            </a:r>
+            <a:endParaRPr lang="en-US" sz="2000" b="1" i="0" dirty="0">
+              <a:solidFill>
+                <a:srgbClr val="FFFFFF"/>
+              </a:solidFill>
+            </a:endParaRPr>
+          </a:p>
+        </p:txBody>
+      </p:sp>
+      <p:sp>
+        <p:nvSpPr>
+          <p:cNvPr id="910" name="Block"/>
           <p:cNvSpPr/>
           <p:nvPr/>
         </p:nvSpPr>
         <p:spPr>
           <a:xfrm>
-            <a:off x="548640" y="1143000"/>
-            <a:ext cx="2560320" cy="566928"/>
+            <a:off x="365760" y="3008376"/>
+            <a:ext cx="1645920" cy="713232"/>
           </a:xfrm>
           <a:prstGeom prst="rect">
             <a:avLst/>
@@ -19518,112 +19651,31 @@
           <a:p>
             <a:pPr algn="ctr"/>
             <a:r>
-              <a:rPr sz="1200" b="1" i="0">
+              <a:rPr sz="1200" b="1" i="0" dirty="0">
                 <a:solidFill>
                   <a:srgbClr val="FFFFFF"/>
                 </a:solidFill>
               </a:rPr>
-              <a:t>CLOUDFLARE</a:t>
-            </a:r>
-          </a:p>
-        </p:txBody>
-      </p:sp>
-      <p:sp>
-        <p:nvSpPr>
-          <p:cNvPr id="921" name="RowCaption"/>
+              <a:t>Validate content</a:t>
+            </a:r>
+            <a:endParaRPr lang="en-US" sz="2000" b="1" i="0" dirty="0">
+              <a:solidFill>
+                <a:srgbClr val="FFFFFF"/>
+              </a:solidFill>
+            </a:endParaRPr>
+          </a:p>
+        </p:txBody>
+      </p:sp>
+      <p:sp>
+        <p:nvSpPr>
+          <p:cNvPr id="911" name="Block"/>
           <p:cNvSpPr/>
           <p:nvPr/>
         </p:nvSpPr>
         <p:spPr>
           <a:xfrm>
-            <a:off x="3383280" y="1143000"/>
-            <a:ext cx="5212080" cy="566928"/>
-          </a:xfrm>
-          <a:prstGeom prst="rect">
-            <a:avLst/>
-          </a:prstGeom>
-          <a:noFill/>
-          <a:ln>
-            <a:noFill/>
-          </a:ln>
-          <a:effectLst/>
-        </p:spPr>
-        <p:style>
-          <a:lnRef idx="1">
-            <a:schemeClr val="accent1"/>
-          </a:lnRef>
-          <a:fillRef idx="3">
-            <a:schemeClr val="accent1"/>
-          </a:fillRef>
-          <a:effectRef idx="2">
-            <a:schemeClr val="accent1"/>
-          </a:effectRef>
-          <a:fontRef idx="minor">
-            <a:schemeClr val="lt1"/>
-          </a:fontRef>
-        </p:style>
-        <p:txBody>
-          <a:bodyPr wrap="square" lIns="27432" tIns="22860" rIns="27432" bIns="22860" rtlCol="0" anchor="ctr"/>
-          <a:lstStyle/>
-          <a:p>
-            <a:pPr algn="l"/>
-            <a:r>
-              <a:rPr sz="2000" b="0" i="0">
-                <a:solidFill>
-                  <a:srgbClr val="555960"/>
-                </a:solidFill>
-              </a:rPr>
-              <a:t>operates a global edge network; its WAF inspects customers’ web traffic for attacks</a:t>
-            </a:r>
-          </a:p>
-        </p:txBody>
-      </p:sp>
-      <p:cxnSp>
-        <p:nvCxnSpPr>
-          <p:cNvPr id="922" name="Connector 922"/>
-          <p:cNvCxnSpPr/>
-          <p:nvPr/>
-        </p:nvCxnSpPr>
-        <p:spPr>
-          <a:xfrm>
-            <a:off x="1828800" y="1709928"/>
-            <a:ext cx="0" cy="393192"/>
-          </a:xfrm>
-          <a:prstGeom prst="line">
-            <a:avLst/>
-          </a:prstGeom>
-          <a:ln w="19050">
-            <a:solidFill>
-              <a:srgbClr val="8E6F3E"/>
-            </a:solidFill>
-            <a:tailEnd type="triangle"/>
-          </a:ln>
-        </p:spPr>
-        <p:style>
-          <a:lnRef idx="2">
-            <a:schemeClr val="accent1"/>
-          </a:lnRef>
-          <a:fillRef idx="0">
-            <a:schemeClr val="accent1"/>
-          </a:fillRef>
-          <a:effectRef idx="1">
-            <a:schemeClr val="accent1"/>
-          </a:effectRef>
-          <a:fontRef idx="minor">
-            <a:schemeClr val="tx1"/>
-          </a:fontRef>
-        </p:style>
-      </p:cxnSp>
-      <p:sp>
-        <p:nvSpPr>
-          <p:cNvPr id="923" name="Block"/>
-          <p:cNvSpPr/>
-          <p:nvPr/>
-        </p:nvSpPr>
-        <p:spPr>
-          <a:xfrm>
-            <a:off x="548640" y="2103120"/>
-            <a:ext cx="2560320" cy="566928"/>
+            <a:off x="365760" y="3785615"/>
+            <a:ext cx="1645920" cy="713232"/>
           </a:xfrm>
           <a:prstGeom prst="rect">
             <a:avLst/>
@@ -19656,112 +19708,31 @@
           <a:p>
             <a:pPr algn="ctr"/>
             <a:r>
-              <a:rPr sz="1200" b="1" i="0">
+              <a:rPr sz="1200" b="1" i="0" dirty="0">
                 <a:solidFill>
                   <a:srgbClr val="FFFFFF"/>
                 </a:solidFill>
               </a:rPr>
-              <a:t>WAF MANAGED RULES</a:t>
-            </a:r>
-          </a:p>
-        </p:txBody>
-      </p:sp>
-      <p:sp>
-        <p:nvSpPr>
-          <p:cNvPr id="924" name="RowCaption"/>
+              <a:t>Distribute content</a:t>
+            </a:r>
+            <a:endParaRPr sz="2000" b="1" i="0" dirty="0">
+              <a:solidFill>
+                <a:srgbClr val="FFFFFF"/>
+              </a:solidFill>
+            </a:endParaRPr>
+          </a:p>
+        </p:txBody>
+      </p:sp>
+      <p:sp>
+        <p:nvSpPr>
+          <p:cNvPr id="912" name="Block"/>
           <p:cNvSpPr/>
           <p:nvPr/>
         </p:nvSpPr>
         <p:spPr>
           <a:xfrm>
-            <a:off x="3383280" y="2103120"/>
-            <a:ext cx="5212080" cy="566928"/>
-          </a:xfrm>
-          <a:prstGeom prst="rect">
-            <a:avLst/>
-          </a:prstGeom>
-          <a:noFill/>
-          <a:ln>
-            <a:noFill/>
-          </a:ln>
-          <a:effectLst/>
-        </p:spPr>
-        <p:style>
-          <a:lnRef idx="1">
-            <a:schemeClr val="accent1"/>
-          </a:lnRef>
-          <a:fillRef idx="3">
-            <a:schemeClr val="accent1"/>
-          </a:fillRef>
-          <a:effectRef idx="2">
-            <a:schemeClr val="accent1"/>
-          </a:effectRef>
-          <a:fontRef idx="minor">
-            <a:schemeClr val="lt1"/>
-          </a:fontRef>
-        </p:style>
-        <p:txBody>
-          <a:bodyPr wrap="square" lIns="27432" tIns="22860" rIns="27432" bIns="22860" rtlCol="0" anchor="ctr"/>
-          <a:lstStyle/>
-          <a:p>
-            <a:pPr algn="l"/>
-            <a:r>
-              <a:rPr sz="2000" b="0" i="0">
-                <a:solidFill>
-                  <a:srgbClr val="555960"/>
-                </a:solidFill>
-              </a:rPr>
-              <a:t>attack-detection patterns — often regular expressions — running on every edge server</a:t>
-            </a:r>
-          </a:p>
-        </p:txBody>
-      </p:sp>
-      <p:cxnSp>
-        <p:nvCxnSpPr>
-          <p:cNvPr id="925" name="Connector 925"/>
-          <p:cNvCxnSpPr/>
-          <p:nvPr/>
-        </p:nvCxnSpPr>
-        <p:spPr>
-          <a:xfrm>
-            <a:off x="1828800" y="2670048"/>
-            <a:ext cx="0" cy="393192"/>
-          </a:xfrm>
-          <a:prstGeom prst="line">
-            <a:avLst/>
-          </a:prstGeom>
-          <a:ln w="19050">
-            <a:solidFill>
-              <a:srgbClr val="8E6F3E"/>
-            </a:solidFill>
-            <a:tailEnd type="triangle"/>
-          </a:ln>
-        </p:spPr>
-        <p:style>
-          <a:lnRef idx="2">
-            <a:schemeClr val="accent1"/>
-          </a:lnRef>
-          <a:fillRef idx="0">
-            <a:schemeClr val="accent1"/>
-          </a:fillRef>
-          <a:effectRef idx="1">
-            <a:schemeClr val="accent1"/>
-          </a:effectRef>
-          <a:fontRef idx="minor">
-            <a:schemeClr val="tx1"/>
-          </a:fontRef>
-        </p:style>
-      </p:cxnSp>
-      <p:sp>
-        <p:nvSpPr>
-          <p:cNvPr id="926" name="Block"/>
-          <p:cNvSpPr/>
-          <p:nvPr/>
-        </p:nvSpPr>
-        <p:spPr>
-          <a:xfrm>
-            <a:off x="548640" y="3063240"/>
-            <a:ext cx="2560320" cy="566928"/>
+            <a:off x="365760" y="4562856"/>
+            <a:ext cx="1645920" cy="713232"/>
           </a:xfrm>
           <a:prstGeom prst="rect">
             <a:avLst/>
@@ -19799,21 +19770,21 @@
                   <a:srgbClr val="FFFFFF"/>
                 </a:solidFill>
               </a:rPr>
-              <a:t>THE DEFECTIVE RULE</a:t>
-            </a:r>
-          </a:p>
-        </p:txBody>
-      </p:sp>
-      <p:sp>
-        <p:nvSpPr>
-          <p:cNvPr id="927" name="RowCaption"/>
+              <a:t>Maintain service</a:t>
+            </a:r>
+          </a:p>
+        </p:txBody>
+      </p:sp>
+      <p:sp>
+        <p:nvSpPr>
+          <p:cNvPr id="913" name="FooterBand"/>
           <p:cNvSpPr/>
           <p:nvPr/>
         </p:nvSpPr>
         <p:spPr>
           <a:xfrm>
-            <a:off x="3383280" y="3063240"/>
-            <a:ext cx="5212080" cy="566928"/>
+            <a:off x="274320" y="5852160"/>
+            <a:ext cx="8595360" cy="566928"/>
           </a:xfrm>
           <a:prstGeom prst="rect">
             <a:avLst/>
@@ -19842,73 +19813,93 @@
           <a:bodyPr wrap="square" lIns="27432" tIns="22860" rIns="27432" bIns="22860" rtlCol="0" anchor="ctr"/>
           <a:lstStyle/>
           <a:p>
-            <a:pPr algn="l"/>
-            <a:r>
-              <a:rPr sz="2000" b="0" i="0">
-                <a:solidFill>
-                  <a:srgbClr val="555960"/>
-                </a:solidFill>
-              </a:rPr>
-              <a:t>.*(?:.*=.*) — matching work grows explosively with input length (backtracking)</a:t>
-            </a:r>
-          </a:p>
-        </p:txBody>
-      </p:sp>
-      <p:cxnSp>
-        <p:nvCxnSpPr>
-          <p:cNvPr id="928" name="Connector 928"/>
-          <p:cNvCxnSpPr/>
-          <p:nvPr/>
-        </p:nvCxnSpPr>
-        <p:spPr>
-          <a:xfrm>
-            <a:off x="1828800" y="3630168"/>
-            <a:ext cx="0" cy="393192"/>
-          </a:xfrm>
-          <a:prstGeom prst="line">
-            <a:avLst/>
-          </a:prstGeom>
-          <a:ln w="19050">
+            <a:pPr algn="ctr"/>
+            <a:r>
+              <a:rPr lang="en-US" sz="2000" b="1" i="0" dirty="0">
+                <a:solidFill>
+                  <a:schemeClr val="bg1"/>
+                </a:solidFill>
+              </a:rPr>
+              <a:t>Which of these failure modes could occur in another security product?</a:t>
+            </a:r>
+          </a:p>
+        </p:txBody>
+      </p:sp>
+      <p:sp>
+        <p:nvSpPr>
+          <p:cNvPr id="2" name="Card"/>
+          <p:cNvSpPr/>
+          <p:nvPr/>
+        </p:nvSpPr>
+        <p:spPr>
+          <a:xfrm>
+            <a:off x="2103120" y="3785615"/>
+            <a:ext cx="2194560" cy="713232"/>
+          </a:xfrm>
+          <a:prstGeom prst="rect">
+            <a:avLst/>
+          </a:prstGeom>
+          <a:solidFill>
+            <a:srgbClr val="F5F1E8"/>
+          </a:solidFill>
+          <a:ln w="12700">
             <a:solidFill>
-              <a:srgbClr val="8E6F3E"/>
+              <a:srgbClr val="C9B991"/>
             </a:solidFill>
-            <a:tailEnd type="triangle"/>
-          </a:ln>
-        </p:spPr>
-        <p:style>
-          <a:lnRef idx="2">
-            <a:schemeClr val="accent1"/>
-          </a:lnRef>
-          <a:fillRef idx="0">
-            <a:schemeClr val="accent1"/>
-          </a:fillRef>
-          <a:effectRef idx="1">
-            <a:schemeClr val="accent1"/>
-          </a:effectRef>
-          <a:fontRef idx="minor">
-            <a:schemeClr val="tx1"/>
-          </a:fontRef>
-        </p:style>
-      </p:cxnSp>
-      <p:sp>
-        <p:nvSpPr>
-          <p:cNvPr id="929" name="Block"/>
+          </a:ln>
+          <a:effectLst/>
+        </p:spPr>
+        <p:style>
+          <a:lnRef idx="1">
+            <a:schemeClr val="accent1"/>
+          </a:lnRef>
+          <a:fillRef idx="3">
+            <a:schemeClr val="accent1"/>
+          </a:fillRef>
+          <a:effectRef idx="2">
+            <a:schemeClr val="accent1"/>
+          </a:effectRef>
+          <a:fontRef idx="minor">
+            <a:schemeClr val="lt1"/>
+          </a:fontRef>
+        </p:style>
+        <p:txBody>
+          <a:bodyPr wrap="square" lIns="27432" tIns="22860" rIns="27432" bIns="22860" rtlCol="0" anchor="ctr"/>
+          <a:lstStyle/>
+          <a:p>
+            <a:pPr algn="ctr"/>
+            <a:r>
+              <a:rPr lang="en-US" sz="1100" b="0" i="1" dirty="0">
+                <a:solidFill>
+                  <a:srgbClr val="5C4826"/>
+                </a:solidFill>
+              </a:rPr>
+              <a:t>a defective update reaches all endpoints</a:t>
+            </a:r>
+          </a:p>
+        </p:txBody>
+      </p:sp>
+      <p:sp>
+        <p:nvSpPr>
+          <p:cNvPr id="4" name="Card"/>
           <p:cNvSpPr/>
           <p:nvPr/>
         </p:nvSpPr>
         <p:spPr>
           <a:xfrm>
-            <a:off x="548640" y="4023360"/>
-            <a:ext cx="2560320" cy="566928"/>
+            <a:off x="2103120" y="4562856"/>
+            <a:ext cx="2194560" cy="713232"/>
           </a:xfrm>
           <a:prstGeom prst="rect">
             <a:avLst/>
           </a:prstGeom>
           <a:solidFill>
-            <a:srgbClr val="9A3F12"/>
+            <a:srgbClr val="F5F1E8"/>
           </a:solidFill>
-          <a:ln>
-            <a:noFill/>
+          <a:ln w="12700">
+            <a:solidFill>
+              <a:srgbClr val="C9B991"/>
+            </a:solidFill>
           </a:ln>
           <a:effectLst/>
         </p:spPr>
@@ -19932,26 +19923,31 @@
           <a:p>
             <a:pPr algn="ctr"/>
             <a:r>
-              <a:rPr sz="1200" b="1" i="0">
-                <a:solidFill>
-                  <a:srgbClr val="FFFFFF"/>
-                </a:solidFill>
-              </a:rPr>
-              <a:t>27 MINUTES</a:t>
-            </a:r>
-          </a:p>
-        </p:txBody>
-      </p:sp>
-      <p:sp>
-        <p:nvSpPr>
-          <p:cNvPr id="930" name="RowCaption"/>
+              <a:rPr lang="en-US" sz="1100" b="0" i="1" dirty="0">
+                <a:solidFill>
+                  <a:srgbClr val="5C4826"/>
+                </a:solidFill>
+              </a:rPr>
+              <a:t>endpoint failure disables critical services</a:t>
+            </a:r>
+            <a:endParaRPr sz="2000" b="0" i="1" dirty="0">
+              <a:solidFill>
+                <a:srgbClr val="5C4826"/>
+              </a:solidFill>
+            </a:endParaRPr>
+          </a:p>
+        </p:txBody>
+      </p:sp>
+      <p:sp>
+        <p:nvSpPr>
+          <p:cNvPr id="5" name="ColumnHeading"/>
           <p:cNvSpPr/>
           <p:nvPr/>
         </p:nvSpPr>
         <p:spPr>
           <a:xfrm>
-            <a:off x="3383280" y="4023360"/>
-            <a:ext cx="5212080" cy="566928"/>
+            <a:off x="365760" y="1883664"/>
+            <a:ext cx="1645920" cy="274320"/>
           </a:xfrm>
           <a:prstGeom prst="rect">
             <a:avLst/>
@@ -19980,18 +19976,18 @@
           <a:bodyPr wrap="square" lIns="27432" tIns="22860" rIns="27432" bIns="22860" rtlCol="0" anchor="ctr"/>
           <a:lstStyle/>
           <a:p>
-            <a:pPr algn="l"/>
-            <a:r>
-              <a:rPr sz="2000" b="1" i="0" dirty="0">
-                <a:solidFill>
-                  <a:srgbClr val="555960"/>
-                </a:solidFill>
-              </a:rPr>
-              <a:t>CPU exhaustion from 13:42 UTC; rule killed globally 14:07; traffic normal 14:09</a:t>
-            </a:r>
-            <a:endParaRPr sz="2000" b="1" i="0" dirty="0">
+            <a:pPr algn="ctr"/>
+            <a:r>
+              <a:rPr lang="en-US" sz="1200" b="1" i="0" dirty="0">
+                <a:solidFill>
+                  <a:schemeClr val="bg1"/>
+                </a:solidFill>
+              </a:rPr>
+              <a:t>FUNCTION</a:t>
+            </a:r>
+            <a:endParaRPr sz="2800" b="1" i="0" dirty="0">
               <a:solidFill>
-                <a:srgbClr val="555960"/>
+                <a:schemeClr val="bg1"/>
               </a:solidFill>
             </a:endParaRPr>
           </a:p>
@@ -19999,14 +19995,69 @@
       </p:sp>
       <p:sp>
         <p:nvSpPr>
+          <p:cNvPr id="6" name="ColumnHeading"/>
+          <p:cNvSpPr/>
+          <p:nvPr/>
+        </p:nvSpPr>
+        <p:spPr>
+          <a:xfrm>
+            <a:off x="2103120" y="1883664"/>
+            <a:ext cx="2194560" cy="274320"/>
+          </a:xfrm>
+          <a:prstGeom prst="rect">
+            <a:avLst/>
+          </a:prstGeom>
+          <a:noFill/>
+          <a:ln>
+            <a:noFill/>
+          </a:ln>
+          <a:effectLst/>
+        </p:spPr>
+        <p:style>
+          <a:lnRef idx="1">
+            <a:schemeClr val="accent1"/>
+          </a:lnRef>
+          <a:fillRef idx="3">
+            <a:schemeClr val="accent1"/>
+          </a:fillRef>
+          <a:effectRef idx="2">
+            <a:schemeClr val="accent1"/>
+          </a:effectRef>
+          <a:fontRef idx="minor">
+            <a:schemeClr val="lt1"/>
+          </a:fontRef>
+        </p:style>
+        <p:txBody>
+          <a:bodyPr wrap="square" lIns="27432" tIns="22860" rIns="27432" bIns="22860" rtlCol="0" anchor="ctr"/>
+          <a:lstStyle/>
+          <a:p>
+            <a:pPr algn="ctr"/>
+            <a:r>
+              <a:rPr lang="en-US" sz="1200" b="1" i="0" dirty="0">
+                <a:solidFill>
+                  <a:schemeClr val="bg1"/>
+                </a:solidFill>
+              </a:rPr>
+              <a:t>FAILURE MODE</a:t>
+            </a:r>
+            <a:endParaRPr sz="2800" b="1" i="0" dirty="0">
+              <a:solidFill>
+                <a:schemeClr val="bg1"/>
+              </a:solidFill>
+            </a:endParaRPr>
+          </a:p>
+        </p:txBody>
+      </p:sp>
+      <p:sp>
+        <p:nvSpPr>
           <p:cNvPr id="915" name="Label"/>
           <p:cNvSpPr txBox="1"/>
           <p:nvPr/>
         </p:nvSpPr>
         <p:spPr>
           <a:xfrm>
-            <a:off x="548640" y="4599432"/>
-            <a:ext cx="2560320" cy="274320"/>
+            <a:off x="548640" y="841248"/>
+            <a:ext cx="8046720" cy="566928"/>
           </a:xfrm>
           <a:prstGeom prst="rect">
             <a:avLst/>
@@ -20021,33 +20072,42 @@
           <a:p>
             <a:pPr algn="ctr"/>
             <a:r>
-              <a:rPr sz="1200" b="1" i="0">
+              <a:rPr sz="1200" b="1" i="1">
                 <a:solidFill>
                   <a:srgbClr val="5C4826"/>
                 </a:solidFill>
               </a:rPr>
-              <a:t>‘x=x’  →  23 steps</a:t>
-            </a:r>
-          </a:p>
-        </p:txBody>
-      </p:sp>
-      <p:sp>
-        <p:nvSpPr>
-          <p:cNvPr id="910" name="Block"/>
+              <a:t>The three models explain a failure that has happened. FMEA — Failure Mode and Effects Analysis —</a:t>
+            </a:r>
+          </a:p>
+          <a:p>
+            <a:pPr algn="ctr"/>
+            <a:r>
+              <a:rPr sz="1200" b="1" i="1">
+                <a:solidFill>
+                  <a:srgbClr val="5C4826"/>
+                </a:solidFill>
+              </a:rPr>
+              <a:t>searches for failures that have not happened yet. The procedure:</a:t>
+            </a:r>
+          </a:p>
+        </p:txBody>
+      </p:sp>
+      <p:sp>
+        <p:nvSpPr>
+          <p:cNvPr id="1000" name="ColumnHeading"/>
           <p:cNvSpPr/>
           <p:nvPr/>
         </p:nvSpPr>
         <p:spPr>
           <a:xfrm>
-            <a:off x="3291840" y="4626864"/>
-            <a:ext cx="237744" cy="182880"/>
-          </a:xfrm>
-          <a:prstGeom prst="rect">
-            <a:avLst/>
-          </a:prstGeom>
-          <a:solidFill>
-            <a:srgbClr val="8E6F3E"/>
-          </a:solidFill>
+            <a:off x="4389120" y="1883664"/>
+            <a:ext cx="1828800" cy="274320"/>
+          </a:xfrm>
+          <a:prstGeom prst="rect">
+            <a:avLst/>
+          </a:prstGeom>
+          <a:noFill/>
           <a:ln>
             <a:noFill/>
           </a:ln>
@@ -20073,26 +20133,518 @@
           <a:p>
             <a:pPr algn="ctr"/>
             <a:r>
-              <a:rPr sz="1200" b="1" i="0">
-                <a:solidFill>
-                  <a:srgbClr val="FFFFFF"/>
-                </a:solidFill>
-              </a:rPr>
-              <a:t/>
-            </a:r>
-          </a:p>
-        </p:txBody>
-      </p:sp>
-      <p:sp>
-        <p:nvSpPr>
-          <p:cNvPr id="1000" name="Label"/>
+              <a:rPr lang="en-US" sz="1200" b="1" i="0" dirty="0">
+                <a:solidFill>
+                  <a:schemeClr val="bg1"/>
+                </a:solidFill>
+              </a:rPr>
+              <a:t>EFFECT</a:t>
+            </a:r>
+            <a:endParaRPr sz="2800" b="1" i="0" dirty="0">
+              <a:solidFill>
+                <a:schemeClr val="bg1"/>
+              </a:solidFill>
+            </a:endParaRPr>
+          </a:p>
+        </p:txBody>
+      </p:sp>
+      <p:sp>
+        <p:nvSpPr>
+          <p:cNvPr id="1001" name="ColumnHeading"/>
+          <p:cNvSpPr/>
+          <p:nvPr/>
+        </p:nvSpPr>
+        <p:spPr>
+          <a:xfrm>
+            <a:off x="6309360" y="1883664"/>
+            <a:ext cx="2286000" cy="274320"/>
+          </a:xfrm>
+          <a:prstGeom prst="rect">
+            <a:avLst/>
+          </a:prstGeom>
+          <a:noFill/>
+          <a:ln>
+            <a:noFill/>
+          </a:ln>
+          <a:effectLst/>
+        </p:spPr>
+        <p:style>
+          <a:lnRef idx="1">
+            <a:schemeClr val="accent1"/>
+          </a:lnRef>
+          <a:fillRef idx="3">
+            <a:schemeClr val="accent1"/>
+          </a:fillRef>
+          <a:effectRef idx="2">
+            <a:schemeClr val="accent1"/>
+          </a:effectRef>
+          <a:fontRef idx="minor">
+            <a:schemeClr val="lt1"/>
+          </a:fontRef>
+        </p:style>
+        <p:txBody>
+          <a:bodyPr wrap="square" lIns="27432" tIns="22860" rIns="27432" bIns="22860" rtlCol="0" anchor="ctr"/>
+          <a:lstStyle/>
+          <a:p>
+            <a:pPr algn="ctr"/>
+            <a:r>
+              <a:rPr lang="en-US" sz="1200" b="1" i="0" dirty="0">
+                <a:solidFill>
+                  <a:schemeClr val="bg1"/>
+                </a:solidFill>
+              </a:rPr>
+              <a:t>CANDIDATE CONTROL</a:t>
+            </a:r>
+            <a:endParaRPr sz="2800" b="1" i="0" dirty="0">
+              <a:solidFill>
+                <a:schemeClr val="bg1"/>
+              </a:solidFill>
+            </a:endParaRPr>
+          </a:p>
+        </p:txBody>
+      </p:sp>
+      <p:sp>
+        <p:nvSpPr>
+          <p:cNvPr id="1002" name="Card"/>
+          <p:cNvSpPr/>
+          <p:nvPr/>
+        </p:nvSpPr>
+        <p:spPr>
+          <a:xfrm>
+            <a:off x="4389120" y="2231136"/>
+            <a:ext cx="1828800" cy="713232"/>
+          </a:xfrm>
+          <a:prstGeom prst="rect">
+            <a:avLst/>
+          </a:prstGeom>
+          <a:solidFill>
+            <a:srgbClr val="F5F1E8"/>
+          </a:solidFill>
+          <a:ln w="12700">
+            <a:solidFill>
+              <a:srgbClr val="C9B991"/>
+            </a:solidFill>
+          </a:ln>
+          <a:effectLst/>
+        </p:spPr>
+        <p:style>
+          <a:lnRef idx="1">
+            <a:schemeClr val="accent1"/>
+          </a:lnRef>
+          <a:fillRef idx="3">
+            <a:schemeClr val="accent1"/>
+          </a:fillRef>
+          <a:effectRef idx="2">
+            <a:schemeClr val="accent1"/>
+          </a:effectRef>
+          <a:fontRef idx="minor">
+            <a:schemeClr val="lt1"/>
+          </a:fontRef>
+        </p:style>
+        <p:txBody>
+          <a:bodyPr wrap="square" lIns="27432" tIns="22860" rIns="27432" bIns="22860" rtlCol="0" anchor="ctr"/>
+          <a:lstStyle/>
+          <a:p>
+            <a:pPr algn="ctr"/>
+            <a:r>
+              <a:rPr sz="1100" b="0" i="1" dirty="0">
+                <a:solidFill>
+                  <a:srgbClr val="5C4826"/>
+                </a:solidFill>
+              </a:rPr>
+              <a:t>endpoint failure</a:t>
+            </a:r>
+          </a:p>
+        </p:txBody>
+      </p:sp>
+      <p:sp>
+        <p:nvSpPr>
+          <p:cNvPr id="1003" name="Card"/>
+          <p:cNvSpPr/>
+          <p:nvPr/>
+        </p:nvSpPr>
+        <p:spPr>
+          <a:xfrm>
+            <a:off x="6309360" y="2231136"/>
+            <a:ext cx="2286000" cy="713232"/>
+          </a:xfrm>
+          <a:prstGeom prst="rect">
+            <a:avLst/>
+          </a:prstGeom>
+          <a:solidFill>
+            <a:srgbClr val="F5F1E8"/>
+          </a:solidFill>
+          <a:ln w="12700">
+            <a:solidFill>
+              <a:srgbClr val="C9B991"/>
+            </a:solidFill>
+          </a:ln>
+          <a:effectLst/>
+        </p:spPr>
+        <p:style>
+          <a:lnRef idx="1">
+            <a:schemeClr val="accent1"/>
+          </a:lnRef>
+          <a:fillRef idx="3">
+            <a:schemeClr val="accent1"/>
+          </a:fillRef>
+          <a:effectRef idx="2">
+            <a:schemeClr val="accent1"/>
+          </a:effectRef>
+          <a:fontRef idx="minor">
+            <a:schemeClr val="lt1"/>
+          </a:fontRef>
+        </p:style>
+        <p:txBody>
+          <a:bodyPr wrap="square" lIns="27432" tIns="22860" rIns="27432" bIns="22860" rtlCol="0" anchor="ctr"/>
+          <a:lstStyle/>
+          <a:p>
+            <a:pPr algn="ctr"/>
+            <a:r>
+              <a:rPr sz="1100" b="0" i="1" dirty="0">
+                <a:solidFill>
+                  <a:srgbClr val="5C4826"/>
+                </a:solidFill>
+              </a:rPr>
+              <a:t>contract validation</a:t>
+            </a:r>
+          </a:p>
+        </p:txBody>
+      </p:sp>
+      <p:sp>
+        <p:nvSpPr>
+          <p:cNvPr id="1004" name="Card"/>
+          <p:cNvSpPr/>
+          <p:nvPr/>
+        </p:nvSpPr>
+        <p:spPr>
+          <a:xfrm>
+            <a:off x="4389120" y="3008376"/>
+            <a:ext cx="1828800" cy="713232"/>
+          </a:xfrm>
+          <a:prstGeom prst="rect">
+            <a:avLst/>
+          </a:prstGeom>
+          <a:solidFill>
+            <a:srgbClr val="F5F1E8"/>
+          </a:solidFill>
+          <a:ln w="12700">
+            <a:solidFill>
+              <a:srgbClr val="C9B991"/>
+            </a:solidFill>
+          </a:ln>
+          <a:effectLst/>
+        </p:spPr>
+        <p:style>
+          <a:lnRef idx="1">
+            <a:schemeClr val="accent1"/>
+          </a:lnRef>
+          <a:fillRef idx="3">
+            <a:schemeClr val="accent1"/>
+          </a:fillRef>
+          <a:effectRef idx="2">
+            <a:schemeClr val="accent1"/>
+          </a:effectRef>
+          <a:fontRef idx="minor">
+            <a:schemeClr val="lt1"/>
+          </a:fontRef>
+        </p:style>
+        <p:txBody>
+          <a:bodyPr wrap="square" lIns="27432" tIns="22860" rIns="27432" bIns="22860" rtlCol="0" anchor="ctr"/>
+          <a:lstStyle/>
+          <a:p>
+            <a:pPr algn="ctr"/>
+            <a:r>
+              <a:rPr sz="1100" b="0" i="1" dirty="0">
+                <a:solidFill>
+                  <a:srgbClr val="5C4826"/>
+                </a:solidFill>
+              </a:rPr>
+              <a:t>defective update released</a:t>
+            </a:r>
+          </a:p>
+        </p:txBody>
+      </p:sp>
+      <p:sp>
+        <p:nvSpPr>
+          <p:cNvPr id="1005" name="Card"/>
+          <p:cNvSpPr/>
+          <p:nvPr/>
+        </p:nvSpPr>
+        <p:spPr>
+          <a:xfrm>
+            <a:off x="6309360" y="3008376"/>
+            <a:ext cx="2286000" cy="713232"/>
+          </a:xfrm>
+          <a:prstGeom prst="rect">
+            <a:avLst/>
+          </a:prstGeom>
+          <a:solidFill>
+            <a:srgbClr val="F5F1E8"/>
+          </a:solidFill>
+          <a:ln w="12700">
+            <a:solidFill>
+              <a:srgbClr val="C9B991"/>
+            </a:solidFill>
+          </a:ln>
+          <a:effectLst/>
+        </p:spPr>
+        <p:style>
+          <a:lnRef idx="1">
+            <a:schemeClr val="accent1"/>
+          </a:lnRef>
+          <a:fillRef idx="3">
+            <a:schemeClr val="accent1"/>
+          </a:fillRef>
+          <a:effectRef idx="2">
+            <a:schemeClr val="accent1"/>
+          </a:effectRef>
+          <a:fontRef idx="minor">
+            <a:schemeClr val="lt1"/>
+          </a:fontRef>
+        </p:style>
+        <p:txBody>
+          <a:bodyPr wrap="square" lIns="27432" tIns="22860" rIns="27432" bIns="22860" rtlCol="0" anchor="ctr"/>
+          <a:lstStyle/>
+          <a:p>
+            <a:pPr algn="ctr"/>
+            <a:r>
+              <a:rPr sz="1100" b="0" i="1" dirty="0">
+                <a:solidFill>
+                  <a:srgbClr val="5C4826"/>
+                </a:solidFill>
+              </a:rPr>
+              <a:t>independent compatibility tests</a:t>
+            </a:r>
+          </a:p>
+        </p:txBody>
+      </p:sp>
+      <p:sp>
+        <p:nvSpPr>
+          <p:cNvPr id="1006" name="Card"/>
+          <p:cNvSpPr/>
+          <p:nvPr/>
+        </p:nvSpPr>
+        <p:spPr>
+          <a:xfrm>
+            <a:off x="4389120" y="3785615"/>
+            <a:ext cx="1828800" cy="713232"/>
+          </a:xfrm>
+          <a:prstGeom prst="rect">
+            <a:avLst/>
+          </a:prstGeom>
+          <a:solidFill>
+            <a:srgbClr val="F5F1E8"/>
+          </a:solidFill>
+          <a:ln w="12700">
+            <a:solidFill>
+              <a:srgbClr val="C9B991"/>
+            </a:solidFill>
+          </a:ln>
+          <a:effectLst/>
+        </p:spPr>
+        <p:style>
+          <a:lnRef idx="1">
+            <a:schemeClr val="accent1"/>
+          </a:lnRef>
+          <a:fillRef idx="3">
+            <a:schemeClr val="accent1"/>
+          </a:fillRef>
+          <a:effectRef idx="2">
+            <a:schemeClr val="accent1"/>
+          </a:effectRef>
+          <a:fontRef idx="minor">
+            <a:schemeClr val="lt1"/>
+          </a:fontRef>
+        </p:style>
+        <p:txBody>
+          <a:bodyPr wrap="square" lIns="27432" tIns="22860" rIns="27432" bIns="22860" rtlCol="0" anchor="ctr"/>
+          <a:lstStyle/>
+          <a:p>
+            <a:pPr algn="ctr"/>
+            <a:r>
+              <a:rPr sz="1100" b="0" i="1" dirty="0">
+                <a:solidFill>
+                  <a:srgbClr val="5C4826"/>
+                </a:solidFill>
+              </a:rPr>
+              <a:t>widespread outage</a:t>
+            </a:r>
+          </a:p>
+        </p:txBody>
+      </p:sp>
+      <p:sp>
+        <p:nvSpPr>
+          <p:cNvPr id="1007" name="Card"/>
+          <p:cNvSpPr/>
+          <p:nvPr/>
+        </p:nvSpPr>
+        <p:spPr>
+          <a:xfrm>
+            <a:off x="6309360" y="3785615"/>
+            <a:ext cx="2286000" cy="713232"/>
+          </a:xfrm>
+          <a:prstGeom prst="rect">
+            <a:avLst/>
+          </a:prstGeom>
+          <a:solidFill>
+            <a:srgbClr val="F5F1E8"/>
+          </a:solidFill>
+          <a:ln w="12700">
+            <a:solidFill>
+              <a:srgbClr val="C9B991"/>
+            </a:solidFill>
+          </a:ln>
+          <a:effectLst/>
+        </p:spPr>
+        <p:style>
+          <a:lnRef idx="1">
+            <a:schemeClr val="accent1"/>
+          </a:lnRef>
+          <a:fillRef idx="3">
+            <a:schemeClr val="accent1"/>
+          </a:fillRef>
+          <a:effectRef idx="2">
+            <a:schemeClr val="accent1"/>
+          </a:effectRef>
+          <a:fontRef idx="minor">
+            <a:schemeClr val="lt1"/>
+          </a:fontRef>
+        </p:style>
+        <p:txBody>
+          <a:bodyPr wrap="square" lIns="27432" tIns="22860" rIns="27432" bIns="22860" rtlCol="0" anchor="ctr"/>
+          <a:lstStyle/>
+          <a:p>
+            <a:pPr algn="ctr"/>
+            <a:r>
+              <a:rPr sz="1100" b="0" i="1" dirty="0">
+                <a:solidFill>
+                  <a:srgbClr val="5C4826"/>
+                </a:solidFill>
+              </a:rPr>
+              <a:t>staged rollout + demonstrated halt</a:t>
+            </a:r>
+          </a:p>
+        </p:txBody>
+      </p:sp>
+      <p:sp>
+        <p:nvSpPr>
+          <p:cNvPr id="1008" name="Card"/>
+          <p:cNvSpPr/>
+          <p:nvPr/>
+        </p:nvSpPr>
+        <p:spPr>
+          <a:xfrm>
+            <a:off x="4389120" y="4562856"/>
+            <a:ext cx="1828800" cy="713232"/>
+          </a:xfrm>
+          <a:prstGeom prst="rect">
+            <a:avLst/>
+          </a:prstGeom>
+          <a:solidFill>
+            <a:srgbClr val="F5F1E8"/>
+          </a:solidFill>
+          <a:ln w="12700">
+            <a:solidFill>
+              <a:srgbClr val="C9B991"/>
+            </a:solidFill>
+          </a:ln>
+          <a:effectLst/>
+        </p:spPr>
+        <p:style>
+          <a:lnRef idx="1">
+            <a:schemeClr val="accent1"/>
+          </a:lnRef>
+          <a:fillRef idx="3">
+            <a:schemeClr val="accent1"/>
+          </a:fillRef>
+          <a:effectRef idx="2">
+            <a:schemeClr val="accent1"/>
+          </a:effectRef>
+          <a:fontRef idx="minor">
+            <a:schemeClr val="lt1"/>
+          </a:fontRef>
+        </p:style>
+        <p:txBody>
+          <a:bodyPr wrap="square" lIns="27432" tIns="22860" rIns="27432" bIns="22860" rtlCol="0" anchor="ctr"/>
+          <a:lstStyle/>
+          <a:p>
+            <a:pPr algn="ctr"/>
+            <a:r>
+              <a:rPr sz="1100" b="0" i="1" dirty="0">
+                <a:solidFill>
+                  <a:srgbClr val="5C4826"/>
+                </a:solidFill>
+              </a:rPr>
+              <a:t>service disruption</a:t>
+            </a:r>
+          </a:p>
+        </p:txBody>
+      </p:sp>
+      <p:sp>
+        <p:nvSpPr>
+          <p:cNvPr id="1009" name="Card"/>
+          <p:cNvSpPr/>
+          <p:nvPr/>
+        </p:nvSpPr>
+        <p:spPr>
+          <a:xfrm>
+            <a:off x="6309360" y="4562856"/>
+            <a:ext cx="2286000" cy="713232"/>
+          </a:xfrm>
+          <a:prstGeom prst="rect">
+            <a:avLst/>
+          </a:prstGeom>
+          <a:solidFill>
+            <a:srgbClr val="F5F1E8"/>
+          </a:solidFill>
+          <a:ln w="12700">
+            <a:solidFill>
+              <a:srgbClr val="C9B991"/>
+            </a:solidFill>
+          </a:ln>
+          <a:effectLst/>
+        </p:spPr>
+        <p:style>
+          <a:lnRef idx="1">
+            <a:schemeClr val="accent1"/>
+          </a:lnRef>
+          <a:fillRef idx="3">
+            <a:schemeClr val="accent1"/>
+          </a:fillRef>
+          <a:effectRef idx="2">
+            <a:schemeClr val="accent1"/>
+          </a:effectRef>
+          <a:fontRef idx="minor">
+            <a:schemeClr val="lt1"/>
+          </a:fontRef>
+        </p:style>
+        <p:txBody>
+          <a:bodyPr wrap="square" lIns="27432" tIns="22860" rIns="27432" bIns="22860" rtlCol="0" anchor="ctr"/>
+          <a:lstStyle/>
+          <a:p>
+            <a:pPr algn="ctr"/>
+            <a:r>
+              <a:rPr sz="1100" b="0" i="1" dirty="0">
+                <a:solidFill>
+                  <a:srgbClr val="5C4826"/>
+                </a:solidFill>
+              </a:rPr>
+              <a:t>independent service paths</a:t>
+            </a:r>
+          </a:p>
+        </p:txBody>
+      </p:sp>
+      <p:sp>
+        <p:nvSpPr>
+          <p:cNvPr id="1010" name="Label"/>
           <p:cNvSpPr txBox="1"/>
           <p:nvPr/>
         </p:nvSpPr>
         <p:spPr>
           <a:xfrm>
-            <a:off x="548640" y="4919472"/>
-            <a:ext cx="2560320" cy="274320"/>
+            <a:off x="548640" y="5358384"/>
+            <a:ext cx="8046720" cy="365760"/>
           </a:xfrm>
           <a:prstGeom prst="rect">
             <a:avLst/>
@@ -20107,78 +20659,26 @@
           <a:p>
             <a:pPr algn="ctr"/>
             <a:r>
-              <a:rPr sz="1200" b="1" i="0">
+              <a:rPr sz="1200" b="1" i="1">
                 <a:solidFill>
                   <a:srgbClr val="5C4826"/>
                 </a:solidFill>
               </a:rPr>
-              <a:t>‘x=’ + twenty ‘x’s  →  555 steps</a:t>
-            </a:r>
-          </a:p>
-        </p:txBody>
-      </p:sp>
-      <p:sp>
-        <p:nvSpPr>
-          <p:cNvPr id="1001" name="Block"/>
-          <p:cNvSpPr/>
-          <p:nvPr/>
-        </p:nvSpPr>
-        <p:spPr>
-          <a:xfrm>
-            <a:off x="3291840" y="4946904"/>
-            <a:ext cx="5486400" cy="182880"/>
-          </a:xfrm>
-          <a:prstGeom prst="rect">
-            <a:avLst/>
-          </a:prstGeom>
-          <a:solidFill>
-            <a:srgbClr val="B3261E"/>
-          </a:solidFill>
-          <a:ln>
-            <a:noFill/>
-          </a:ln>
-          <a:effectLst/>
-        </p:spPr>
-        <p:style>
-          <a:lnRef idx="1">
-            <a:schemeClr val="accent1"/>
-          </a:lnRef>
-          <a:fillRef idx="3">
-            <a:schemeClr val="accent1"/>
-          </a:fillRef>
-          <a:effectRef idx="2">
-            <a:schemeClr val="accent1"/>
-          </a:effectRef>
-          <a:fontRef idx="minor">
-            <a:schemeClr val="lt1"/>
-          </a:fontRef>
-        </p:style>
-        <p:txBody>
-          <a:bodyPr wrap="square" lIns="27432" tIns="22860" rIns="27432" bIns="22860" rtlCol="0" anchor="ctr"/>
-          <a:lstStyle/>
-          <a:p>
-            <a:pPr algn="ctr"/>
-            <a:r>
-              <a:rPr sz="1200" b="1" i="0">
-                <a:solidFill>
-                  <a:srgbClr val="FFFFFF"/>
-                </a:solidFill>
-              </a:rPr>
-              <a:t/>
-            </a:r>
-          </a:p>
-        </p:txBody>
-      </p:sp>
-      <p:sp>
-        <p:nvSpPr>
-          <p:cNvPr id="1002" name="Label"/>
+              <a:t>How often will each mode occur? Occurrence stays ‘?’ — which modes warrant action even when their probabilities are unknown?</a:t>
+            </a:r>
+          </a:p>
+        </p:txBody>
+      </p:sp>
+      <p:sp>
+        <p:nvSpPr>
+          <p:cNvPr id="1011" name="Label"/>
           <p:cNvSpPr txBox="1"/>
           <p:nvPr/>
         </p:nvSpPr>
         <p:spPr>
           <a:xfrm>
-            <a:off x="3291840" y="5193792"/>
-            <a:ext cx="5120640" cy="256032"/>
+            <a:off x="548640" y="1389888"/>
+            <a:ext cx="3931920" cy="219456"/>
           </a:xfrm>
           <a:prstGeom prst="rect">
             <a:avLst/>
@@ -20186,19 +20686,121 @@
           <a:noFill/>
         </p:spPr>
         <p:txBody>
-          <a:bodyPr wrap="square" lIns="27432" tIns="22860" rIns="27432" bIns="22860" anchor="t">
+          <a:bodyPr wrap="none" lIns="27432" tIns="22860" rIns="27432" bIns="22860" anchor="t">
             <a:spAutoFit/>
           </a:bodyPr>
           <a:lstStyle/>
           <a:p>
-            <a:pPr algn="ctr"/>
-            <a:r>
-              <a:rPr sz="1000" b="1" i="0">
+            <a:pPr algn="l"/>
+            <a:r>
+              <a:rPr sz="1200" b="1" i="1">
                 <a:solidFill>
                   <a:srgbClr val="5C4826"/>
                 </a:solidFill>
               </a:rPr>
-              <a:t>the same rule — the input grew from 3 to 22 characters</a:t>
+              <a:t>1  Identify a plausible failure mode</a:t>
+            </a:r>
+          </a:p>
+        </p:txBody>
+      </p:sp>
+      <p:sp>
+        <p:nvSpPr>
+          <p:cNvPr id="1012" name="Label"/>
+          <p:cNvSpPr txBox="1"/>
+          <p:nvPr/>
+        </p:nvSpPr>
+        <p:spPr>
+          <a:xfrm>
+            <a:off x="4526280" y="1389888"/>
+            <a:ext cx="3931920" cy="219456"/>
+          </a:xfrm>
+          <a:prstGeom prst="rect">
+            <a:avLst/>
+          </a:prstGeom>
+          <a:noFill/>
+        </p:spPr>
+        <p:txBody>
+          <a:bodyPr wrap="none" lIns="27432" tIns="22860" rIns="27432" bIns="22860" anchor="t">
+            <a:spAutoFit/>
+          </a:bodyPr>
+          <a:lstStyle/>
+          <a:p>
+            <a:pPr algn="l"/>
+            <a:r>
+              <a:rPr sz="1200" b="1" i="1">
+                <a:solidFill>
+                  <a:srgbClr val="5C4826"/>
+                </a:solidFill>
+              </a:rPr>
+              <a:t>2  Determine its consequences</a:t>
+            </a:r>
+          </a:p>
+        </p:txBody>
+      </p:sp>
+      <p:sp>
+        <p:nvSpPr>
+          <p:cNvPr id="1013" name="Label"/>
+          <p:cNvSpPr txBox="1"/>
+          <p:nvPr/>
+        </p:nvSpPr>
+        <p:spPr>
+          <a:xfrm>
+            <a:off x="548640" y="1627632"/>
+            <a:ext cx="3931920" cy="219456"/>
+          </a:xfrm>
+          <a:prstGeom prst="rect">
+            <a:avLst/>
+          </a:prstGeom>
+          <a:noFill/>
+        </p:spPr>
+        <p:txBody>
+          <a:bodyPr wrap="none" lIns="27432" tIns="22860" rIns="27432" bIns="22860" anchor="t">
+            <a:spAutoFit/>
+          </a:bodyPr>
+          <a:lstStyle/>
+          <a:p>
+            <a:pPr algn="l"/>
+            <a:r>
+              <a:rPr sz="1200" b="1" i="1">
+                <a:solidFill>
+                  <a:srgbClr val="5C4826"/>
+                </a:solidFill>
+              </a:rPr>
+              <a:t>3  Identify existing or proposed controls</a:t>
+            </a:r>
+          </a:p>
+        </p:txBody>
+      </p:sp>
+      <p:sp>
+        <p:nvSpPr>
+          <p:cNvPr id="1014" name="Label"/>
+          <p:cNvSpPr txBox="1"/>
+          <p:nvPr/>
+        </p:nvSpPr>
+        <p:spPr>
+          <a:xfrm>
+            <a:off x="4526280" y="1627632"/>
+            <a:ext cx="3931920" cy="219456"/>
+          </a:xfrm>
+          <a:prstGeom prst="rect">
+            <a:avLst/>
+          </a:prstGeom>
+          <a:noFill/>
+        </p:spPr>
+        <p:txBody>
+          <a:bodyPr wrap="none" lIns="27432" tIns="22860" rIns="27432" bIns="22860" anchor="t">
+            <a:spAutoFit/>
+          </a:bodyPr>
+          <a:lstStyle/>
+          <a:p>
+            <a:pPr algn="l"/>
+            <a:r>
+              <a:rPr sz="1200" b="1" i="1">
+                <a:solidFill>
+                  <a:srgbClr val="5C4826"/>
+                </a:solidFill>
+              </a:rPr>
+              <a:t>4  Decide whether the remaining risk warrants action</a:t>
             </a:r>
           </a:p>
         </p:txBody>
@@ -20231,12 +20833,7 @@
             <p:ph type="title"/>
           </p:nvPr>
         </p:nvSpPr>
-        <p:spPr>
-          <a:xfrm>
-            <a:off x="277148" y="118428"/>
-            <a:ext cx="9145148" cy="638175"/>
-          </a:xfrm>
-        </p:spPr>
+        <p:spPr/>
         <p:txBody>
           <a:bodyPr>
             <a:normAutofit fontScale="90000"/>
@@ -20244,12 +20841,12 @@
           <a:lstStyle/>
           <a:p>
             <a:r>
-              <a:rPr lang="en-US" sz="2400" i="1" dirty="0">
+              <a:rPr sz="2400" b="0" i="0">
                 <a:solidFill>
                   <a:srgbClr val="000000"/>
                 </a:solidFill>
               </a:rPr>
-              <a:t>Diagnose the Cloudflare outage</a:t>
+              <a:t>Apply FMEA to an unfamiliar system</a:t>
             </a:r>
           </a:p>
         </p:txBody>
@@ -20269,9 +20866,9 @@
           <a:bodyPr/>
           <a:lstStyle/>
           <a:p>
-            <a:fld id="{54DE72B0-FFEB-4C83-B4BD-F25961BEDFCA}" type="slidenum">
+            <a:fld id="{8CF8A65D-8523-4C39-BD83-5C787F1FA9B3}" type="slidenum">
               <a:rPr lang="en-US" smtClean="0"/>
-              <a:t>29</a:t>
+              <a:t>10</a:t>
             </a:fld>
             <a:endParaRPr lang="en-US"/>
           </a:p>
@@ -20279,14 +20876,763 @@
       </p:sp>
       <p:sp>
         <p:nvSpPr>
+          <p:cNvPr id="909" name="FooterBand"/>
+          <p:cNvSpPr/>
+          <p:nvPr/>
+        </p:nvSpPr>
+        <p:spPr>
+          <a:xfrm>
+            <a:off x="274320" y="5513831"/>
+            <a:ext cx="8595360" cy="905256"/>
+          </a:xfrm>
+          <a:prstGeom prst="rect">
+            <a:avLst/>
+          </a:prstGeom>
+          <a:solidFill>
+            <a:srgbClr val="8E6F3E"/>
+          </a:solidFill>
+          <a:ln>
+            <a:noFill/>
+          </a:ln>
+          <a:effectLst/>
+        </p:spPr>
+        <p:style>
+          <a:lnRef idx="1">
+            <a:schemeClr val="accent1"/>
+          </a:lnRef>
+          <a:fillRef idx="3">
+            <a:schemeClr val="accent1"/>
+          </a:fillRef>
+          <a:effectRef idx="2">
+            <a:schemeClr val="accent1"/>
+          </a:effectRef>
+          <a:fontRef idx="minor">
+            <a:schemeClr val="lt1"/>
+          </a:fontRef>
+        </p:style>
+        <p:txBody>
+          <a:bodyPr wrap="square" lIns="27432" tIns="22860" rIns="27432" bIns="22860" rtlCol="0" anchor="ctr"/>
+          <a:lstStyle/>
+          <a:p>
+            <a:pPr algn="ctr"/>
+            <a:r>
+              <a:rPr sz="2000" b="1" i="0" dirty="0">
+                <a:solidFill>
+                  <a:srgbClr val="FFFFFF"/>
+                </a:solidFill>
+              </a:rPr>
+              <a:t>YOUR TASK (2–3 minutes, with a partner): at least one failure mode per function.</a:t>
+            </a:r>
+          </a:p>
+          <a:p>
+            <a:pPr algn="ctr">
+              <a:spcBef>
+                <a:spcPts val="300"/>
+              </a:spcBef>
+            </a:pPr>
+            <a:r>
+              <a:rPr sz="2000" b="1" i="0" dirty="0">
+                <a:solidFill>
+                  <a:srgbClr val="FFFFFF"/>
+                </a:solidFill>
+              </a:rPr>
+              <a:t>Leave likelihood as ‘?’ — decide which modes warrant a control anyway.</a:t>
+            </a:r>
+          </a:p>
+        </p:txBody>
+      </p:sp>
+      <p:sp>
+        <p:nvSpPr>
+          <p:cNvPr id="920" name="Block"/>
+          <p:cNvSpPr/>
+          <p:nvPr/>
+        </p:nvSpPr>
+        <p:spPr>
+          <a:xfrm>
+            <a:off x="548640" y="1005840"/>
+            <a:ext cx="2560320" cy="566928"/>
+          </a:xfrm>
+          <a:prstGeom prst="rect">
+            <a:avLst/>
+          </a:prstGeom>
+          <a:solidFill>
+            <a:srgbClr val="8E6F3E"/>
+          </a:solidFill>
+          <a:ln>
+            <a:noFill/>
+          </a:ln>
+          <a:effectLst/>
+        </p:spPr>
+        <p:style>
+          <a:lnRef idx="1">
+            <a:schemeClr val="accent1"/>
+          </a:lnRef>
+          <a:fillRef idx="3">
+            <a:schemeClr val="accent1"/>
+          </a:fillRef>
+          <a:effectRef idx="2">
+            <a:schemeClr val="accent1"/>
+          </a:effectRef>
+          <a:fontRef idx="minor">
+            <a:schemeClr val="lt1"/>
+          </a:fontRef>
+        </p:style>
+        <p:txBody>
+          <a:bodyPr wrap="square" lIns="27432" tIns="22860" rIns="27432" bIns="22860" rtlCol="0" anchor="ctr"/>
+          <a:lstStyle/>
+          <a:p>
+            <a:pPr algn="ctr"/>
+            <a:r>
+              <a:rPr sz="1200" b="1" i="0">
+                <a:solidFill>
+                  <a:srgbClr val="FFFFFF"/>
+                </a:solidFill>
+              </a:rPr>
+              <a:t>CLOUDFLARE</a:t>
+            </a:r>
+          </a:p>
+        </p:txBody>
+      </p:sp>
+      <p:sp>
+        <p:nvSpPr>
+          <p:cNvPr id="921" name="RowCaption"/>
+          <p:cNvSpPr/>
+          <p:nvPr/>
+        </p:nvSpPr>
+        <p:spPr>
+          <a:xfrm>
+            <a:off x="3383280" y="1005840"/>
+            <a:ext cx="5212080" cy="566928"/>
+          </a:xfrm>
+          <a:prstGeom prst="rect">
+            <a:avLst/>
+          </a:prstGeom>
+          <a:noFill/>
+          <a:ln>
+            <a:noFill/>
+          </a:ln>
+          <a:effectLst/>
+        </p:spPr>
+        <p:style>
+          <a:lnRef idx="1">
+            <a:schemeClr val="accent1"/>
+          </a:lnRef>
+          <a:fillRef idx="3">
+            <a:schemeClr val="accent1"/>
+          </a:fillRef>
+          <a:effectRef idx="2">
+            <a:schemeClr val="accent1"/>
+          </a:effectRef>
+          <a:fontRef idx="minor">
+            <a:schemeClr val="lt1"/>
+          </a:fontRef>
+        </p:style>
+        <p:txBody>
+          <a:bodyPr wrap="square" lIns="27432" tIns="22860" rIns="27432" bIns="22860" rtlCol="0" anchor="ctr"/>
+          <a:lstStyle/>
+          <a:p>
+            <a:pPr algn="l"/>
+            <a:r>
+              <a:rPr sz="1600" b="0" i="0">
+                <a:solidFill>
+                  <a:srgbClr val="555960"/>
+                </a:solidFill>
+              </a:rPr>
+              <a:t>operates a Web Application Firewall (WAF): it inspects incoming web requests for attacks</a:t>
+            </a:r>
+          </a:p>
+        </p:txBody>
+      </p:sp>
+      <p:sp>
+        <p:nvSpPr>
+          <p:cNvPr id="923" name="Block"/>
+          <p:cNvSpPr/>
+          <p:nvPr/>
+        </p:nvSpPr>
+        <p:spPr>
+          <a:xfrm>
+            <a:off x="548640" y="1664208"/>
+            <a:ext cx="2560320" cy="566928"/>
+          </a:xfrm>
+          <a:prstGeom prst="rect">
+            <a:avLst/>
+          </a:prstGeom>
+          <a:solidFill>
+            <a:srgbClr val="8E6F3E"/>
+          </a:solidFill>
+          <a:ln>
+            <a:noFill/>
+          </a:ln>
+          <a:effectLst/>
+        </p:spPr>
+        <p:style>
+          <a:lnRef idx="1">
+            <a:schemeClr val="accent1"/>
+          </a:lnRef>
+          <a:fillRef idx="3">
+            <a:schemeClr val="accent1"/>
+          </a:fillRef>
+          <a:effectRef idx="2">
+            <a:schemeClr val="accent1"/>
+          </a:effectRef>
+          <a:fontRef idx="minor">
+            <a:schemeClr val="lt1"/>
+          </a:fontRef>
+        </p:style>
+        <p:txBody>
+          <a:bodyPr wrap="square" lIns="27432" tIns="22860" rIns="27432" bIns="22860" rtlCol="0" anchor="ctr"/>
+          <a:lstStyle/>
+          <a:p>
+            <a:pPr algn="ctr"/>
+            <a:r>
+              <a:rPr sz="1200" b="1" i="0">
+                <a:solidFill>
+                  <a:srgbClr val="FFFFFF"/>
+                </a:solidFill>
+              </a:rPr>
+              <a:t>RULE CHANGES</a:t>
+            </a:r>
+          </a:p>
+        </p:txBody>
+      </p:sp>
+      <p:sp>
+        <p:nvSpPr>
+          <p:cNvPr id="924" name="RowCaption"/>
+          <p:cNvSpPr/>
+          <p:nvPr/>
+        </p:nvSpPr>
+        <p:spPr>
+          <a:xfrm>
+            <a:off x="3383280" y="1664208"/>
+            <a:ext cx="5212080" cy="566928"/>
+          </a:xfrm>
+          <a:prstGeom prst="rect">
+            <a:avLst/>
+          </a:prstGeom>
+          <a:noFill/>
+          <a:ln>
+            <a:noFill/>
+          </a:ln>
+          <a:effectLst/>
+        </p:spPr>
+        <p:style>
+          <a:lnRef idx="1">
+            <a:schemeClr val="accent1"/>
+          </a:lnRef>
+          <a:fillRef idx="3">
+            <a:schemeClr val="accent1"/>
+          </a:fillRef>
+          <a:effectRef idx="2">
+            <a:schemeClr val="accent1"/>
+          </a:effectRef>
+          <a:fontRef idx="minor">
+            <a:schemeClr val="lt1"/>
+          </a:fontRef>
+        </p:style>
+        <p:txBody>
+          <a:bodyPr wrap="square" lIns="27432" tIns="22860" rIns="27432" bIns="22860" rtlCol="0" anchor="ctr"/>
+          <a:lstStyle/>
+          <a:p>
+            <a:pPr algn="l"/>
+            <a:r>
+              <a:rPr sz="1600" b="0" i="0">
+                <a:solidFill>
+                  <a:srgbClr val="555960"/>
+                </a:solidFill>
+              </a:rPr>
+              <a:t>new detection rules deploy without a software release — and propagate globally within seconds</a:t>
+            </a:r>
+          </a:p>
+        </p:txBody>
+      </p:sp>
+      <p:sp>
+        <p:nvSpPr>
+          <p:cNvPr id="926" name="Block"/>
+          <p:cNvSpPr/>
+          <p:nvPr/>
+        </p:nvSpPr>
+        <p:spPr>
+          <a:xfrm>
+            <a:off x="548640" y="2322576"/>
+            <a:ext cx="2560320" cy="566928"/>
+          </a:xfrm>
+          <a:prstGeom prst="rect">
+            <a:avLst/>
+          </a:prstGeom>
+          <a:solidFill>
+            <a:srgbClr val="8E6F3E"/>
+          </a:solidFill>
+          <a:ln>
+            <a:noFill/>
+          </a:ln>
+          <a:effectLst/>
+        </p:spPr>
+        <p:style>
+          <a:lnRef idx="1">
+            <a:schemeClr val="accent1"/>
+          </a:lnRef>
+          <a:fillRef idx="3">
+            <a:schemeClr val="accent1"/>
+          </a:fillRef>
+          <a:effectRef idx="2">
+            <a:schemeClr val="accent1"/>
+          </a:effectRef>
+          <a:fontRef idx="minor">
+            <a:schemeClr val="lt1"/>
+          </a:fontRef>
+        </p:style>
+        <p:txBody>
+          <a:bodyPr wrap="square" lIns="27432" tIns="22860" rIns="27432" bIns="22860" rtlCol="0" anchor="ctr"/>
+          <a:lstStyle/>
+          <a:p>
+            <a:pPr algn="ctr"/>
+            <a:r>
+              <a:rPr sz="1200" b="1" i="0" dirty="0">
+                <a:solidFill>
+                  <a:srgbClr val="FFFFFF"/>
+                </a:solidFill>
+              </a:rPr>
+              <a:t>RULE FORM</a:t>
+            </a:r>
+          </a:p>
+        </p:txBody>
+      </p:sp>
+      <p:sp>
+        <p:nvSpPr>
+          <p:cNvPr id="927" name="RowCaption"/>
+          <p:cNvSpPr/>
+          <p:nvPr/>
+        </p:nvSpPr>
+        <p:spPr>
+          <a:xfrm>
+            <a:off x="3383280" y="2322576"/>
+            <a:ext cx="5212080" cy="566928"/>
+          </a:xfrm>
+          <a:prstGeom prst="rect">
+            <a:avLst/>
+          </a:prstGeom>
+          <a:noFill/>
+          <a:ln>
+            <a:noFill/>
+          </a:ln>
+          <a:effectLst/>
+        </p:spPr>
+        <p:style>
+          <a:lnRef idx="1">
+            <a:schemeClr val="accent1"/>
+          </a:lnRef>
+          <a:fillRef idx="3">
+            <a:schemeClr val="accent1"/>
+          </a:fillRef>
+          <a:effectRef idx="2">
+            <a:schemeClr val="accent1"/>
+          </a:effectRef>
+          <a:fontRef idx="minor">
+            <a:schemeClr val="lt1"/>
+          </a:fontRef>
+        </p:style>
+        <p:txBody>
+          <a:bodyPr wrap="square" lIns="27432" tIns="22860" rIns="27432" bIns="22860" rtlCol="0" anchor="ctr"/>
+          <a:lstStyle/>
+          <a:p>
+            <a:pPr algn="l"/>
+            <a:r>
+              <a:rPr sz="1600" b="0" i="0">
+                <a:solidFill>
+                  <a:srgbClr val="555960"/>
+                </a:solidFill>
+              </a:rPr>
+              <a:t>some detection rules are written as regular expressions</a:t>
+            </a:r>
+          </a:p>
+        </p:txBody>
+      </p:sp>
+      <p:sp>
+        <p:nvSpPr>
+          <p:cNvPr id="5" name="ColumnHeading"/>
+          <p:cNvSpPr/>
+          <p:nvPr/>
+        </p:nvSpPr>
+        <p:spPr>
+          <a:xfrm>
+            <a:off x="365760" y="3072384"/>
+            <a:ext cx="1645920" cy="256032"/>
+          </a:xfrm>
+          <a:prstGeom prst="rect">
+            <a:avLst/>
+          </a:prstGeom>
+          <a:noFill/>
+          <a:ln>
+            <a:noFill/>
+          </a:ln>
+          <a:effectLst/>
+        </p:spPr>
+        <p:style>
+          <a:lnRef idx="1">
+            <a:schemeClr val="accent1"/>
+          </a:lnRef>
+          <a:fillRef idx="3">
+            <a:schemeClr val="accent1"/>
+          </a:fillRef>
+          <a:effectRef idx="2">
+            <a:schemeClr val="accent1"/>
+          </a:effectRef>
+          <a:fontRef idx="minor">
+            <a:schemeClr val="lt1"/>
+          </a:fontRef>
+        </p:style>
+        <p:txBody>
+          <a:bodyPr wrap="square" lIns="27432" tIns="22860" rIns="27432" bIns="22860" rtlCol="0" anchor="ctr"/>
+          <a:lstStyle/>
+          <a:p>
+            <a:pPr algn="ctr"/>
+            <a:r>
+              <a:rPr lang="en-US" sz="1200" b="1" i="0" dirty="0">
+                <a:solidFill>
+                  <a:schemeClr val="bg1"/>
+                </a:solidFill>
+              </a:rPr>
+              <a:t>FUNCTION</a:t>
+            </a:r>
+            <a:endParaRPr sz="2800" b="1" i="0" dirty="0">
+              <a:solidFill>
+                <a:schemeClr val="bg1"/>
+              </a:solidFill>
+            </a:endParaRPr>
+          </a:p>
+        </p:txBody>
+      </p:sp>
+      <p:sp>
+        <p:nvSpPr>
+          <p:cNvPr id="1000" name="ColumnHeading"/>
+          <p:cNvSpPr/>
+          <p:nvPr/>
+        </p:nvSpPr>
+        <p:spPr>
+          <a:xfrm>
+            <a:off x="2103120" y="3072384"/>
+            <a:ext cx="2194560" cy="256032"/>
+          </a:xfrm>
+          <a:prstGeom prst="rect">
+            <a:avLst/>
+          </a:prstGeom>
+          <a:noFill/>
+          <a:ln>
+            <a:noFill/>
+          </a:ln>
+          <a:effectLst/>
+        </p:spPr>
+        <p:style>
+          <a:lnRef idx="1">
+            <a:schemeClr val="accent1"/>
+          </a:lnRef>
+          <a:fillRef idx="3">
+            <a:schemeClr val="accent1"/>
+          </a:fillRef>
+          <a:effectRef idx="2">
+            <a:schemeClr val="accent1"/>
+          </a:effectRef>
+          <a:fontRef idx="minor">
+            <a:schemeClr val="lt1"/>
+          </a:fontRef>
+        </p:style>
+        <p:txBody>
+          <a:bodyPr wrap="square" lIns="27432" tIns="22860" rIns="27432" bIns="22860" rtlCol="0" anchor="ctr"/>
+          <a:lstStyle/>
+          <a:p>
+            <a:pPr algn="ctr"/>
+            <a:r>
+              <a:rPr lang="en-US" sz="1200" b="1" i="0" dirty="0">
+                <a:solidFill>
+                  <a:schemeClr val="bg1"/>
+                </a:solidFill>
+              </a:rPr>
+              <a:t>POSSIBLE FAILURE MODE</a:t>
+            </a:r>
+            <a:endParaRPr sz="2800" b="1" i="0" dirty="0">
+              <a:solidFill>
+                <a:schemeClr val="bg1"/>
+              </a:solidFill>
+            </a:endParaRPr>
+          </a:p>
+        </p:txBody>
+      </p:sp>
+      <p:sp>
+        <p:nvSpPr>
+          <p:cNvPr id="1001" name="ColumnHeading"/>
+          <p:cNvSpPr/>
+          <p:nvPr/>
+        </p:nvSpPr>
+        <p:spPr>
+          <a:xfrm>
+            <a:off x="4389120" y="3072384"/>
+            <a:ext cx="2011680" cy="256032"/>
+          </a:xfrm>
+          <a:prstGeom prst="rect">
+            <a:avLst/>
+          </a:prstGeom>
+          <a:noFill/>
+          <a:ln>
+            <a:noFill/>
+          </a:ln>
+          <a:effectLst/>
+        </p:spPr>
+        <p:style>
+          <a:lnRef idx="1">
+            <a:schemeClr val="accent1"/>
+          </a:lnRef>
+          <a:fillRef idx="3">
+            <a:schemeClr val="accent1"/>
+          </a:fillRef>
+          <a:effectRef idx="2">
+            <a:schemeClr val="accent1"/>
+          </a:effectRef>
+          <a:fontRef idx="minor">
+            <a:schemeClr val="lt1"/>
+          </a:fontRef>
+        </p:style>
+        <p:txBody>
+          <a:bodyPr wrap="square" lIns="27432" tIns="22860" rIns="27432" bIns="22860" rtlCol="0" anchor="ctr"/>
+          <a:lstStyle/>
+          <a:p>
+            <a:pPr algn="ctr"/>
+            <a:r>
+              <a:rPr lang="en-US" sz="1200" b="1" i="0" dirty="0">
+                <a:solidFill>
+                  <a:schemeClr val="bg1"/>
+                </a:solidFill>
+              </a:rPr>
+              <a:t>POTENTIAL EFFECT</a:t>
+            </a:r>
+            <a:endParaRPr sz="2800" b="1" i="0" dirty="0">
+              <a:solidFill>
+                <a:schemeClr val="bg1"/>
+              </a:solidFill>
+            </a:endParaRPr>
+          </a:p>
+        </p:txBody>
+      </p:sp>
+      <p:sp>
+        <p:nvSpPr>
+          <p:cNvPr id="1002" name="ColumnHeading"/>
+          <p:cNvSpPr/>
+          <p:nvPr/>
+        </p:nvSpPr>
+        <p:spPr>
+          <a:xfrm>
+            <a:off x="6492240" y="3072384"/>
+            <a:ext cx="2103120" cy="256032"/>
+          </a:xfrm>
+          <a:prstGeom prst="rect">
+            <a:avLst/>
+          </a:prstGeom>
+          <a:noFill/>
+          <a:ln>
+            <a:noFill/>
+          </a:ln>
+          <a:effectLst/>
+        </p:spPr>
+        <p:style>
+          <a:lnRef idx="1">
+            <a:schemeClr val="accent1"/>
+          </a:lnRef>
+          <a:fillRef idx="3">
+            <a:schemeClr val="accent1"/>
+          </a:fillRef>
+          <a:effectRef idx="2">
+            <a:schemeClr val="accent1"/>
+          </a:effectRef>
+          <a:fontRef idx="minor">
+            <a:schemeClr val="lt1"/>
+          </a:fontRef>
+        </p:style>
+        <p:txBody>
+          <a:bodyPr wrap="square" lIns="27432" tIns="22860" rIns="27432" bIns="22860" rtlCol="0" anchor="ctr"/>
+          <a:lstStyle/>
+          <a:p>
+            <a:pPr algn="ctr"/>
+            <a:r>
+              <a:rPr lang="en-US" sz="1200" b="1" i="0" dirty="0">
+                <a:solidFill>
+                  <a:schemeClr val="bg1"/>
+                </a:solidFill>
+              </a:rPr>
+              <a:t>PROPOSED CONTROL</a:t>
+            </a:r>
+            <a:endParaRPr sz="2800" b="1" i="0" dirty="0">
+              <a:solidFill>
+                <a:schemeClr val="bg1"/>
+              </a:solidFill>
+            </a:endParaRPr>
+          </a:p>
+        </p:txBody>
+      </p:sp>
+      <p:sp>
+        <p:nvSpPr>
+          <p:cNvPr id="1003" name="Block"/>
+          <p:cNvSpPr/>
+          <p:nvPr/>
+        </p:nvSpPr>
+        <p:spPr>
+          <a:xfrm>
+            <a:off x="365760" y="3401568"/>
+            <a:ext cx="1645920" cy="603504"/>
+          </a:xfrm>
+          <a:prstGeom prst="rect">
+            <a:avLst/>
+          </a:prstGeom>
+          <a:solidFill>
+            <a:srgbClr val="8E6F3E"/>
+          </a:solidFill>
+          <a:ln>
+            <a:noFill/>
+          </a:ln>
+          <a:effectLst/>
+        </p:spPr>
+        <p:style>
+          <a:lnRef idx="1">
+            <a:schemeClr val="accent1"/>
+          </a:lnRef>
+          <a:fillRef idx="3">
+            <a:schemeClr val="accent1"/>
+          </a:fillRef>
+          <a:effectRef idx="2">
+            <a:schemeClr val="accent1"/>
+          </a:effectRef>
+          <a:fontRef idx="minor">
+            <a:schemeClr val="lt1"/>
+          </a:fontRef>
+        </p:style>
+        <p:txBody>
+          <a:bodyPr wrap="square" lIns="27432" tIns="22860" rIns="27432" bIns="22860" rtlCol="0" anchor="ctr"/>
+          <a:lstStyle/>
+          <a:p>
+            <a:pPr algn="ctr"/>
+            <a:r>
+              <a:rPr sz="1200" b="1" i="0">
+                <a:solidFill>
+                  <a:srgbClr val="FFFFFF"/>
+                </a:solidFill>
+              </a:rPr>
+              <a:t>Evaluate WAF rule</a:t>
+            </a:r>
+          </a:p>
+        </p:txBody>
+      </p:sp>
+      <p:sp>
+        <p:nvSpPr>
+          <p:cNvPr id="1004" name="Block"/>
+          <p:cNvSpPr/>
+          <p:nvPr/>
+        </p:nvSpPr>
+        <p:spPr>
+          <a:xfrm>
+            <a:off x="365760" y="4059936"/>
+            <a:ext cx="1645920" cy="603504"/>
+          </a:xfrm>
+          <a:prstGeom prst="rect">
+            <a:avLst/>
+          </a:prstGeom>
+          <a:solidFill>
+            <a:srgbClr val="8E6F3E"/>
+          </a:solidFill>
+          <a:ln>
+            <a:noFill/>
+          </a:ln>
+          <a:effectLst/>
+        </p:spPr>
+        <p:style>
+          <a:lnRef idx="1">
+            <a:schemeClr val="accent1"/>
+          </a:lnRef>
+          <a:fillRef idx="3">
+            <a:schemeClr val="accent1"/>
+          </a:fillRef>
+          <a:effectRef idx="2">
+            <a:schemeClr val="accent1"/>
+          </a:effectRef>
+          <a:fontRef idx="minor">
+            <a:schemeClr val="lt1"/>
+          </a:fontRef>
+        </p:style>
+        <p:txBody>
+          <a:bodyPr wrap="square" lIns="27432" tIns="22860" rIns="27432" bIns="22860" rtlCol="0" anchor="ctr"/>
+          <a:lstStyle/>
+          <a:p>
+            <a:pPr algn="ctr"/>
+            <a:r>
+              <a:rPr sz="1200" b="1" i="0">
+                <a:solidFill>
+                  <a:srgbClr val="FFFFFF"/>
+                </a:solidFill>
+              </a:rPr>
+              <a:t>Validate new rule</a:t>
+            </a:r>
+          </a:p>
+        </p:txBody>
+      </p:sp>
+      <p:sp>
+        <p:nvSpPr>
+          <p:cNvPr id="1005" name="Block"/>
+          <p:cNvSpPr/>
+          <p:nvPr/>
+        </p:nvSpPr>
+        <p:spPr>
+          <a:xfrm>
+            <a:off x="365760" y="4718304"/>
+            <a:ext cx="1645920" cy="603504"/>
+          </a:xfrm>
+          <a:prstGeom prst="rect">
+            <a:avLst/>
+          </a:prstGeom>
+          <a:solidFill>
+            <a:srgbClr val="8E6F3E"/>
+          </a:solidFill>
+          <a:ln>
+            <a:noFill/>
+          </a:ln>
+          <a:effectLst/>
+        </p:spPr>
+        <p:style>
+          <a:lnRef idx="1">
+            <a:schemeClr val="accent1"/>
+          </a:lnRef>
+          <a:fillRef idx="3">
+            <a:schemeClr val="accent1"/>
+          </a:fillRef>
+          <a:effectRef idx="2">
+            <a:schemeClr val="accent1"/>
+          </a:effectRef>
+          <a:fontRef idx="minor">
+            <a:schemeClr val="lt1"/>
+          </a:fontRef>
+        </p:style>
+        <p:txBody>
+          <a:bodyPr wrap="square" lIns="27432" tIns="22860" rIns="27432" bIns="22860" rtlCol="0" anchor="ctr"/>
+          <a:lstStyle/>
+          <a:p>
+            <a:pPr algn="ctr"/>
+            <a:r>
+              <a:rPr sz="1200" b="1" i="0">
+                <a:solidFill>
+                  <a:srgbClr val="FFFFFF"/>
+                </a:solidFill>
+              </a:rPr>
+              <a:t>Distribute rule</a:t>
+            </a:r>
+          </a:p>
+        </p:txBody>
+      </p:sp>
+      <p:sp>
+        <p:nvSpPr>
           <p:cNvPr id="903" name="Card"/>
           <p:cNvSpPr/>
           <p:nvPr/>
         </p:nvSpPr>
         <p:spPr>
           <a:xfrm>
-            <a:off x="4023360" y="1463040"/>
-            <a:ext cx="4572000" cy="640080"/>
+            <a:off x="2103120" y="3401568"/>
+            <a:ext cx="2194560" cy="603504"/>
           </a:xfrm>
           <a:prstGeom prst="rect">
             <a:avLst/>
@@ -20326,21 +21672,21 @@
                   <a:srgbClr val="5C4826"/>
                 </a:solidFill>
               </a:rPr>
-              <a:t>what failed locally?</a:t>
-            </a:r>
-          </a:p>
-        </p:txBody>
-      </p:sp>
-      <p:sp>
-        <p:nvSpPr>
-          <p:cNvPr id="907" name="Card"/>
+              <a:t/>
+            </a:r>
+          </a:p>
+        </p:txBody>
+      </p:sp>
+      <p:sp>
+        <p:nvSpPr>
+          <p:cNvPr id="1006" name="Card"/>
           <p:cNvSpPr/>
           <p:nvPr/>
         </p:nvSpPr>
         <p:spPr>
           <a:xfrm>
-            <a:off x="4023360" y="2423160"/>
-            <a:ext cx="4572000" cy="640080"/>
+            <a:off x="4389120" y="3401568"/>
+            <a:ext cx="2011680" cy="603504"/>
           </a:xfrm>
           <a:prstGeom prst="rect">
             <a:avLst/>
@@ -20375,269 +21721,26 @@
           <a:p>
             <a:pPr algn="ctr"/>
             <a:r>
-              <a:rPr sz="2000" b="0" i="1">
+              <a:rPr sz="2000" b="0" i="1" dirty="0">
                 <a:solidFill>
                   <a:srgbClr val="5C4826"/>
                 </a:solidFill>
               </a:rPr>
-              <a:t>why did the defect escape?</a:t>
-            </a:r>
-          </a:p>
-        </p:txBody>
-      </p:sp>
-      <p:sp>
-        <p:nvSpPr>
-          <p:cNvPr id="909" name="Block"/>
+              <a:t/>
+            </a:r>
+          </a:p>
+        </p:txBody>
+      </p:sp>
+      <p:sp>
+        <p:nvSpPr>
+          <p:cNvPr id="1007" name="Card"/>
           <p:cNvSpPr/>
           <p:nvPr/>
         </p:nvSpPr>
         <p:spPr>
           <a:xfrm>
-            <a:off x="548640" y="1463040"/>
-            <a:ext cx="3291840" cy="640080"/>
-          </a:xfrm>
-          <a:prstGeom prst="rect">
-            <a:avLst/>
-          </a:prstGeom>
-          <a:solidFill>
-            <a:srgbClr val="8E6F3E"/>
-          </a:solidFill>
-          <a:ln>
-            <a:noFill/>
-          </a:ln>
-          <a:effectLst/>
-        </p:spPr>
-        <p:style>
-          <a:lnRef idx="1">
-            <a:schemeClr val="accent1"/>
-          </a:lnRef>
-          <a:fillRef idx="3">
-            <a:schemeClr val="accent1"/>
-          </a:fillRef>
-          <a:effectRef idx="2">
-            <a:schemeClr val="accent1"/>
-          </a:effectRef>
-          <a:fontRef idx="minor">
-            <a:schemeClr val="lt1"/>
-          </a:fontRef>
-        </p:style>
-        <p:txBody>
-          <a:bodyPr wrap="square" lIns="27432" tIns="22860" rIns="27432" bIns="22860" rtlCol="0" anchor="ctr"/>
-          <a:lstStyle/>
-          <a:p>
-            <a:pPr algn="ctr"/>
-            <a:r>
-              <a:rPr sz="2000" b="1" i="0" dirty="0">
-                <a:solidFill>
-                  <a:srgbClr val="FFFFFF"/>
-                </a:solidFill>
-              </a:rPr>
-              <a:t>COMPONENT-LEVEL</a:t>
-            </a:r>
-            <a:endParaRPr lang="en-US" sz="2000" b="1" i="0" dirty="0">
-              <a:solidFill>
-                <a:srgbClr val="FFFFFF"/>
-              </a:solidFill>
-            </a:endParaRPr>
-          </a:p>
-        </p:txBody>
-      </p:sp>
-      <p:sp>
-        <p:nvSpPr>
-          <p:cNvPr id="910" name="Block"/>
-          <p:cNvSpPr/>
-          <p:nvPr/>
-        </p:nvSpPr>
-        <p:spPr>
-          <a:xfrm>
-            <a:off x="548640" y="2423160"/>
-            <a:ext cx="3291840" cy="640080"/>
-          </a:xfrm>
-          <a:prstGeom prst="rect">
-            <a:avLst/>
-          </a:prstGeom>
-          <a:solidFill>
-            <a:srgbClr val="8E6F3E"/>
-          </a:solidFill>
-          <a:ln>
-            <a:noFill/>
-          </a:ln>
-          <a:effectLst/>
-        </p:spPr>
-        <p:style>
-          <a:lnRef idx="1">
-            <a:schemeClr val="accent1"/>
-          </a:lnRef>
-          <a:fillRef idx="3">
-            <a:schemeClr val="accent1"/>
-          </a:fillRef>
-          <a:effectRef idx="2">
-            <a:schemeClr val="accent1"/>
-          </a:effectRef>
-          <a:fontRef idx="minor">
-            <a:schemeClr val="lt1"/>
-          </a:fontRef>
-        </p:style>
-        <p:txBody>
-          <a:bodyPr wrap="square" lIns="27432" tIns="22860" rIns="27432" bIns="22860" rtlCol="0" anchor="ctr"/>
-          <a:lstStyle/>
-          <a:p>
-            <a:pPr algn="ctr"/>
-            <a:r>
-              <a:rPr sz="2000" b="1" i="0" dirty="0">
-                <a:solidFill>
-                  <a:srgbClr val="FFFFFF"/>
-                </a:solidFill>
-              </a:rPr>
-              <a:t>SWISS CHEESE</a:t>
-            </a:r>
-            <a:endParaRPr lang="en-US" sz="2000" b="1" i="0" dirty="0">
-              <a:solidFill>
-                <a:srgbClr val="FFFFFF"/>
-              </a:solidFill>
-            </a:endParaRPr>
-          </a:p>
-        </p:txBody>
-      </p:sp>
-      <p:sp>
-        <p:nvSpPr>
-          <p:cNvPr id="911" name="Block"/>
-          <p:cNvSpPr/>
-          <p:nvPr/>
-        </p:nvSpPr>
-        <p:spPr>
-          <a:xfrm>
-            <a:off x="548640" y="3383280"/>
-            <a:ext cx="3291840" cy="640080"/>
-          </a:xfrm>
-          <a:prstGeom prst="rect">
-            <a:avLst/>
-          </a:prstGeom>
-          <a:solidFill>
-            <a:srgbClr val="8E6F3E"/>
-          </a:solidFill>
-          <a:ln>
-            <a:noFill/>
-          </a:ln>
-          <a:effectLst/>
-        </p:spPr>
-        <p:style>
-          <a:lnRef idx="1">
-            <a:schemeClr val="accent1"/>
-          </a:lnRef>
-          <a:fillRef idx="3">
-            <a:schemeClr val="accent1"/>
-          </a:fillRef>
-          <a:effectRef idx="2">
-            <a:schemeClr val="accent1"/>
-          </a:effectRef>
-          <a:fontRef idx="minor">
-            <a:schemeClr val="lt1"/>
-          </a:fontRef>
-        </p:style>
-        <p:txBody>
-          <a:bodyPr wrap="square" lIns="27432" tIns="22860" rIns="27432" bIns="22860" rtlCol="0" anchor="ctr"/>
-          <a:lstStyle/>
-          <a:p>
-            <a:pPr algn="ctr"/>
-            <a:r>
-              <a:rPr sz="2000" b="1" i="0" dirty="0">
-                <a:solidFill>
-                  <a:srgbClr val="FFFFFF"/>
-                </a:solidFill>
-              </a:rPr>
-              <a:t>STAMP</a:t>
-            </a:r>
-            <a:endParaRPr sz="2000" b="1" i="0" dirty="0">
-              <a:solidFill>
-                <a:srgbClr val="FFFFFF"/>
-              </a:solidFill>
-            </a:endParaRPr>
-          </a:p>
-        </p:txBody>
-      </p:sp>
-      <p:sp>
-        <p:nvSpPr>
-          <p:cNvPr id="913" name="FooterBand"/>
-          <p:cNvSpPr/>
-          <p:nvPr/>
-        </p:nvSpPr>
-        <p:spPr>
-          <a:xfrm>
-            <a:off x="274320" y="5128591"/>
-            <a:ext cx="8595360" cy="1592884"/>
-          </a:xfrm>
-          <a:prstGeom prst="rect">
-            <a:avLst/>
-          </a:prstGeom>
-          <a:noFill/>
-          <a:ln>
-            <a:noFill/>
-          </a:ln>
-          <a:effectLst/>
-        </p:spPr>
-        <p:style>
-          <a:lnRef idx="1">
-            <a:schemeClr val="accent1"/>
-          </a:lnRef>
-          <a:fillRef idx="3">
-            <a:schemeClr val="accent1"/>
-          </a:fillRef>
-          <a:effectRef idx="2">
-            <a:schemeClr val="accent1"/>
-          </a:effectRef>
-          <a:fontRef idx="minor">
-            <a:schemeClr val="lt1"/>
-          </a:fontRef>
-        </p:style>
-        <p:txBody>
-          <a:bodyPr wrap="square" lIns="27432" tIns="22860" rIns="27432" bIns="22860" rtlCol="0" anchor="ctr"/>
-          <a:lstStyle/>
-          <a:p>
-            <a:pPr algn="ctr"/>
-            <a:r>
-              <a:rPr lang="en-US" sz="2000" b="1" i="0" dirty="0">
-                <a:solidFill>
-                  <a:schemeClr val="bg1"/>
-                </a:solidFill>
-              </a:rPr>
-              <a:t>YOUR TASK — choose an intervention · name the failure class it addresses ·</a:t>
-            </a:r>
-          </a:p>
-          <a:p>
-            <a:pPr algn="ctr"/>
-            <a:r>
-              <a:rPr lang="en-US" sz="2000" b="1" i="0" dirty="0">
-                <a:solidFill>
-                  <a:schemeClr val="bg1"/>
-                </a:solidFill>
-              </a:rPr>
-              <a:t>decide where the lesson should live. What evidence would establish that it works?</a:t>
-            </a:r>
-          </a:p>
-          <a:p>
-            <a:pPr algn="ctr"/>
-            <a:r>
-              <a:rPr lang="en-US" sz="2000" b="1" i="0" dirty="0">
-                <a:solidFill>
-                  <a:schemeClr val="bg1"/>
-                </a:solidFill>
-              </a:rPr>
-              <a:t>How should this incident change the FMEA for future WAF releases?</a:t>
-            </a:r>
-          </a:p>
-        </p:txBody>
-      </p:sp>
-      <p:sp>
-        <p:nvSpPr>
-          <p:cNvPr id="2" name="Card"/>
-          <p:cNvSpPr/>
-          <p:nvPr/>
-        </p:nvSpPr>
-        <p:spPr>
-          <a:xfrm>
-            <a:off x="4023360" y="3383280"/>
-            <a:ext cx="4572000" cy="640080"/>
+            <a:off x="6492240" y="3401568"/>
+            <a:ext cx="2103120" cy="603504"/>
           </a:xfrm>
           <a:prstGeom prst="rect">
             <a:avLst/>
@@ -20672,33 +21775,37 @@
           <a:p>
             <a:pPr algn="ctr"/>
             <a:r>
-              <a:rPr lang="en-US" sz="2000" b="0" i="1" dirty="0">
+              <a:rPr sz="2000" b="0" i="1" dirty="0">
                 <a:solidFill>
                   <a:srgbClr val="5C4826"/>
                 </a:solidFill>
               </a:rPr>
-              <a:t>what controls and feedback permitted the consequences?</a:t>
-            </a:r>
-          </a:p>
-        </p:txBody>
-      </p:sp>
-      <p:sp>
-        <p:nvSpPr>
-          <p:cNvPr id="5" name="ColumnHeading"/>
+              <a:t/>
+            </a:r>
+          </a:p>
+        </p:txBody>
+      </p:sp>
+      <p:sp>
+        <p:nvSpPr>
+          <p:cNvPr id="1008" name="Card"/>
           <p:cNvSpPr/>
           <p:nvPr/>
         </p:nvSpPr>
         <p:spPr>
           <a:xfrm>
-            <a:off x="548640" y="1042415"/>
-            <a:ext cx="3291840" cy="274320"/>
-          </a:xfrm>
-          <a:prstGeom prst="rect">
-            <a:avLst/>
-          </a:prstGeom>
-          <a:noFill/>
-          <a:ln>
-            <a:noFill/>
+            <a:off x="2103120" y="4059936"/>
+            <a:ext cx="2194560" cy="603504"/>
+          </a:xfrm>
+          <a:prstGeom prst="rect">
+            <a:avLst/>
+          </a:prstGeom>
+          <a:solidFill>
+            <a:srgbClr val="F5F1E8"/>
+          </a:solidFill>
+          <a:ln w="12700">
+            <a:solidFill>
+              <a:srgbClr val="C9B991"/>
+            </a:solidFill>
           </a:ln>
           <a:effectLst/>
         </p:spPr>
@@ -20722,38 +21829,37 @@
           <a:p>
             <a:pPr algn="ctr"/>
             <a:r>
-              <a:rPr lang="en-US" sz="1400" b="1" i="0" dirty="0">
-                <a:solidFill>
-                  <a:schemeClr val="bg1"/>
-                </a:solidFill>
-              </a:rPr>
-              <a:t>MODEL</a:t>
-            </a:r>
-            <a:endParaRPr sz="2800" b="1" i="0" dirty="0">
-              <a:solidFill>
-                <a:schemeClr val="bg1"/>
-              </a:solidFill>
-            </a:endParaRPr>
-          </a:p>
-        </p:txBody>
-      </p:sp>
-      <p:sp>
-        <p:nvSpPr>
-          <p:cNvPr id="6" name="ColumnHeading"/>
+              <a:rPr sz="2000" b="0" i="1" dirty="0">
+                <a:solidFill>
+                  <a:srgbClr val="5C4826"/>
+                </a:solidFill>
+              </a:rPr>
+              <a:t/>
+            </a:r>
+          </a:p>
+        </p:txBody>
+      </p:sp>
+      <p:sp>
+        <p:nvSpPr>
+          <p:cNvPr id="1009" name="Card"/>
           <p:cNvSpPr/>
           <p:nvPr/>
         </p:nvSpPr>
         <p:spPr>
           <a:xfrm>
-            <a:off x="4023360" y="1042415"/>
-            <a:ext cx="4572000" cy="274320"/>
-          </a:xfrm>
-          <a:prstGeom prst="rect">
-            <a:avLst/>
-          </a:prstGeom>
-          <a:noFill/>
-          <a:ln>
-            <a:noFill/>
+            <a:off x="4389120" y="4059936"/>
+            <a:ext cx="2011680" cy="603504"/>
+          </a:xfrm>
+          <a:prstGeom prst="rect">
+            <a:avLst/>
+          </a:prstGeom>
+          <a:solidFill>
+            <a:srgbClr val="F5F1E8"/>
+          </a:solidFill>
+          <a:ln w="12700">
+            <a:solidFill>
+              <a:srgbClr val="C9B991"/>
+            </a:solidFill>
           </a:ln>
           <a:effectLst/>
         </p:spPr>
@@ -20777,18 +21883,229 @@
           <a:p>
             <a:pPr algn="ctr"/>
             <a:r>
-              <a:rPr lang="en-US" sz="1400" b="1" i="0" dirty="0">
-                <a:solidFill>
-                  <a:schemeClr val="bg1"/>
-                </a:solidFill>
-              </a:rPr>
-              <a:t>ITS QUESTION</a:t>
-            </a:r>
-            <a:endParaRPr sz="2800" b="1" i="0" dirty="0">
-              <a:solidFill>
-                <a:schemeClr val="bg1"/>
-              </a:solidFill>
-            </a:endParaRPr>
+              <a:rPr sz="2000" b="0" i="1" dirty="0">
+                <a:solidFill>
+                  <a:srgbClr val="5C4826"/>
+                </a:solidFill>
+              </a:rPr>
+              <a:t/>
+            </a:r>
+          </a:p>
+        </p:txBody>
+      </p:sp>
+      <p:sp>
+        <p:nvSpPr>
+          <p:cNvPr id="1010" name="Card"/>
+          <p:cNvSpPr/>
+          <p:nvPr/>
+        </p:nvSpPr>
+        <p:spPr>
+          <a:xfrm>
+            <a:off x="6492240" y="4059936"/>
+            <a:ext cx="2103120" cy="603504"/>
+          </a:xfrm>
+          <a:prstGeom prst="rect">
+            <a:avLst/>
+          </a:prstGeom>
+          <a:solidFill>
+            <a:srgbClr val="F5F1E8"/>
+          </a:solidFill>
+          <a:ln w="12700">
+            <a:solidFill>
+              <a:srgbClr val="C9B991"/>
+            </a:solidFill>
+          </a:ln>
+          <a:effectLst/>
+        </p:spPr>
+        <p:style>
+          <a:lnRef idx="1">
+            <a:schemeClr val="accent1"/>
+          </a:lnRef>
+          <a:fillRef idx="3">
+            <a:schemeClr val="accent1"/>
+          </a:fillRef>
+          <a:effectRef idx="2">
+            <a:schemeClr val="accent1"/>
+          </a:effectRef>
+          <a:fontRef idx="minor">
+            <a:schemeClr val="lt1"/>
+          </a:fontRef>
+        </p:style>
+        <p:txBody>
+          <a:bodyPr wrap="square" lIns="27432" tIns="22860" rIns="27432" bIns="22860" rtlCol="0" anchor="ctr"/>
+          <a:lstStyle/>
+          <a:p>
+            <a:pPr algn="ctr"/>
+            <a:r>
+              <a:rPr sz="2000" b="0" i="1" dirty="0">
+                <a:solidFill>
+                  <a:srgbClr val="5C4826"/>
+                </a:solidFill>
+              </a:rPr>
+              <a:t/>
+            </a:r>
+          </a:p>
+        </p:txBody>
+      </p:sp>
+      <p:sp>
+        <p:nvSpPr>
+          <p:cNvPr id="1011" name="Card"/>
+          <p:cNvSpPr/>
+          <p:nvPr/>
+        </p:nvSpPr>
+        <p:spPr>
+          <a:xfrm>
+            <a:off x="2103120" y="4718304"/>
+            <a:ext cx="2194560" cy="603504"/>
+          </a:xfrm>
+          <a:prstGeom prst="rect">
+            <a:avLst/>
+          </a:prstGeom>
+          <a:solidFill>
+            <a:srgbClr val="F5F1E8"/>
+          </a:solidFill>
+          <a:ln w="12700">
+            <a:solidFill>
+              <a:srgbClr val="C9B991"/>
+            </a:solidFill>
+          </a:ln>
+          <a:effectLst/>
+        </p:spPr>
+        <p:style>
+          <a:lnRef idx="1">
+            <a:schemeClr val="accent1"/>
+          </a:lnRef>
+          <a:fillRef idx="3">
+            <a:schemeClr val="accent1"/>
+          </a:fillRef>
+          <a:effectRef idx="2">
+            <a:schemeClr val="accent1"/>
+          </a:effectRef>
+          <a:fontRef idx="minor">
+            <a:schemeClr val="lt1"/>
+          </a:fontRef>
+        </p:style>
+        <p:txBody>
+          <a:bodyPr wrap="square" lIns="27432" tIns="22860" rIns="27432" bIns="22860" rtlCol="0" anchor="ctr"/>
+          <a:lstStyle/>
+          <a:p>
+            <a:pPr algn="ctr"/>
+            <a:r>
+              <a:rPr sz="2000" b="0" i="1" dirty="0">
+                <a:solidFill>
+                  <a:srgbClr val="5C4826"/>
+                </a:solidFill>
+              </a:rPr>
+              <a:t/>
+            </a:r>
+          </a:p>
+        </p:txBody>
+      </p:sp>
+      <p:sp>
+        <p:nvSpPr>
+          <p:cNvPr id="1012" name="Card"/>
+          <p:cNvSpPr/>
+          <p:nvPr/>
+        </p:nvSpPr>
+        <p:spPr>
+          <a:xfrm>
+            <a:off x="4389120" y="4718304"/>
+            <a:ext cx="2011680" cy="603504"/>
+          </a:xfrm>
+          <a:prstGeom prst="rect">
+            <a:avLst/>
+          </a:prstGeom>
+          <a:solidFill>
+            <a:srgbClr val="F5F1E8"/>
+          </a:solidFill>
+          <a:ln w="12700">
+            <a:solidFill>
+              <a:srgbClr val="C9B991"/>
+            </a:solidFill>
+          </a:ln>
+          <a:effectLst/>
+        </p:spPr>
+        <p:style>
+          <a:lnRef idx="1">
+            <a:schemeClr val="accent1"/>
+          </a:lnRef>
+          <a:fillRef idx="3">
+            <a:schemeClr val="accent1"/>
+          </a:fillRef>
+          <a:effectRef idx="2">
+            <a:schemeClr val="accent1"/>
+          </a:effectRef>
+          <a:fontRef idx="minor">
+            <a:schemeClr val="lt1"/>
+          </a:fontRef>
+        </p:style>
+        <p:txBody>
+          <a:bodyPr wrap="square" lIns="27432" tIns="22860" rIns="27432" bIns="22860" rtlCol="0" anchor="ctr"/>
+          <a:lstStyle/>
+          <a:p>
+            <a:pPr algn="ctr"/>
+            <a:r>
+              <a:rPr sz="2000" b="0" i="1" dirty="0">
+                <a:solidFill>
+                  <a:srgbClr val="5C4826"/>
+                </a:solidFill>
+              </a:rPr>
+              <a:t/>
+            </a:r>
+          </a:p>
+        </p:txBody>
+      </p:sp>
+      <p:sp>
+        <p:nvSpPr>
+          <p:cNvPr id="1013" name="Card"/>
+          <p:cNvSpPr/>
+          <p:nvPr/>
+        </p:nvSpPr>
+        <p:spPr>
+          <a:xfrm>
+            <a:off x="6492240" y="4718304"/>
+            <a:ext cx="2103120" cy="603504"/>
+          </a:xfrm>
+          <a:prstGeom prst="rect">
+            <a:avLst/>
+          </a:prstGeom>
+          <a:solidFill>
+            <a:srgbClr val="F5F1E8"/>
+          </a:solidFill>
+          <a:ln w="12700">
+            <a:solidFill>
+              <a:srgbClr val="C9B991"/>
+            </a:solidFill>
+          </a:ln>
+          <a:effectLst/>
+        </p:spPr>
+        <p:style>
+          <a:lnRef idx="1">
+            <a:schemeClr val="accent1"/>
+          </a:lnRef>
+          <a:fillRef idx="3">
+            <a:schemeClr val="accent1"/>
+          </a:fillRef>
+          <a:effectRef idx="2">
+            <a:schemeClr val="accent1"/>
+          </a:effectRef>
+          <a:fontRef idx="minor">
+            <a:schemeClr val="lt1"/>
+          </a:fontRef>
+        </p:style>
+        <p:txBody>
+          <a:bodyPr wrap="square" lIns="27432" tIns="22860" rIns="27432" bIns="22860" rtlCol="0" anchor="ctr"/>
+          <a:lstStyle/>
+          <a:p>
+            <a:pPr algn="ctr"/>
+            <a:r>
+              <a:rPr sz="2000" b="0" i="1" dirty="0">
+                <a:solidFill>
+                  <a:srgbClr val="5C4826"/>
+                </a:solidFill>
+              </a:rPr>
+              <a:t/>
+            </a:r>
           </a:p>
         </p:txBody>
       </p:sp>
@@ -20820,12 +22137,7 @@
             <p:ph type="title"/>
           </p:nvPr>
         </p:nvSpPr>
-        <p:spPr>
-          <a:xfrm>
-            <a:off x="277148" y="118428"/>
-            <a:ext cx="9145148" cy="638175"/>
-          </a:xfrm>
-        </p:spPr>
+        <p:spPr/>
         <p:txBody>
           <a:bodyPr>
             <a:normAutofit fontScale="90000"/>
@@ -20833,12 +22145,12 @@
           <a:lstStyle/>
           <a:p>
             <a:r>
-              <a:rPr lang="en-US" sz="2400" b="0" i="0" dirty="0">
+              <a:rPr sz="2400" b="0" i="0">
                 <a:solidFill>
                   <a:srgbClr val="000000"/>
                 </a:solidFill>
               </a:rPr>
-              <a:t>Failure should change future engineering</a:t>
+              <a:t>What actually happened? July 2, 2019</a:t>
             </a:r>
           </a:p>
         </p:txBody>
@@ -20858,9 +22170,9 @@
           <a:bodyPr/>
           <a:lstStyle/>
           <a:p>
-            <a:fld id="{54DE72B0-FFEB-4C83-B4BD-F25961BEDFCA}" type="slidenum">
+            <a:fld id="{8CF8A65D-8523-4C39-BD83-5C787F1FA9B3}" type="slidenum">
               <a:rPr lang="en-US" smtClean="0"/>
-              <a:t>32</a:t>
+              <a:t>10</a:t>
             </a:fld>
             <a:endParaRPr lang="en-US"/>
           </a:p>
@@ -20868,14 +22180,14 @@
       </p:sp>
       <p:sp>
         <p:nvSpPr>
-          <p:cNvPr id="901" name="Block"/>
+          <p:cNvPr id="909" name="FooterBand"/>
           <p:cNvSpPr/>
           <p:nvPr/>
         </p:nvSpPr>
         <p:spPr>
           <a:xfrm>
-            <a:off x="2606040" y="1097280"/>
-            <a:ext cx="3931920" cy="548640"/>
+            <a:off x="274320" y="5513831"/>
+            <a:ext cx="8595360" cy="905256"/>
           </a:xfrm>
           <a:prstGeom prst="rect">
             <a:avLst/>
@@ -20908,26 +22220,143 @@
           <a:p>
             <a:pPr algn="ctr"/>
             <a:r>
-              <a:rPr sz="2000" b="1" i="0">
+              <a:rPr sz="2000" b="1" i="0" dirty="0">
                 <a:solidFill>
                   <a:srgbClr val="FFFFFF"/>
                 </a:solidFill>
               </a:rPr>
-              <a:t>OBSERVE</a:t>
+              <a:t>Which failure modes did we anticipate — and which did we miss?</a:t>
+            </a:r>
+          </a:p>
+          <a:p>
+            <a:pPr algn="ctr">
+              <a:spcBef>
+                <a:spcPts val="300"/>
+              </a:spcBef>
+            </a:pPr>
+            <a:r>
+              <a:rPr sz="2000" b="1" i="0" dirty="0">
+                <a:solidFill>
+                  <a:srgbClr val="FFFFFF"/>
+                </a:solidFill>
+              </a:rPr>
+              <a:t>Configuration shipped through a faster, less-gated path than code — again.</a:t>
+            </a:r>
+          </a:p>
+        </p:txBody>
+      </p:sp>
+      <p:sp>
+        <p:nvSpPr>
+          <p:cNvPr id="920" name="Block"/>
+          <p:cNvSpPr/>
+          <p:nvPr/>
+        </p:nvSpPr>
+        <p:spPr>
+          <a:xfrm>
+            <a:off x="548640" y="1143000"/>
+            <a:ext cx="2560320" cy="566928"/>
+          </a:xfrm>
+          <a:prstGeom prst="rect">
+            <a:avLst/>
+          </a:prstGeom>
+          <a:solidFill>
+            <a:srgbClr val="8E6F3E"/>
+          </a:solidFill>
+          <a:ln>
+            <a:noFill/>
+          </a:ln>
+          <a:effectLst/>
+        </p:spPr>
+        <p:style>
+          <a:lnRef idx="1">
+            <a:schemeClr val="accent1"/>
+          </a:lnRef>
+          <a:fillRef idx="3">
+            <a:schemeClr val="accent1"/>
+          </a:fillRef>
+          <a:effectRef idx="2">
+            <a:schemeClr val="accent1"/>
+          </a:effectRef>
+          <a:fontRef idx="minor">
+            <a:schemeClr val="lt1"/>
+          </a:fontRef>
+        </p:style>
+        <p:txBody>
+          <a:bodyPr wrap="square" lIns="27432" tIns="22860" rIns="27432" bIns="22860" rtlCol="0" anchor="ctr"/>
+          <a:lstStyle/>
+          <a:p>
+            <a:pPr algn="ctr"/>
+            <a:r>
+              <a:rPr sz="1200" b="1" i="0">
+                <a:solidFill>
+                  <a:srgbClr val="FFFFFF"/>
+                </a:solidFill>
+              </a:rPr>
+              <a:t>CLOUDFLARE</a:t>
+            </a:r>
+          </a:p>
+        </p:txBody>
+      </p:sp>
+      <p:sp>
+        <p:nvSpPr>
+          <p:cNvPr id="921" name="RowCaption"/>
+          <p:cNvSpPr/>
+          <p:nvPr/>
+        </p:nvSpPr>
+        <p:spPr>
+          <a:xfrm>
+            <a:off x="3383280" y="1143000"/>
+            <a:ext cx="5212080" cy="566928"/>
+          </a:xfrm>
+          <a:prstGeom prst="rect">
+            <a:avLst/>
+          </a:prstGeom>
+          <a:noFill/>
+          <a:ln>
+            <a:noFill/>
+          </a:ln>
+          <a:effectLst/>
+        </p:spPr>
+        <p:style>
+          <a:lnRef idx="1">
+            <a:schemeClr val="accent1"/>
+          </a:lnRef>
+          <a:fillRef idx="3">
+            <a:schemeClr val="accent1"/>
+          </a:fillRef>
+          <a:effectRef idx="2">
+            <a:schemeClr val="accent1"/>
+          </a:effectRef>
+          <a:fontRef idx="minor">
+            <a:schemeClr val="lt1"/>
+          </a:fontRef>
+        </p:style>
+        <p:txBody>
+          <a:bodyPr wrap="square" lIns="27432" tIns="22860" rIns="27432" bIns="22860" rtlCol="0" anchor="ctr"/>
+          <a:lstStyle/>
+          <a:p>
+            <a:pPr algn="l"/>
+            <a:r>
+              <a:rPr sz="2000" b="0" i="0">
+                <a:solidFill>
+                  <a:srgbClr val="555960"/>
+                </a:solidFill>
+              </a:rPr>
+              <a:t>operates a global edge network; its WAF inspects customers’ web traffic for attacks</a:t>
             </a:r>
           </a:p>
         </p:txBody>
       </p:sp>
       <p:cxnSp>
         <p:nvCxnSpPr>
-          <p:cNvPr id="902" name="Connector 901"/>
+          <p:cNvPr id="922" name="Connector 922"/>
           <p:cNvCxnSpPr/>
           <p:nvPr/>
         </p:nvCxnSpPr>
         <p:spPr>
           <a:xfrm>
-            <a:off x="4572000" y="1645919"/>
-            <a:ext cx="0" cy="274321"/>
+            <a:off x="1828800" y="1709928"/>
+            <a:ext cx="0" cy="393192"/>
           </a:xfrm>
           <a:prstGeom prst="line">
             <a:avLst/>
@@ -20956,25 +22385,23 @@
       </p:cxnSp>
       <p:sp>
         <p:nvSpPr>
-          <p:cNvPr id="903" name="Card"/>
+          <p:cNvPr id="923" name="Block"/>
           <p:cNvSpPr/>
           <p:nvPr/>
         </p:nvSpPr>
         <p:spPr>
           <a:xfrm>
-            <a:off x="2606040" y="1920240"/>
-            <a:ext cx="3931920" cy="548640"/>
+            <a:off x="548640" y="2103120"/>
+            <a:ext cx="2560320" cy="566928"/>
           </a:xfrm>
           <a:prstGeom prst="rect">
             <a:avLst/>
           </a:prstGeom>
           <a:solidFill>
-            <a:srgbClr val="F5F1E8"/>
+            <a:srgbClr val="8E6F3E"/>
           </a:solidFill>
-          <a:ln w="12700">
-            <a:solidFill>
-              <a:srgbClr val="C9B991"/>
-            </a:solidFill>
+          <a:ln>
+            <a:noFill/>
           </a:ln>
           <a:effectLst/>
         </p:spPr>
@@ -20998,31 +22425,76 @@
           <a:p>
             <a:pPr algn="ctr"/>
             <a:r>
-              <a:rPr sz="2000" b="0" i="1" dirty="0">
-                <a:solidFill>
-                  <a:srgbClr val="5C4826"/>
-                </a:solidFill>
-              </a:rPr>
-              <a:t>explain — a causal account the evidence supports</a:t>
-            </a:r>
-            <a:endParaRPr sz="2000" b="0" i="1" dirty="0">
-              <a:solidFill>
-                <a:srgbClr val="5C4826"/>
-              </a:solidFill>
-            </a:endParaRPr>
+              <a:rPr sz="1200" b="1" i="0">
+                <a:solidFill>
+                  <a:srgbClr val="FFFFFF"/>
+                </a:solidFill>
+              </a:rPr>
+              <a:t>WAF MANAGED RULES</a:t>
+            </a:r>
+          </a:p>
+        </p:txBody>
+      </p:sp>
+      <p:sp>
+        <p:nvSpPr>
+          <p:cNvPr id="924" name="RowCaption"/>
+          <p:cNvSpPr/>
+          <p:nvPr/>
+        </p:nvSpPr>
+        <p:spPr>
+          <a:xfrm>
+            <a:off x="3383280" y="2103120"/>
+            <a:ext cx="5212080" cy="566928"/>
+          </a:xfrm>
+          <a:prstGeom prst="rect">
+            <a:avLst/>
+          </a:prstGeom>
+          <a:noFill/>
+          <a:ln>
+            <a:noFill/>
+          </a:ln>
+          <a:effectLst/>
+        </p:spPr>
+        <p:style>
+          <a:lnRef idx="1">
+            <a:schemeClr val="accent1"/>
+          </a:lnRef>
+          <a:fillRef idx="3">
+            <a:schemeClr val="accent1"/>
+          </a:fillRef>
+          <a:effectRef idx="2">
+            <a:schemeClr val="accent1"/>
+          </a:effectRef>
+          <a:fontRef idx="minor">
+            <a:schemeClr val="lt1"/>
+          </a:fontRef>
+        </p:style>
+        <p:txBody>
+          <a:bodyPr wrap="square" lIns="27432" tIns="22860" rIns="27432" bIns="22860" rtlCol="0" anchor="ctr"/>
+          <a:lstStyle/>
+          <a:p>
+            <a:pPr algn="l"/>
+            <a:r>
+              <a:rPr sz="2000" b="0" i="0">
+                <a:solidFill>
+                  <a:srgbClr val="555960"/>
+                </a:solidFill>
+              </a:rPr>
+              <a:t>attack-detection patterns — often regular expressions — running on every edge server</a:t>
+            </a:r>
           </a:p>
         </p:txBody>
       </p:sp>
       <p:cxnSp>
         <p:nvCxnSpPr>
-          <p:cNvPr id="904" name="Connector 903"/>
+          <p:cNvPr id="925" name="Connector 925"/>
           <p:cNvCxnSpPr/>
           <p:nvPr/>
         </p:nvCxnSpPr>
         <p:spPr>
           <a:xfrm>
-            <a:off x="4572000" y="2468880"/>
-            <a:ext cx="0" cy="274320"/>
+            <a:off x="1828800" y="2670048"/>
+            <a:ext cx="0" cy="393192"/>
           </a:xfrm>
           <a:prstGeom prst="line">
             <a:avLst/>
@@ -21051,14 +22523,14 @@
       </p:cxnSp>
       <p:sp>
         <p:nvSpPr>
-          <p:cNvPr id="905" name="Block"/>
+          <p:cNvPr id="926" name="Block"/>
           <p:cNvSpPr/>
           <p:nvPr/>
         </p:nvSpPr>
         <p:spPr>
           <a:xfrm>
-            <a:off x="2606040" y="2743200"/>
-            <a:ext cx="3931920" cy="548640"/>
+            <a:off x="548640" y="3063240"/>
+            <a:ext cx="2560320" cy="566928"/>
           </a:xfrm>
           <a:prstGeom prst="rect">
             <a:avLst/>
@@ -21091,26 +22563,253 @@
           <a:p>
             <a:pPr algn="ctr"/>
             <a:r>
+              <a:rPr sz="1200" b="1" i="0" dirty="0">
+                <a:solidFill>
+                  <a:srgbClr val="FFFFFF"/>
+                </a:solidFill>
+              </a:rPr>
+              <a:t>THE DEFECTIVE RULE</a:t>
+            </a:r>
+          </a:p>
+        </p:txBody>
+      </p:sp>
+      <p:sp>
+        <p:nvSpPr>
+          <p:cNvPr id="927" name="RowCaption"/>
+          <p:cNvSpPr/>
+          <p:nvPr/>
+        </p:nvSpPr>
+        <p:spPr>
+          <a:xfrm>
+            <a:off x="3383280" y="3063240"/>
+            <a:ext cx="5212080" cy="566928"/>
+          </a:xfrm>
+          <a:prstGeom prst="rect">
+            <a:avLst/>
+          </a:prstGeom>
+          <a:noFill/>
+          <a:ln>
+            <a:noFill/>
+          </a:ln>
+          <a:effectLst/>
+        </p:spPr>
+        <p:style>
+          <a:lnRef idx="1">
+            <a:schemeClr val="accent1"/>
+          </a:lnRef>
+          <a:fillRef idx="3">
+            <a:schemeClr val="accent1"/>
+          </a:fillRef>
+          <a:effectRef idx="2">
+            <a:schemeClr val="accent1"/>
+          </a:effectRef>
+          <a:fontRef idx="minor">
+            <a:schemeClr val="lt1"/>
+          </a:fontRef>
+        </p:style>
+        <p:txBody>
+          <a:bodyPr wrap="square" lIns="27432" tIns="22860" rIns="27432" bIns="22860" rtlCol="0" anchor="ctr"/>
+          <a:lstStyle/>
+          <a:p>
+            <a:pPr algn="l"/>
+            <a:r>
+              <a:rPr sz="2000" b="0" i="0">
+                <a:solidFill>
+                  <a:srgbClr val="555960"/>
+                </a:solidFill>
+              </a:rPr>
+              <a:t>.*(?:.*=.*) — matching work grows explosively with input length (backtracking)</a:t>
+            </a:r>
+          </a:p>
+        </p:txBody>
+      </p:sp>
+      <p:cxnSp>
+        <p:nvCxnSpPr>
+          <p:cNvPr id="928" name="Connector 928"/>
+          <p:cNvCxnSpPr/>
+          <p:nvPr/>
+        </p:nvCxnSpPr>
+        <p:spPr>
+          <a:xfrm>
+            <a:off x="1828800" y="3630168"/>
+            <a:ext cx="0" cy="393192"/>
+          </a:xfrm>
+          <a:prstGeom prst="line">
+            <a:avLst/>
+          </a:prstGeom>
+          <a:ln w="19050">
+            <a:solidFill>
+              <a:srgbClr val="8E6F3E"/>
+            </a:solidFill>
+            <a:tailEnd type="triangle"/>
+          </a:ln>
+        </p:spPr>
+        <p:style>
+          <a:lnRef idx="2">
+            <a:schemeClr val="accent1"/>
+          </a:lnRef>
+          <a:fillRef idx="0">
+            <a:schemeClr val="accent1"/>
+          </a:fillRef>
+          <a:effectRef idx="1">
+            <a:schemeClr val="accent1"/>
+          </a:effectRef>
+          <a:fontRef idx="minor">
+            <a:schemeClr val="tx1"/>
+          </a:fontRef>
+        </p:style>
+      </p:cxnSp>
+      <p:sp>
+        <p:nvSpPr>
+          <p:cNvPr id="929" name="Block"/>
+          <p:cNvSpPr/>
+          <p:nvPr/>
+        </p:nvSpPr>
+        <p:spPr>
+          <a:xfrm>
+            <a:off x="548640" y="4023360"/>
+            <a:ext cx="2560320" cy="566928"/>
+          </a:xfrm>
+          <a:prstGeom prst="rect">
+            <a:avLst/>
+          </a:prstGeom>
+          <a:solidFill>
+            <a:srgbClr val="9A3F12"/>
+          </a:solidFill>
+          <a:ln>
+            <a:noFill/>
+          </a:ln>
+          <a:effectLst/>
+        </p:spPr>
+        <p:style>
+          <a:lnRef idx="1">
+            <a:schemeClr val="accent1"/>
+          </a:lnRef>
+          <a:fillRef idx="3">
+            <a:schemeClr val="accent1"/>
+          </a:fillRef>
+          <a:effectRef idx="2">
+            <a:schemeClr val="accent1"/>
+          </a:effectRef>
+          <a:fontRef idx="minor">
+            <a:schemeClr val="lt1"/>
+          </a:fontRef>
+        </p:style>
+        <p:txBody>
+          <a:bodyPr wrap="square" lIns="27432" tIns="22860" rIns="27432" bIns="22860" rtlCol="0" anchor="ctr"/>
+          <a:lstStyle/>
+          <a:p>
+            <a:pPr algn="ctr"/>
+            <a:r>
+              <a:rPr sz="1200" b="1" i="0">
+                <a:solidFill>
+                  <a:srgbClr val="FFFFFF"/>
+                </a:solidFill>
+              </a:rPr>
+              <a:t>27 MINUTES</a:t>
+            </a:r>
+          </a:p>
+        </p:txBody>
+      </p:sp>
+      <p:sp>
+        <p:nvSpPr>
+          <p:cNvPr id="930" name="RowCaption"/>
+          <p:cNvSpPr/>
+          <p:nvPr/>
+        </p:nvSpPr>
+        <p:spPr>
+          <a:xfrm>
+            <a:off x="3383280" y="4023360"/>
+            <a:ext cx="5212080" cy="566928"/>
+          </a:xfrm>
+          <a:prstGeom prst="rect">
+            <a:avLst/>
+          </a:prstGeom>
+          <a:noFill/>
+          <a:ln>
+            <a:noFill/>
+          </a:ln>
+          <a:effectLst/>
+        </p:spPr>
+        <p:style>
+          <a:lnRef idx="1">
+            <a:schemeClr val="accent1"/>
+          </a:lnRef>
+          <a:fillRef idx="3">
+            <a:schemeClr val="accent1"/>
+          </a:fillRef>
+          <a:effectRef idx="2">
+            <a:schemeClr val="accent1"/>
+          </a:effectRef>
+          <a:fontRef idx="minor">
+            <a:schemeClr val="lt1"/>
+          </a:fontRef>
+        </p:style>
+        <p:txBody>
+          <a:bodyPr wrap="square" lIns="27432" tIns="22860" rIns="27432" bIns="22860" rtlCol="0" anchor="ctr"/>
+          <a:lstStyle/>
+          <a:p>
+            <a:pPr algn="l"/>
+            <a:r>
               <a:rPr sz="2000" b="1" i="0" dirty="0">
                 <a:solidFill>
-                  <a:srgbClr val="FFFFFF"/>
-                </a:solidFill>
-              </a:rPr>
-              <a:t>LEARN</a:t>
-            </a:r>
-          </a:p>
-        </p:txBody>
-      </p:sp>
-      <p:sp>
-        <p:nvSpPr>
-          <p:cNvPr id="909" name="Block"/>
+                  <a:srgbClr val="555960"/>
+                </a:solidFill>
+              </a:rPr>
+              <a:t>CPU exhaustion from 13:42 UTC; rule killed globally 14:07; traffic normal 14:09</a:t>
+            </a:r>
+            <a:endParaRPr sz="2000" b="1" i="0" dirty="0">
+              <a:solidFill>
+                <a:srgbClr val="555960"/>
+              </a:solidFill>
+            </a:endParaRPr>
+          </a:p>
+        </p:txBody>
+      </p:sp>
+      <p:sp>
+        <p:nvSpPr>
+          <p:cNvPr id="915" name="Label"/>
+          <p:cNvSpPr txBox="1"/>
+          <p:nvPr/>
+        </p:nvSpPr>
+        <p:spPr>
+          <a:xfrm>
+            <a:off x="548640" y="4599432"/>
+            <a:ext cx="2560320" cy="274320"/>
+          </a:xfrm>
+          <a:prstGeom prst="rect">
+            <a:avLst/>
+          </a:prstGeom>
+          <a:noFill/>
+        </p:spPr>
+        <p:txBody>
+          <a:bodyPr wrap="square" lIns="27432" tIns="22860" rIns="27432" bIns="22860" anchor="t">
+            <a:spAutoFit/>
+          </a:bodyPr>
+          <a:lstStyle/>
+          <a:p>
+            <a:pPr algn="ctr"/>
+            <a:r>
+              <a:rPr sz="1200" b="1" i="0">
+                <a:solidFill>
+                  <a:srgbClr val="5C4826"/>
+                </a:solidFill>
+              </a:rPr>
+              <a:t>‘x=x’  →  23 steps</a:t>
+            </a:r>
+          </a:p>
+        </p:txBody>
+      </p:sp>
+      <p:sp>
+        <p:nvSpPr>
+          <p:cNvPr id="910" name="Block"/>
           <p:cNvSpPr/>
           <p:nvPr/>
         </p:nvSpPr>
         <p:spPr>
           <a:xfrm>
-            <a:off x="1005840" y="4160520"/>
-            <a:ext cx="2926080" cy="777240"/>
+            <a:off x="3291840" y="4626864"/>
+            <a:ext cx="237744" cy="182880"/>
           </a:xfrm>
           <a:prstGeom prst="rect">
             <a:avLst/>
@@ -21143,43 +22842,66 @@
           <a:p>
             <a:pPr algn="ctr"/>
             <a:r>
-              <a:rPr sz="1300" b="1" i="0">
+              <a:rPr sz="1200" b="1" i="0">
                 <a:solidFill>
                   <a:srgbClr val="FFFFFF"/>
                 </a:solidFill>
               </a:rPr>
-              <a:t>REFLECTION</a:t>
-            </a:r>
-          </a:p>
-          <a:p>
-            <a:pPr algn="ctr"/>
-            <a:r>
-              <a:rPr sz="1100" b="1" i="0">
-                <a:solidFill>
-                  <a:srgbClr val="FFFFFF"/>
-                </a:solidFill>
-              </a:rPr>
-              <a:t>changes the engineer</a:t>
-            </a:r>
-          </a:p>
-        </p:txBody>
-      </p:sp>
-      <p:sp>
-        <p:nvSpPr>
-          <p:cNvPr id="910" name="Block"/>
+              <a:t/>
+            </a:r>
+          </a:p>
+        </p:txBody>
+      </p:sp>
+      <p:sp>
+        <p:nvSpPr>
+          <p:cNvPr id="1000" name="Label"/>
+          <p:cNvSpPr txBox="1"/>
+          <p:nvPr/>
+        </p:nvSpPr>
+        <p:spPr>
+          <a:xfrm>
+            <a:off x="548640" y="4919472"/>
+            <a:ext cx="2560320" cy="274320"/>
+          </a:xfrm>
+          <a:prstGeom prst="rect">
+            <a:avLst/>
+          </a:prstGeom>
+          <a:noFill/>
+        </p:spPr>
+        <p:txBody>
+          <a:bodyPr wrap="square" lIns="27432" tIns="22860" rIns="27432" bIns="22860" anchor="t">
+            <a:spAutoFit/>
+          </a:bodyPr>
+          <a:lstStyle/>
+          <a:p>
+            <a:pPr algn="ctr"/>
+            <a:r>
+              <a:rPr sz="1200" b="1" i="0">
+                <a:solidFill>
+                  <a:srgbClr val="5C4826"/>
+                </a:solidFill>
+              </a:rPr>
+              <a:t>‘x=’ + twenty ‘x’s  →  555 steps</a:t>
+            </a:r>
+          </a:p>
+        </p:txBody>
+      </p:sp>
+      <p:sp>
+        <p:nvSpPr>
+          <p:cNvPr id="1001" name="Block"/>
           <p:cNvSpPr/>
           <p:nvPr/>
         </p:nvSpPr>
         <p:spPr>
           <a:xfrm>
-            <a:off x="5212080" y="4160520"/>
-            <a:ext cx="2926080" cy="777240"/>
+            <a:off x="3291840" y="4946904"/>
+            <a:ext cx="5486400" cy="182880"/>
           </a:xfrm>
           <a:prstGeom prst="rect">
             <a:avLst/>
           </a:prstGeom>
           <a:solidFill>
-            <a:srgbClr val="8E6F3E"/>
+            <a:srgbClr val="B3261E"/>
           </a:solidFill>
           <a:ln>
             <a:noFill/>
@@ -21206,337 +22928,114 @@
           <a:p>
             <a:pPr algn="ctr"/>
             <a:r>
-              <a:rPr sz="1300" b="1" i="0">
+              <a:rPr sz="1200" b="1" i="0">
                 <a:solidFill>
                   <a:srgbClr val="FFFFFF"/>
                 </a:solidFill>
               </a:rPr>
-              <a:t>ENGINEERING STRUCTURE</a:t>
-            </a:r>
-          </a:p>
-          <a:p>
-            <a:pPr algn="ctr"/>
-            <a:r>
-              <a:rPr sz="1100" b="1" i="0">
-                <a:solidFill>
-                  <a:srgbClr val="FFFFFF"/>
-                </a:solidFill>
-              </a:rPr>
-              <a:t>changes the environment</a:t>
-            </a:r>
-          </a:p>
-        </p:txBody>
-      </p:sp>
-      <p:sp>
-        <p:nvSpPr>
-          <p:cNvPr id="1000" name="Card"/>
-          <p:cNvSpPr/>
-          <p:nvPr/>
-        </p:nvSpPr>
-        <p:spPr>
-          <a:xfrm>
-            <a:off x="1005840" y="5303520"/>
-            <a:ext cx="2926080" cy="502920"/>
-          </a:xfrm>
-          <a:prstGeom prst="rect">
-            <a:avLst/>
-          </a:prstGeom>
-          <a:solidFill>
-            <a:srgbClr val="F5F1E8"/>
-          </a:solidFill>
-          <a:ln w="12700">
-            <a:solidFill>
-              <a:srgbClr val="C9B991"/>
-            </a:solidFill>
-          </a:ln>
-          <a:effectLst/>
-        </p:spPr>
-        <p:style>
-          <a:lnRef idx="1">
-            <a:schemeClr val="accent1"/>
-          </a:lnRef>
-          <a:fillRef idx="3">
-            <a:schemeClr val="accent1"/>
-          </a:fillRef>
-          <a:effectRef idx="2">
-            <a:schemeClr val="accent1"/>
-          </a:effectRef>
-          <a:fontRef idx="minor">
-            <a:schemeClr val="lt1"/>
-          </a:fontRef>
-        </p:style>
-        <p:txBody>
-          <a:bodyPr wrap="square" lIns="27432" tIns="22860" rIns="27432" bIns="22860" rtlCol="0" anchor="ctr"/>
-          <a:lstStyle/>
-          <a:p>
-            <a:pPr algn="ctr"/>
-            <a:r>
-              <a:rPr sz="2000" b="0" i="1" dirty="0">
+              <a:t/>
+            </a:r>
+          </a:p>
+        </p:txBody>
+      </p:sp>
+      <p:sp>
+        <p:nvSpPr>
+          <p:cNvPr id="1002" name="Label"/>
+          <p:cNvSpPr txBox="1"/>
+          <p:nvPr/>
+        </p:nvSpPr>
+        <p:spPr>
+          <a:xfrm>
+            <a:off x="3291840" y="5193792"/>
+            <a:ext cx="5120640" cy="256032"/>
+          </a:xfrm>
+          <a:prstGeom prst="rect">
+            <a:avLst/>
+          </a:prstGeom>
+          <a:noFill/>
+        </p:spPr>
+        <p:txBody>
+          <a:bodyPr wrap="square" lIns="27432" tIns="22860" rIns="27432" bIns="22860" anchor="t">
+            <a:spAutoFit/>
+          </a:bodyPr>
+          <a:lstStyle/>
+          <a:p>
+            <a:pPr algn="ctr"/>
+            <a:r>
+              <a:rPr sz="1000" b="1" i="0">
                 <a:solidFill>
                   <a:srgbClr val="5C4826"/>
                 </a:solidFill>
               </a:rPr>
-              <a:t>future judgment</a:t>
-            </a:r>
-            <a:endParaRPr sz="2000" b="0" i="1" dirty="0">
-              <a:solidFill>
-                <a:srgbClr val="5C4826"/>
-              </a:solidFill>
-            </a:endParaRPr>
-          </a:p>
-        </p:txBody>
-      </p:sp>
-      <p:sp>
-        <p:nvSpPr>
-          <p:cNvPr id="1001" name="Card"/>
-          <p:cNvSpPr/>
-          <p:nvPr/>
-        </p:nvSpPr>
-        <p:spPr>
-          <a:xfrm>
-            <a:off x="5212080" y="5303520"/>
-            <a:ext cx="2926080" cy="502920"/>
-          </a:xfrm>
-          <a:prstGeom prst="rect">
-            <a:avLst/>
-          </a:prstGeom>
-          <a:solidFill>
-            <a:srgbClr val="F5F1E8"/>
-          </a:solidFill>
-          <a:ln w="12700">
-            <a:solidFill>
-              <a:srgbClr val="C9B991"/>
-            </a:solidFill>
-          </a:ln>
-          <a:effectLst/>
-        </p:spPr>
-        <p:style>
-          <a:lnRef idx="1">
-            <a:schemeClr val="accent1"/>
-          </a:lnRef>
-          <a:fillRef idx="3">
-            <a:schemeClr val="accent1"/>
-          </a:fillRef>
-          <a:effectRef idx="2">
-            <a:schemeClr val="accent1"/>
-          </a:effectRef>
-          <a:fontRef idx="minor">
-            <a:schemeClr val="lt1"/>
-          </a:fontRef>
-        </p:style>
-        <p:txBody>
-          <a:bodyPr wrap="square" lIns="27432" tIns="22860" rIns="27432" bIns="22860" rtlCol="0" anchor="ctr"/>
-          <a:lstStyle/>
-          <a:p>
-            <a:pPr algn="ctr"/>
-            <a:r>
-              <a:rPr sz="2000" b="0" i="1" dirty="0">
+              <a:t>the same rule — the input grew from 3 to 22 characters</a:t>
+            </a:r>
+          </a:p>
+        </p:txBody>
+      </p:sp>
+      <p:sp>
+        <p:nvSpPr>
+          <p:cNvPr id="1003" name="Label"/>
+          <p:cNvSpPr txBox="1"/>
+          <p:nvPr/>
+        </p:nvSpPr>
+        <p:spPr>
+          <a:xfrm>
+            <a:off x="3383280" y="2706624"/>
+            <a:ext cx="5212080" cy="237744"/>
+          </a:xfrm>
+          <a:prstGeom prst="rect">
+            <a:avLst/>
+          </a:prstGeom>
+          <a:noFill/>
+        </p:spPr>
+        <p:txBody>
+          <a:bodyPr wrap="square" lIns="27432" tIns="22860" rIns="27432" bIns="22860" anchor="t">
+            <a:spAutoFit/>
+          </a:bodyPr>
+          <a:lstStyle/>
+          <a:p>
+            <a:pPr algn="ctr"/>
+            <a:r>
+              <a:rPr sz="1200" b="1" i="0">
                 <a:solidFill>
                   <a:srgbClr val="5C4826"/>
                 </a:solidFill>
               </a:rPr>
-              <a:t>future constraints</a:t>
-            </a:r>
-            <a:endParaRPr sz="2000" b="0" i="1" dirty="0">
-              <a:solidFill>
-                <a:srgbClr val="5C4826"/>
-              </a:solidFill>
-            </a:endParaRPr>
-          </a:p>
-        </p:txBody>
-      </p:sp>
-      <p:cxnSp>
-        <p:nvCxnSpPr>
-          <p:cNvPr id="911" name="Connector 911"/>
-          <p:cNvCxnSpPr/>
-          <p:nvPr/>
-        </p:nvCxnSpPr>
-        <p:spPr>
-          <a:xfrm flipH="1">
-            <a:off x="2468880" y="3291840"/>
-            <a:ext cx="2103120" cy="868679"/>
-          </a:xfrm>
-          <a:prstGeom prst="line">
-            <a:avLst/>
-          </a:prstGeom>
-          <a:ln w="28575">
-            <a:solidFill>
-              <a:srgbClr val="8E6F3E"/>
-            </a:solidFill>
-            <a:tailEnd type="triangle"/>
-          </a:ln>
-        </p:spPr>
-        <p:style>
-          <a:lnRef idx="2">
-            <a:schemeClr val="accent1"/>
-          </a:lnRef>
-          <a:fillRef idx="0">
-            <a:schemeClr val="accent1"/>
-          </a:fillRef>
-          <a:effectRef idx="1">
-            <a:schemeClr val="accent1"/>
-          </a:effectRef>
-          <a:fontRef idx="minor">
-            <a:schemeClr val="tx1"/>
-          </a:fontRef>
-        </p:style>
-      </p:cxnSp>
-      <p:cxnSp>
-        <p:nvCxnSpPr>
-          <p:cNvPr id="1002" name="Connector 911"/>
-          <p:cNvCxnSpPr/>
-          <p:nvPr/>
-        </p:nvCxnSpPr>
-        <p:spPr>
-          <a:xfrm>
-            <a:off x="4572000" y="3291840"/>
-            <a:ext cx="2103120" cy="868679"/>
-          </a:xfrm>
-          <a:prstGeom prst="line">
-            <a:avLst/>
-          </a:prstGeom>
-          <a:ln w="28575">
-            <a:solidFill>
-              <a:srgbClr val="8E6F3E"/>
-            </a:solidFill>
-            <a:tailEnd type="triangle"/>
-          </a:ln>
-        </p:spPr>
-        <p:style>
-          <a:lnRef idx="2">
-            <a:schemeClr val="accent1"/>
-          </a:lnRef>
-          <a:fillRef idx="0">
-            <a:schemeClr val="accent1"/>
-          </a:fillRef>
-          <a:effectRef idx="1">
-            <a:schemeClr val="accent1"/>
-          </a:effectRef>
-          <a:fontRef idx="minor">
-            <a:schemeClr val="tx1"/>
-          </a:fontRef>
-        </p:style>
-      </p:cxnSp>
-      <p:cxnSp>
-        <p:nvCxnSpPr>
-          <p:cNvPr id="1003" name="Connector 911"/>
-          <p:cNvCxnSpPr/>
-          <p:nvPr/>
-        </p:nvCxnSpPr>
-        <p:spPr>
-          <a:xfrm>
-            <a:off x="2468880" y="4937760"/>
-            <a:ext cx="0" cy="365759"/>
-          </a:xfrm>
-          <a:prstGeom prst="line">
-            <a:avLst/>
-          </a:prstGeom>
-          <a:ln w="28575">
-            <a:solidFill>
-              <a:srgbClr val="8E6F3E"/>
-            </a:solidFill>
-            <a:tailEnd type="triangle"/>
-          </a:ln>
-        </p:spPr>
-        <p:style>
-          <a:lnRef idx="2">
-            <a:schemeClr val="accent1"/>
-          </a:lnRef>
-          <a:fillRef idx="0">
-            <a:schemeClr val="accent1"/>
-          </a:fillRef>
-          <a:effectRef idx="1">
-            <a:schemeClr val="accent1"/>
-          </a:effectRef>
-          <a:fontRef idx="minor">
-            <a:schemeClr val="tx1"/>
-          </a:fontRef>
-        </p:style>
-      </p:cxnSp>
-      <p:cxnSp>
-        <p:nvCxnSpPr>
-          <p:cNvPr id="1004" name="Connector 911"/>
-          <p:cNvCxnSpPr/>
-          <p:nvPr/>
-        </p:nvCxnSpPr>
-        <p:spPr>
-          <a:xfrm>
-            <a:off x="6675120" y="4937760"/>
-            <a:ext cx="0" cy="365759"/>
-          </a:xfrm>
-          <a:prstGeom prst="line">
-            <a:avLst/>
-          </a:prstGeom>
-          <a:ln w="28575">
-            <a:solidFill>
-              <a:srgbClr val="8E6F3E"/>
-            </a:solidFill>
-            <a:tailEnd type="triangle"/>
-          </a:ln>
-        </p:spPr>
-        <p:style>
-          <a:lnRef idx="2">
-            <a:schemeClr val="accent1"/>
-          </a:lnRef>
-          <a:fillRef idx="0">
-            <a:schemeClr val="accent1"/>
-          </a:fillRef>
-          <a:effectRef idx="1">
-            <a:schemeClr val="accent1"/>
-          </a:effectRef>
-          <a:fontRef idx="minor">
-            <a:schemeClr val="tx1"/>
-          </a:fontRef>
-        </p:style>
-      </p:cxnSp>
-      <p:sp>
-        <p:nvSpPr>
-          <p:cNvPr id="1005" name="FooterBand"/>
-          <p:cNvSpPr/>
-          <p:nvPr/>
-        </p:nvSpPr>
-        <p:spPr>
-          <a:xfrm>
-            <a:off x="274320" y="5852159"/>
-            <a:ext cx="8595360" cy="566928"/>
-          </a:xfrm>
-          <a:prstGeom prst="rect">
-            <a:avLst/>
-          </a:prstGeom>
-          <a:solidFill>
-            <a:srgbClr val="8E6F3E"/>
-          </a:solidFill>
-          <a:ln>
-            <a:noFill/>
-          </a:ln>
-          <a:effectLst/>
-        </p:spPr>
-        <p:style>
-          <a:lnRef idx="1">
-            <a:schemeClr val="accent1"/>
-          </a:lnRef>
-          <a:fillRef idx="3">
-            <a:schemeClr val="accent1"/>
-          </a:fillRef>
-          <a:effectRef idx="2">
-            <a:schemeClr val="accent1"/>
-          </a:effectRef>
-          <a:fontRef idx="minor">
-            <a:schemeClr val="lt1"/>
-          </a:fontRef>
-        </p:style>
-        <p:txBody>
-          <a:bodyPr wrap="square" lIns="27432" tIns="22860" rIns="27432" bIns="22860" rtlCol="0" anchor="ctr"/>
-          <a:lstStyle/>
-          <a:p>
-            <a:pPr algn="ctr"/>
-            <a:r>
-              <a:rPr sz="2000" b="1" i="0" dirty="0">
-                <a:solidFill>
-                  <a:srgbClr val="FFFFFF"/>
-                </a:solidFill>
-              </a:rPr>
-              <a:t>What will be different when the next engineer or agent acts?</a:t>
+              <a:t>AMPLIFIER — deployed globally in seconds, with no staged rollout</a:t>
+            </a:r>
+          </a:p>
+        </p:txBody>
+      </p:sp>
+      <p:sp>
+        <p:nvSpPr>
+          <p:cNvPr id="1004" name="Label"/>
+          <p:cNvSpPr txBox="1"/>
+          <p:nvPr/>
+        </p:nvSpPr>
+        <p:spPr>
+          <a:xfrm>
+            <a:off x="3383280" y="3666744"/>
+            <a:ext cx="5212080" cy="237744"/>
+          </a:xfrm>
+          <a:prstGeom prst="rect">
+            <a:avLst/>
+          </a:prstGeom>
+          <a:noFill/>
+        </p:spPr>
+        <p:txBody>
+          <a:bodyPr wrap="square" lIns="27432" tIns="22860" rIns="27432" bIns="22860" anchor="t">
+            <a:spAutoFit/>
+          </a:bodyPr>
+          <a:lstStyle/>
+          <a:p>
+            <a:pPr algn="ctr"/>
+            <a:r>
+              <a:rPr sz="1200" b="1" i="0">
+                <a:solidFill>
+                  <a:srgbClr val="5C4826"/>
+                </a:solidFill>
+              </a:rPr>
+              <a:t>TRIGGER — a pathological regex exhausts CPU resources</a:t>
             </a:r>
           </a:p>
         </p:txBody>
@@ -21587,7 +23086,7 @@
                   <a:srgbClr val="000000"/>
                 </a:solidFill>
               </a:rPr>
-              <a:t>Could we have anticipated this failure?</a:t>
+              <a:t>Diagnose the Cloudflare outage</a:t>
             </a:r>
           </a:p>
         </p:txBody>
@@ -21623,8 +23122,8 @@
         </p:nvSpPr>
         <p:spPr>
           <a:xfrm>
-            <a:off x="2103120" y="1920240"/>
-            <a:ext cx="2194560" cy="713232"/>
+            <a:off x="4023360" y="1463040"/>
+            <a:ext cx="4572000" cy="640080"/>
           </a:xfrm>
           <a:prstGeom prst="rect">
             <a:avLst/>
@@ -21659,12 +23158,12 @@
           <a:p>
             <a:pPr algn="ctr"/>
             <a:r>
-              <a:rPr sz="1100" b="0" i="1" dirty="0">
+              <a:rPr sz="2000" b="0" i="1" dirty="0">
                 <a:solidFill>
                   <a:srgbClr val="5C4826"/>
                 </a:solidFill>
               </a:rPr>
-              <a:t>invalid content causes unsafe execution</a:t>
+              <a:t>what failed locally?</a:t>
             </a:r>
           </a:p>
         </p:txBody>
@@ -21677,8 +23176,8 @@
         </p:nvSpPr>
         <p:spPr>
           <a:xfrm>
-            <a:off x="2103120" y="2697480"/>
-            <a:ext cx="2194560" cy="713232"/>
+            <a:off x="4023360" y="2423160"/>
+            <a:ext cx="4572000" cy="640080"/>
           </a:xfrm>
           <a:prstGeom prst="rect">
             <a:avLst/>
@@ -21713,12 +23212,12 @@
           <a:p>
             <a:pPr algn="ctr"/>
             <a:r>
-              <a:rPr sz="1100" b="0" i="1">
+              <a:rPr sz="2000" b="0" i="1">
                 <a:solidFill>
                   <a:srgbClr val="5C4826"/>
                 </a:solidFill>
               </a:rPr>
-              <a:t>a defect escapes testing</a:t>
+              <a:t>why did the defect escape?</a:t>
             </a:r>
           </a:p>
         </p:txBody>
@@ -21731,8 +23230,8 @@
         </p:nvSpPr>
         <p:spPr>
           <a:xfrm>
-            <a:off x="365760" y="1920240"/>
-            <a:ext cx="1645920" cy="713232"/>
+            <a:off x="548640" y="1463040"/>
+            <a:ext cx="3291840" cy="640080"/>
           </a:xfrm>
           <a:prstGeom prst="rect">
             <a:avLst/>
@@ -21765,12 +23264,12 @@
           <a:p>
             <a:pPr algn="ctr"/>
             <a:r>
-              <a:rPr sz="1200" b="1" i="0" dirty="0">
+              <a:rPr sz="2000" b="1" i="0" dirty="0">
                 <a:solidFill>
                   <a:srgbClr val="FFFFFF"/>
                 </a:solidFill>
               </a:rPr>
-              <a:t>Interpret security content</a:t>
+              <a:t>COMPONENT-LEVEL</a:t>
             </a:r>
             <a:endParaRPr lang="en-US" sz="2000" b="1" i="0" dirty="0">
               <a:solidFill>
@@ -21788,8 +23287,8 @@
         </p:nvSpPr>
         <p:spPr>
           <a:xfrm>
-            <a:off x="365760" y="2697480"/>
-            <a:ext cx="1645920" cy="713232"/>
+            <a:off x="548640" y="2423160"/>
+            <a:ext cx="3291840" cy="640080"/>
           </a:xfrm>
           <a:prstGeom prst="rect">
             <a:avLst/>
@@ -21822,12 +23321,12 @@
           <a:p>
             <a:pPr algn="ctr"/>
             <a:r>
-              <a:rPr sz="1200" b="1" i="0" dirty="0">
+              <a:rPr sz="2000" b="1" i="0" dirty="0">
                 <a:solidFill>
                   <a:srgbClr val="FFFFFF"/>
                 </a:solidFill>
               </a:rPr>
-              <a:t>Validate content</a:t>
+              <a:t>SWISS CHEESE</a:t>
             </a:r>
             <a:endParaRPr lang="en-US" sz="2000" b="1" i="0" dirty="0">
               <a:solidFill>
@@ -21845,8 +23344,8 @@
         </p:nvSpPr>
         <p:spPr>
           <a:xfrm>
-            <a:off x="365760" y="3474720"/>
-            <a:ext cx="1645920" cy="713232"/>
+            <a:off x="548640" y="3383280"/>
+            <a:ext cx="3291840" cy="640080"/>
           </a:xfrm>
           <a:prstGeom prst="rect">
             <a:avLst/>
@@ -21879,12 +23378,12 @@
           <a:p>
             <a:pPr algn="ctr"/>
             <a:r>
-              <a:rPr sz="1200" b="1" i="0" dirty="0">
+              <a:rPr sz="2000" b="1" i="0" dirty="0">
                 <a:solidFill>
                   <a:srgbClr val="FFFFFF"/>
                 </a:solidFill>
               </a:rPr>
-              <a:t>Distribute content</a:t>
+              <a:t>STAMP</a:t>
             </a:r>
             <a:endParaRPr sz="2000" b="1" i="0" dirty="0">
               <a:solidFill>
@@ -21896,66 +23395,14 @@
       </p:sp>
       <p:sp>
         <p:nvSpPr>
-          <p:cNvPr id="912" name="Block"/>
-          <p:cNvSpPr/>
-          <p:nvPr/>
-        </p:nvSpPr>
-        <p:spPr>
-          <a:xfrm>
-            <a:off x="365760" y="4251960"/>
-            <a:ext cx="1645920" cy="713232"/>
-          </a:xfrm>
-          <a:prstGeom prst="rect">
-            <a:avLst/>
-          </a:prstGeom>
-          <a:solidFill>
-            <a:srgbClr val="8E6F3E"/>
-          </a:solidFill>
-          <a:ln>
-            <a:noFill/>
-          </a:ln>
-          <a:effectLst/>
-        </p:spPr>
-        <p:style>
-          <a:lnRef idx="1">
-            <a:schemeClr val="accent1"/>
-          </a:lnRef>
-          <a:fillRef idx="3">
-            <a:schemeClr val="accent1"/>
-          </a:fillRef>
-          <a:effectRef idx="2">
-            <a:schemeClr val="accent1"/>
-          </a:effectRef>
-          <a:fontRef idx="minor">
-            <a:schemeClr val="lt1"/>
-          </a:fontRef>
-        </p:style>
-        <p:txBody>
-          <a:bodyPr wrap="square" lIns="27432" tIns="22860" rIns="27432" bIns="22860" rtlCol="0" anchor="ctr"/>
-          <a:lstStyle/>
-          <a:p>
-            <a:pPr algn="ctr"/>
-            <a:r>
-              <a:rPr sz="1200" b="1" i="0" dirty="0">
-                <a:solidFill>
-                  <a:srgbClr val="FFFFFF"/>
-                </a:solidFill>
-              </a:rPr>
-              <a:t>Maintain service</a:t>
-            </a:r>
-          </a:p>
-        </p:txBody>
-      </p:sp>
-      <p:sp>
-        <p:nvSpPr>
           <p:cNvPr id="913" name="FooterBand"/>
           <p:cNvSpPr/>
           <p:nvPr/>
         </p:nvSpPr>
         <p:spPr>
           <a:xfrm>
-            <a:off x="274320" y="5852160"/>
-            <a:ext cx="8595360" cy="566928"/>
+            <a:off x="274320" y="5128591"/>
+            <a:ext cx="8595360" cy="1592884"/>
           </a:xfrm>
           <a:prstGeom prst="rect">
             <a:avLst/>
@@ -21991,7 +23438,29 @@
                   <a:schemeClr val="bg1"/>
                 </a:solidFill>
               </a:rPr>
-              <a:t>Which of these failure modes could occur in another security product?</a:t>
+              <a:t>YOUR TASK — choose ONE model. Explain the failure, propose an intervention,</a:t>
+            </a:r>
+          </a:p>
+          <a:p>
+            <a:pPr algn="ctr"/>
+            <a:r>
+              <a:rPr lang="en-US" sz="2000" b="1" i="0" dirty="0">
+                <a:solidFill>
+                  <a:schemeClr val="bg1"/>
+                </a:solidFill>
+              </a:rPr>
+              <a:t>identify who can implement it, and specify evidence that it works.</a:t>
+            </a:r>
+          </a:p>
+          <a:p>
+            <a:pPr algn="ctr"/>
+            <a:r>
+              <a:rPr lang="en-US" sz="2000" b="1" i="0" dirty="0">
+                <a:solidFill>
+                  <a:schemeClr val="bg1"/>
+                </a:solidFill>
+              </a:rPr>
+              <a:t>How should this incident change the FMEA for future WAF releases?</a:t>
             </a:r>
           </a:p>
         </p:txBody>
@@ -22004,8 +23473,8 @@
         </p:nvSpPr>
         <p:spPr>
           <a:xfrm>
-            <a:off x="2103120" y="3474720"/>
-            <a:ext cx="2194560" cy="713232"/>
+            <a:off x="4023360" y="3383280"/>
+            <a:ext cx="4572000" cy="640080"/>
           </a:xfrm>
           <a:prstGeom prst="rect">
             <a:avLst/>
@@ -22040,72 +23509,13 @@
           <a:p>
             <a:pPr algn="ctr"/>
             <a:r>
-              <a:rPr lang="en-US" sz="1100" b="0" i="1" dirty="0">
+              <a:rPr lang="en-US" sz="2000" b="0" i="1" dirty="0">
                 <a:solidFill>
                   <a:srgbClr val="5C4826"/>
                 </a:solidFill>
               </a:rPr>
-              <a:t>a defective update reaches all endpoints</a:t>
-            </a:r>
-          </a:p>
-        </p:txBody>
-      </p:sp>
-      <p:sp>
-        <p:nvSpPr>
-          <p:cNvPr id="4" name="Card"/>
-          <p:cNvSpPr/>
-          <p:nvPr/>
-        </p:nvSpPr>
-        <p:spPr>
-          <a:xfrm>
-            <a:off x="2103120" y="4251960"/>
-            <a:ext cx="2194560" cy="713232"/>
-          </a:xfrm>
-          <a:prstGeom prst="rect">
-            <a:avLst/>
-          </a:prstGeom>
-          <a:solidFill>
-            <a:srgbClr val="F5F1E8"/>
-          </a:solidFill>
-          <a:ln w="12700">
-            <a:solidFill>
-              <a:srgbClr val="C9B991"/>
-            </a:solidFill>
-          </a:ln>
-          <a:effectLst/>
-        </p:spPr>
-        <p:style>
-          <a:lnRef idx="1">
-            <a:schemeClr val="accent1"/>
-          </a:lnRef>
-          <a:fillRef idx="3">
-            <a:schemeClr val="accent1"/>
-          </a:fillRef>
-          <a:effectRef idx="2">
-            <a:schemeClr val="accent1"/>
-          </a:effectRef>
-          <a:fontRef idx="minor">
-            <a:schemeClr val="lt1"/>
-          </a:fontRef>
-        </p:style>
-        <p:txBody>
-          <a:bodyPr wrap="square" lIns="27432" tIns="22860" rIns="27432" bIns="22860" rtlCol="0" anchor="ctr"/>
-          <a:lstStyle/>
-          <a:p>
-            <a:pPr algn="ctr"/>
-            <a:r>
-              <a:rPr lang="en-US" sz="1100" b="0" i="1" dirty="0">
-                <a:solidFill>
-                  <a:srgbClr val="5C4826"/>
-                </a:solidFill>
-              </a:rPr>
-              <a:t>endpoint failure disables critical services</a:t>
-            </a:r>
-            <a:endParaRPr sz="2000" b="0" i="1" dirty="0">
-              <a:solidFill>
-                <a:srgbClr val="5C4826"/>
-              </a:solidFill>
-            </a:endParaRPr>
+              <a:t>what controls and feedback permitted the consequences?</a:t>
+            </a:r>
           </a:p>
         </p:txBody>
       </p:sp>
@@ -22117,8 +23527,8 @@
         </p:nvSpPr>
         <p:spPr>
           <a:xfrm>
-            <a:off x="365760" y="1572768"/>
-            <a:ext cx="1645920" cy="274320"/>
+            <a:off x="548640" y="1042415"/>
+            <a:ext cx="3291840" cy="274320"/>
           </a:xfrm>
           <a:prstGeom prst="rect">
             <a:avLst/>
@@ -22149,12 +23559,12 @@
           <a:p>
             <a:pPr algn="ctr"/>
             <a:r>
-              <a:rPr lang="en-US" sz="1200" b="1" i="0" dirty="0">
+              <a:rPr lang="en-US" sz="1400" b="1" i="0" dirty="0">
                 <a:solidFill>
                   <a:schemeClr val="bg1"/>
                 </a:solidFill>
               </a:rPr>
-              <a:t>FUNCTION</a:t>
+              <a:t>MODEL</a:t>
             </a:r>
             <a:endParaRPr sz="2800" b="1" i="0" dirty="0">
               <a:solidFill>
@@ -22172,8 +23582,8 @@
         </p:nvSpPr>
         <p:spPr>
           <a:xfrm>
-            <a:off x="2103120" y="1572768"/>
-            <a:ext cx="2194560" cy="274320"/>
+            <a:off x="4023360" y="1042415"/>
+            <a:ext cx="4572000" cy="274320"/>
           </a:xfrm>
           <a:prstGeom prst="rect">
             <a:avLst/>
@@ -22204,639 +23614,18 @@
           <a:p>
             <a:pPr algn="ctr"/>
             <a:r>
-              <a:rPr lang="en-US" sz="1200" b="1" i="0" dirty="0">
+              <a:rPr lang="en-US" sz="1400" b="1" i="0" dirty="0">
                 <a:solidFill>
                   <a:schemeClr val="bg1"/>
                 </a:solidFill>
               </a:rPr>
-              <a:t>FAILURE MODE</a:t>
+              <a:t>ITS QUESTION</a:t>
             </a:r>
             <a:endParaRPr sz="2800" b="1" i="0" dirty="0">
               <a:solidFill>
                 <a:schemeClr val="bg1"/>
               </a:solidFill>
             </a:endParaRPr>
-          </a:p>
-        </p:txBody>
-      </p:sp>
-      <p:sp>
-        <p:nvSpPr>
-          <p:cNvPr id="915" name="Label"/>
-          <p:cNvSpPr txBox="1"/>
-          <p:nvPr/>
-        </p:nvSpPr>
-        <p:spPr>
-          <a:xfrm>
-            <a:off x="548640" y="841248"/>
-            <a:ext cx="8046720" cy="566928"/>
-          </a:xfrm>
-          <a:prstGeom prst="rect">
-            <a:avLst/>
-          </a:prstGeom>
-          <a:noFill/>
-        </p:spPr>
-        <p:txBody>
-          <a:bodyPr wrap="square" lIns="27432" tIns="22860" rIns="27432" bIns="22860" anchor="t">
-            <a:spAutoFit/>
-          </a:bodyPr>
-          <a:lstStyle/>
-          <a:p>
-            <a:pPr algn="ctr"/>
-            <a:r>
-              <a:rPr sz="1200" b="1" i="1">
-                <a:solidFill>
-                  <a:srgbClr val="5C4826"/>
-                </a:solidFill>
-              </a:rPr>
-              <a:t>The three models explain a failure that has happened. FMEA — Failure Mode and Effects Analysis —</a:t>
-            </a:r>
-          </a:p>
-          <a:p>
-            <a:pPr algn="ctr"/>
-            <a:r>
-              <a:rPr sz="1200" b="1" i="1">
-                <a:solidFill>
-                  <a:srgbClr val="5C4826"/>
-                </a:solidFill>
-              </a:rPr>
-              <a:t>searches for failures that have not happened yet: function by function, what could fail, with what effect, held by which control?</a:t>
-            </a:r>
-          </a:p>
-        </p:txBody>
-      </p:sp>
-      <p:sp>
-        <p:nvSpPr>
-          <p:cNvPr id="1000" name="ColumnHeading"/>
-          <p:cNvSpPr/>
-          <p:nvPr/>
-        </p:nvSpPr>
-        <p:spPr>
-          <a:xfrm>
-            <a:off x="4389120" y="1572768"/>
-            <a:ext cx="1828800" cy="274320"/>
-          </a:xfrm>
-          <a:prstGeom prst="rect">
-            <a:avLst/>
-          </a:prstGeom>
-          <a:noFill/>
-          <a:ln>
-            <a:noFill/>
-          </a:ln>
-          <a:effectLst/>
-        </p:spPr>
-        <p:style>
-          <a:lnRef idx="1">
-            <a:schemeClr val="accent1"/>
-          </a:lnRef>
-          <a:fillRef idx="3">
-            <a:schemeClr val="accent1"/>
-          </a:fillRef>
-          <a:effectRef idx="2">
-            <a:schemeClr val="accent1"/>
-          </a:effectRef>
-          <a:fontRef idx="minor">
-            <a:schemeClr val="lt1"/>
-          </a:fontRef>
-        </p:style>
-        <p:txBody>
-          <a:bodyPr wrap="square" lIns="27432" tIns="22860" rIns="27432" bIns="22860" rtlCol="0" anchor="ctr"/>
-          <a:lstStyle/>
-          <a:p>
-            <a:pPr algn="ctr"/>
-            <a:r>
-              <a:rPr lang="en-US" sz="1200" b="1" i="0" dirty="0">
-                <a:solidFill>
-                  <a:schemeClr val="bg1"/>
-                </a:solidFill>
-              </a:rPr>
-              <a:t>EFFECT</a:t>
-            </a:r>
-            <a:endParaRPr sz="2800" b="1" i="0" dirty="0">
-              <a:solidFill>
-                <a:schemeClr val="bg1"/>
-              </a:solidFill>
-            </a:endParaRPr>
-          </a:p>
-        </p:txBody>
-      </p:sp>
-      <p:sp>
-        <p:nvSpPr>
-          <p:cNvPr id="1001" name="ColumnHeading"/>
-          <p:cNvSpPr/>
-          <p:nvPr/>
-        </p:nvSpPr>
-        <p:spPr>
-          <a:xfrm>
-            <a:off x="6309360" y="1572768"/>
-            <a:ext cx="2286000" cy="274320"/>
-          </a:xfrm>
-          <a:prstGeom prst="rect">
-            <a:avLst/>
-          </a:prstGeom>
-          <a:noFill/>
-          <a:ln>
-            <a:noFill/>
-          </a:ln>
-          <a:effectLst/>
-        </p:spPr>
-        <p:style>
-          <a:lnRef idx="1">
-            <a:schemeClr val="accent1"/>
-          </a:lnRef>
-          <a:fillRef idx="3">
-            <a:schemeClr val="accent1"/>
-          </a:fillRef>
-          <a:effectRef idx="2">
-            <a:schemeClr val="accent1"/>
-          </a:effectRef>
-          <a:fontRef idx="minor">
-            <a:schemeClr val="lt1"/>
-          </a:fontRef>
-        </p:style>
-        <p:txBody>
-          <a:bodyPr wrap="square" lIns="27432" tIns="22860" rIns="27432" bIns="22860" rtlCol="0" anchor="ctr"/>
-          <a:lstStyle/>
-          <a:p>
-            <a:pPr algn="ctr"/>
-            <a:r>
-              <a:rPr lang="en-US" sz="1200" b="1" i="0" dirty="0">
-                <a:solidFill>
-                  <a:schemeClr val="bg1"/>
-                </a:solidFill>
-              </a:rPr>
-              <a:t>CANDIDATE CONTROL</a:t>
-            </a:r>
-            <a:endParaRPr sz="2800" b="1" i="0" dirty="0">
-              <a:solidFill>
-                <a:schemeClr val="bg1"/>
-              </a:solidFill>
-            </a:endParaRPr>
-          </a:p>
-        </p:txBody>
-      </p:sp>
-      <p:sp>
-        <p:nvSpPr>
-          <p:cNvPr id="1002" name="Card"/>
-          <p:cNvSpPr/>
-          <p:nvPr/>
-        </p:nvSpPr>
-        <p:spPr>
-          <a:xfrm>
-            <a:off x="4389120" y="1920240"/>
-            <a:ext cx="1828800" cy="713232"/>
-          </a:xfrm>
-          <a:prstGeom prst="rect">
-            <a:avLst/>
-          </a:prstGeom>
-          <a:solidFill>
-            <a:srgbClr val="F5F1E8"/>
-          </a:solidFill>
-          <a:ln w="12700">
-            <a:solidFill>
-              <a:srgbClr val="C9B991"/>
-            </a:solidFill>
-          </a:ln>
-          <a:effectLst/>
-        </p:spPr>
-        <p:style>
-          <a:lnRef idx="1">
-            <a:schemeClr val="accent1"/>
-          </a:lnRef>
-          <a:fillRef idx="3">
-            <a:schemeClr val="accent1"/>
-          </a:fillRef>
-          <a:effectRef idx="2">
-            <a:schemeClr val="accent1"/>
-          </a:effectRef>
-          <a:fontRef idx="minor">
-            <a:schemeClr val="lt1"/>
-          </a:fontRef>
-        </p:style>
-        <p:txBody>
-          <a:bodyPr wrap="square" lIns="27432" tIns="22860" rIns="27432" bIns="22860" rtlCol="0" anchor="ctr"/>
-          <a:lstStyle/>
-          <a:p>
-            <a:pPr algn="ctr"/>
-            <a:r>
-              <a:rPr sz="1100" b="0" i="1" dirty="0">
-                <a:solidFill>
-                  <a:srgbClr val="5C4826"/>
-                </a:solidFill>
-              </a:rPr>
-              <a:t>endpoint failure</a:t>
-            </a:r>
-          </a:p>
-        </p:txBody>
-      </p:sp>
-      <p:sp>
-        <p:nvSpPr>
-          <p:cNvPr id="1003" name="Card"/>
-          <p:cNvSpPr/>
-          <p:nvPr/>
-        </p:nvSpPr>
-        <p:spPr>
-          <a:xfrm>
-            <a:off x="6309360" y="1920240"/>
-            <a:ext cx="2286000" cy="713232"/>
-          </a:xfrm>
-          <a:prstGeom prst="rect">
-            <a:avLst/>
-          </a:prstGeom>
-          <a:solidFill>
-            <a:srgbClr val="F5F1E8"/>
-          </a:solidFill>
-          <a:ln w="12700">
-            <a:solidFill>
-              <a:srgbClr val="C9B991"/>
-            </a:solidFill>
-          </a:ln>
-          <a:effectLst/>
-        </p:spPr>
-        <p:style>
-          <a:lnRef idx="1">
-            <a:schemeClr val="accent1"/>
-          </a:lnRef>
-          <a:fillRef idx="3">
-            <a:schemeClr val="accent1"/>
-          </a:fillRef>
-          <a:effectRef idx="2">
-            <a:schemeClr val="accent1"/>
-          </a:effectRef>
-          <a:fontRef idx="minor">
-            <a:schemeClr val="lt1"/>
-          </a:fontRef>
-        </p:style>
-        <p:txBody>
-          <a:bodyPr wrap="square" lIns="27432" tIns="22860" rIns="27432" bIns="22860" rtlCol="0" anchor="ctr"/>
-          <a:lstStyle/>
-          <a:p>
-            <a:pPr algn="ctr"/>
-            <a:r>
-              <a:rPr sz="1100" b="0" i="1" dirty="0">
-                <a:solidFill>
-                  <a:srgbClr val="5C4826"/>
-                </a:solidFill>
-              </a:rPr>
-              <a:t>contract validation</a:t>
-            </a:r>
-          </a:p>
-        </p:txBody>
-      </p:sp>
-      <p:sp>
-        <p:nvSpPr>
-          <p:cNvPr id="1004" name="Card"/>
-          <p:cNvSpPr/>
-          <p:nvPr/>
-        </p:nvSpPr>
-        <p:spPr>
-          <a:xfrm>
-            <a:off x="4389120" y="2697480"/>
-            <a:ext cx="1828800" cy="713232"/>
-          </a:xfrm>
-          <a:prstGeom prst="rect">
-            <a:avLst/>
-          </a:prstGeom>
-          <a:solidFill>
-            <a:srgbClr val="F5F1E8"/>
-          </a:solidFill>
-          <a:ln w="12700">
-            <a:solidFill>
-              <a:srgbClr val="C9B991"/>
-            </a:solidFill>
-          </a:ln>
-          <a:effectLst/>
-        </p:spPr>
-        <p:style>
-          <a:lnRef idx="1">
-            <a:schemeClr val="accent1"/>
-          </a:lnRef>
-          <a:fillRef idx="3">
-            <a:schemeClr val="accent1"/>
-          </a:fillRef>
-          <a:effectRef idx="2">
-            <a:schemeClr val="accent1"/>
-          </a:effectRef>
-          <a:fontRef idx="minor">
-            <a:schemeClr val="lt1"/>
-          </a:fontRef>
-        </p:style>
-        <p:txBody>
-          <a:bodyPr wrap="square" lIns="27432" tIns="22860" rIns="27432" bIns="22860" rtlCol="0" anchor="ctr"/>
-          <a:lstStyle/>
-          <a:p>
-            <a:pPr algn="ctr"/>
-            <a:r>
-              <a:rPr sz="1100" b="0" i="1" dirty="0">
-                <a:solidFill>
-                  <a:srgbClr val="5C4826"/>
-                </a:solidFill>
-              </a:rPr>
-              <a:t>defective update released</a:t>
-            </a:r>
-          </a:p>
-        </p:txBody>
-      </p:sp>
-      <p:sp>
-        <p:nvSpPr>
-          <p:cNvPr id="1005" name="Card"/>
-          <p:cNvSpPr/>
-          <p:nvPr/>
-        </p:nvSpPr>
-        <p:spPr>
-          <a:xfrm>
-            <a:off x="6309360" y="2697480"/>
-            <a:ext cx="2286000" cy="713232"/>
-          </a:xfrm>
-          <a:prstGeom prst="rect">
-            <a:avLst/>
-          </a:prstGeom>
-          <a:solidFill>
-            <a:srgbClr val="F5F1E8"/>
-          </a:solidFill>
-          <a:ln w="12700">
-            <a:solidFill>
-              <a:srgbClr val="C9B991"/>
-            </a:solidFill>
-          </a:ln>
-          <a:effectLst/>
-        </p:spPr>
-        <p:style>
-          <a:lnRef idx="1">
-            <a:schemeClr val="accent1"/>
-          </a:lnRef>
-          <a:fillRef idx="3">
-            <a:schemeClr val="accent1"/>
-          </a:fillRef>
-          <a:effectRef idx="2">
-            <a:schemeClr val="accent1"/>
-          </a:effectRef>
-          <a:fontRef idx="minor">
-            <a:schemeClr val="lt1"/>
-          </a:fontRef>
-        </p:style>
-        <p:txBody>
-          <a:bodyPr wrap="square" lIns="27432" tIns="22860" rIns="27432" bIns="22860" rtlCol="0" anchor="ctr"/>
-          <a:lstStyle/>
-          <a:p>
-            <a:pPr algn="ctr"/>
-            <a:r>
-              <a:rPr sz="1100" b="0" i="1" dirty="0">
-                <a:solidFill>
-                  <a:srgbClr val="5C4826"/>
-                </a:solidFill>
-              </a:rPr>
-              <a:t>independent compatibility tests</a:t>
-            </a:r>
-          </a:p>
-        </p:txBody>
-      </p:sp>
-      <p:sp>
-        <p:nvSpPr>
-          <p:cNvPr id="1006" name="Card"/>
-          <p:cNvSpPr/>
-          <p:nvPr/>
-        </p:nvSpPr>
-        <p:spPr>
-          <a:xfrm>
-            <a:off x="4389120" y="3474720"/>
-            <a:ext cx="1828800" cy="713232"/>
-          </a:xfrm>
-          <a:prstGeom prst="rect">
-            <a:avLst/>
-          </a:prstGeom>
-          <a:solidFill>
-            <a:srgbClr val="F5F1E8"/>
-          </a:solidFill>
-          <a:ln w="12700">
-            <a:solidFill>
-              <a:srgbClr val="C9B991"/>
-            </a:solidFill>
-          </a:ln>
-          <a:effectLst/>
-        </p:spPr>
-        <p:style>
-          <a:lnRef idx="1">
-            <a:schemeClr val="accent1"/>
-          </a:lnRef>
-          <a:fillRef idx="3">
-            <a:schemeClr val="accent1"/>
-          </a:fillRef>
-          <a:effectRef idx="2">
-            <a:schemeClr val="accent1"/>
-          </a:effectRef>
-          <a:fontRef idx="minor">
-            <a:schemeClr val="lt1"/>
-          </a:fontRef>
-        </p:style>
-        <p:txBody>
-          <a:bodyPr wrap="square" lIns="27432" tIns="22860" rIns="27432" bIns="22860" rtlCol="0" anchor="ctr"/>
-          <a:lstStyle/>
-          <a:p>
-            <a:pPr algn="ctr"/>
-            <a:r>
-              <a:rPr sz="1100" b="0" i="1" dirty="0">
-                <a:solidFill>
-                  <a:srgbClr val="5C4826"/>
-                </a:solidFill>
-              </a:rPr>
-              <a:t>widespread outage</a:t>
-            </a:r>
-          </a:p>
-        </p:txBody>
-      </p:sp>
-      <p:sp>
-        <p:nvSpPr>
-          <p:cNvPr id="1007" name="Card"/>
-          <p:cNvSpPr/>
-          <p:nvPr/>
-        </p:nvSpPr>
-        <p:spPr>
-          <a:xfrm>
-            <a:off x="6309360" y="3474720"/>
-            <a:ext cx="2286000" cy="713232"/>
-          </a:xfrm>
-          <a:prstGeom prst="rect">
-            <a:avLst/>
-          </a:prstGeom>
-          <a:solidFill>
-            <a:srgbClr val="F5F1E8"/>
-          </a:solidFill>
-          <a:ln w="12700">
-            <a:solidFill>
-              <a:srgbClr val="C9B991"/>
-            </a:solidFill>
-          </a:ln>
-          <a:effectLst/>
-        </p:spPr>
-        <p:style>
-          <a:lnRef idx="1">
-            <a:schemeClr val="accent1"/>
-          </a:lnRef>
-          <a:fillRef idx="3">
-            <a:schemeClr val="accent1"/>
-          </a:fillRef>
-          <a:effectRef idx="2">
-            <a:schemeClr val="accent1"/>
-          </a:effectRef>
-          <a:fontRef idx="minor">
-            <a:schemeClr val="lt1"/>
-          </a:fontRef>
-        </p:style>
-        <p:txBody>
-          <a:bodyPr wrap="square" lIns="27432" tIns="22860" rIns="27432" bIns="22860" rtlCol="0" anchor="ctr"/>
-          <a:lstStyle/>
-          <a:p>
-            <a:pPr algn="ctr"/>
-            <a:r>
-              <a:rPr sz="1100" b="0" i="1" dirty="0">
-                <a:solidFill>
-                  <a:srgbClr val="5C4826"/>
-                </a:solidFill>
-              </a:rPr>
-              <a:t>staged rollout + demonstrated halt</a:t>
-            </a:r>
-          </a:p>
-        </p:txBody>
-      </p:sp>
-      <p:sp>
-        <p:nvSpPr>
-          <p:cNvPr id="1008" name="Card"/>
-          <p:cNvSpPr/>
-          <p:nvPr/>
-        </p:nvSpPr>
-        <p:spPr>
-          <a:xfrm>
-            <a:off x="4389120" y="4251960"/>
-            <a:ext cx="1828800" cy="713232"/>
-          </a:xfrm>
-          <a:prstGeom prst="rect">
-            <a:avLst/>
-          </a:prstGeom>
-          <a:solidFill>
-            <a:srgbClr val="F5F1E8"/>
-          </a:solidFill>
-          <a:ln w="12700">
-            <a:solidFill>
-              <a:srgbClr val="C9B991"/>
-            </a:solidFill>
-          </a:ln>
-          <a:effectLst/>
-        </p:spPr>
-        <p:style>
-          <a:lnRef idx="1">
-            <a:schemeClr val="accent1"/>
-          </a:lnRef>
-          <a:fillRef idx="3">
-            <a:schemeClr val="accent1"/>
-          </a:fillRef>
-          <a:effectRef idx="2">
-            <a:schemeClr val="accent1"/>
-          </a:effectRef>
-          <a:fontRef idx="minor">
-            <a:schemeClr val="lt1"/>
-          </a:fontRef>
-        </p:style>
-        <p:txBody>
-          <a:bodyPr wrap="square" lIns="27432" tIns="22860" rIns="27432" bIns="22860" rtlCol="0" anchor="ctr"/>
-          <a:lstStyle/>
-          <a:p>
-            <a:pPr algn="ctr"/>
-            <a:r>
-              <a:rPr sz="1100" b="0" i="1" dirty="0">
-                <a:solidFill>
-                  <a:srgbClr val="5C4826"/>
-                </a:solidFill>
-              </a:rPr>
-              <a:t>service disruption</a:t>
-            </a:r>
-          </a:p>
-        </p:txBody>
-      </p:sp>
-      <p:sp>
-        <p:nvSpPr>
-          <p:cNvPr id="1009" name="Card"/>
-          <p:cNvSpPr/>
-          <p:nvPr/>
-        </p:nvSpPr>
-        <p:spPr>
-          <a:xfrm>
-            <a:off x="6309360" y="4251960"/>
-            <a:ext cx="2286000" cy="713232"/>
-          </a:xfrm>
-          <a:prstGeom prst="rect">
-            <a:avLst/>
-          </a:prstGeom>
-          <a:solidFill>
-            <a:srgbClr val="F5F1E8"/>
-          </a:solidFill>
-          <a:ln w="12700">
-            <a:solidFill>
-              <a:srgbClr val="C9B991"/>
-            </a:solidFill>
-          </a:ln>
-          <a:effectLst/>
-        </p:spPr>
-        <p:style>
-          <a:lnRef idx="1">
-            <a:schemeClr val="accent1"/>
-          </a:lnRef>
-          <a:fillRef idx="3">
-            <a:schemeClr val="accent1"/>
-          </a:fillRef>
-          <a:effectRef idx="2">
-            <a:schemeClr val="accent1"/>
-          </a:effectRef>
-          <a:fontRef idx="minor">
-            <a:schemeClr val="lt1"/>
-          </a:fontRef>
-        </p:style>
-        <p:txBody>
-          <a:bodyPr wrap="square" lIns="27432" tIns="22860" rIns="27432" bIns="22860" rtlCol="0" anchor="ctr"/>
-          <a:lstStyle/>
-          <a:p>
-            <a:pPr algn="ctr"/>
-            <a:r>
-              <a:rPr sz="1100" b="0" i="1" dirty="0">
-                <a:solidFill>
-                  <a:srgbClr val="5C4826"/>
-                </a:solidFill>
-              </a:rPr>
-              <a:t>independent service paths</a:t>
-            </a:r>
-          </a:p>
-        </p:txBody>
-      </p:sp>
-      <p:sp>
-        <p:nvSpPr>
-          <p:cNvPr id="1010" name="Label"/>
-          <p:cNvSpPr txBox="1"/>
-          <p:nvPr/>
-        </p:nvSpPr>
-        <p:spPr>
-          <a:xfrm>
-            <a:off x="548640" y="5102352"/>
-            <a:ext cx="8046720" cy="365760"/>
-          </a:xfrm>
-          <a:prstGeom prst="rect">
-            <a:avLst/>
-          </a:prstGeom>
-          <a:noFill/>
-        </p:spPr>
-        <p:txBody>
-          <a:bodyPr wrap="square" lIns="27432" tIns="22860" rIns="27432" bIns="22860" anchor="t">
-            <a:spAutoFit/>
-          </a:bodyPr>
-          <a:lstStyle/>
-          <a:p>
-            <a:pPr algn="ctr"/>
-            <a:r>
-              <a:rPr sz="1200" b="1" i="1">
-                <a:solidFill>
-                  <a:srgbClr val="5C4826"/>
-                </a:solidFill>
-              </a:rPr>
-              <a:t>How often will each mode occur? Occurrence stays ‘?’ — which modes warrant action even when their probabilities are unknown?</a:t>
-            </a:r>
           </a:p>
         </p:txBody>
       </p:sp>
@@ -23633,7 +24422,12 @@
             <p:ph type="title"/>
           </p:nvPr>
         </p:nvSpPr>
-        <p:spPr/>
+        <p:spPr>
+          <a:xfrm>
+            <a:off x="277148" y="118428"/>
+            <a:ext cx="9145148" cy="638175"/>
+          </a:xfrm>
+        </p:spPr>
         <p:txBody>
           <a:bodyPr>
             <a:normAutofit fontScale="90000"/>
@@ -23641,12 +24435,12 @@
           <a:lstStyle/>
           <a:p>
             <a:r>
-              <a:rPr sz="2400" b="0" i="0">
+              <a:rPr lang="en-US" sz="2400" b="0" i="0" dirty="0">
                 <a:solidFill>
                   <a:srgbClr val="000000"/>
                 </a:solidFill>
               </a:rPr>
-              <a:t>Apply FMEA to an unfamiliar system</a:t>
+              <a:t>Failure should change future engineering</a:t>
             </a:r>
           </a:p>
         </p:txBody>
@@ -23666,9 +24460,9 @@
           <a:bodyPr/>
           <a:lstStyle/>
           <a:p>
-            <a:fld id="{8CF8A65D-8523-4C39-BD83-5C787F1FA9B3}" type="slidenum">
+            <a:fld id="{54DE72B0-FFEB-4C83-B4BD-F25961BEDFCA}" type="slidenum">
               <a:rPr lang="en-US" smtClean="0"/>
-              <a:t>10</a:t>
+              <a:t>32</a:t>
             </a:fld>
             <a:endParaRPr lang="en-US"/>
           </a:p>
@@ -23676,14 +24470,14 @@
       </p:sp>
       <p:sp>
         <p:nvSpPr>
-          <p:cNvPr id="909" name="FooterBand"/>
+          <p:cNvPr id="901" name="Block"/>
           <p:cNvSpPr/>
           <p:nvPr/>
         </p:nvSpPr>
         <p:spPr>
           <a:xfrm>
-            <a:off x="274320" y="5513831"/>
-            <a:ext cx="8595360" cy="905256"/>
+            <a:off x="2606040" y="1097280"/>
+            <a:ext cx="3931920" cy="548640"/>
           </a:xfrm>
           <a:prstGeom prst="rect">
             <a:avLst/>
@@ -23716,713 +24510,52 @@
           <a:p>
             <a:pPr algn="ctr"/>
             <a:r>
-              <a:rPr sz="2000" b="1" i="0" dirty="0">
+              <a:rPr sz="2000" b="1" i="0">
                 <a:solidFill>
                   <a:srgbClr val="FFFFFF"/>
                 </a:solidFill>
               </a:rPr>
-              <a:t>YOUR TASK (2–3 minutes, with a partner): at least one failure mode per function.</a:t>
-            </a:r>
-          </a:p>
-          <a:p>
-            <a:pPr algn="ctr">
-              <a:spcBef>
-                <a:spcPts val="300"/>
-              </a:spcBef>
-            </a:pPr>
-            <a:r>
-              <a:rPr sz="2000" b="1" i="0" dirty="0">
-                <a:solidFill>
-                  <a:srgbClr val="FFFFFF"/>
-                </a:solidFill>
-              </a:rPr>
-              <a:t>Leave likelihood as ‘?’ — decide which modes warrant a control anyway.</a:t>
-            </a:r>
-          </a:p>
-        </p:txBody>
-      </p:sp>
-      <p:sp>
-        <p:nvSpPr>
-          <p:cNvPr id="920" name="Block"/>
-          <p:cNvSpPr/>
-          <p:nvPr/>
-        </p:nvSpPr>
-        <p:spPr>
-          <a:xfrm>
-            <a:off x="548640" y="1005840"/>
-            <a:ext cx="2560320" cy="566928"/>
-          </a:xfrm>
-          <a:prstGeom prst="rect">
-            <a:avLst/>
-          </a:prstGeom>
-          <a:solidFill>
-            <a:srgbClr val="8E6F3E"/>
-          </a:solidFill>
-          <a:ln>
-            <a:noFill/>
-          </a:ln>
-          <a:effectLst/>
-        </p:spPr>
-        <p:style>
-          <a:lnRef idx="1">
-            <a:schemeClr val="accent1"/>
-          </a:lnRef>
-          <a:fillRef idx="3">
-            <a:schemeClr val="accent1"/>
-          </a:fillRef>
-          <a:effectRef idx="2">
-            <a:schemeClr val="accent1"/>
-          </a:effectRef>
-          <a:fontRef idx="minor">
-            <a:schemeClr val="lt1"/>
-          </a:fontRef>
-        </p:style>
-        <p:txBody>
-          <a:bodyPr wrap="square" lIns="27432" tIns="22860" rIns="27432" bIns="22860" rtlCol="0" anchor="ctr"/>
-          <a:lstStyle/>
-          <a:p>
-            <a:pPr algn="ctr"/>
-            <a:r>
-              <a:rPr sz="1200" b="1" i="0">
-                <a:solidFill>
-                  <a:srgbClr val="FFFFFF"/>
-                </a:solidFill>
-              </a:rPr>
-              <a:t>CLOUDFLARE</a:t>
-            </a:r>
-          </a:p>
-        </p:txBody>
-      </p:sp>
-      <p:sp>
-        <p:nvSpPr>
-          <p:cNvPr id="921" name="RowCaption"/>
-          <p:cNvSpPr/>
-          <p:nvPr/>
-        </p:nvSpPr>
-        <p:spPr>
-          <a:xfrm>
-            <a:off x="3383280" y="1005840"/>
-            <a:ext cx="5212080" cy="566928"/>
-          </a:xfrm>
-          <a:prstGeom prst="rect">
-            <a:avLst/>
-          </a:prstGeom>
-          <a:noFill/>
-          <a:ln>
-            <a:noFill/>
-          </a:ln>
-          <a:effectLst/>
-        </p:spPr>
-        <p:style>
-          <a:lnRef idx="1">
-            <a:schemeClr val="accent1"/>
-          </a:lnRef>
-          <a:fillRef idx="3">
-            <a:schemeClr val="accent1"/>
-          </a:fillRef>
-          <a:effectRef idx="2">
-            <a:schemeClr val="accent1"/>
-          </a:effectRef>
-          <a:fontRef idx="minor">
-            <a:schemeClr val="lt1"/>
-          </a:fontRef>
-        </p:style>
-        <p:txBody>
-          <a:bodyPr wrap="square" lIns="27432" tIns="22860" rIns="27432" bIns="22860" rtlCol="0" anchor="ctr"/>
-          <a:lstStyle/>
-          <a:p>
-            <a:pPr algn="l"/>
-            <a:r>
-              <a:rPr sz="1600" b="0" i="0">
-                <a:solidFill>
-                  <a:srgbClr val="555960"/>
-                </a:solidFill>
-              </a:rPr>
-              <a:t>operates a Web Application Firewall (WAF): it inspects incoming web requests for attacks</a:t>
-            </a:r>
-          </a:p>
-        </p:txBody>
-      </p:sp>
-      <p:sp>
-        <p:nvSpPr>
-          <p:cNvPr id="923" name="Block"/>
-          <p:cNvSpPr/>
-          <p:nvPr/>
-        </p:nvSpPr>
-        <p:spPr>
-          <a:xfrm>
-            <a:off x="548640" y="1664208"/>
-            <a:ext cx="2560320" cy="566928"/>
-          </a:xfrm>
-          <a:prstGeom prst="rect">
-            <a:avLst/>
-          </a:prstGeom>
-          <a:solidFill>
-            <a:srgbClr val="8E6F3E"/>
-          </a:solidFill>
-          <a:ln>
-            <a:noFill/>
-          </a:ln>
-          <a:effectLst/>
-        </p:spPr>
-        <p:style>
-          <a:lnRef idx="1">
-            <a:schemeClr val="accent1"/>
-          </a:lnRef>
-          <a:fillRef idx="3">
-            <a:schemeClr val="accent1"/>
-          </a:fillRef>
-          <a:effectRef idx="2">
-            <a:schemeClr val="accent1"/>
-          </a:effectRef>
-          <a:fontRef idx="minor">
-            <a:schemeClr val="lt1"/>
-          </a:fontRef>
-        </p:style>
-        <p:txBody>
-          <a:bodyPr wrap="square" lIns="27432" tIns="22860" rIns="27432" bIns="22860" rtlCol="0" anchor="ctr"/>
-          <a:lstStyle/>
-          <a:p>
-            <a:pPr algn="ctr"/>
-            <a:r>
-              <a:rPr sz="1200" b="1" i="0">
-                <a:solidFill>
-                  <a:srgbClr val="FFFFFF"/>
-                </a:solidFill>
-              </a:rPr>
-              <a:t>RULE CHANGES</a:t>
-            </a:r>
-          </a:p>
-        </p:txBody>
-      </p:sp>
-      <p:sp>
-        <p:nvSpPr>
-          <p:cNvPr id="924" name="RowCaption"/>
-          <p:cNvSpPr/>
-          <p:nvPr/>
-        </p:nvSpPr>
-        <p:spPr>
-          <a:xfrm>
-            <a:off x="3383280" y="1664208"/>
-            <a:ext cx="5212080" cy="566928"/>
-          </a:xfrm>
-          <a:prstGeom prst="rect">
-            <a:avLst/>
-          </a:prstGeom>
-          <a:noFill/>
-          <a:ln>
-            <a:noFill/>
-          </a:ln>
-          <a:effectLst/>
-        </p:spPr>
-        <p:style>
-          <a:lnRef idx="1">
-            <a:schemeClr val="accent1"/>
-          </a:lnRef>
-          <a:fillRef idx="3">
-            <a:schemeClr val="accent1"/>
-          </a:fillRef>
-          <a:effectRef idx="2">
-            <a:schemeClr val="accent1"/>
-          </a:effectRef>
-          <a:fontRef idx="minor">
-            <a:schemeClr val="lt1"/>
-          </a:fontRef>
-        </p:style>
-        <p:txBody>
-          <a:bodyPr wrap="square" lIns="27432" tIns="22860" rIns="27432" bIns="22860" rtlCol="0" anchor="ctr"/>
-          <a:lstStyle/>
-          <a:p>
-            <a:pPr algn="l"/>
-            <a:r>
-              <a:rPr sz="1600" b="0" i="0">
-                <a:solidFill>
-                  <a:srgbClr val="555960"/>
-                </a:solidFill>
-              </a:rPr>
-              <a:t>new detection rules deploy without a software release — and propagate globally within seconds</a:t>
-            </a:r>
-          </a:p>
-        </p:txBody>
-      </p:sp>
-      <p:sp>
-        <p:nvSpPr>
-          <p:cNvPr id="926" name="Block"/>
-          <p:cNvSpPr/>
-          <p:nvPr/>
-        </p:nvSpPr>
-        <p:spPr>
-          <a:xfrm>
-            <a:off x="548640" y="2322576"/>
-            <a:ext cx="2560320" cy="566928"/>
-          </a:xfrm>
-          <a:prstGeom prst="rect">
-            <a:avLst/>
-          </a:prstGeom>
-          <a:solidFill>
-            <a:srgbClr val="8E6F3E"/>
-          </a:solidFill>
-          <a:ln>
-            <a:noFill/>
-          </a:ln>
-          <a:effectLst/>
-        </p:spPr>
-        <p:style>
-          <a:lnRef idx="1">
-            <a:schemeClr val="accent1"/>
-          </a:lnRef>
-          <a:fillRef idx="3">
-            <a:schemeClr val="accent1"/>
-          </a:fillRef>
-          <a:effectRef idx="2">
-            <a:schemeClr val="accent1"/>
-          </a:effectRef>
-          <a:fontRef idx="minor">
-            <a:schemeClr val="lt1"/>
-          </a:fontRef>
-        </p:style>
-        <p:txBody>
-          <a:bodyPr wrap="square" lIns="27432" tIns="22860" rIns="27432" bIns="22860" rtlCol="0" anchor="ctr"/>
-          <a:lstStyle/>
-          <a:p>
-            <a:pPr algn="ctr"/>
-            <a:r>
-              <a:rPr sz="1200" b="1" i="0" dirty="0">
-                <a:solidFill>
-                  <a:srgbClr val="FFFFFF"/>
-                </a:solidFill>
-              </a:rPr>
-              <a:t>RULE FORM</a:t>
-            </a:r>
-          </a:p>
-        </p:txBody>
-      </p:sp>
-      <p:sp>
-        <p:nvSpPr>
-          <p:cNvPr id="927" name="RowCaption"/>
-          <p:cNvSpPr/>
-          <p:nvPr/>
-        </p:nvSpPr>
-        <p:spPr>
-          <a:xfrm>
-            <a:off x="3383280" y="2322576"/>
-            <a:ext cx="5212080" cy="566928"/>
-          </a:xfrm>
-          <a:prstGeom prst="rect">
-            <a:avLst/>
-          </a:prstGeom>
-          <a:noFill/>
-          <a:ln>
-            <a:noFill/>
-          </a:ln>
-          <a:effectLst/>
-        </p:spPr>
-        <p:style>
-          <a:lnRef idx="1">
-            <a:schemeClr val="accent1"/>
-          </a:lnRef>
-          <a:fillRef idx="3">
-            <a:schemeClr val="accent1"/>
-          </a:fillRef>
-          <a:effectRef idx="2">
-            <a:schemeClr val="accent1"/>
-          </a:effectRef>
-          <a:fontRef idx="minor">
-            <a:schemeClr val="lt1"/>
-          </a:fontRef>
-        </p:style>
-        <p:txBody>
-          <a:bodyPr wrap="square" lIns="27432" tIns="22860" rIns="27432" bIns="22860" rtlCol="0" anchor="ctr"/>
-          <a:lstStyle/>
-          <a:p>
-            <a:pPr algn="l"/>
-            <a:r>
-              <a:rPr sz="1600" b="0" i="0">
-                <a:solidFill>
-                  <a:srgbClr val="555960"/>
-                </a:solidFill>
-              </a:rPr>
-              <a:t>some detection rules are written as regular expressions</a:t>
-            </a:r>
-          </a:p>
-        </p:txBody>
-      </p:sp>
-      <p:sp>
-        <p:nvSpPr>
-          <p:cNvPr id="5" name="ColumnHeading"/>
-          <p:cNvSpPr/>
-          <p:nvPr/>
-        </p:nvSpPr>
-        <p:spPr>
-          <a:xfrm>
-            <a:off x="365760" y="3072384"/>
-            <a:ext cx="1645920" cy="256032"/>
-          </a:xfrm>
-          <a:prstGeom prst="rect">
-            <a:avLst/>
-          </a:prstGeom>
-          <a:noFill/>
-          <a:ln>
-            <a:noFill/>
-          </a:ln>
-          <a:effectLst/>
-        </p:spPr>
-        <p:style>
-          <a:lnRef idx="1">
-            <a:schemeClr val="accent1"/>
-          </a:lnRef>
-          <a:fillRef idx="3">
-            <a:schemeClr val="accent1"/>
-          </a:fillRef>
-          <a:effectRef idx="2">
-            <a:schemeClr val="accent1"/>
-          </a:effectRef>
-          <a:fontRef idx="minor">
-            <a:schemeClr val="lt1"/>
-          </a:fontRef>
-        </p:style>
-        <p:txBody>
-          <a:bodyPr wrap="square" lIns="27432" tIns="22860" rIns="27432" bIns="22860" rtlCol="0" anchor="ctr"/>
-          <a:lstStyle/>
-          <a:p>
-            <a:pPr algn="ctr"/>
-            <a:r>
-              <a:rPr lang="en-US" sz="1200" b="1" i="0" dirty="0">
-                <a:solidFill>
-                  <a:schemeClr val="bg1"/>
-                </a:solidFill>
-              </a:rPr>
-              <a:t>FUNCTION</a:t>
-            </a:r>
-            <a:endParaRPr sz="2800" b="1" i="0" dirty="0">
-              <a:solidFill>
-                <a:schemeClr val="bg1"/>
-              </a:solidFill>
-            </a:endParaRPr>
-          </a:p>
-        </p:txBody>
-      </p:sp>
-      <p:sp>
-        <p:nvSpPr>
-          <p:cNvPr id="1000" name="ColumnHeading"/>
-          <p:cNvSpPr/>
-          <p:nvPr/>
-        </p:nvSpPr>
-        <p:spPr>
-          <a:xfrm>
-            <a:off x="2103120" y="3072384"/>
-            <a:ext cx="2194560" cy="256032"/>
-          </a:xfrm>
-          <a:prstGeom prst="rect">
-            <a:avLst/>
-          </a:prstGeom>
-          <a:noFill/>
-          <a:ln>
-            <a:noFill/>
-          </a:ln>
-          <a:effectLst/>
-        </p:spPr>
-        <p:style>
-          <a:lnRef idx="1">
-            <a:schemeClr val="accent1"/>
-          </a:lnRef>
-          <a:fillRef idx="3">
-            <a:schemeClr val="accent1"/>
-          </a:fillRef>
-          <a:effectRef idx="2">
-            <a:schemeClr val="accent1"/>
-          </a:effectRef>
-          <a:fontRef idx="minor">
-            <a:schemeClr val="lt1"/>
-          </a:fontRef>
-        </p:style>
-        <p:txBody>
-          <a:bodyPr wrap="square" lIns="27432" tIns="22860" rIns="27432" bIns="22860" rtlCol="0" anchor="ctr"/>
-          <a:lstStyle/>
-          <a:p>
-            <a:pPr algn="ctr"/>
-            <a:r>
-              <a:rPr lang="en-US" sz="1200" b="1" i="0" dirty="0">
-                <a:solidFill>
-                  <a:schemeClr val="bg1"/>
-                </a:solidFill>
-              </a:rPr>
-              <a:t>POSSIBLE FAILURE MODE</a:t>
-            </a:r>
-            <a:endParaRPr sz="2800" b="1" i="0" dirty="0">
-              <a:solidFill>
-                <a:schemeClr val="bg1"/>
-              </a:solidFill>
-            </a:endParaRPr>
-          </a:p>
-        </p:txBody>
-      </p:sp>
-      <p:sp>
-        <p:nvSpPr>
-          <p:cNvPr id="1001" name="ColumnHeading"/>
-          <p:cNvSpPr/>
-          <p:nvPr/>
-        </p:nvSpPr>
-        <p:spPr>
-          <a:xfrm>
-            <a:off x="4389120" y="3072384"/>
-            <a:ext cx="2011680" cy="256032"/>
-          </a:xfrm>
-          <a:prstGeom prst="rect">
-            <a:avLst/>
-          </a:prstGeom>
-          <a:noFill/>
-          <a:ln>
-            <a:noFill/>
-          </a:ln>
-          <a:effectLst/>
-        </p:spPr>
-        <p:style>
-          <a:lnRef idx="1">
-            <a:schemeClr val="accent1"/>
-          </a:lnRef>
-          <a:fillRef idx="3">
-            <a:schemeClr val="accent1"/>
-          </a:fillRef>
-          <a:effectRef idx="2">
-            <a:schemeClr val="accent1"/>
-          </a:effectRef>
-          <a:fontRef idx="minor">
-            <a:schemeClr val="lt1"/>
-          </a:fontRef>
-        </p:style>
-        <p:txBody>
-          <a:bodyPr wrap="square" lIns="27432" tIns="22860" rIns="27432" bIns="22860" rtlCol="0" anchor="ctr"/>
-          <a:lstStyle/>
-          <a:p>
-            <a:pPr algn="ctr"/>
-            <a:r>
-              <a:rPr lang="en-US" sz="1200" b="1" i="0" dirty="0">
-                <a:solidFill>
-                  <a:schemeClr val="bg1"/>
-                </a:solidFill>
-              </a:rPr>
-              <a:t>POTENTIAL EFFECT</a:t>
-            </a:r>
-            <a:endParaRPr sz="2800" b="1" i="0" dirty="0">
-              <a:solidFill>
-                <a:schemeClr val="bg1"/>
-              </a:solidFill>
-            </a:endParaRPr>
-          </a:p>
-        </p:txBody>
-      </p:sp>
-      <p:sp>
-        <p:nvSpPr>
-          <p:cNvPr id="1002" name="ColumnHeading"/>
-          <p:cNvSpPr/>
-          <p:nvPr/>
-        </p:nvSpPr>
-        <p:spPr>
-          <a:xfrm>
-            <a:off x="6492240" y="3072384"/>
-            <a:ext cx="2103120" cy="256032"/>
-          </a:xfrm>
-          <a:prstGeom prst="rect">
-            <a:avLst/>
-          </a:prstGeom>
-          <a:noFill/>
-          <a:ln>
-            <a:noFill/>
-          </a:ln>
-          <a:effectLst/>
-        </p:spPr>
-        <p:style>
-          <a:lnRef idx="1">
-            <a:schemeClr val="accent1"/>
-          </a:lnRef>
-          <a:fillRef idx="3">
-            <a:schemeClr val="accent1"/>
-          </a:fillRef>
-          <a:effectRef idx="2">
-            <a:schemeClr val="accent1"/>
-          </a:effectRef>
-          <a:fontRef idx="minor">
-            <a:schemeClr val="lt1"/>
-          </a:fontRef>
-        </p:style>
-        <p:txBody>
-          <a:bodyPr wrap="square" lIns="27432" tIns="22860" rIns="27432" bIns="22860" rtlCol="0" anchor="ctr"/>
-          <a:lstStyle/>
-          <a:p>
-            <a:pPr algn="ctr"/>
-            <a:r>
-              <a:rPr lang="en-US" sz="1200" b="1" i="0" dirty="0">
-                <a:solidFill>
-                  <a:schemeClr val="bg1"/>
-                </a:solidFill>
-              </a:rPr>
-              <a:t>PROPOSED CONTROL</a:t>
-            </a:r>
-            <a:endParaRPr sz="2800" b="1" i="0" dirty="0">
-              <a:solidFill>
-                <a:schemeClr val="bg1"/>
-              </a:solidFill>
-            </a:endParaRPr>
-          </a:p>
-        </p:txBody>
-      </p:sp>
-      <p:sp>
-        <p:nvSpPr>
-          <p:cNvPr id="1003" name="Block"/>
-          <p:cNvSpPr/>
-          <p:nvPr/>
-        </p:nvSpPr>
-        <p:spPr>
-          <a:xfrm>
-            <a:off x="365760" y="3401568"/>
-            <a:ext cx="1645920" cy="603504"/>
-          </a:xfrm>
-          <a:prstGeom prst="rect">
-            <a:avLst/>
-          </a:prstGeom>
-          <a:solidFill>
-            <a:srgbClr val="8E6F3E"/>
-          </a:solidFill>
-          <a:ln>
-            <a:noFill/>
-          </a:ln>
-          <a:effectLst/>
-        </p:spPr>
-        <p:style>
-          <a:lnRef idx="1">
-            <a:schemeClr val="accent1"/>
-          </a:lnRef>
-          <a:fillRef idx="3">
-            <a:schemeClr val="accent1"/>
-          </a:fillRef>
-          <a:effectRef idx="2">
-            <a:schemeClr val="accent1"/>
-          </a:effectRef>
-          <a:fontRef idx="minor">
-            <a:schemeClr val="lt1"/>
-          </a:fontRef>
-        </p:style>
-        <p:txBody>
-          <a:bodyPr wrap="square" lIns="27432" tIns="22860" rIns="27432" bIns="22860" rtlCol="0" anchor="ctr"/>
-          <a:lstStyle/>
-          <a:p>
-            <a:pPr algn="ctr"/>
-            <a:r>
-              <a:rPr sz="1200" b="1" i="0">
-                <a:solidFill>
-                  <a:srgbClr val="FFFFFF"/>
-                </a:solidFill>
-              </a:rPr>
-              <a:t>Evaluate WAF rule</a:t>
-            </a:r>
-          </a:p>
-        </p:txBody>
-      </p:sp>
-      <p:sp>
-        <p:nvSpPr>
-          <p:cNvPr id="1004" name="Block"/>
-          <p:cNvSpPr/>
-          <p:nvPr/>
-        </p:nvSpPr>
-        <p:spPr>
-          <a:xfrm>
-            <a:off x="365760" y="4059936"/>
-            <a:ext cx="1645920" cy="603504"/>
-          </a:xfrm>
-          <a:prstGeom prst="rect">
-            <a:avLst/>
-          </a:prstGeom>
-          <a:solidFill>
-            <a:srgbClr val="8E6F3E"/>
-          </a:solidFill>
-          <a:ln>
-            <a:noFill/>
-          </a:ln>
-          <a:effectLst/>
-        </p:spPr>
-        <p:style>
-          <a:lnRef idx="1">
-            <a:schemeClr val="accent1"/>
-          </a:lnRef>
-          <a:fillRef idx="3">
-            <a:schemeClr val="accent1"/>
-          </a:fillRef>
-          <a:effectRef idx="2">
-            <a:schemeClr val="accent1"/>
-          </a:effectRef>
-          <a:fontRef idx="minor">
-            <a:schemeClr val="lt1"/>
-          </a:fontRef>
-        </p:style>
-        <p:txBody>
-          <a:bodyPr wrap="square" lIns="27432" tIns="22860" rIns="27432" bIns="22860" rtlCol="0" anchor="ctr"/>
-          <a:lstStyle/>
-          <a:p>
-            <a:pPr algn="ctr"/>
-            <a:r>
-              <a:rPr sz="1200" b="1" i="0">
-                <a:solidFill>
-                  <a:srgbClr val="FFFFFF"/>
-                </a:solidFill>
-              </a:rPr>
-              <a:t>Validate new rule</a:t>
-            </a:r>
-          </a:p>
-        </p:txBody>
-      </p:sp>
-      <p:sp>
-        <p:nvSpPr>
-          <p:cNvPr id="1005" name="Block"/>
-          <p:cNvSpPr/>
-          <p:nvPr/>
-        </p:nvSpPr>
-        <p:spPr>
-          <a:xfrm>
-            <a:off x="365760" y="4718304"/>
-            <a:ext cx="1645920" cy="603504"/>
-          </a:xfrm>
-          <a:prstGeom prst="rect">
-            <a:avLst/>
-          </a:prstGeom>
-          <a:solidFill>
-            <a:srgbClr val="8E6F3E"/>
-          </a:solidFill>
-          <a:ln>
-            <a:noFill/>
-          </a:ln>
-          <a:effectLst/>
-        </p:spPr>
-        <p:style>
-          <a:lnRef idx="1">
-            <a:schemeClr val="accent1"/>
-          </a:lnRef>
-          <a:fillRef idx="3">
-            <a:schemeClr val="accent1"/>
-          </a:fillRef>
-          <a:effectRef idx="2">
-            <a:schemeClr val="accent1"/>
-          </a:effectRef>
-          <a:fontRef idx="minor">
-            <a:schemeClr val="lt1"/>
-          </a:fontRef>
-        </p:style>
-        <p:txBody>
-          <a:bodyPr wrap="square" lIns="27432" tIns="22860" rIns="27432" bIns="22860" rtlCol="0" anchor="ctr"/>
-          <a:lstStyle/>
-          <a:p>
-            <a:pPr algn="ctr"/>
-            <a:r>
-              <a:rPr sz="1200" b="1" i="0">
-                <a:solidFill>
-                  <a:srgbClr val="FFFFFF"/>
-                </a:solidFill>
-              </a:rPr>
-              <a:t>Distribute rule</a:t>
-            </a:r>
-          </a:p>
-        </p:txBody>
-      </p:sp>
+              <a:t>OBSERVE</a:t>
+            </a:r>
+          </a:p>
+        </p:txBody>
+      </p:sp>
+      <p:cxnSp>
+        <p:nvCxnSpPr>
+          <p:cNvPr id="902" name="Connector 901"/>
+          <p:cNvCxnSpPr/>
+          <p:nvPr/>
+        </p:nvCxnSpPr>
+        <p:spPr>
+          <a:xfrm>
+            <a:off x="4572000" y="1645919"/>
+            <a:ext cx="0" cy="274321"/>
+          </a:xfrm>
+          <a:prstGeom prst="line">
+            <a:avLst/>
+          </a:prstGeom>
+          <a:ln w="19050">
+            <a:solidFill>
+              <a:srgbClr val="8E6F3E"/>
+            </a:solidFill>
+            <a:tailEnd type="triangle"/>
+          </a:ln>
+        </p:spPr>
+        <p:style>
+          <a:lnRef idx="2">
+            <a:schemeClr val="accent1"/>
+          </a:lnRef>
+          <a:fillRef idx="0">
+            <a:schemeClr val="accent1"/>
+          </a:fillRef>
+          <a:effectRef idx="1">
+            <a:schemeClr val="accent1"/>
+          </a:effectRef>
+          <a:fontRef idx="minor">
+            <a:schemeClr val="tx1"/>
+          </a:fontRef>
+        </p:style>
+      </p:cxnSp>
       <p:sp>
         <p:nvSpPr>
           <p:cNvPr id="903" name="Card"/>
@@ -24431,8 +24564,8 @@
         </p:nvSpPr>
         <p:spPr>
           <a:xfrm>
-            <a:off x="2103120" y="3401568"/>
-            <a:ext cx="2194560" cy="603504"/>
+            <a:off x="2606040" y="1920240"/>
+            <a:ext cx="3931920" cy="548640"/>
           </a:xfrm>
           <a:prstGeom prst="rect">
             <a:avLst/>
@@ -24472,21 +24605,240 @@
                   <a:srgbClr val="5C4826"/>
                 </a:solidFill>
               </a:rPr>
-              <a:t/>
-            </a:r>
-          </a:p>
-        </p:txBody>
-      </p:sp>
-      <p:sp>
-        <p:nvSpPr>
-          <p:cNvPr id="1006" name="Card"/>
+              <a:t>explain — a causal account the evidence supports</a:t>
+            </a:r>
+            <a:endParaRPr sz="2000" b="0" i="1" dirty="0">
+              <a:solidFill>
+                <a:srgbClr val="5C4826"/>
+              </a:solidFill>
+            </a:endParaRPr>
+          </a:p>
+        </p:txBody>
+      </p:sp>
+      <p:cxnSp>
+        <p:nvCxnSpPr>
+          <p:cNvPr id="904" name="Connector 903"/>
+          <p:cNvCxnSpPr/>
+          <p:nvPr/>
+        </p:nvCxnSpPr>
+        <p:spPr>
+          <a:xfrm>
+            <a:off x="4572000" y="2468880"/>
+            <a:ext cx="0" cy="274320"/>
+          </a:xfrm>
+          <a:prstGeom prst="line">
+            <a:avLst/>
+          </a:prstGeom>
+          <a:ln w="19050">
+            <a:solidFill>
+              <a:srgbClr val="8E6F3E"/>
+            </a:solidFill>
+            <a:tailEnd type="triangle"/>
+          </a:ln>
+        </p:spPr>
+        <p:style>
+          <a:lnRef idx="2">
+            <a:schemeClr val="accent1"/>
+          </a:lnRef>
+          <a:fillRef idx="0">
+            <a:schemeClr val="accent1"/>
+          </a:fillRef>
+          <a:effectRef idx="1">
+            <a:schemeClr val="accent1"/>
+          </a:effectRef>
+          <a:fontRef idx="minor">
+            <a:schemeClr val="tx1"/>
+          </a:fontRef>
+        </p:style>
+      </p:cxnSp>
+      <p:sp>
+        <p:nvSpPr>
+          <p:cNvPr id="905" name="Block"/>
           <p:cNvSpPr/>
           <p:nvPr/>
         </p:nvSpPr>
         <p:spPr>
           <a:xfrm>
-            <a:off x="4389120" y="3401568"/>
-            <a:ext cx="2011680" cy="603504"/>
+            <a:off x="2606040" y="2743200"/>
+            <a:ext cx="3931920" cy="548640"/>
+          </a:xfrm>
+          <a:prstGeom prst="rect">
+            <a:avLst/>
+          </a:prstGeom>
+          <a:solidFill>
+            <a:srgbClr val="8E6F3E"/>
+          </a:solidFill>
+          <a:ln>
+            <a:noFill/>
+          </a:ln>
+          <a:effectLst/>
+        </p:spPr>
+        <p:style>
+          <a:lnRef idx="1">
+            <a:schemeClr val="accent1"/>
+          </a:lnRef>
+          <a:fillRef idx="3">
+            <a:schemeClr val="accent1"/>
+          </a:fillRef>
+          <a:effectRef idx="2">
+            <a:schemeClr val="accent1"/>
+          </a:effectRef>
+          <a:fontRef idx="minor">
+            <a:schemeClr val="lt1"/>
+          </a:fontRef>
+        </p:style>
+        <p:txBody>
+          <a:bodyPr wrap="square" lIns="27432" tIns="22860" rIns="27432" bIns="22860" rtlCol="0" anchor="ctr"/>
+          <a:lstStyle/>
+          <a:p>
+            <a:pPr algn="ctr"/>
+            <a:r>
+              <a:rPr sz="2000" b="1" i="0" dirty="0">
+                <a:solidFill>
+                  <a:srgbClr val="FFFFFF"/>
+                </a:solidFill>
+              </a:rPr>
+              <a:t>LEARN</a:t>
+            </a:r>
+          </a:p>
+        </p:txBody>
+      </p:sp>
+      <p:sp>
+        <p:nvSpPr>
+          <p:cNvPr id="909" name="Block"/>
+          <p:cNvSpPr/>
+          <p:nvPr/>
+        </p:nvSpPr>
+        <p:spPr>
+          <a:xfrm>
+            <a:off x="1005840" y="4160520"/>
+            <a:ext cx="2926080" cy="777240"/>
+          </a:xfrm>
+          <a:prstGeom prst="rect">
+            <a:avLst/>
+          </a:prstGeom>
+          <a:solidFill>
+            <a:srgbClr val="8E6F3E"/>
+          </a:solidFill>
+          <a:ln>
+            <a:noFill/>
+          </a:ln>
+          <a:effectLst/>
+        </p:spPr>
+        <p:style>
+          <a:lnRef idx="1">
+            <a:schemeClr val="accent1"/>
+          </a:lnRef>
+          <a:fillRef idx="3">
+            <a:schemeClr val="accent1"/>
+          </a:fillRef>
+          <a:effectRef idx="2">
+            <a:schemeClr val="accent1"/>
+          </a:effectRef>
+          <a:fontRef idx="minor">
+            <a:schemeClr val="lt1"/>
+          </a:fontRef>
+        </p:style>
+        <p:txBody>
+          <a:bodyPr wrap="square" lIns="27432" tIns="22860" rIns="27432" bIns="22860" rtlCol="0" anchor="ctr"/>
+          <a:lstStyle/>
+          <a:p>
+            <a:pPr algn="ctr"/>
+            <a:r>
+              <a:rPr sz="1300" b="1" i="0">
+                <a:solidFill>
+                  <a:srgbClr val="FFFFFF"/>
+                </a:solidFill>
+              </a:rPr>
+              <a:t>REFLECTION</a:t>
+            </a:r>
+          </a:p>
+          <a:p>
+            <a:pPr algn="ctr"/>
+            <a:r>
+              <a:rPr sz="1100" b="1" i="0">
+                <a:solidFill>
+                  <a:srgbClr val="FFFFFF"/>
+                </a:solidFill>
+              </a:rPr>
+              <a:t>changes the engineer</a:t>
+            </a:r>
+          </a:p>
+        </p:txBody>
+      </p:sp>
+      <p:sp>
+        <p:nvSpPr>
+          <p:cNvPr id="910" name="Block"/>
+          <p:cNvSpPr/>
+          <p:nvPr/>
+        </p:nvSpPr>
+        <p:spPr>
+          <a:xfrm>
+            <a:off x="5212080" y="4160520"/>
+            <a:ext cx="2926080" cy="777240"/>
+          </a:xfrm>
+          <a:prstGeom prst="rect">
+            <a:avLst/>
+          </a:prstGeom>
+          <a:solidFill>
+            <a:srgbClr val="8E6F3E"/>
+          </a:solidFill>
+          <a:ln>
+            <a:noFill/>
+          </a:ln>
+          <a:effectLst/>
+        </p:spPr>
+        <p:style>
+          <a:lnRef idx="1">
+            <a:schemeClr val="accent1"/>
+          </a:lnRef>
+          <a:fillRef idx="3">
+            <a:schemeClr val="accent1"/>
+          </a:fillRef>
+          <a:effectRef idx="2">
+            <a:schemeClr val="accent1"/>
+          </a:effectRef>
+          <a:fontRef idx="minor">
+            <a:schemeClr val="lt1"/>
+          </a:fontRef>
+        </p:style>
+        <p:txBody>
+          <a:bodyPr wrap="square" lIns="27432" tIns="22860" rIns="27432" bIns="22860" rtlCol="0" anchor="ctr"/>
+          <a:lstStyle/>
+          <a:p>
+            <a:pPr algn="ctr"/>
+            <a:r>
+              <a:rPr sz="1300" b="1" i="0">
+                <a:solidFill>
+                  <a:srgbClr val="FFFFFF"/>
+                </a:solidFill>
+              </a:rPr>
+              <a:t>ENGINEERING STRUCTURE</a:t>
+            </a:r>
+          </a:p>
+          <a:p>
+            <a:pPr algn="ctr"/>
+            <a:r>
+              <a:rPr sz="1100" b="1" i="0">
+                <a:solidFill>
+                  <a:srgbClr val="FFFFFF"/>
+                </a:solidFill>
+              </a:rPr>
+              <a:t>changes the environment</a:t>
+            </a:r>
+          </a:p>
+        </p:txBody>
+      </p:sp>
+      <p:sp>
+        <p:nvSpPr>
+          <p:cNvPr id="1000" name="Card"/>
+          <p:cNvSpPr/>
+          <p:nvPr/>
+        </p:nvSpPr>
+        <p:spPr>
+          <a:xfrm>
+            <a:off x="1005840" y="5303520"/>
+            <a:ext cx="2926080" cy="502920"/>
           </a:xfrm>
           <a:prstGeom prst="rect">
             <a:avLst/>
@@ -24526,21 +24878,26 @@
                   <a:srgbClr val="5C4826"/>
                 </a:solidFill>
               </a:rPr>
-              <a:t/>
-            </a:r>
-          </a:p>
-        </p:txBody>
-      </p:sp>
-      <p:sp>
-        <p:nvSpPr>
-          <p:cNvPr id="1007" name="Card"/>
+              <a:t>future judgment</a:t>
+            </a:r>
+            <a:endParaRPr sz="2000" b="0" i="1" dirty="0">
+              <a:solidFill>
+                <a:srgbClr val="5C4826"/>
+              </a:solidFill>
+            </a:endParaRPr>
+          </a:p>
+        </p:txBody>
+      </p:sp>
+      <p:sp>
+        <p:nvSpPr>
+          <p:cNvPr id="1001" name="Card"/>
           <p:cNvSpPr/>
           <p:nvPr/>
         </p:nvSpPr>
         <p:spPr>
           <a:xfrm>
-            <a:off x="6492240" y="3401568"/>
-            <a:ext cx="2103120" cy="603504"/>
+            <a:off x="5212080" y="5303520"/>
+            <a:ext cx="2926080" cy="502920"/>
           </a:xfrm>
           <a:prstGeom prst="rect">
             <a:avLst/>
@@ -24580,32 +24937,179 @@
                   <a:srgbClr val="5C4826"/>
                 </a:solidFill>
               </a:rPr>
-              <a:t/>
-            </a:r>
-          </a:p>
-        </p:txBody>
-      </p:sp>
-      <p:sp>
-        <p:nvSpPr>
-          <p:cNvPr id="1008" name="Card"/>
+              <a:t>future constraints</a:t>
+            </a:r>
+            <a:endParaRPr sz="2000" b="0" i="1" dirty="0">
+              <a:solidFill>
+                <a:srgbClr val="5C4826"/>
+              </a:solidFill>
+            </a:endParaRPr>
+          </a:p>
+        </p:txBody>
+      </p:sp>
+      <p:cxnSp>
+        <p:nvCxnSpPr>
+          <p:cNvPr id="911" name="Connector 911"/>
+          <p:cNvCxnSpPr/>
+          <p:nvPr/>
+        </p:nvCxnSpPr>
+        <p:spPr>
+          <a:xfrm flipH="1">
+            <a:off x="2468880" y="3291840"/>
+            <a:ext cx="2103120" cy="868679"/>
+          </a:xfrm>
+          <a:prstGeom prst="line">
+            <a:avLst/>
+          </a:prstGeom>
+          <a:ln w="28575">
+            <a:solidFill>
+              <a:srgbClr val="8E6F3E"/>
+            </a:solidFill>
+            <a:tailEnd type="triangle"/>
+          </a:ln>
+        </p:spPr>
+        <p:style>
+          <a:lnRef idx="2">
+            <a:schemeClr val="accent1"/>
+          </a:lnRef>
+          <a:fillRef idx="0">
+            <a:schemeClr val="accent1"/>
+          </a:fillRef>
+          <a:effectRef idx="1">
+            <a:schemeClr val="accent1"/>
+          </a:effectRef>
+          <a:fontRef idx="minor">
+            <a:schemeClr val="tx1"/>
+          </a:fontRef>
+        </p:style>
+      </p:cxnSp>
+      <p:cxnSp>
+        <p:nvCxnSpPr>
+          <p:cNvPr id="1002" name="Connector 911"/>
+          <p:cNvCxnSpPr/>
+          <p:nvPr/>
+        </p:nvCxnSpPr>
+        <p:spPr>
+          <a:xfrm>
+            <a:off x="4572000" y="3291840"/>
+            <a:ext cx="2103120" cy="868679"/>
+          </a:xfrm>
+          <a:prstGeom prst="line">
+            <a:avLst/>
+          </a:prstGeom>
+          <a:ln w="28575">
+            <a:solidFill>
+              <a:srgbClr val="8E6F3E"/>
+            </a:solidFill>
+            <a:tailEnd type="triangle"/>
+          </a:ln>
+        </p:spPr>
+        <p:style>
+          <a:lnRef idx="2">
+            <a:schemeClr val="accent1"/>
+          </a:lnRef>
+          <a:fillRef idx="0">
+            <a:schemeClr val="accent1"/>
+          </a:fillRef>
+          <a:effectRef idx="1">
+            <a:schemeClr val="accent1"/>
+          </a:effectRef>
+          <a:fontRef idx="minor">
+            <a:schemeClr val="tx1"/>
+          </a:fontRef>
+        </p:style>
+      </p:cxnSp>
+      <p:cxnSp>
+        <p:nvCxnSpPr>
+          <p:cNvPr id="1003" name="Connector 911"/>
+          <p:cNvCxnSpPr/>
+          <p:nvPr/>
+        </p:nvCxnSpPr>
+        <p:spPr>
+          <a:xfrm>
+            <a:off x="2468880" y="4937760"/>
+            <a:ext cx="0" cy="365759"/>
+          </a:xfrm>
+          <a:prstGeom prst="line">
+            <a:avLst/>
+          </a:prstGeom>
+          <a:ln w="28575">
+            <a:solidFill>
+              <a:srgbClr val="8E6F3E"/>
+            </a:solidFill>
+            <a:tailEnd type="triangle"/>
+          </a:ln>
+        </p:spPr>
+        <p:style>
+          <a:lnRef idx="2">
+            <a:schemeClr val="accent1"/>
+          </a:lnRef>
+          <a:fillRef idx="0">
+            <a:schemeClr val="accent1"/>
+          </a:fillRef>
+          <a:effectRef idx="1">
+            <a:schemeClr val="accent1"/>
+          </a:effectRef>
+          <a:fontRef idx="minor">
+            <a:schemeClr val="tx1"/>
+          </a:fontRef>
+        </p:style>
+      </p:cxnSp>
+      <p:cxnSp>
+        <p:nvCxnSpPr>
+          <p:cNvPr id="1004" name="Connector 911"/>
+          <p:cNvCxnSpPr/>
+          <p:nvPr/>
+        </p:nvCxnSpPr>
+        <p:spPr>
+          <a:xfrm>
+            <a:off x="6675120" y="4937760"/>
+            <a:ext cx="0" cy="365759"/>
+          </a:xfrm>
+          <a:prstGeom prst="line">
+            <a:avLst/>
+          </a:prstGeom>
+          <a:ln w="28575">
+            <a:solidFill>
+              <a:srgbClr val="8E6F3E"/>
+            </a:solidFill>
+            <a:tailEnd type="triangle"/>
+          </a:ln>
+        </p:spPr>
+        <p:style>
+          <a:lnRef idx="2">
+            <a:schemeClr val="accent1"/>
+          </a:lnRef>
+          <a:fillRef idx="0">
+            <a:schemeClr val="accent1"/>
+          </a:fillRef>
+          <a:effectRef idx="1">
+            <a:schemeClr val="accent1"/>
+          </a:effectRef>
+          <a:fontRef idx="minor">
+            <a:schemeClr val="tx1"/>
+          </a:fontRef>
+        </p:style>
+      </p:cxnSp>
+      <p:sp>
+        <p:nvSpPr>
+          <p:cNvPr id="1005" name="FooterBand"/>
           <p:cNvSpPr/>
           <p:nvPr/>
         </p:nvSpPr>
         <p:spPr>
           <a:xfrm>
-            <a:off x="2103120" y="4059936"/>
-            <a:ext cx="2194560" cy="603504"/>
+            <a:off x="274320" y="5852159"/>
+            <a:ext cx="8595360" cy="566928"/>
           </a:xfrm>
           <a:prstGeom prst="rect">
             <a:avLst/>
           </a:prstGeom>
           <a:solidFill>
-            <a:srgbClr val="F5F1E8"/>
+            <a:srgbClr val="8E6F3E"/>
           </a:solidFill>
-          <a:ln w="12700">
-            <a:solidFill>
-              <a:srgbClr val="C9B991"/>
-            </a:solidFill>
+          <a:ln>
+            <a:noFill/>
           </a:ln>
           <a:effectLst/>
         </p:spPr>
@@ -24629,282 +25133,12 @@
           <a:p>
             <a:pPr algn="ctr"/>
             <a:r>
-              <a:rPr sz="2000" b="0" i="1" dirty="0">
-                <a:solidFill>
-                  <a:srgbClr val="5C4826"/>
-                </a:solidFill>
-              </a:rPr>
-              <a:t/>
-            </a:r>
-          </a:p>
-        </p:txBody>
-      </p:sp>
-      <p:sp>
-        <p:nvSpPr>
-          <p:cNvPr id="1009" name="Card"/>
-          <p:cNvSpPr/>
-          <p:nvPr/>
-        </p:nvSpPr>
-        <p:spPr>
-          <a:xfrm>
-            <a:off x="4389120" y="4059936"/>
-            <a:ext cx="2011680" cy="603504"/>
-          </a:xfrm>
-          <a:prstGeom prst="rect">
-            <a:avLst/>
-          </a:prstGeom>
-          <a:solidFill>
-            <a:srgbClr val="F5F1E8"/>
-          </a:solidFill>
-          <a:ln w="12700">
-            <a:solidFill>
-              <a:srgbClr val="C9B991"/>
-            </a:solidFill>
-          </a:ln>
-          <a:effectLst/>
-        </p:spPr>
-        <p:style>
-          <a:lnRef idx="1">
-            <a:schemeClr val="accent1"/>
-          </a:lnRef>
-          <a:fillRef idx="3">
-            <a:schemeClr val="accent1"/>
-          </a:fillRef>
-          <a:effectRef idx="2">
-            <a:schemeClr val="accent1"/>
-          </a:effectRef>
-          <a:fontRef idx="minor">
-            <a:schemeClr val="lt1"/>
-          </a:fontRef>
-        </p:style>
-        <p:txBody>
-          <a:bodyPr wrap="square" lIns="27432" tIns="22860" rIns="27432" bIns="22860" rtlCol="0" anchor="ctr"/>
-          <a:lstStyle/>
-          <a:p>
-            <a:pPr algn="ctr"/>
-            <a:r>
-              <a:rPr sz="2000" b="0" i="1" dirty="0">
-                <a:solidFill>
-                  <a:srgbClr val="5C4826"/>
-                </a:solidFill>
-              </a:rPr>
-              <a:t/>
-            </a:r>
-          </a:p>
-        </p:txBody>
-      </p:sp>
-      <p:sp>
-        <p:nvSpPr>
-          <p:cNvPr id="1010" name="Card"/>
-          <p:cNvSpPr/>
-          <p:nvPr/>
-        </p:nvSpPr>
-        <p:spPr>
-          <a:xfrm>
-            <a:off x="6492240" y="4059936"/>
-            <a:ext cx="2103120" cy="603504"/>
-          </a:xfrm>
-          <a:prstGeom prst="rect">
-            <a:avLst/>
-          </a:prstGeom>
-          <a:solidFill>
-            <a:srgbClr val="F5F1E8"/>
-          </a:solidFill>
-          <a:ln w="12700">
-            <a:solidFill>
-              <a:srgbClr val="C9B991"/>
-            </a:solidFill>
-          </a:ln>
-          <a:effectLst/>
-        </p:spPr>
-        <p:style>
-          <a:lnRef idx="1">
-            <a:schemeClr val="accent1"/>
-          </a:lnRef>
-          <a:fillRef idx="3">
-            <a:schemeClr val="accent1"/>
-          </a:fillRef>
-          <a:effectRef idx="2">
-            <a:schemeClr val="accent1"/>
-          </a:effectRef>
-          <a:fontRef idx="minor">
-            <a:schemeClr val="lt1"/>
-          </a:fontRef>
-        </p:style>
-        <p:txBody>
-          <a:bodyPr wrap="square" lIns="27432" tIns="22860" rIns="27432" bIns="22860" rtlCol="0" anchor="ctr"/>
-          <a:lstStyle/>
-          <a:p>
-            <a:pPr algn="ctr"/>
-            <a:r>
-              <a:rPr sz="2000" b="0" i="1" dirty="0">
-                <a:solidFill>
-                  <a:srgbClr val="5C4826"/>
-                </a:solidFill>
-              </a:rPr>
-              <a:t/>
-            </a:r>
-          </a:p>
-        </p:txBody>
-      </p:sp>
-      <p:sp>
-        <p:nvSpPr>
-          <p:cNvPr id="1011" name="Card"/>
-          <p:cNvSpPr/>
-          <p:nvPr/>
-        </p:nvSpPr>
-        <p:spPr>
-          <a:xfrm>
-            <a:off x="2103120" y="4718304"/>
-            <a:ext cx="2194560" cy="603504"/>
-          </a:xfrm>
-          <a:prstGeom prst="rect">
-            <a:avLst/>
-          </a:prstGeom>
-          <a:solidFill>
-            <a:srgbClr val="F5F1E8"/>
-          </a:solidFill>
-          <a:ln w="12700">
-            <a:solidFill>
-              <a:srgbClr val="C9B991"/>
-            </a:solidFill>
-          </a:ln>
-          <a:effectLst/>
-        </p:spPr>
-        <p:style>
-          <a:lnRef idx="1">
-            <a:schemeClr val="accent1"/>
-          </a:lnRef>
-          <a:fillRef idx="3">
-            <a:schemeClr val="accent1"/>
-          </a:fillRef>
-          <a:effectRef idx="2">
-            <a:schemeClr val="accent1"/>
-          </a:effectRef>
-          <a:fontRef idx="minor">
-            <a:schemeClr val="lt1"/>
-          </a:fontRef>
-        </p:style>
-        <p:txBody>
-          <a:bodyPr wrap="square" lIns="27432" tIns="22860" rIns="27432" bIns="22860" rtlCol="0" anchor="ctr"/>
-          <a:lstStyle/>
-          <a:p>
-            <a:pPr algn="ctr"/>
-            <a:r>
-              <a:rPr sz="2000" b="0" i="1" dirty="0">
-                <a:solidFill>
-                  <a:srgbClr val="5C4826"/>
-                </a:solidFill>
-              </a:rPr>
-              <a:t/>
-            </a:r>
-          </a:p>
-        </p:txBody>
-      </p:sp>
-      <p:sp>
-        <p:nvSpPr>
-          <p:cNvPr id="1012" name="Card"/>
-          <p:cNvSpPr/>
-          <p:nvPr/>
-        </p:nvSpPr>
-        <p:spPr>
-          <a:xfrm>
-            <a:off x="4389120" y="4718304"/>
-            <a:ext cx="2011680" cy="603504"/>
-          </a:xfrm>
-          <a:prstGeom prst="rect">
-            <a:avLst/>
-          </a:prstGeom>
-          <a:solidFill>
-            <a:srgbClr val="F5F1E8"/>
-          </a:solidFill>
-          <a:ln w="12700">
-            <a:solidFill>
-              <a:srgbClr val="C9B991"/>
-            </a:solidFill>
-          </a:ln>
-          <a:effectLst/>
-        </p:spPr>
-        <p:style>
-          <a:lnRef idx="1">
-            <a:schemeClr val="accent1"/>
-          </a:lnRef>
-          <a:fillRef idx="3">
-            <a:schemeClr val="accent1"/>
-          </a:fillRef>
-          <a:effectRef idx="2">
-            <a:schemeClr val="accent1"/>
-          </a:effectRef>
-          <a:fontRef idx="minor">
-            <a:schemeClr val="lt1"/>
-          </a:fontRef>
-        </p:style>
-        <p:txBody>
-          <a:bodyPr wrap="square" lIns="27432" tIns="22860" rIns="27432" bIns="22860" rtlCol="0" anchor="ctr"/>
-          <a:lstStyle/>
-          <a:p>
-            <a:pPr algn="ctr"/>
-            <a:r>
-              <a:rPr sz="2000" b="0" i="1" dirty="0">
-                <a:solidFill>
-                  <a:srgbClr val="5C4826"/>
-                </a:solidFill>
-              </a:rPr>
-              <a:t/>
-            </a:r>
-          </a:p>
-        </p:txBody>
-      </p:sp>
-      <p:sp>
-        <p:nvSpPr>
-          <p:cNvPr id="1013" name="Card"/>
-          <p:cNvSpPr/>
-          <p:nvPr/>
-        </p:nvSpPr>
-        <p:spPr>
-          <a:xfrm>
-            <a:off x="6492240" y="4718304"/>
-            <a:ext cx="2103120" cy="603504"/>
-          </a:xfrm>
-          <a:prstGeom prst="rect">
-            <a:avLst/>
-          </a:prstGeom>
-          <a:solidFill>
-            <a:srgbClr val="F5F1E8"/>
-          </a:solidFill>
-          <a:ln w="12700">
-            <a:solidFill>
-              <a:srgbClr val="C9B991"/>
-            </a:solidFill>
-          </a:ln>
-          <a:effectLst/>
-        </p:spPr>
-        <p:style>
-          <a:lnRef idx="1">
-            <a:schemeClr val="accent1"/>
-          </a:lnRef>
-          <a:fillRef idx="3">
-            <a:schemeClr val="accent1"/>
-          </a:fillRef>
-          <a:effectRef idx="2">
-            <a:schemeClr val="accent1"/>
-          </a:effectRef>
-          <a:fontRef idx="minor">
-            <a:schemeClr val="lt1"/>
-          </a:fontRef>
-        </p:style>
-        <p:txBody>
-          <a:bodyPr wrap="square" lIns="27432" tIns="22860" rIns="27432" bIns="22860" rtlCol="0" anchor="ctr"/>
-          <a:lstStyle/>
-          <a:p>
-            <a:pPr algn="ctr"/>
-            <a:r>
-              <a:rPr sz="2000" b="0" i="1" dirty="0">
-                <a:solidFill>
-                  <a:srgbClr val="5C4826"/>
-                </a:solidFill>
-              </a:rPr>
-              <a:t/>
+              <a:rPr sz="2000" b="1" i="0" dirty="0">
+                <a:solidFill>
+                  <a:srgbClr val="FFFFFF"/>
+                </a:solidFill>
+              </a:rPr>
+              <a:t>What will be different when the next engineer or agent acts?</a:t>
             </a:r>
           </a:p>
         </p:txBody>
